--- a/docs/plots/carbo/jx_carbo_linsubhr_ratio_hosp10.pptx
+++ b/docs/plots/carbo/jx_carbo_linsubhr_ratio_hosp10.pptx
@@ -3002,588 +3002,519 @@
           </p:nvSpPr>
           <p:spPr>
             <a:xfrm>
-              <a:off x="817517" y="3762473"/>
-              <a:ext cx="7370972" cy="1414019"/>
+              <a:off x="817517" y="1896563"/>
+              <a:ext cx="7370972" cy="3631631"/>
             </a:xfrm>
             <a:custGeom>
               <a:avLst/>
               <a:pathLst>
-                <a:path w="7370972" h="1414019">
+                <a:path w="7370972" h="3631631">
                   <a:moveTo>
-                    <a:pt x="0" y="0"/>
+                    <a:pt x="1850433" y="0"/>
                   </a:moveTo>
                   <a:lnTo>
-                    <a:pt x="73372" y="27671"/>
-                  </a:lnTo>
-                  <a:lnTo>
-                    <a:pt x="151006" y="56471"/>
-                  </a:lnTo>
-                  <a:lnTo>
-                    <a:pt x="228640" y="84799"/>
-                  </a:lnTo>
-                  <a:lnTo>
-                    <a:pt x="306274" y="112664"/>
-                  </a:lnTo>
-                  <a:lnTo>
-                    <a:pt x="383908" y="140072"/>
-                  </a:lnTo>
-                  <a:lnTo>
-                    <a:pt x="461542" y="167031"/>
-                  </a:lnTo>
-                  <a:lnTo>
-                    <a:pt x="539176" y="193550"/>
-                  </a:lnTo>
-                  <a:lnTo>
-                    <a:pt x="616810" y="219634"/>
-                  </a:lnTo>
-                  <a:lnTo>
-                    <a:pt x="694444" y="245290"/>
-                  </a:lnTo>
-                  <a:lnTo>
-                    <a:pt x="772078" y="270527"/>
-                  </a:lnTo>
-                  <a:lnTo>
-                    <a:pt x="849712" y="295351"/>
-                  </a:lnTo>
-                  <a:lnTo>
-                    <a:pt x="927346" y="319768"/>
-                  </a:lnTo>
-                  <a:lnTo>
-                    <a:pt x="1004981" y="343786"/>
-                  </a:lnTo>
-                  <a:lnTo>
-                    <a:pt x="1082615" y="367410"/>
-                  </a:lnTo>
-                  <a:lnTo>
-                    <a:pt x="1160249" y="390647"/>
-                  </a:lnTo>
-                  <a:lnTo>
-                    <a:pt x="1237883" y="413504"/>
-                  </a:lnTo>
-                  <a:lnTo>
-                    <a:pt x="1315517" y="435987"/>
-                  </a:lnTo>
-                  <a:lnTo>
-                    <a:pt x="1393151" y="458102"/>
-                  </a:lnTo>
-                  <a:lnTo>
-                    <a:pt x="1470785" y="479854"/>
-                  </a:lnTo>
-                  <a:lnTo>
-                    <a:pt x="1548419" y="501251"/>
-                  </a:lnTo>
-                  <a:lnTo>
-                    <a:pt x="1626053" y="522297"/>
-                  </a:lnTo>
-                  <a:lnTo>
-                    <a:pt x="1703687" y="542999"/>
-                  </a:lnTo>
-                  <a:lnTo>
-                    <a:pt x="1781321" y="563361"/>
-                  </a:lnTo>
-                  <a:lnTo>
-                    <a:pt x="1858955" y="583391"/>
-                  </a:lnTo>
-                  <a:lnTo>
-                    <a:pt x="1936589" y="603092"/>
-                  </a:lnTo>
-                  <a:lnTo>
-                    <a:pt x="2014223" y="622471"/>
-                  </a:lnTo>
-                  <a:lnTo>
-                    <a:pt x="2091857" y="641532"/>
-                  </a:lnTo>
-                  <a:lnTo>
-                    <a:pt x="2169491" y="660282"/>
-                  </a:lnTo>
-                  <a:lnTo>
-                    <a:pt x="2247125" y="678724"/>
-                  </a:lnTo>
-                  <a:lnTo>
-                    <a:pt x="2324759" y="696865"/>
-                  </a:lnTo>
-                  <a:lnTo>
-                    <a:pt x="2402393" y="714709"/>
-                  </a:lnTo>
-                  <a:lnTo>
-                    <a:pt x="2480027" y="732260"/>
-                  </a:lnTo>
-                  <a:lnTo>
-                    <a:pt x="2557661" y="749524"/>
-                  </a:lnTo>
-                  <a:lnTo>
-                    <a:pt x="2635295" y="766505"/>
-                  </a:lnTo>
-                  <a:lnTo>
-                    <a:pt x="2712930" y="783209"/>
-                  </a:lnTo>
-                  <a:lnTo>
-                    <a:pt x="2790564" y="799639"/>
-                  </a:lnTo>
-                  <a:lnTo>
-                    <a:pt x="2868198" y="815800"/>
-                  </a:lnTo>
-                  <a:lnTo>
-                    <a:pt x="2945832" y="831696"/>
-                  </a:lnTo>
-                  <a:lnTo>
-                    <a:pt x="3023466" y="847332"/>
-                  </a:lnTo>
-                  <a:lnTo>
-                    <a:pt x="3101100" y="862712"/>
-                  </a:lnTo>
-                  <a:lnTo>
-                    <a:pt x="3178734" y="877840"/>
-                  </a:lnTo>
-                  <a:lnTo>
-                    <a:pt x="3256368" y="892721"/>
-                  </a:lnTo>
-                  <a:lnTo>
-                    <a:pt x="3334002" y="907358"/>
-                  </a:lnTo>
-                  <a:lnTo>
-                    <a:pt x="3411636" y="913725"/>
-                  </a:lnTo>
-                  <a:lnTo>
-                    <a:pt x="3489270" y="903499"/>
-                  </a:lnTo>
-                  <a:lnTo>
-                    <a:pt x="3566904" y="893153"/>
-                  </a:lnTo>
-                  <a:lnTo>
-                    <a:pt x="3644538" y="882685"/>
-                  </a:lnTo>
-                  <a:lnTo>
-                    <a:pt x="3722172" y="872095"/>
-                  </a:lnTo>
-                  <a:lnTo>
-                    <a:pt x="3799806" y="861381"/>
-                  </a:lnTo>
-                  <a:lnTo>
-                    <a:pt x="3877440" y="850541"/>
-                  </a:lnTo>
-                  <a:lnTo>
-                    <a:pt x="3955074" y="839575"/>
-                  </a:lnTo>
-                  <a:lnTo>
-                    <a:pt x="4032708" y="828480"/>
-                  </a:lnTo>
-                  <a:lnTo>
-                    <a:pt x="4110342" y="817255"/>
-                  </a:lnTo>
-                  <a:lnTo>
-                    <a:pt x="4187976" y="805898"/>
-                  </a:lnTo>
-                  <a:lnTo>
-                    <a:pt x="4265610" y="794409"/>
-                  </a:lnTo>
-                  <a:lnTo>
-                    <a:pt x="4343244" y="782784"/>
-                  </a:lnTo>
-                  <a:lnTo>
-                    <a:pt x="4420879" y="771024"/>
-                  </a:lnTo>
-                  <a:lnTo>
-                    <a:pt x="4498513" y="759126"/>
-                  </a:lnTo>
-                  <a:lnTo>
-                    <a:pt x="4576147" y="747089"/>
-                  </a:lnTo>
-                  <a:lnTo>
-                    <a:pt x="4653781" y="734910"/>
-                  </a:lnTo>
-                  <a:lnTo>
-                    <a:pt x="4731415" y="722589"/>
-                  </a:lnTo>
-                  <a:lnTo>
-                    <a:pt x="4809049" y="710124"/>
-                  </a:lnTo>
-                  <a:lnTo>
-                    <a:pt x="4886683" y="697512"/>
-                  </a:lnTo>
-                  <a:lnTo>
-                    <a:pt x="4964317" y="684753"/>
-                  </a:lnTo>
-                  <a:lnTo>
-                    <a:pt x="5041951" y="671844"/>
-                  </a:lnTo>
-                  <a:lnTo>
-                    <a:pt x="5119585" y="658785"/>
-                  </a:lnTo>
-                  <a:lnTo>
-                    <a:pt x="5197219" y="645572"/>
-                  </a:lnTo>
-                  <a:lnTo>
-                    <a:pt x="5274853" y="632204"/>
-                  </a:lnTo>
-                  <a:lnTo>
-                    <a:pt x="5352487" y="618680"/>
-                  </a:lnTo>
-                  <a:lnTo>
-                    <a:pt x="5430121" y="604997"/>
-                  </a:lnTo>
-                  <a:lnTo>
-                    <a:pt x="5507755" y="591154"/>
-                  </a:lnTo>
-                  <a:lnTo>
-                    <a:pt x="5585389" y="577149"/>
-                  </a:lnTo>
-                  <a:lnTo>
-                    <a:pt x="5663023" y="562980"/>
-                  </a:lnTo>
-                  <a:lnTo>
-                    <a:pt x="5740657" y="548645"/>
-                  </a:lnTo>
-                  <a:lnTo>
-                    <a:pt x="5818291" y="534142"/>
-                  </a:lnTo>
-                  <a:lnTo>
-                    <a:pt x="5895925" y="519469"/>
-                  </a:lnTo>
-                  <a:lnTo>
-                    <a:pt x="5973559" y="504624"/>
-                  </a:lnTo>
-                  <a:lnTo>
-                    <a:pt x="6051193" y="489606"/>
-                  </a:lnTo>
-                  <a:lnTo>
-                    <a:pt x="6128827" y="474411"/>
-                  </a:lnTo>
-                  <a:lnTo>
-                    <a:pt x="6206462" y="459038"/>
-                  </a:lnTo>
-                  <a:lnTo>
-                    <a:pt x="6284096" y="443486"/>
-                  </a:lnTo>
-                  <a:lnTo>
-                    <a:pt x="6361730" y="427751"/>
-                  </a:lnTo>
-                  <a:lnTo>
-                    <a:pt x="6439364" y="411832"/>
-                  </a:lnTo>
-                  <a:lnTo>
-                    <a:pt x="6516998" y="395726"/>
-                  </a:lnTo>
-                  <a:lnTo>
-                    <a:pt x="6594632" y="379432"/>
-                  </a:lnTo>
-                  <a:lnTo>
-                    <a:pt x="6672266" y="362947"/>
-                  </a:lnTo>
-                  <a:lnTo>
-                    <a:pt x="6749900" y="346268"/>
-                  </a:lnTo>
-                  <a:lnTo>
-                    <a:pt x="6827534" y="329395"/>
-                  </a:lnTo>
-                  <a:lnTo>
-                    <a:pt x="6905168" y="312323"/>
-                  </a:lnTo>
-                  <a:lnTo>
-                    <a:pt x="6982802" y="295052"/>
-                  </a:lnTo>
-                  <a:lnTo>
-                    <a:pt x="7060436" y="277578"/>
-                  </a:lnTo>
-                  <a:lnTo>
-                    <a:pt x="7138070" y="259900"/>
-                  </a:lnTo>
-                  <a:lnTo>
-                    <a:pt x="7215704" y="242015"/>
-                  </a:lnTo>
-                  <a:lnTo>
-                    <a:pt x="7293338" y="223920"/>
-                  </a:lnTo>
-                  <a:lnTo>
-                    <a:pt x="7370972" y="205613"/>
-                  </a:lnTo>
-                  <a:lnTo>
-                    <a:pt x="7370972" y="1414019"/>
-                  </a:lnTo>
-                  <a:lnTo>
-                    <a:pt x="7293338" y="1407816"/>
-                  </a:lnTo>
-                  <a:lnTo>
-                    <a:pt x="7215704" y="1401509"/>
-                  </a:lnTo>
-                  <a:lnTo>
-                    <a:pt x="7138070" y="1395097"/>
-                  </a:lnTo>
-                  <a:lnTo>
-                    <a:pt x="7060436" y="1388578"/>
-                  </a:lnTo>
-                  <a:lnTo>
-                    <a:pt x="6982802" y="1381951"/>
-                  </a:lnTo>
-                  <a:lnTo>
-                    <a:pt x="6905168" y="1375213"/>
-                  </a:lnTo>
-                  <a:lnTo>
-                    <a:pt x="6827534" y="1368364"/>
-                  </a:lnTo>
-                  <a:lnTo>
-                    <a:pt x="6749900" y="1361400"/>
-                  </a:lnTo>
-                  <a:lnTo>
-                    <a:pt x="6672266" y="1354321"/>
-                  </a:lnTo>
-                  <a:lnTo>
-                    <a:pt x="6594632" y="1347123"/>
-                  </a:lnTo>
-                  <a:lnTo>
-                    <a:pt x="6516998" y="1339806"/>
-                  </a:lnTo>
-                  <a:lnTo>
-                    <a:pt x="6439364" y="1332367"/>
-                  </a:lnTo>
-                  <a:lnTo>
-                    <a:pt x="6361730" y="1324804"/>
-                  </a:lnTo>
-                  <a:lnTo>
-                    <a:pt x="6284096" y="1317116"/>
-                  </a:lnTo>
-                  <a:lnTo>
-                    <a:pt x="6206462" y="1309299"/>
-                  </a:lnTo>
-                  <a:lnTo>
-                    <a:pt x="6128827" y="1301352"/>
-                  </a:lnTo>
-                  <a:lnTo>
-                    <a:pt x="6051193" y="1293273"/>
-                  </a:lnTo>
-                  <a:lnTo>
-                    <a:pt x="5973559" y="1285060"/>
-                  </a:lnTo>
-                  <a:lnTo>
-                    <a:pt x="5895925" y="1276709"/>
-                  </a:lnTo>
-                  <a:lnTo>
-                    <a:pt x="5818291" y="1268220"/>
-                  </a:lnTo>
-                  <a:lnTo>
-                    <a:pt x="5740657" y="1259590"/>
-                  </a:lnTo>
-                  <a:lnTo>
-                    <a:pt x="5663023" y="1250816"/>
-                  </a:lnTo>
-                  <a:lnTo>
-                    <a:pt x="5585389" y="1241895"/>
-                  </a:lnTo>
-                  <a:lnTo>
-                    <a:pt x="5507755" y="1232827"/>
-                  </a:lnTo>
-                  <a:lnTo>
-                    <a:pt x="5430121" y="1223607"/>
-                  </a:lnTo>
-                  <a:lnTo>
-                    <a:pt x="5352487" y="1214234"/>
-                  </a:lnTo>
-                  <a:lnTo>
-                    <a:pt x="5274853" y="1204705"/>
-                  </a:lnTo>
-                  <a:lnTo>
-                    <a:pt x="5197219" y="1195017"/>
-                  </a:lnTo>
-                  <a:lnTo>
-                    <a:pt x="5119585" y="1185168"/>
-                  </a:lnTo>
-                  <a:lnTo>
-                    <a:pt x="5041951" y="1175155"/>
-                  </a:lnTo>
-                  <a:lnTo>
-                    <a:pt x="4964317" y="1164976"/>
-                  </a:lnTo>
-                  <a:lnTo>
-                    <a:pt x="4886683" y="1154627"/>
-                  </a:lnTo>
-                  <a:lnTo>
-                    <a:pt x="4809049" y="1144106"/>
-                  </a:lnTo>
-                  <a:lnTo>
-                    <a:pt x="4731415" y="1133409"/>
-                  </a:lnTo>
-                  <a:lnTo>
-                    <a:pt x="4653781" y="1122535"/>
-                  </a:lnTo>
-                  <a:lnTo>
-                    <a:pt x="4576147" y="1111480"/>
-                  </a:lnTo>
-                  <a:lnTo>
-                    <a:pt x="4498513" y="1100240"/>
-                  </a:lnTo>
-                  <a:lnTo>
-                    <a:pt x="4420879" y="1088814"/>
-                  </a:lnTo>
-                  <a:lnTo>
-                    <a:pt x="4343244" y="1077197"/>
-                  </a:lnTo>
-                  <a:lnTo>
-                    <a:pt x="4265610" y="1065387"/>
-                  </a:lnTo>
-                  <a:lnTo>
-                    <a:pt x="4187976" y="1053380"/>
-                  </a:lnTo>
-                  <a:lnTo>
-                    <a:pt x="4110342" y="1041174"/>
-                  </a:lnTo>
-                  <a:lnTo>
-                    <a:pt x="4032708" y="1028764"/>
-                  </a:lnTo>
-                  <a:lnTo>
-                    <a:pt x="3955074" y="1016148"/>
-                  </a:lnTo>
-                  <a:lnTo>
-                    <a:pt x="3877440" y="1003322"/>
-                  </a:lnTo>
-                  <a:lnTo>
-                    <a:pt x="3799806" y="990282"/>
-                  </a:lnTo>
-                  <a:lnTo>
-                    <a:pt x="3722172" y="977026"/>
-                  </a:lnTo>
-                  <a:lnTo>
-                    <a:pt x="3644538" y="963548"/>
-                  </a:lnTo>
-                  <a:lnTo>
-                    <a:pt x="3566904" y="949847"/>
-                  </a:lnTo>
-                  <a:lnTo>
-                    <a:pt x="3489270" y="935917"/>
-                  </a:lnTo>
-                  <a:lnTo>
-                    <a:pt x="3411636" y="921755"/>
-                  </a:lnTo>
-                  <a:lnTo>
-                    <a:pt x="3334002" y="923833"/>
-                  </a:lnTo>
-                  <a:lnTo>
-                    <a:pt x="3256368" y="933824"/>
-                  </a:lnTo>
-                  <a:lnTo>
-                    <a:pt x="3178734" y="943700"/>
-                  </a:lnTo>
-                  <a:lnTo>
-                    <a:pt x="3101100" y="953461"/>
-                  </a:lnTo>
-                  <a:lnTo>
-                    <a:pt x="3023466" y="963109"/>
-                  </a:lnTo>
-                  <a:lnTo>
-                    <a:pt x="2945832" y="972645"/>
-                  </a:lnTo>
-                  <a:lnTo>
-                    <a:pt x="2868198" y="982071"/>
-                  </a:lnTo>
-                  <a:lnTo>
-                    <a:pt x="2790564" y="991387"/>
-                  </a:lnTo>
-                  <a:lnTo>
-                    <a:pt x="2712930" y="1000596"/>
-                  </a:lnTo>
-                  <a:lnTo>
-                    <a:pt x="2635295" y="1009698"/>
-                  </a:lnTo>
-                  <a:lnTo>
-                    <a:pt x="2557661" y="1018695"/>
-                  </a:lnTo>
-                  <a:lnTo>
-                    <a:pt x="2480027" y="1027588"/>
-                  </a:lnTo>
-                  <a:lnTo>
-                    <a:pt x="2402393" y="1036378"/>
-                  </a:lnTo>
-                  <a:lnTo>
-                    <a:pt x="2324759" y="1045066"/>
-                  </a:lnTo>
-                  <a:lnTo>
-                    <a:pt x="2247125" y="1053653"/>
-                  </a:lnTo>
-                  <a:lnTo>
-                    <a:pt x="2169491" y="1062141"/>
-                  </a:lnTo>
-                  <a:lnTo>
-                    <a:pt x="2091857" y="1070530"/>
-                  </a:lnTo>
-                  <a:lnTo>
-                    <a:pt x="2014223" y="1078823"/>
-                  </a:lnTo>
-                  <a:lnTo>
-                    <a:pt x="1936589" y="1087019"/>
-                  </a:lnTo>
-                  <a:lnTo>
-                    <a:pt x="1858955" y="1095121"/>
-                  </a:lnTo>
-                  <a:lnTo>
-                    <a:pt x="1781321" y="1103129"/>
-                  </a:lnTo>
-                  <a:lnTo>
-                    <a:pt x="1703687" y="1111044"/>
-                  </a:lnTo>
-                  <a:lnTo>
-                    <a:pt x="1626053" y="1118867"/>
-                  </a:lnTo>
-                  <a:lnTo>
-                    <a:pt x="1548419" y="1126600"/>
-                  </a:lnTo>
-                  <a:lnTo>
-                    <a:pt x="1470785" y="1134243"/>
-                  </a:lnTo>
-                  <a:lnTo>
-                    <a:pt x="1393151" y="1141798"/>
-                  </a:lnTo>
-                  <a:lnTo>
-                    <a:pt x="1315517" y="1149265"/>
-                  </a:lnTo>
-                  <a:lnTo>
-                    <a:pt x="1237883" y="1156646"/>
-                  </a:lnTo>
-                  <a:lnTo>
-                    <a:pt x="1160249" y="1163942"/>
-                  </a:lnTo>
-                  <a:lnTo>
-                    <a:pt x="1082615" y="1171153"/>
-                  </a:lnTo>
-                  <a:lnTo>
-                    <a:pt x="1004981" y="1178280"/>
-                  </a:lnTo>
-                  <a:lnTo>
-                    <a:pt x="927346" y="1185325"/>
-                  </a:lnTo>
-                  <a:lnTo>
-                    <a:pt x="849712" y="1192288"/>
-                  </a:lnTo>
-                  <a:lnTo>
-                    <a:pt x="772078" y="1199171"/>
-                  </a:lnTo>
-                  <a:lnTo>
-                    <a:pt x="694444" y="1205974"/>
-                  </a:lnTo>
-                  <a:lnTo>
-                    <a:pt x="616810" y="1212698"/>
-                  </a:lnTo>
-                  <a:lnTo>
-                    <a:pt x="539176" y="1219345"/>
-                  </a:lnTo>
-                  <a:lnTo>
-                    <a:pt x="461542" y="1225914"/>
-                  </a:lnTo>
-                  <a:lnTo>
-                    <a:pt x="383908" y="1232408"/>
-                  </a:lnTo>
-                  <a:lnTo>
-                    <a:pt x="306274" y="1238826"/>
-                  </a:lnTo>
-                  <a:lnTo>
-                    <a:pt x="228640" y="1245170"/>
-                  </a:lnTo>
-                  <a:lnTo>
-                    <a:pt x="151006" y="1251440"/>
-                  </a:lnTo>
-                  <a:lnTo>
-                    <a:pt x="73372" y="1257638"/>
-                  </a:lnTo>
-                  <a:lnTo>
-                    <a:pt x="0" y="1263428"/>
+                    <a:pt x="1858955" y="29915"/>
+                  </a:lnTo>
+                  <a:lnTo>
+                    <a:pt x="1936589" y="283380"/>
+                  </a:lnTo>
+                  <a:lnTo>
+                    <a:pt x="2014223" y="519112"/>
+                  </a:lnTo>
+                  <a:lnTo>
+                    <a:pt x="2091857" y="738350"/>
+                  </a:lnTo>
+                  <a:lnTo>
+                    <a:pt x="2169491" y="942250"/>
+                  </a:lnTo>
+                  <a:lnTo>
+                    <a:pt x="2247125" y="1131883"/>
+                  </a:lnTo>
+                  <a:lnTo>
+                    <a:pt x="2324759" y="1308249"/>
+                  </a:lnTo>
+                  <a:lnTo>
+                    <a:pt x="2402393" y="1472275"/>
+                  </a:lnTo>
+                  <a:lnTo>
+                    <a:pt x="2480027" y="1624825"/>
+                  </a:lnTo>
+                  <a:lnTo>
+                    <a:pt x="2557661" y="1766702"/>
+                  </a:lnTo>
+                  <a:lnTo>
+                    <a:pt x="2635295" y="1898653"/>
+                  </a:lnTo>
+                  <a:lnTo>
+                    <a:pt x="2712930" y="2021371"/>
+                  </a:lnTo>
+                  <a:lnTo>
+                    <a:pt x="2790564" y="2135504"/>
+                  </a:lnTo>
+                  <a:lnTo>
+                    <a:pt x="2868198" y="2241651"/>
+                  </a:lnTo>
+                  <a:lnTo>
+                    <a:pt x="2945832" y="2340371"/>
+                  </a:lnTo>
+                  <a:lnTo>
+                    <a:pt x="3023466" y="2432185"/>
+                  </a:lnTo>
+                  <a:lnTo>
+                    <a:pt x="3101100" y="2517575"/>
+                  </a:lnTo>
+                  <a:lnTo>
+                    <a:pt x="3178734" y="2596990"/>
+                  </a:lnTo>
+                  <a:lnTo>
+                    <a:pt x="3256368" y="2670849"/>
+                  </a:lnTo>
+                  <a:lnTo>
+                    <a:pt x="3334002" y="2739541"/>
+                  </a:lnTo>
+                  <a:lnTo>
+                    <a:pt x="3411636" y="2778933"/>
+                  </a:lnTo>
+                  <a:lnTo>
+                    <a:pt x="3489270" y="2766528"/>
+                  </a:lnTo>
+                  <a:lnTo>
+                    <a:pt x="3566904" y="2753948"/>
+                  </a:lnTo>
+                  <a:lnTo>
+                    <a:pt x="3644538" y="2741189"/>
+                  </a:lnTo>
+                  <a:lnTo>
+                    <a:pt x="3722172" y="2728248"/>
+                  </a:lnTo>
+                  <a:lnTo>
+                    <a:pt x="3799806" y="2715124"/>
+                  </a:lnTo>
+                  <a:lnTo>
+                    <a:pt x="3877440" y="2701814"/>
+                  </a:lnTo>
+                  <a:lnTo>
+                    <a:pt x="3955074" y="2688315"/>
+                  </a:lnTo>
+                  <a:lnTo>
+                    <a:pt x="4032708" y="2674624"/>
+                  </a:lnTo>
+                  <a:lnTo>
+                    <a:pt x="4110342" y="2660738"/>
+                  </a:lnTo>
+                  <a:lnTo>
+                    <a:pt x="4187976" y="2646656"/>
+                  </a:lnTo>
+                  <a:lnTo>
+                    <a:pt x="4265610" y="2632373"/>
+                  </a:lnTo>
+                  <a:lnTo>
+                    <a:pt x="4343244" y="2617888"/>
+                  </a:lnTo>
+                  <a:lnTo>
+                    <a:pt x="4420879" y="2603197"/>
+                  </a:lnTo>
+                  <a:lnTo>
+                    <a:pt x="4498513" y="2588298"/>
+                  </a:lnTo>
+                  <a:lnTo>
+                    <a:pt x="4576147" y="2573187"/>
+                  </a:lnTo>
+                  <a:lnTo>
+                    <a:pt x="4653781" y="2557861"/>
+                  </a:lnTo>
+                  <a:lnTo>
+                    <a:pt x="4731415" y="2542318"/>
+                  </a:lnTo>
+                  <a:lnTo>
+                    <a:pt x="4809049" y="2526555"/>
+                  </a:lnTo>
+                  <a:lnTo>
+                    <a:pt x="4886683" y="2510567"/>
+                  </a:lnTo>
+                  <a:lnTo>
+                    <a:pt x="4964317" y="2494353"/>
+                  </a:lnTo>
+                  <a:lnTo>
+                    <a:pt x="5041951" y="2477908"/>
+                  </a:lnTo>
+                  <a:lnTo>
+                    <a:pt x="5119585" y="2461230"/>
+                  </a:lnTo>
+                  <a:lnTo>
+                    <a:pt x="5197219" y="2444315"/>
+                  </a:lnTo>
+                  <a:lnTo>
+                    <a:pt x="5274853" y="2427159"/>
+                  </a:lnTo>
+                  <a:lnTo>
+                    <a:pt x="5352487" y="2409761"/>
+                  </a:lnTo>
+                  <a:lnTo>
+                    <a:pt x="5430121" y="2392115"/>
+                  </a:lnTo>
+                  <a:lnTo>
+                    <a:pt x="5507755" y="2374219"/>
+                  </a:lnTo>
+                  <a:lnTo>
+                    <a:pt x="5585389" y="2356068"/>
+                  </a:lnTo>
+                  <a:lnTo>
+                    <a:pt x="5663023" y="2337660"/>
+                  </a:lnTo>
+                  <a:lnTo>
+                    <a:pt x="5740657" y="2318991"/>
+                  </a:lnTo>
+                  <a:lnTo>
+                    <a:pt x="5818291" y="2300057"/>
+                  </a:lnTo>
+                  <a:lnTo>
+                    <a:pt x="5895925" y="2280853"/>
+                  </a:lnTo>
+                  <a:lnTo>
+                    <a:pt x="5973559" y="2261377"/>
+                  </a:lnTo>
+                  <a:lnTo>
+                    <a:pt x="6051193" y="2241625"/>
+                  </a:lnTo>
+                  <a:lnTo>
+                    <a:pt x="6128827" y="2221592"/>
+                  </a:lnTo>
+                  <a:lnTo>
+                    <a:pt x="6206462" y="2201275"/>
+                  </a:lnTo>
+                  <a:lnTo>
+                    <a:pt x="6284096" y="2180669"/>
+                  </a:lnTo>
+                  <a:lnTo>
+                    <a:pt x="6361730" y="2159771"/>
+                  </a:lnTo>
+                  <a:lnTo>
+                    <a:pt x="6439364" y="2138576"/>
+                  </a:lnTo>
+                  <a:lnTo>
+                    <a:pt x="6516998" y="2117080"/>
+                  </a:lnTo>
+                  <a:lnTo>
+                    <a:pt x="6594632" y="2095279"/>
+                  </a:lnTo>
+                  <a:lnTo>
+                    <a:pt x="6672266" y="2073169"/>
+                  </a:lnTo>
+                  <a:lnTo>
+                    <a:pt x="6749900" y="2050744"/>
+                  </a:lnTo>
+                  <a:lnTo>
+                    <a:pt x="6827534" y="2028001"/>
+                  </a:lnTo>
+                  <a:lnTo>
+                    <a:pt x="6905168" y="2004936"/>
+                  </a:lnTo>
+                  <a:lnTo>
+                    <a:pt x="6982802" y="1981543"/>
+                  </a:lnTo>
+                  <a:lnTo>
+                    <a:pt x="7060436" y="1957817"/>
+                  </a:lnTo>
+                  <a:lnTo>
+                    <a:pt x="7138070" y="1933755"/>
+                  </a:lnTo>
+                  <a:lnTo>
+                    <a:pt x="7215704" y="1909351"/>
+                  </a:lnTo>
+                  <a:lnTo>
+                    <a:pt x="7293338" y="1884601"/>
+                  </a:lnTo>
+                  <a:lnTo>
+                    <a:pt x="7370972" y="1859499"/>
+                  </a:lnTo>
+                  <a:lnTo>
+                    <a:pt x="7370972" y="3631631"/>
+                  </a:lnTo>
+                  <a:lnTo>
+                    <a:pt x="7293338" y="3630050"/>
+                  </a:lnTo>
+                  <a:lnTo>
+                    <a:pt x="7215704" y="3628351"/>
+                  </a:lnTo>
+                  <a:lnTo>
+                    <a:pt x="7138070" y="3626523"/>
+                  </a:lnTo>
+                  <a:lnTo>
+                    <a:pt x="7060436" y="3624558"/>
+                  </a:lnTo>
+                  <a:lnTo>
+                    <a:pt x="6982802" y="3622445"/>
+                  </a:lnTo>
+                  <a:lnTo>
+                    <a:pt x="6905168" y="3620173"/>
+                  </a:lnTo>
+                  <a:lnTo>
+                    <a:pt x="6827534" y="3617731"/>
+                  </a:lnTo>
+                  <a:lnTo>
+                    <a:pt x="6749900" y="3615104"/>
+                  </a:lnTo>
+                  <a:lnTo>
+                    <a:pt x="6672266" y="3612280"/>
+                  </a:lnTo>
+                  <a:lnTo>
+                    <a:pt x="6594632" y="3609244"/>
+                  </a:lnTo>
+                  <a:lnTo>
+                    <a:pt x="6516998" y="3605979"/>
+                  </a:lnTo>
+                  <a:lnTo>
+                    <a:pt x="6439364" y="3602468"/>
+                  </a:lnTo>
+                  <a:lnTo>
+                    <a:pt x="6361730" y="3598694"/>
+                  </a:lnTo>
+                  <a:lnTo>
+                    <a:pt x="6284096" y="3594635"/>
+                  </a:lnTo>
+                  <a:lnTo>
+                    <a:pt x="6206462" y="3590271"/>
+                  </a:lnTo>
+                  <a:lnTo>
+                    <a:pt x="6128827" y="3585579"/>
+                  </a:lnTo>
+                  <a:lnTo>
+                    <a:pt x="6051193" y="3580534"/>
+                  </a:lnTo>
+                  <a:lnTo>
+                    <a:pt x="5973559" y="3575110"/>
+                  </a:lnTo>
+                  <a:lnTo>
+                    <a:pt x="5895925" y="3569277"/>
+                  </a:lnTo>
+                  <a:lnTo>
+                    <a:pt x="5818291" y="3563005"/>
+                  </a:lnTo>
+                  <a:lnTo>
+                    <a:pt x="5740657" y="3556262"/>
+                  </a:lnTo>
+                  <a:lnTo>
+                    <a:pt x="5663023" y="3549011"/>
+                  </a:lnTo>
+                  <a:lnTo>
+                    <a:pt x="5585389" y="3541215"/>
+                  </a:lnTo>
+                  <a:lnTo>
+                    <a:pt x="5507755" y="3532833"/>
+                  </a:lnTo>
+                  <a:lnTo>
+                    <a:pt x="5430121" y="3523819"/>
+                  </a:lnTo>
+                  <a:lnTo>
+                    <a:pt x="5352487" y="3514128"/>
+                  </a:lnTo>
+                  <a:lnTo>
+                    <a:pt x="5274853" y="3503708"/>
+                  </a:lnTo>
+                  <a:lnTo>
+                    <a:pt x="5197219" y="3492503"/>
+                  </a:lnTo>
+                  <a:lnTo>
+                    <a:pt x="5119585" y="3480456"/>
+                  </a:lnTo>
+                  <a:lnTo>
+                    <a:pt x="5041951" y="3467503"/>
+                  </a:lnTo>
+                  <a:lnTo>
+                    <a:pt x="4964317" y="3453575"/>
+                  </a:lnTo>
+                  <a:lnTo>
+                    <a:pt x="4886683" y="3438599"/>
+                  </a:lnTo>
+                  <a:lnTo>
+                    <a:pt x="4809049" y="3422497"/>
+                  </a:lnTo>
+                  <a:lnTo>
+                    <a:pt x="4731415" y="3405184"/>
+                  </a:lnTo>
+                  <a:lnTo>
+                    <a:pt x="4653781" y="3386568"/>
+                  </a:lnTo>
+                  <a:lnTo>
+                    <a:pt x="4576147" y="3366551"/>
+                  </a:lnTo>
+                  <a:lnTo>
+                    <a:pt x="4498513" y="3345029"/>
+                  </a:lnTo>
+                  <a:lnTo>
+                    <a:pt x="4420879" y="3321887"/>
+                  </a:lnTo>
+                  <a:lnTo>
+                    <a:pt x="4343244" y="3297005"/>
+                  </a:lnTo>
+                  <a:lnTo>
+                    <a:pt x="4265610" y="3270251"/>
+                  </a:lnTo>
+                  <a:lnTo>
+                    <a:pt x="4187976" y="3241484"/>
+                  </a:lnTo>
+                  <a:lnTo>
+                    <a:pt x="4110342" y="3210553"/>
+                  </a:lnTo>
+                  <a:lnTo>
+                    <a:pt x="4032708" y="3177295"/>
+                  </a:lnTo>
+                  <a:lnTo>
+                    <a:pt x="3955074" y="3141535"/>
+                  </a:lnTo>
+                  <a:lnTo>
+                    <a:pt x="3877440" y="3103085"/>
+                  </a:lnTo>
+                  <a:lnTo>
+                    <a:pt x="3799806" y="3061743"/>
+                  </a:lnTo>
+                  <a:lnTo>
+                    <a:pt x="3722172" y="3017290"/>
+                  </a:lnTo>
+                  <a:lnTo>
+                    <a:pt x="3644538" y="2969493"/>
+                  </a:lnTo>
+                  <a:lnTo>
+                    <a:pt x="3566904" y="2918101"/>
+                  </a:lnTo>
+                  <a:lnTo>
+                    <a:pt x="3489270" y="2862842"/>
+                  </a:lnTo>
+                  <a:lnTo>
+                    <a:pt x="3411636" y="2803426"/>
+                  </a:lnTo>
+                  <a:lnTo>
+                    <a:pt x="3334002" y="2791164"/>
+                  </a:lnTo>
+                  <a:lnTo>
+                    <a:pt x="3256368" y="2803223"/>
+                  </a:lnTo>
+                  <a:lnTo>
+                    <a:pt x="3178734" y="2815114"/>
+                  </a:lnTo>
+                  <a:lnTo>
+                    <a:pt x="3101100" y="2826838"/>
+                  </a:lnTo>
+                  <a:lnTo>
+                    <a:pt x="3023466" y="2838398"/>
+                  </a:lnTo>
+                  <a:lnTo>
+                    <a:pt x="2945832" y="2849797"/>
+                  </a:lnTo>
+                  <a:lnTo>
+                    <a:pt x="2868198" y="2861036"/>
+                  </a:lnTo>
+                  <a:lnTo>
+                    <a:pt x="2790564" y="2872117"/>
+                  </a:lnTo>
+                  <a:lnTo>
+                    <a:pt x="2712930" y="2883043"/>
+                  </a:lnTo>
+                  <a:lnTo>
+                    <a:pt x="2635295" y="2893817"/>
+                  </a:lnTo>
+                  <a:lnTo>
+                    <a:pt x="2557661" y="2904439"/>
+                  </a:lnTo>
+                  <a:lnTo>
+                    <a:pt x="2480027" y="2914913"/>
+                  </a:lnTo>
+                  <a:lnTo>
+                    <a:pt x="2402393" y="2925240"/>
+                  </a:lnTo>
+                  <a:lnTo>
+                    <a:pt x="2324759" y="2935423"/>
+                  </a:lnTo>
+                  <a:lnTo>
+                    <a:pt x="2247125" y="2945463"/>
+                  </a:lnTo>
+                  <a:lnTo>
+                    <a:pt x="2169491" y="2955363"/>
+                  </a:lnTo>
+                  <a:lnTo>
+                    <a:pt x="2091857" y="2965124"/>
+                  </a:lnTo>
+                  <a:lnTo>
+                    <a:pt x="2014223" y="2974748"/>
+                  </a:lnTo>
+                  <a:lnTo>
+                    <a:pt x="1936589" y="2984238"/>
+                  </a:lnTo>
+                  <a:lnTo>
+                    <a:pt x="1858955" y="2993595"/>
+                  </a:lnTo>
+                  <a:lnTo>
+                    <a:pt x="1781321" y="3002820"/>
+                  </a:lnTo>
+                  <a:lnTo>
+                    <a:pt x="1703687" y="3011917"/>
+                  </a:lnTo>
+                  <a:lnTo>
+                    <a:pt x="1626053" y="3020886"/>
+                  </a:lnTo>
+                  <a:lnTo>
+                    <a:pt x="1548419" y="3029730"/>
+                  </a:lnTo>
+                  <a:lnTo>
+                    <a:pt x="1470785" y="3038450"/>
+                  </a:lnTo>
+                  <a:lnTo>
+                    <a:pt x="1393151" y="3047048"/>
+                  </a:lnTo>
+                  <a:lnTo>
+                    <a:pt x="1315517" y="3055526"/>
+                  </a:lnTo>
+                  <a:lnTo>
+                    <a:pt x="1237883" y="3063884"/>
+                  </a:lnTo>
+                  <a:lnTo>
+                    <a:pt x="1160249" y="3072126"/>
+                  </a:lnTo>
+                  <a:lnTo>
+                    <a:pt x="1082615" y="3080253"/>
+                  </a:lnTo>
+                  <a:lnTo>
+                    <a:pt x="1004981" y="3088265"/>
+                  </a:lnTo>
+                  <a:lnTo>
+                    <a:pt x="927346" y="3096166"/>
+                  </a:lnTo>
+                  <a:lnTo>
+                    <a:pt x="849712" y="3103956"/>
+                  </a:lnTo>
+                  <a:lnTo>
+                    <a:pt x="772078" y="3111637"/>
+                  </a:lnTo>
+                  <a:lnTo>
+                    <a:pt x="694444" y="3119210"/>
+                  </a:lnTo>
+                  <a:lnTo>
+                    <a:pt x="616810" y="3126678"/>
+                  </a:lnTo>
+                  <a:lnTo>
+                    <a:pt x="539176" y="3134040"/>
+                  </a:lnTo>
+                  <a:lnTo>
+                    <a:pt x="461542" y="3141300"/>
+                  </a:lnTo>
+                  <a:lnTo>
+                    <a:pt x="383908" y="3148458"/>
+                  </a:lnTo>
+                  <a:lnTo>
+                    <a:pt x="306274" y="3155516"/>
+                  </a:lnTo>
+                  <a:lnTo>
+                    <a:pt x="228640" y="3162475"/>
+                  </a:lnTo>
+                  <a:lnTo>
+                    <a:pt x="151006" y="3169337"/>
+                  </a:lnTo>
+                  <a:lnTo>
+                    <a:pt x="73372" y="3176103"/>
+                  </a:lnTo>
+                  <a:lnTo>
+                    <a:pt x="0" y="3182407"/>
                   </a:lnTo>
                   <a:close/>
                 </a:path>
@@ -3609,300 +3540,231 @@
           </p:nvSpPr>
           <p:spPr>
             <a:xfrm>
-              <a:off x="817517" y="3762473"/>
-              <a:ext cx="7370972" cy="913725"/>
+              <a:off x="2667951" y="1896563"/>
+              <a:ext cx="5520539" cy="2778933"/>
             </a:xfrm>
             <a:custGeom>
               <a:avLst/>
               <a:pathLst>
-                <a:path w="7370972" h="913725">
+                <a:path w="5520539" h="2778933">
                   <a:moveTo>
                     <a:pt x="0" y="0"/>
                   </a:moveTo>
                   <a:lnTo>
-                    <a:pt x="73372" y="27671"/>
-                  </a:lnTo>
-                  <a:lnTo>
-                    <a:pt x="151006" y="56471"/>
-                  </a:lnTo>
-                  <a:lnTo>
-                    <a:pt x="228640" y="84799"/>
-                  </a:lnTo>
-                  <a:lnTo>
-                    <a:pt x="306274" y="112664"/>
-                  </a:lnTo>
-                  <a:lnTo>
-                    <a:pt x="383908" y="140072"/>
-                  </a:lnTo>
-                  <a:lnTo>
-                    <a:pt x="461542" y="167031"/>
-                  </a:lnTo>
-                  <a:lnTo>
-                    <a:pt x="539176" y="193550"/>
-                  </a:lnTo>
-                  <a:lnTo>
-                    <a:pt x="616810" y="219634"/>
-                  </a:lnTo>
-                  <a:lnTo>
-                    <a:pt x="694444" y="245290"/>
-                  </a:lnTo>
-                  <a:lnTo>
-                    <a:pt x="772078" y="270527"/>
-                  </a:lnTo>
-                  <a:lnTo>
-                    <a:pt x="849712" y="295351"/>
-                  </a:lnTo>
-                  <a:lnTo>
-                    <a:pt x="927346" y="319768"/>
-                  </a:lnTo>
-                  <a:lnTo>
-                    <a:pt x="1004981" y="343786"/>
-                  </a:lnTo>
-                  <a:lnTo>
-                    <a:pt x="1082615" y="367410"/>
-                  </a:lnTo>
-                  <a:lnTo>
-                    <a:pt x="1160249" y="390647"/>
-                  </a:lnTo>
-                  <a:lnTo>
-                    <a:pt x="1237883" y="413504"/>
-                  </a:lnTo>
-                  <a:lnTo>
-                    <a:pt x="1315517" y="435987"/>
-                  </a:lnTo>
-                  <a:lnTo>
-                    <a:pt x="1393151" y="458102"/>
-                  </a:lnTo>
-                  <a:lnTo>
-                    <a:pt x="1470785" y="479854"/>
-                  </a:lnTo>
-                  <a:lnTo>
-                    <a:pt x="1548419" y="501251"/>
-                  </a:lnTo>
-                  <a:lnTo>
-                    <a:pt x="1626053" y="522297"/>
-                  </a:lnTo>
-                  <a:lnTo>
-                    <a:pt x="1703687" y="542999"/>
-                  </a:lnTo>
-                  <a:lnTo>
-                    <a:pt x="1781321" y="563361"/>
-                  </a:lnTo>
-                  <a:lnTo>
-                    <a:pt x="1858955" y="583391"/>
-                  </a:lnTo>
-                  <a:lnTo>
-                    <a:pt x="1936589" y="603092"/>
-                  </a:lnTo>
-                  <a:lnTo>
-                    <a:pt x="2014223" y="622471"/>
-                  </a:lnTo>
-                  <a:lnTo>
-                    <a:pt x="2091857" y="641532"/>
-                  </a:lnTo>
-                  <a:lnTo>
-                    <a:pt x="2169491" y="660282"/>
-                  </a:lnTo>
-                  <a:lnTo>
-                    <a:pt x="2247125" y="678724"/>
-                  </a:lnTo>
-                  <a:lnTo>
-                    <a:pt x="2324759" y="696865"/>
-                  </a:lnTo>
-                  <a:lnTo>
-                    <a:pt x="2402393" y="714709"/>
-                  </a:lnTo>
-                  <a:lnTo>
-                    <a:pt x="2480027" y="732260"/>
-                  </a:lnTo>
-                  <a:lnTo>
-                    <a:pt x="2557661" y="749524"/>
-                  </a:lnTo>
-                  <a:lnTo>
-                    <a:pt x="2635295" y="766505"/>
-                  </a:lnTo>
-                  <a:lnTo>
-                    <a:pt x="2712930" y="783209"/>
-                  </a:lnTo>
-                  <a:lnTo>
-                    <a:pt x="2790564" y="799639"/>
-                  </a:lnTo>
-                  <a:lnTo>
-                    <a:pt x="2868198" y="815800"/>
-                  </a:lnTo>
-                  <a:lnTo>
-                    <a:pt x="2945832" y="831696"/>
-                  </a:lnTo>
-                  <a:lnTo>
-                    <a:pt x="3023466" y="847332"/>
-                  </a:lnTo>
-                  <a:lnTo>
-                    <a:pt x="3101100" y="862712"/>
-                  </a:lnTo>
-                  <a:lnTo>
-                    <a:pt x="3178734" y="877840"/>
-                  </a:lnTo>
-                  <a:lnTo>
-                    <a:pt x="3256368" y="892721"/>
-                  </a:lnTo>
-                  <a:lnTo>
-                    <a:pt x="3334002" y="907358"/>
-                  </a:lnTo>
-                  <a:lnTo>
-                    <a:pt x="3411636" y="913725"/>
-                  </a:lnTo>
-                  <a:lnTo>
-                    <a:pt x="3489270" y="903499"/>
-                  </a:lnTo>
-                  <a:lnTo>
-                    <a:pt x="3566904" y="893153"/>
-                  </a:lnTo>
-                  <a:lnTo>
-                    <a:pt x="3644538" y="882685"/>
-                  </a:lnTo>
-                  <a:lnTo>
-                    <a:pt x="3722172" y="872095"/>
-                  </a:lnTo>
-                  <a:lnTo>
-                    <a:pt x="3799806" y="861381"/>
-                  </a:lnTo>
-                  <a:lnTo>
-                    <a:pt x="3877440" y="850541"/>
-                  </a:lnTo>
-                  <a:lnTo>
-                    <a:pt x="3955074" y="839575"/>
-                  </a:lnTo>
-                  <a:lnTo>
-                    <a:pt x="4032708" y="828480"/>
-                  </a:lnTo>
-                  <a:lnTo>
-                    <a:pt x="4110342" y="817255"/>
-                  </a:lnTo>
-                  <a:lnTo>
-                    <a:pt x="4187976" y="805898"/>
-                  </a:lnTo>
-                  <a:lnTo>
-                    <a:pt x="4265610" y="794409"/>
-                  </a:lnTo>
-                  <a:lnTo>
-                    <a:pt x="4343244" y="782784"/>
-                  </a:lnTo>
-                  <a:lnTo>
-                    <a:pt x="4420879" y="771024"/>
-                  </a:lnTo>
-                  <a:lnTo>
-                    <a:pt x="4498513" y="759126"/>
-                  </a:lnTo>
-                  <a:lnTo>
-                    <a:pt x="4576147" y="747089"/>
-                  </a:lnTo>
-                  <a:lnTo>
-                    <a:pt x="4653781" y="734910"/>
-                  </a:lnTo>
-                  <a:lnTo>
-                    <a:pt x="4731415" y="722589"/>
-                  </a:lnTo>
-                  <a:lnTo>
-                    <a:pt x="4809049" y="710124"/>
-                  </a:lnTo>
-                  <a:lnTo>
-                    <a:pt x="4886683" y="697512"/>
-                  </a:lnTo>
-                  <a:lnTo>
-                    <a:pt x="4964317" y="684753"/>
-                  </a:lnTo>
-                  <a:lnTo>
-                    <a:pt x="5041951" y="671844"/>
-                  </a:lnTo>
-                  <a:lnTo>
-                    <a:pt x="5119585" y="658785"/>
-                  </a:lnTo>
-                  <a:lnTo>
-                    <a:pt x="5197219" y="645572"/>
-                  </a:lnTo>
-                  <a:lnTo>
-                    <a:pt x="5274853" y="632204"/>
-                  </a:lnTo>
-                  <a:lnTo>
-                    <a:pt x="5352487" y="618680"/>
-                  </a:lnTo>
-                  <a:lnTo>
-                    <a:pt x="5430121" y="604997"/>
-                  </a:lnTo>
-                  <a:lnTo>
-                    <a:pt x="5507755" y="591154"/>
-                  </a:lnTo>
-                  <a:lnTo>
-                    <a:pt x="5585389" y="577149"/>
-                  </a:lnTo>
-                  <a:lnTo>
-                    <a:pt x="5663023" y="562980"/>
-                  </a:lnTo>
-                  <a:lnTo>
-                    <a:pt x="5740657" y="548645"/>
-                  </a:lnTo>
-                  <a:lnTo>
-                    <a:pt x="5818291" y="534142"/>
-                  </a:lnTo>
-                  <a:lnTo>
-                    <a:pt x="5895925" y="519469"/>
-                  </a:lnTo>
-                  <a:lnTo>
-                    <a:pt x="5973559" y="504624"/>
-                  </a:lnTo>
-                  <a:lnTo>
-                    <a:pt x="6051193" y="489606"/>
-                  </a:lnTo>
-                  <a:lnTo>
-                    <a:pt x="6128827" y="474411"/>
-                  </a:lnTo>
-                  <a:lnTo>
-                    <a:pt x="6206462" y="459038"/>
-                  </a:lnTo>
-                  <a:lnTo>
-                    <a:pt x="6284096" y="443486"/>
-                  </a:lnTo>
-                  <a:lnTo>
-                    <a:pt x="6361730" y="427751"/>
-                  </a:lnTo>
-                  <a:lnTo>
-                    <a:pt x="6439364" y="411832"/>
-                  </a:lnTo>
-                  <a:lnTo>
-                    <a:pt x="6516998" y="395726"/>
-                  </a:lnTo>
-                  <a:lnTo>
-                    <a:pt x="6594632" y="379432"/>
-                  </a:lnTo>
-                  <a:lnTo>
-                    <a:pt x="6672266" y="362947"/>
-                  </a:lnTo>
-                  <a:lnTo>
-                    <a:pt x="6749900" y="346268"/>
-                  </a:lnTo>
-                  <a:lnTo>
-                    <a:pt x="6827534" y="329395"/>
-                  </a:lnTo>
-                  <a:lnTo>
-                    <a:pt x="6905168" y="312323"/>
-                  </a:lnTo>
-                  <a:lnTo>
-                    <a:pt x="6982802" y="295052"/>
-                  </a:lnTo>
-                  <a:lnTo>
-                    <a:pt x="7060436" y="277578"/>
-                  </a:lnTo>
-                  <a:lnTo>
-                    <a:pt x="7138070" y="259900"/>
-                  </a:lnTo>
-                  <a:lnTo>
-                    <a:pt x="7215704" y="242015"/>
-                  </a:lnTo>
-                  <a:lnTo>
-                    <a:pt x="7293338" y="223920"/>
-                  </a:lnTo>
-                  <a:lnTo>
-                    <a:pt x="7370972" y="205613"/>
+                    <a:pt x="8521" y="29915"/>
+                  </a:lnTo>
+                  <a:lnTo>
+                    <a:pt x="86155" y="283380"/>
+                  </a:lnTo>
+                  <a:lnTo>
+                    <a:pt x="163789" y="519112"/>
+                  </a:lnTo>
+                  <a:lnTo>
+                    <a:pt x="241423" y="738350"/>
+                  </a:lnTo>
+                  <a:lnTo>
+                    <a:pt x="319057" y="942250"/>
+                  </a:lnTo>
+                  <a:lnTo>
+                    <a:pt x="396692" y="1131883"/>
+                  </a:lnTo>
+                  <a:lnTo>
+                    <a:pt x="474326" y="1308249"/>
+                  </a:lnTo>
+                  <a:lnTo>
+                    <a:pt x="551960" y="1472275"/>
+                  </a:lnTo>
+                  <a:lnTo>
+                    <a:pt x="629594" y="1624825"/>
+                  </a:lnTo>
+                  <a:lnTo>
+                    <a:pt x="707228" y="1766702"/>
+                  </a:lnTo>
+                  <a:lnTo>
+                    <a:pt x="784862" y="1898653"/>
+                  </a:lnTo>
+                  <a:lnTo>
+                    <a:pt x="862496" y="2021371"/>
+                  </a:lnTo>
+                  <a:lnTo>
+                    <a:pt x="940130" y="2135504"/>
+                  </a:lnTo>
+                  <a:lnTo>
+                    <a:pt x="1017764" y="2241651"/>
+                  </a:lnTo>
+                  <a:lnTo>
+                    <a:pt x="1095398" y="2340371"/>
+                  </a:lnTo>
+                  <a:lnTo>
+                    <a:pt x="1173032" y="2432185"/>
+                  </a:lnTo>
+                  <a:lnTo>
+                    <a:pt x="1250666" y="2517575"/>
+                  </a:lnTo>
+                  <a:lnTo>
+                    <a:pt x="1328300" y="2596990"/>
+                  </a:lnTo>
+                  <a:lnTo>
+                    <a:pt x="1405934" y="2670849"/>
+                  </a:lnTo>
+                  <a:lnTo>
+                    <a:pt x="1483568" y="2739541"/>
+                  </a:lnTo>
+                  <a:lnTo>
+                    <a:pt x="1561202" y="2778933"/>
+                  </a:lnTo>
+                  <a:lnTo>
+                    <a:pt x="1638836" y="2766528"/>
+                  </a:lnTo>
+                  <a:lnTo>
+                    <a:pt x="1716470" y="2753948"/>
+                  </a:lnTo>
+                  <a:lnTo>
+                    <a:pt x="1794104" y="2741189"/>
+                  </a:lnTo>
+                  <a:lnTo>
+                    <a:pt x="1871738" y="2728248"/>
+                  </a:lnTo>
+                  <a:lnTo>
+                    <a:pt x="1949372" y="2715124"/>
+                  </a:lnTo>
+                  <a:lnTo>
+                    <a:pt x="2027006" y="2701814"/>
+                  </a:lnTo>
+                  <a:lnTo>
+                    <a:pt x="2104641" y="2688315"/>
+                  </a:lnTo>
+                  <a:lnTo>
+                    <a:pt x="2182275" y="2674624"/>
+                  </a:lnTo>
+                  <a:lnTo>
+                    <a:pt x="2259909" y="2660738"/>
+                  </a:lnTo>
+                  <a:lnTo>
+                    <a:pt x="2337543" y="2646656"/>
+                  </a:lnTo>
+                  <a:lnTo>
+                    <a:pt x="2415177" y="2632373"/>
+                  </a:lnTo>
+                  <a:lnTo>
+                    <a:pt x="2492811" y="2617888"/>
+                  </a:lnTo>
+                  <a:lnTo>
+                    <a:pt x="2570445" y="2603197"/>
+                  </a:lnTo>
+                  <a:lnTo>
+                    <a:pt x="2648079" y="2588298"/>
+                  </a:lnTo>
+                  <a:lnTo>
+                    <a:pt x="2725713" y="2573187"/>
+                  </a:lnTo>
+                  <a:lnTo>
+                    <a:pt x="2803347" y="2557861"/>
+                  </a:lnTo>
+                  <a:lnTo>
+                    <a:pt x="2880981" y="2542318"/>
+                  </a:lnTo>
+                  <a:lnTo>
+                    <a:pt x="2958615" y="2526555"/>
+                  </a:lnTo>
+                  <a:lnTo>
+                    <a:pt x="3036249" y="2510567"/>
+                  </a:lnTo>
+                  <a:lnTo>
+                    <a:pt x="3113883" y="2494353"/>
+                  </a:lnTo>
+                  <a:lnTo>
+                    <a:pt x="3191517" y="2477908"/>
+                  </a:lnTo>
+                  <a:lnTo>
+                    <a:pt x="3269151" y="2461230"/>
+                  </a:lnTo>
+                  <a:lnTo>
+                    <a:pt x="3346785" y="2444315"/>
+                  </a:lnTo>
+                  <a:lnTo>
+                    <a:pt x="3424419" y="2427159"/>
+                  </a:lnTo>
+                  <a:lnTo>
+                    <a:pt x="3502053" y="2409761"/>
+                  </a:lnTo>
+                  <a:lnTo>
+                    <a:pt x="3579687" y="2392115"/>
+                  </a:lnTo>
+                  <a:lnTo>
+                    <a:pt x="3657321" y="2374219"/>
+                  </a:lnTo>
+                  <a:lnTo>
+                    <a:pt x="3734955" y="2356068"/>
+                  </a:lnTo>
+                  <a:lnTo>
+                    <a:pt x="3812590" y="2337660"/>
+                  </a:lnTo>
+                  <a:lnTo>
+                    <a:pt x="3890224" y="2318991"/>
+                  </a:lnTo>
+                  <a:lnTo>
+                    <a:pt x="3967858" y="2300057"/>
+                  </a:lnTo>
+                  <a:lnTo>
+                    <a:pt x="4045492" y="2280853"/>
+                  </a:lnTo>
+                  <a:lnTo>
+                    <a:pt x="4123126" y="2261377"/>
+                  </a:lnTo>
+                  <a:lnTo>
+                    <a:pt x="4200760" y="2241625"/>
+                  </a:lnTo>
+                  <a:lnTo>
+                    <a:pt x="4278394" y="2221592"/>
+                  </a:lnTo>
+                  <a:lnTo>
+                    <a:pt x="4356028" y="2201275"/>
+                  </a:lnTo>
+                  <a:lnTo>
+                    <a:pt x="4433662" y="2180669"/>
+                  </a:lnTo>
+                  <a:lnTo>
+                    <a:pt x="4511296" y="2159771"/>
+                  </a:lnTo>
+                  <a:lnTo>
+                    <a:pt x="4588930" y="2138576"/>
+                  </a:lnTo>
+                  <a:lnTo>
+                    <a:pt x="4666564" y="2117080"/>
+                  </a:lnTo>
+                  <a:lnTo>
+                    <a:pt x="4744198" y="2095279"/>
+                  </a:lnTo>
+                  <a:lnTo>
+                    <a:pt x="4821832" y="2073169"/>
+                  </a:lnTo>
+                  <a:lnTo>
+                    <a:pt x="4899466" y="2050744"/>
+                  </a:lnTo>
+                  <a:lnTo>
+                    <a:pt x="4977100" y="2028001"/>
+                  </a:lnTo>
+                  <a:lnTo>
+                    <a:pt x="5054734" y="2004936"/>
+                  </a:lnTo>
+                  <a:lnTo>
+                    <a:pt x="5132368" y="1981543"/>
+                  </a:lnTo>
+                  <a:lnTo>
+                    <a:pt x="5210002" y="1957817"/>
+                  </a:lnTo>
+                  <a:lnTo>
+                    <a:pt x="5287636" y="1933755"/>
+                  </a:lnTo>
+                  <a:lnTo>
+                    <a:pt x="5365270" y="1909351"/>
+                  </a:lnTo>
+                  <a:lnTo>
+                    <a:pt x="5442904" y="1884601"/>
+                  </a:lnTo>
+                  <a:lnTo>
+                    <a:pt x="5520539" y="1859499"/>
                   </a:lnTo>
                 </a:path>
               </a:pathLst>
@@ -3922,300 +3784,300 @@
           </p:nvSpPr>
           <p:spPr>
             <a:xfrm>
-              <a:off x="817517" y="4684229"/>
-              <a:ext cx="7370972" cy="492264"/>
+              <a:off x="817517" y="4687727"/>
+              <a:ext cx="7370972" cy="840467"/>
             </a:xfrm>
             <a:custGeom>
               <a:avLst/>
               <a:pathLst>
-                <a:path w="7370972" h="492264">
+                <a:path w="7370972" h="840467">
                   <a:moveTo>
-                    <a:pt x="7370972" y="492264"/>
+                    <a:pt x="7370972" y="840467"/>
                   </a:moveTo>
                   <a:lnTo>
-                    <a:pt x="7293338" y="486060"/>
-                  </a:lnTo>
-                  <a:lnTo>
-                    <a:pt x="7215704" y="479753"/>
-                  </a:lnTo>
-                  <a:lnTo>
-                    <a:pt x="7138070" y="473341"/>
-                  </a:lnTo>
-                  <a:lnTo>
-                    <a:pt x="7060436" y="466822"/>
-                  </a:lnTo>
-                  <a:lnTo>
-                    <a:pt x="6982802" y="460195"/>
-                  </a:lnTo>
-                  <a:lnTo>
-                    <a:pt x="6905168" y="453458"/>
-                  </a:lnTo>
-                  <a:lnTo>
-                    <a:pt x="6827534" y="446608"/>
-                  </a:lnTo>
-                  <a:lnTo>
-                    <a:pt x="6749900" y="439644"/>
-                  </a:lnTo>
-                  <a:lnTo>
-                    <a:pt x="6672266" y="432565"/>
-                  </a:lnTo>
-                  <a:lnTo>
-                    <a:pt x="6594632" y="425368"/>
-                  </a:lnTo>
-                  <a:lnTo>
-                    <a:pt x="6516998" y="418050"/>
-                  </a:lnTo>
-                  <a:lnTo>
-                    <a:pt x="6439364" y="410611"/>
-                  </a:lnTo>
-                  <a:lnTo>
-                    <a:pt x="6361730" y="403049"/>
-                  </a:lnTo>
-                  <a:lnTo>
-                    <a:pt x="6284096" y="395360"/>
-                  </a:lnTo>
-                  <a:lnTo>
-                    <a:pt x="6206462" y="387543"/>
-                  </a:lnTo>
-                  <a:lnTo>
-                    <a:pt x="6128827" y="379597"/>
-                  </a:lnTo>
-                  <a:lnTo>
-                    <a:pt x="6051193" y="371518"/>
-                  </a:lnTo>
-                  <a:lnTo>
-                    <a:pt x="5973559" y="363304"/>
-                  </a:lnTo>
-                  <a:lnTo>
-                    <a:pt x="5895925" y="354954"/>
-                  </a:lnTo>
-                  <a:lnTo>
-                    <a:pt x="5818291" y="346465"/>
-                  </a:lnTo>
-                  <a:lnTo>
-                    <a:pt x="5740657" y="337834"/>
-                  </a:lnTo>
-                  <a:lnTo>
-                    <a:pt x="5663023" y="329060"/>
-                  </a:lnTo>
-                  <a:lnTo>
-                    <a:pt x="5585389" y="320140"/>
-                  </a:lnTo>
-                  <a:lnTo>
-                    <a:pt x="5507755" y="311071"/>
-                  </a:lnTo>
-                  <a:lnTo>
-                    <a:pt x="5430121" y="301851"/>
-                  </a:lnTo>
-                  <a:lnTo>
-                    <a:pt x="5352487" y="292478"/>
-                  </a:lnTo>
-                  <a:lnTo>
-                    <a:pt x="5274853" y="282949"/>
-                  </a:lnTo>
-                  <a:lnTo>
-                    <a:pt x="5197219" y="273262"/>
-                  </a:lnTo>
-                  <a:lnTo>
-                    <a:pt x="5119585" y="263413"/>
-                  </a:lnTo>
-                  <a:lnTo>
-                    <a:pt x="5041951" y="253400"/>
-                  </a:lnTo>
-                  <a:lnTo>
-                    <a:pt x="4964317" y="243220"/>
-                  </a:lnTo>
-                  <a:lnTo>
-                    <a:pt x="4886683" y="232871"/>
-                  </a:lnTo>
-                  <a:lnTo>
-                    <a:pt x="4809049" y="222350"/>
-                  </a:lnTo>
-                  <a:lnTo>
-                    <a:pt x="4731415" y="211654"/>
-                  </a:lnTo>
-                  <a:lnTo>
-                    <a:pt x="4653781" y="200779"/>
-                  </a:lnTo>
-                  <a:lnTo>
-                    <a:pt x="4576147" y="189724"/>
-                  </a:lnTo>
-                  <a:lnTo>
-                    <a:pt x="4498513" y="178484"/>
-                  </a:lnTo>
-                  <a:lnTo>
-                    <a:pt x="4420879" y="167058"/>
-                  </a:lnTo>
-                  <a:lnTo>
-                    <a:pt x="4343244" y="155441"/>
-                  </a:lnTo>
-                  <a:lnTo>
-                    <a:pt x="4265610" y="143631"/>
-                  </a:lnTo>
-                  <a:lnTo>
-                    <a:pt x="4187976" y="131625"/>
-                  </a:lnTo>
-                  <a:lnTo>
-                    <a:pt x="4110342" y="119418"/>
-                  </a:lnTo>
-                  <a:lnTo>
-                    <a:pt x="4032708" y="107009"/>
-                  </a:lnTo>
-                  <a:lnTo>
-                    <a:pt x="3955074" y="94392"/>
-                  </a:lnTo>
-                  <a:lnTo>
-                    <a:pt x="3877440" y="81566"/>
-                  </a:lnTo>
-                  <a:lnTo>
-                    <a:pt x="3799806" y="68527"/>
-                  </a:lnTo>
-                  <a:lnTo>
-                    <a:pt x="3722172" y="55270"/>
-                  </a:lnTo>
-                  <a:lnTo>
-                    <a:pt x="3644538" y="41793"/>
-                  </a:lnTo>
-                  <a:lnTo>
-                    <a:pt x="3566904" y="28091"/>
-                  </a:lnTo>
-                  <a:lnTo>
-                    <a:pt x="3489270" y="14161"/>
-                  </a:lnTo>
-                  <a:lnTo>
-                    <a:pt x="3411636" y="0"/>
-                  </a:lnTo>
-                  <a:lnTo>
-                    <a:pt x="3334002" y="2078"/>
-                  </a:lnTo>
-                  <a:lnTo>
-                    <a:pt x="3256368" y="12069"/>
-                  </a:lnTo>
-                  <a:lnTo>
-                    <a:pt x="3178734" y="21944"/>
-                  </a:lnTo>
-                  <a:lnTo>
-                    <a:pt x="3101100" y="31705"/>
-                  </a:lnTo>
-                  <a:lnTo>
-                    <a:pt x="3023466" y="41353"/>
-                  </a:lnTo>
-                  <a:lnTo>
-                    <a:pt x="2945832" y="50889"/>
-                  </a:lnTo>
-                  <a:lnTo>
-                    <a:pt x="2868198" y="60315"/>
-                  </a:lnTo>
-                  <a:lnTo>
-                    <a:pt x="2790564" y="69632"/>
-                  </a:lnTo>
-                  <a:lnTo>
-                    <a:pt x="2712930" y="78841"/>
-                  </a:lnTo>
-                  <a:lnTo>
-                    <a:pt x="2635295" y="87943"/>
-                  </a:lnTo>
-                  <a:lnTo>
-                    <a:pt x="2557661" y="96940"/>
-                  </a:lnTo>
-                  <a:lnTo>
-                    <a:pt x="2480027" y="105832"/>
-                  </a:lnTo>
-                  <a:lnTo>
-                    <a:pt x="2402393" y="114622"/>
-                  </a:lnTo>
-                  <a:lnTo>
-                    <a:pt x="2324759" y="123310"/>
-                  </a:lnTo>
-                  <a:lnTo>
-                    <a:pt x="2247125" y="131897"/>
-                  </a:lnTo>
-                  <a:lnTo>
-                    <a:pt x="2169491" y="140385"/>
-                  </a:lnTo>
-                  <a:lnTo>
-                    <a:pt x="2091857" y="148775"/>
-                  </a:lnTo>
-                  <a:lnTo>
-                    <a:pt x="2014223" y="157067"/>
-                  </a:lnTo>
-                  <a:lnTo>
-                    <a:pt x="1936589" y="165264"/>
-                  </a:lnTo>
-                  <a:lnTo>
-                    <a:pt x="1858955" y="173365"/>
-                  </a:lnTo>
-                  <a:lnTo>
-                    <a:pt x="1781321" y="181373"/>
-                  </a:lnTo>
-                  <a:lnTo>
-                    <a:pt x="1703687" y="189288"/>
-                  </a:lnTo>
-                  <a:lnTo>
-                    <a:pt x="1626053" y="197112"/>
-                  </a:lnTo>
-                  <a:lnTo>
-                    <a:pt x="1548419" y="204844"/>
-                  </a:lnTo>
-                  <a:lnTo>
-                    <a:pt x="1470785" y="212488"/>
-                  </a:lnTo>
-                  <a:lnTo>
-                    <a:pt x="1393151" y="220042"/>
-                  </a:lnTo>
-                  <a:lnTo>
-                    <a:pt x="1315517" y="227510"/>
-                  </a:lnTo>
-                  <a:lnTo>
-                    <a:pt x="1237883" y="234891"/>
-                  </a:lnTo>
-                  <a:lnTo>
-                    <a:pt x="1160249" y="242186"/>
-                  </a:lnTo>
-                  <a:lnTo>
-                    <a:pt x="1082615" y="249397"/>
-                  </a:lnTo>
-                  <a:lnTo>
-                    <a:pt x="1004981" y="256524"/>
-                  </a:lnTo>
-                  <a:lnTo>
-                    <a:pt x="927346" y="263569"/>
-                  </a:lnTo>
-                  <a:lnTo>
-                    <a:pt x="849712" y="270533"/>
-                  </a:lnTo>
-                  <a:lnTo>
-                    <a:pt x="772078" y="277415"/>
-                  </a:lnTo>
-                  <a:lnTo>
-                    <a:pt x="694444" y="284218"/>
-                  </a:lnTo>
-                  <a:lnTo>
-                    <a:pt x="616810" y="290943"/>
-                  </a:lnTo>
-                  <a:lnTo>
-                    <a:pt x="539176" y="297589"/>
-                  </a:lnTo>
-                  <a:lnTo>
-                    <a:pt x="461542" y="304159"/>
-                  </a:lnTo>
-                  <a:lnTo>
-                    <a:pt x="383908" y="310652"/>
-                  </a:lnTo>
-                  <a:lnTo>
-                    <a:pt x="306274" y="317070"/>
-                  </a:lnTo>
-                  <a:lnTo>
-                    <a:pt x="228640" y="323414"/>
-                  </a:lnTo>
-                  <a:lnTo>
-                    <a:pt x="151006" y="329685"/>
-                  </a:lnTo>
-                  <a:lnTo>
-                    <a:pt x="73372" y="335882"/>
-                  </a:lnTo>
-                  <a:lnTo>
-                    <a:pt x="0" y="341672"/>
+                    <a:pt x="7293338" y="838886"/>
+                  </a:lnTo>
+                  <a:lnTo>
+                    <a:pt x="7215704" y="837186"/>
+                  </a:lnTo>
+                  <a:lnTo>
+                    <a:pt x="7138070" y="835359"/>
+                  </a:lnTo>
+                  <a:lnTo>
+                    <a:pt x="7060436" y="833394"/>
+                  </a:lnTo>
+                  <a:lnTo>
+                    <a:pt x="6982802" y="831281"/>
+                  </a:lnTo>
+                  <a:lnTo>
+                    <a:pt x="6905168" y="829009"/>
+                  </a:lnTo>
+                  <a:lnTo>
+                    <a:pt x="6827534" y="826567"/>
+                  </a:lnTo>
+                  <a:lnTo>
+                    <a:pt x="6749900" y="823940"/>
+                  </a:lnTo>
+                  <a:lnTo>
+                    <a:pt x="6672266" y="821116"/>
+                  </a:lnTo>
+                  <a:lnTo>
+                    <a:pt x="6594632" y="818080"/>
+                  </a:lnTo>
+                  <a:lnTo>
+                    <a:pt x="6516998" y="814815"/>
+                  </a:lnTo>
+                  <a:lnTo>
+                    <a:pt x="6439364" y="811304"/>
+                  </a:lnTo>
+                  <a:lnTo>
+                    <a:pt x="6361730" y="807530"/>
+                  </a:lnTo>
+                  <a:lnTo>
+                    <a:pt x="6284096" y="803471"/>
+                  </a:lnTo>
+                  <a:lnTo>
+                    <a:pt x="6206462" y="799107"/>
+                  </a:lnTo>
+                  <a:lnTo>
+                    <a:pt x="6128827" y="794415"/>
+                  </a:lnTo>
+                  <a:lnTo>
+                    <a:pt x="6051193" y="789370"/>
+                  </a:lnTo>
+                  <a:lnTo>
+                    <a:pt x="5973559" y="783945"/>
+                  </a:lnTo>
+                  <a:lnTo>
+                    <a:pt x="5895925" y="778113"/>
+                  </a:lnTo>
+                  <a:lnTo>
+                    <a:pt x="5818291" y="771841"/>
+                  </a:lnTo>
+                  <a:lnTo>
+                    <a:pt x="5740657" y="765098"/>
+                  </a:lnTo>
+                  <a:lnTo>
+                    <a:pt x="5663023" y="757847"/>
+                  </a:lnTo>
+                  <a:lnTo>
+                    <a:pt x="5585389" y="750051"/>
+                  </a:lnTo>
+                  <a:lnTo>
+                    <a:pt x="5507755" y="741668"/>
+                  </a:lnTo>
+                  <a:lnTo>
+                    <a:pt x="5430121" y="732655"/>
+                  </a:lnTo>
+                  <a:lnTo>
+                    <a:pt x="5352487" y="722964"/>
+                  </a:lnTo>
+                  <a:lnTo>
+                    <a:pt x="5274853" y="712544"/>
+                  </a:lnTo>
+                  <a:lnTo>
+                    <a:pt x="5197219" y="701339"/>
+                  </a:lnTo>
+                  <a:lnTo>
+                    <a:pt x="5119585" y="689292"/>
+                  </a:lnTo>
+                  <a:lnTo>
+                    <a:pt x="5041951" y="676339"/>
+                  </a:lnTo>
+                  <a:lnTo>
+                    <a:pt x="4964317" y="662411"/>
+                  </a:lnTo>
+                  <a:lnTo>
+                    <a:pt x="4886683" y="647435"/>
+                  </a:lnTo>
+                  <a:lnTo>
+                    <a:pt x="4809049" y="631333"/>
+                  </a:lnTo>
+                  <a:lnTo>
+                    <a:pt x="4731415" y="614020"/>
+                  </a:lnTo>
+                  <a:lnTo>
+                    <a:pt x="4653781" y="595404"/>
+                  </a:lnTo>
+                  <a:lnTo>
+                    <a:pt x="4576147" y="575387"/>
+                  </a:lnTo>
+                  <a:lnTo>
+                    <a:pt x="4498513" y="553865"/>
+                  </a:lnTo>
+                  <a:lnTo>
+                    <a:pt x="4420879" y="530723"/>
+                  </a:lnTo>
+                  <a:lnTo>
+                    <a:pt x="4343244" y="505841"/>
+                  </a:lnTo>
+                  <a:lnTo>
+                    <a:pt x="4265610" y="479087"/>
+                  </a:lnTo>
+                  <a:lnTo>
+                    <a:pt x="4187976" y="450320"/>
+                  </a:lnTo>
+                  <a:lnTo>
+                    <a:pt x="4110342" y="419389"/>
+                  </a:lnTo>
+                  <a:lnTo>
+                    <a:pt x="4032708" y="386131"/>
+                  </a:lnTo>
+                  <a:lnTo>
+                    <a:pt x="3955074" y="350371"/>
+                  </a:lnTo>
+                  <a:lnTo>
+                    <a:pt x="3877440" y="311921"/>
+                  </a:lnTo>
+                  <a:lnTo>
+                    <a:pt x="3799806" y="270578"/>
+                  </a:lnTo>
+                  <a:lnTo>
+                    <a:pt x="3722172" y="226126"/>
+                  </a:lnTo>
+                  <a:lnTo>
+                    <a:pt x="3644538" y="178329"/>
+                  </a:lnTo>
+                  <a:lnTo>
+                    <a:pt x="3566904" y="126936"/>
+                  </a:lnTo>
+                  <a:lnTo>
+                    <a:pt x="3489270" y="71678"/>
+                  </a:lnTo>
+                  <a:lnTo>
+                    <a:pt x="3411636" y="12262"/>
+                  </a:lnTo>
+                  <a:lnTo>
+                    <a:pt x="3334002" y="0"/>
+                  </a:lnTo>
+                  <a:lnTo>
+                    <a:pt x="3256368" y="12059"/>
+                  </a:lnTo>
+                  <a:lnTo>
+                    <a:pt x="3178734" y="23950"/>
+                  </a:lnTo>
+                  <a:lnTo>
+                    <a:pt x="3101100" y="35674"/>
+                  </a:lnTo>
+                  <a:lnTo>
+                    <a:pt x="3023466" y="47234"/>
+                  </a:lnTo>
+                  <a:lnTo>
+                    <a:pt x="2945832" y="58633"/>
+                  </a:lnTo>
+                  <a:lnTo>
+                    <a:pt x="2868198" y="69871"/>
+                  </a:lnTo>
+                  <a:lnTo>
+                    <a:pt x="2790564" y="80953"/>
+                  </a:lnTo>
+                  <a:lnTo>
+                    <a:pt x="2712930" y="91879"/>
+                  </a:lnTo>
+                  <a:lnTo>
+                    <a:pt x="2635295" y="102653"/>
+                  </a:lnTo>
+                  <a:lnTo>
+                    <a:pt x="2557661" y="113275"/>
+                  </a:lnTo>
+                  <a:lnTo>
+                    <a:pt x="2480027" y="123749"/>
+                  </a:lnTo>
+                  <a:lnTo>
+                    <a:pt x="2402393" y="134076"/>
+                  </a:lnTo>
+                  <a:lnTo>
+                    <a:pt x="2324759" y="144259"/>
+                  </a:lnTo>
+                  <a:lnTo>
+                    <a:pt x="2247125" y="154299"/>
+                  </a:lnTo>
+                  <a:lnTo>
+                    <a:pt x="2169491" y="164199"/>
+                  </a:lnTo>
+                  <a:lnTo>
+                    <a:pt x="2091857" y="173960"/>
+                  </a:lnTo>
+                  <a:lnTo>
+                    <a:pt x="2014223" y="183584"/>
+                  </a:lnTo>
+                  <a:lnTo>
+                    <a:pt x="1936589" y="193074"/>
+                  </a:lnTo>
+                  <a:lnTo>
+                    <a:pt x="1858955" y="202430"/>
+                  </a:lnTo>
+                  <a:lnTo>
+                    <a:pt x="1781321" y="211656"/>
+                  </a:lnTo>
+                  <a:lnTo>
+                    <a:pt x="1703687" y="220753"/>
+                  </a:lnTo>
+                  <a:lnTo>
+                    <a:pt x="1626053" y="229722"/>
+                  </a:lnTo>
+                  <a:lnTo>
+                    <a:pt x="1548419" y="238566"/>
+                  </a:lnTo>
+                  <a:lnTo>
+                    <a:pt x="1470785" y="247286"/>
+                  </a:lnTo>
+                  <a:lnTo>
+                    <a:pt x="1393151" y="255884"/>
+                  </a:lnTo>
+                  <a:lnTo>
+                    <a:pt x="1315517" y="264361"/>
+                  </a:lnTo>
+                  <a:lnTo>
+                    <a:pt x="1237883" y="272720"/>
+                  </a:lnTo>
+                  <a:lnTo>
+                    <a:pt x="1160249" y="280962"/>
+                  </a:lnTo>
+                  <a:lnTo>
+                    <a:pt x="1082615" y="289089"/>
+                  </a:lnTo>
+                  <a:lnTo>
+                    <a:pt x="1004981" y="297101"/>
+                  </a:lnTo>
+                  <a:lnTo>
+                    <a:pt x="927346" y="305002"/>
+                  </a:lnTo>
+                  <a:lnTo>
+                    <a:pt x="849712" y="312792"/>
+                  </a:lnTo>
+                  <a:lnTo>
+                    <a:pt x="772078" y="320473"/>
+                  </a:lnTo>
+                  <a:lnTo>
+                    <a:pt x="694444" y="328046"/>
+                  </a:lnTo>
+                  <a:lnTo>
+                    <a:pt x="616810" y="335513"/>
+                  </a:lnTo>
+                  <a:lnTo>
+                    <a:pt x="539176" y="342876"/>
+                  </a:lnTo>
+                  <a:lnTo>
+                    <a:pt x="461542" y="350136"/>
+                  </a:lnTo>
+                  <a:lnTo>
+                    <a:pt x="383908" y="357294"/>
+                  </a:lnTo>
+                  <a:lnTo>
+                    <a:pt x="306274" y="364352"/>
+                  </a:lnTo>
+                  <a:lnTo>
+                    <a:pt x="228640" y="371311"/>
+                  </a:lnTo>
+                  <a:lnTo>
+                    <a:pt x="151006" y="378173"/>
+                  </a:lnTo>
+                  <a:lnTo>
+                    <a:pt x="73372" y="384939"/>
+                  </a:lnTo>
+                  <a:lnTo>
+                    <a:pt x="0" y="391243"/>
                   </a:lnTo>
                 </a:path>
               </a:pathLst>
@@ -4235,300 +4097,300 @@
           </p:nvSpPr>
           <p:spPr>
             <a:xfrm>
-              <a:off x="817517" y="4582254"/>
-              <a:ext cx="7370972" cy="199290"/>
+              <a:off x="817517" y="2438710"/>
+              <a:ext cx="7370972" cy="2916388"/>
             </a:xfrm>
             <a:custGeom>
               <a:avLst/>
               <a:pathLst>
-                <a:path w="7370972" h="199290">
+                <a:path w="7370972" h="2916388">
                   <a:moveTo>
                     <a:pt x="0" y="0"/>
                   </a:moveTo>
                   <a:lnTo>
-                    <a:pt x="73372" y="2219"/>
-                  </a:lnTo>
-                  <a:lnTo>
-                    <a:pt x="151006" y="4561"/>
-                  </a:lnTo>
-                  <a:lnTo>
-                    <a:pt x="228640" y="6898"/>
-                  </a:lnTo>
-                  <a:lnTo>
-                    <a:pt x="306274" y="9228"/>
-                  </a:lnTo>
-                  <a:lnTo>
-                    <a:pt x="383908" y="11554"/>
-                  </a:lnTo>
-                  <a:lnTo>
-                    <a:pt x="461542" y="13873"/>
-                  </a:lnTo>
-                  <a:lnTo>
-                    <a:pt x="539176" y="16187"/>
-                  </a:lnTo>
-                  <a:lnTo>
-                    <a:pt x="616810" y="18496"/>
-                  </a:lnTo>
-                  <a:lnTo>
-                    <a:pt x="694444" y="20799"/>
-                  </a:lnTo>
-                  <a:lnTo>
-                    <a:pt x="772078" y="23096"/>
-                  </a:lnTo>
-                  <a:lnTo>
-                    <a:pt x="849712" y="25387"/>
-                  </a:lnTo>
-                  <a:lnTo>
-                    <a:pt x="927346" y="27673"/>
-                  </a:lnTo>
-                  <a:lnTo>
-                    <a:pt x="1004981" y="29954"/>
-                  </a:lnTo>
-                  <a:lnTo>
-                    <a:pt x="1082615" y="32229"/>
-                  </a:lnTo>
-                  <a:lnTo>
-                    <a:pt x="1160249" y="34498"/>
-                  </a:lnTo>
-                  <a:lnTo>
-                    <a:pt x="1237883" y="36762"/>
-                  </a:lnTo>
-                  <a:lnTo>
-                    <a:pt x="1315517" y="39021"/>
-                  </a:lnTo>
-                  <a:lnTo>
-                    <a:pt x="1393151" y="41274"/>
-                  </a:lnTo>
-                  <a:lnTo>
-                    <a:pt x="1470785" y="43521"/>
-                  </a:lnTo>
-                  <a:lnTo>
-                    <a:pt x="1548419" y="45763"/>
-                  </a:lnTo>
-                  <a:lnTo>
-                    <a:pt x="1626053" y="48000"/>
-                  </a:lnTo>
-                  <a:lnTo>
-                    <a:pt x="1703687" y="50231"/>
-                  </a:lnTo>
-                  <a:lnTo>
-                    <a:pt x="1781321" y="52457"/>
-                  </a:lnTo>
-                  <a:lnTo>
-                    <a:pt x="1858955" y="54677"/>
-                  </a:lnTo>
-                  <a:lnTo>
-                    <a:pt x="1936589" y="56892"/>
-                  </a:lnTo>
-                  <a:lnTo>
-                    <a:pt x="2014223" y="59101"/>
-                  </a:lnTo>
-                  <a:lnTo>
-                    <a:pt x="2091857" y="61306"/>
-                  </a:lnTo>
-                  <a:lnTo>
-                    <a:pt x="2169491" y="63504"/>
-                  </a:lnTo>
-                  <a:lnTo>
-                    <a:pt x="2247125" y="65698"/>
-                  </a:lnTo>
-                  <a:lnTo>
-                    <a:pt x="2324759" y="67886"/>
-                  </a:lnTo>
-                  <a:lnTo>
-                    <a:pt x="2402393" y="70069"/>
-                  </a:lnTo>
-                  <a:lnTo>
-                    <a:pt x="2480027" y="72246"/>
-                  </a:lnTo>
-                  <a:lnTo>
-                    <a:pt x="2557661" y="74419"/>
-                  </a:lnTo>
-                  <a:lnTo>
-                    <a:pt x="2635295" y="76586"/>
-                  </a:lnTo>
-                  <a:lnTo>
-                    <a:pt x="2712930" y="78748"/>
-                  </a:lnTo>
-                  <a:lnTo>
-                    <a:pt x="2790564" y="80904"/>
-                  </a:lnTo>
-                  <a:lnTo>
-                    <a:pt x="2868198" y="83055"/>
-                  </a:lnTo>
-                  <a:lnTo>
-                    <a:pt x="2945832" y="85201"/>
-                  </a:lnTo>
-                  <a:lnTo>
-                    <a:pt x="3023466" y="87342"/>
-                  </a:lnTo>
-                  <a:lnTo>
-                    <a:pt x="3101100" y="89478"/>
-                  </a:lnTo>
-                  <a:lnTo>
-                    <a:pt x="3178734" y="91608"/>
-                  </a:lnTo>
-                  <a:lnTo>
-                    <a:pt x="3256368" y="93733"/>
-                  </a:lnTo>
-                  <a:lnTo>
-                    <a:pt x="3334002" y="95854"/>
-                  </a:lnTo>
-                  <a:lnTo>
-                    <a:pt x="3411636" y="97969"/>
-                  </a:lnTo>
-                  <a:lnTo>
-                    <a:pt x="3489270" y="100078"/>
-                  </a:lnTo>
-                  <a:lnTo>
-                    <a:pt x="3566904" y="102183"/>
-                  </a:lnTo>
-                  <a:lnTo>
-                    <a:pt x="3644538" y="104283"/>
-                  </a:lnTo>
-                  <a:lnTo>
-                    <a:pt x="3722172" y="106377"/>
-                  </a:lnTo>
-                  <a:lnTo>
-                    <a:pt x="3799806" y="108467"/>
-                  </a:lnTo>
-                  <a:lnTo>
-                    <a:pt x="3877440" y="110551"/>
-                  </a:lnTo>
-                  <a:lnTo>
-                    <a:pt x="3955074" y="112630"/>
-                  </a:lnTo>
-                  <a:lnTo>
-                    <a:pt x="4032708" y="114704"/>
-                  </a:lnTo>
-                  <a:lnTo>
-                    <a:pt x="4110342" y="116774"/>
-                  </a:lnTo>
-                  <a:lnTo>
-                    <a:pt x="4187976" y="118838"/>
-                  </a:lnTo>
-                  <a:lnTo>
-                    <a:pt x="4265610" y="120897"/>
-                  </a:lnTo>
-                  <a:lnTo>
-                    <a:pt x="4343244" y="122951"/>
-                  </a:lnTo>
-                  <a:lnTo>
-                    <a:pt x="4420879" y="125000"/>
-                  </a:lnTo>
-                  <a:lnTo>
-                    <a:pt x="4498513" y="127044"/>
-                  </a:lnTo>
-                  <a:lnTo>
-                    <a:pt x="4576147" y="129084"/>
-                  </a:lnTo>
-                  <a:lnTo>
-                    <a:pt x="4653781" y="131118"/>
-                  </a:lnTo>
-                  <a:lnTo>
-                    <a:pt x="4731415" y="133147"/>
-                  </a:lnTo>
-                  <a:lnTo>
-                    <a:pt x="4809049" y="135172"/>
-                  </a:lnTo>
-                  <a:lnTo>
-                    <a:pt x="4886683" y="137191"/>
-                  </a:lnTo>
-                  <a:lnTo>
-                    <a:pt x="4964317" y="139206"/>
-                  </a:lnTo>
-                  <a:lnTo>
-                    <a:pt x="5041951" y="141216"/>
-                  </a:lnTo>
-                  <a:lnTo>
-                    <a:pt x="5119585" y="143220"/>
-                  </a:lnTo>
-                  <a:lnTo>
-                    <a:pt x="5197219" y="145220"/>
-                  </a:lnTo>
-                  <a:lnTo>
-                    <a:pt x="5274853" y="147215"/>
-                  </a:lnTo>
-                  <a:lnTo>
-                    <a:pt x="5352487" y="149206"/>
-                  </a:lnTo>
-                  <a:lnTo>
-                    <a:pt x="5430121" y="151191"/>
-                  </a:lnTo>
-                  <a:lnTo>
-                    <a:pt x="5507755" y="153172"/>
-                  </a:lnTo>
-                  <a:lnTo>
-                    <a:pt x="5585389" y="155147"/>
-                  </a:lnTo>
-                  <a:lnTo>
-                    <a:pt x="5663023" y="157118"/>
-                  </a:lnTo>
-                  <a:lnTo>
-                    <a:pt x="5740657" y="159085"/>
-                  </a:lnTo>
-                  <a:lnTo>
-                    <a:pt x="5818291" y="161046"/>
-                  </a:lnTo>
-                  <a:lnTo>
-                    <a:pt x="5895925" y="163003"/>
-                  </a:lnTo>
-                  <a:lnTo>
-                    <a:pt x="5973559" y="164955"/>
-                  </a:lnTo>
-                  <a:lnTo>
-                    <a:pt x="6051193" y="166902"/>
-                  </a:lnTo>
-                  <a:lnTo>
-                    <a:pt x="6128827" y="168844"/>
-                  </a:lnTo>
-                  <a:lnTo>
-                    <a:pt x="6206462" y="170782"/>
-                  </a:lnTo>
-                  <a:lnTo>
-                    <a:pt x="6284096" y="172715"/>
-                  </a:lnTo>
-                  <a:lnTo>
-                    <a:pt x="6361730" y="174644"/>
-                  </a:lnTo>
-                  <a:lnTo>
-                    <a:pt x="6439364" y="176567"/>
-                  </a:lnTo>
-                  <a:lnTo>
-                    <a:pt x="6516998" y="178486"/>
-                  </a:lnTo>
-                  <a:lnTo>
-                    <a:pt x="6594632" y="180401"/>
-                  </a:lnTo>
-                  <a:lnTo>
-                    <a:pt x="6672266" y="182310"/>
-                  </a:lnTo>
-                  <a:lnTo>
-                    <a:pt x="6749900" y="184215"/>
-                  </a:lnTo>
-                  <a:lnTo>
-                    <a:pt x="6827534" y="186116"/>
-                  </a:lnTo>
-                  <a:lnTo>
-                    <a:pt x="6905168" y="188011"/>
-                  </a:lnTo>
-                  <a:lnTo>
-                    <a:pt x="6982802" y="189903"/>
-                  </a:lnTo>
-                  <a:lnTo>
-                    <a:pt x="7060436" y="191789"/>
-                  </a:lnTo>
-                  <a:lnTo>
-                    <a:pt x="7138070" y="193671"/>
-                  </a:lnTo>
-                  <a:lnTo>
-                    <a:pt x="7215704" y="195549"/>
-                  </a:lnTo>
-                  <a:lnTo>
-                    <a:pt x="7293338" y="197422"/>
-                  </a:lnTo>
-                  <a:lnTo>
-                    <a:pt x="7370972" y="199290"/>
+                    <a:pt x="73372" y="84784"/>
+                  </a:lnTo>
+                  <a:lnTo>
+                    <a:pt x="151006" y="171910"/>
+                  </a:lnTo>
+                  <a:lnTo>
+                    <a:pt x="228640" y="256527"/>
+                  </a:lnTo>
+                  <a:lnTo>
+                    <a:pt x="306274" y="338708"/>
+                  </a:lnTo>
+                  <a:lnTo>
+                    <a:pt x="383908" y="418522"/>
+                  </a:lnTo>
+                  <a:lnTo>
+                    <a:pt x="461542" y="496038"/>
+                  </a:lnTo>
+                  <a:lnTo>
+                    <a:pt x="539176" y="571322"/>
+                  </a:lnTo>
+                  <a:lnTo>
+                    <a:pt x="616810" y="644438"/>
+                  </a:lnTo>
+                  <a:lnTo>
+                    <a:pt x="694444" y="715448"/>
+                  </a:lnTo>
+                  <a:lnTo>
+                    <a:pt x="772078" y="784414"/>
+                  </a:lnTo>
+                  <a:lnTo>
+                    <a:pt x="849712" y="851394"/>
+                  </a:lnTo>
+                  <a:lnTo>
+                    <a:pt x="927346" y="916445"/>
+                  </a:lnTo>
+                  <a:lnTo>
+                    <a:pt x="1004981" y="979624"/>
+                  </a:lnTo>
+                  <a:lnTo>
+                    <a:pt x="1082615" y="1040982"/>
+                  </a:lnTo>
+                  <a:lnTo>
+                    <a:pt x="1160249" y="1100574"/>
+                  </a:lnTo>
+                  <a:lnTo>
+                    <a:pt x="1237883" y="1158451"/>
+                  </a:lnTo>
+                  <a:lnTo>
+                    <a:pt x="1315517" y="1214660"/>
+                  </a:lnTo>
+                  <a:lnTo>
+                    <a:pt x="1393151" y="1269251"/>
+                  </a:lnTo>
+                  <a:lnTo>
+                    <a:pt x="1470785" y="1322270"/>
+                  </a:lnTo>
+                  <a:lnTo>
+                    <a:pt x="1548419" y="1373762"/>
+                  </a:lnTo>
+                  <a:lnTo>
+                    <a:pt x="1626053" y="1423772"/>
+                  </a:lnTo>
+                  <a:lnTo>
+                    <a:pt x="1703687" y="1472341"/>
+                  </a:lnTo>
+                  <a:lnTo>
+                    <a:pt x="1781321" y="1519512"/>
+                  </a:lnTo>
+                  <a:lnTo>
+                    <a:pt x="1858955" y="1565325"/>
+                  </a:lnTo>
+                  <a:lnTo>
+                    <a:pt x="1936589" y="1609819"/>
+                  </a:lnTo>
+                  <a:lnTo>
+                    <a:pt x="2014223" y="1653031"/>
+                  </a:lnTo>
+                  <a:lnTo>
+                    <a:pt x="2091857" y="1694999"/>
+                  </a:lnTo>
+                  <a:lnTo>
+                    <a:pt x="2169491" y="1735758"/>
+                  </a:lnTo>
+                  <a:lnTo>
+                    <a:pt x="2247125" y="1775344"/>
+                  </a:lnTo>
+                  <a:lnTo>
+                    <a:pt x="2324759" y="1813790"/>
+                  </a:lnTo>
+                  <a:lnTo>
+                    <a:pt x="2402393" y="1851129"/>
+                  </a:lnTo>
+                  <a:lnTo>
+                    <a:pt x="2480027" y="1887393"/>
+                  </a:lnTo>
+                  <a:lnTo>
+                    <a:pt x="2557661" y="1922612"/>
+                  </a:lnTo>
+                  <a:lnTo>
+                    <a:pt x="2635295" y="1956818"/>
+                  </a:lnTo>
+                  <a:lnTo>
+                    <a:pt x="2712930" y="1990038"/>
+                  </a:lnTo>
+                  <a:lnTo>
+                    <a:pt x="2790564" y="2022302"/>
+                  </a:lnTo>
+                  <a:lnTo>
+                    <a:pt x="2868198" y="2053637"/>
+                  </a:lnTo>
+                  <a:lnTo>
+                    <a:pt x="2945832" y="2084069"/>
+                  </a:lnTo>
+                  <a:lnTo>
+                    <a:pt x="3023466" y="2113625"/>
+                  </a:lnTo>
+                  <a:lnTo>
+                    <a:pt x="3101100" y="2142330"/>
+                  </a:lnTo>
+                  <a:lnTo>
+                    <a:pt x="3178734" y="2170209"/>
+                  </a:lnTo>
+                  <a:lnTo>
+                    <a:pt x="3256368" y="2197285"/>
+                  </a:lnTo>
+                  <a:lnTo>
+                    <a:pt x="3334002" y="2223581"/>
+                  </a:lnTo>
+                  <a:lnTo>
+                    <a:pt x="3411636" y="2249120"/>
+                  </a:lnTo>
+                  <a:lnTo>
+                    <a:pt x="3489270" y="2273923"/>
+                  </a:lnTo>
+                  <a:lnTo>
+                    <a:pt x="3566904" y="2298012"/>
+                  </a:lnTo>
+                  <a:lnTo>
+                    <a:pt x="3644538" y="2321408"/>
+                  </a:lnTo>
+                  <a:lnTo>
+                    <a:pt x="3722172" y="2344130"/>
+                  </a:lnTo>
+                  <a:lnTo>
+                    <a:pt x="3799806" y="2366198"/>
+                  </a:lnTo>
+                  <a:lnTo>
+                    <a:pt x="3877440" y="2387630"/>
+                  </a:lnTo>
+                  <a:lnTo>
+                    <a:pt x="3955074" y="2408445"/>
+                  </a:lnTo>
+                  <a:lnTo>
+                    <a:pt x="4032708" y="2428661"/>
+                  </a:lnTo>
+                  <a:lnTo>
+                    <a:pt x="4110342" y="2448294"/>
+                  </a:lnTo>
+                  <a:lnTo>
+                    <a:pt x="4187976" y="2467362"/>
+                  </a:lnTo>
+                  <a:lnTo>
+                    <a:pt x="4265610" y="2485882"/>
+                  </a:lnTo>
+                  <a:lnTo>
+                    <a:pt x="4343244" y="2503867"/>
+                  </a:lnTo>
+                  <a:lnTo>
+                    <a:pt x="4420879" y="2521335"/>
+                  </a:lnTo>
+                  <a:lnTo>
+                    <a:pt x="4498513" y="2538300"/>
+                  </a:lnTo>
+                  <a:lnTo>
+                    <a:pt x="4576147" y="2554777"/>
+                  </a:lnTo>
+                  <a:lnTo>
+                    <a:pt x="4653781" y="2570779"/>
+                  </a:lnTo>
+                  <a:lnTo>
+                    <a:pt x="4731415" y="2586320"/>
+                  </a:lnTo>
+                  <a:lnTo>
+                    <a:pt x="4809049" y="2601414"/>
+                  </a:lnTo>
+                  <a:lnTo>
+                    <a:pt x="4886683" y="2616073"/>
+                  </a:lnTo>
+                  <a:lnTo>
+                    <a:pt x="4964317" y="2630310"/>
+                  </a:lnTo>
+                  <a:lnTo>
+                    <a:pt x="5041951" y="2644137"/>
+                  </a:lnTo>
+                  <a:lnTo>
+                    <a:pt x="5119585" y="2657566"/>
+                  </a:lnTo>
+                  <a:lnTo>
+                    <a:pt x="5197219" y="2670608"/>
+                  </a:lnTo>
+                  <a:lnTo>
+                    <a:pt x="5274853" y="2683275"/>
+                  </a:lnTo>
+                  <a:lnTo>
+                    <a:pt x="5352487" y="2695577"/>
+                  </a:lnTo>
+                  <a:lnTo>
+                    <a:pt x="5430121" y="2707525"/>
+                  </a:lnTo>
+                  <a:lnTo>
+                    <a:pt x="5507755" y="2719128"/>
+                  </a:lnTo>
+                  <a:lnTo>
+                    <a:pt x="5585389" y="2730398"/>
+                  </a:lnTo>
+                  <a:lnTo>
+                    <a:pt x="5663023" y="2741343"/>
+                  </a:lnTo>
+                  <a:lnTo>
+                    <a:pt x="5740657" y="2751973"/>
+                  </a:lnTo>
+                  <a:lnTo>
+                    <a:pt x="5818291" y="2762296"/>
+                  </a:lnTo>
+                  <a:lnTo>
+                    <a:pt x="5895925" y="2772323"/>
+                  </a:lnTo>
+                  <a:lnTo>
+                    <a:pt x="5973559" y="2782061"/>
+                  </a:lnTo>
+                  <a:lnTo>
+                    <a:pt x="6051193" y="2791518"/>
+                  </a:lnTo>
+                  <a:lnTo>
+                    <a:pt x="6128827" y="2800703"/>
+                  </a:lnTo>
+                  <a:lnTo>
+                    <a:pt x="6206462" y="2809624"/>
+                  </a:lnTo>
+                  <a:lnTo>
+                    <a:pt x="6284096" y="2818287"/>
+                  </a:lnTo>
+                  <a:lnTo>
+                    <a:pt x="6361730" y="2826701"/>
+                  </a:lnTo>
+                  <a:lnTo>
+                    <a:pt x="6439364" y="2834873"/>
+                  </a:lnTo>
+                  <a:lnTo>
+                    <a:pt x="6516998" y="2842810"/>
+                  </a:lnTo>
+                  <a:lnTo>
+                    <a:pt x="6594632" y="2850518"/>
+                  </a:lnTo>
+                  <a:lnTo>
+                    <a:pt x="6672266" y="2858004"/>
+                  </a:lnTo>
+                  <a:lnTo>
+                    <a:pt x="6749900" y="2865275"/>
+                  </a:lnTo>
+                  <a:lnTo>
+                    <a:pt x="6827534" y="2872336"/>
+                  </a:lnTo>
+                  <a:lnTo>
+                    <a:pt x="6905168" y="2879194"/>
+                  </a:lnTo>
+                  <a:lnTo>
+                    <a:pt x="6982802" y="2885854"/>
+                  </a:lnTo>
+                  <a:lnTo>
+                    <a:pt x="7060436" y="2892323"/>
+                  </a:lnTo>
+                  <a:lnTo>
+                    <a:pt x="7138070" y="2898605"/>
+                  </a:lnTo>
+                  <a:lnTo>
+                    <a:pt x="7215704" y="2904707"/>
+                  </a:lnTo>
+                  <a:lnTo>
+                    <a:pt x="7293338" y="2910632"/>
+                  </a:lnTo>
+                  <a:lnTo>
+                    <a:pt x="7370972" y="2916388"/>
                   </a:lnTo>
                 </a:path>
               </a:pathLst>

--- a/docs/plots/carbo/jx_carbo_linsubhr_ratio_hosp10.pptx
+++ b/docs/plots/carbo/jx_carbo_linsubhr_ratio_hosp10.pptx
@@ -3003,518 +3003,521 @@
           <p:spPr>
             <a:xfrm>
               <a:off x="817517" y="1896563"/>
-              <a:ext cx="7370972" cy="3631631"/>
+              <a:ext cx="7370972" cy="3624023"/>
             </a:xfrm>
             <a:custGeom>
               <a:avLst/>
               <a:pathLst>
-                <a:path w="7370972" h="3631631">
+                <a:path w="7370972" h="3624023">
                   <a:moveTo>
-                    <a:pt x="1850433" y="0"/>
+                    <a:pt x="1711360" y="0"/>
                   </a:moveTo>
                   <a:lnTo>
-                    <a:pt x="1858955" y="29915"/>
-                  </a:lnTo>
-                  <a:lnTo>
-                    <a:pt x="1936589" y="283380"/>
-                  </a:lnTo>
-                  <a:lnTo>
-                    <a:pt x="2014223" y="519112"/>
-                  </a:lnTo>
-                  <a:lnTo>
-                    <a:pt x="2091857" y="738350"/>
-                  </a:lnTo>
-                  <a:lnTo>
-                    <a:pt x="2169491" y="942250"/>
-                  </a:lnTo>
-                  <a:lnTo>
-                    <a:pt x="2247125" y="1131883"/>
-                  </a:lnTo>
-                  <a:lnTo>
-                    <a:pt x="2324759" y="1308249"/>
-                  </a:lnTo>
-                  <a:lnTo>
-                    <a:pt x="2402393" y="1472275"/>
-                  </a:lnTo>
-                  <a:lnTo>
-                    <a:pt x="2480027" y="1624825"/>
-                  </a:lnTo>
-                  <a:lnTo>
-                    <a:pt x="2557661" y="1766702"/>
-                  </a:lnTo>
-                  <a:lnTo>
-                    <a:pt x="2635295" y="1898653"/>
-                  </a:lnTo>
-                  <a:lnTo>
-                    <a:pt x="2712930" y="2021371"/>
-                  </a:lnTo>
-                  <a:lnTo>
-                    <a:pt x="2790564" y="2135504"/>
-                  </a:lnTo>
-                  <a:lnTo>
-                    <a:pt x="2868198" y="2241651"/>
-                  </a:lnTo>
-                  <a:lnTo>
-                    <a:pt x="2945832" y="2340371"/>
-                  </a:lnTo>
-                  <a:lnTo>
-                    <a:pt x="3023466" y="2432185"/>
-                  </a:lnTo>
-                  <a:lnTo>
-                    <a:pt x="3101100" y="2517575"/>
-                  </a:lnTo>
-                  <a:lnTo>
-                    <a:pt x="3178734" y="2596990"/>
-                  </a:lnTo>
-                  <a:lnTo>
-                    <a:pt x="3256368" y="2670849"/>
-                  </a:lnTo>
-                  <a:lnTo>
-                    <a:pt x="3334002" y="2739541"/>
-                  </a:lnTo>
-                  <a:lnTo>
-                    <a:pt x="3411636" y="2778933"/>
-                  </a:lnTo>
-                  <a:lnTo>
-                    <a:pt x="3489270" y="2766528"/>
-                  </a:lnTo>
-                  <a:lnTo>
-                    <a:pt x="3566904" y="2753948"/>
-                  </a:lnTo>
-                  <a:lnTo>
-                    <a:pt x="3644538" y="2741189"/>
-                  </a:lnTo>
-                  <a:lnTo>
-                    <a:pt x="3722172" y="2728248"/>
-                  </a:lnTo>
-                  <a:lnTo>
-                    <a:pt x="3799806" y="2715124"/>
-                  </a:lnTo>
-                  <a:lnTo>
-                    <a:pt x="3877440" y="2701814"/>
-                  </a:lnTo>
-                  <a:lnTo>
-                    <a:pt x="3955074" y="2688315"/>
-                  </a:lnTo>
-                  <a:lnTo>
-                    <a:pt x="4032708" y="2674624"/>
-                  </a:lnTo>
-                  <a:lnTo>
-                    <a:pt x="4110342" y="2660738"/>
-                  </a:lnTo>
-                  <a:lnTo>
-                    <a:pt x="4187976" y="2646656"/>
-                  </a:lnTo>
-                  <a:lnTo>
-                    <a:pt x="4265610" y="2632373"/>
-                  </a:lnTo>
-                  <a:lnTo>
-                    <a:pt x="4343244" y="2617888"/>
-                  </a:lnTo>
-                  <a:lnTo>
-                    <a:pt x="4420879" y="2603197"/>
-                  </a:lnTo>
-                  <a:lnTo>
-                    <a:pt x="4498513" y="2588298"/>
-                  </a:lnTo>
-                  <a:lnTo>
-                    <a:pt x="4576147" y="2573187"/>
-                  </a:lnTo>
-                  <a:lnTo>
-                    <a:pt x="4653781" y="2557861"/>
-                  </a:lnTo>
-                  <a:lnTo>
-                    <a:pt x="4731415" y="2542318"/>
-                  </a:lnTo>
-                  <a:lnTo>
-                    <a:pt x="4809049" y="2526555"/>
-                  </a:lnTo>
-                  <a:lnTo>
-                    <a:pt x="4886683" y="2510567"/>
-                  </a:lnTo>
-                  <a:lnTo>
-                    <a:pt x="4964317" y="2494353"/>
-                  </a:lnTo>
-                  <a:lnTo>
-                    <a:pt x="5041951" y="2477908"/>
-                  </a:lnTo>
-                  <a:lnTo>
-                    <a:pt x="5119585" y="2461230"/>
-                  </a:lnTo>
-                  <a:lnTo>
-                    <a:pt x="5197219" y="2444315"/>
-                  </a:lnTo>
-                  <a:lnTo>
-                    <a:pt x="5274853" y="2427159"/>
-                  </a:lnTo>
-                  <a:lnTo>
-                    <a:pt x="5352487" y="2409761"/>
-                  </a:lnTo>
-                  <a:lnTo>
-                    <a:pt x="5430121" y="2392115"/>
-                  </a:lnTo>
-                  <a:lnTo>
-                    <a:pt x="5507755" y="2374219"/>
-                  </a:lnTo>
-                  <a:lnTo>
-                    <a:pt x="5585389" y="2356068"/>
-                  </a:lnTo>
-                  <a:lnTo>
-                    <a:pt x="5663023" y="2337660"/>
-                  </a:lnTo>
-                  <a:lnTo>
-                    <a:pt x="5740657" y="2318991"/>
-                  </a:lnTo>
-                  <a:lnTo>
-                    <a:pt x="5818291" y="2300057"/>
-                  </a:lnTo>
-                  <a:lnTo>
-                    <a:pt x="5895925" y="2280853"/>
-                  </a:lnTo>
-                  <a:lnTo>
-                    <a:pt x="5973559" y="2261377"/>
-                  </a:lnTo>
-                  <a:lnTo>
-                    <a:pt x="6051193" y="2241625"/>
-                  </a:lnTo>
-                  <a:lnTo>
-                    <a:pt x="6128827" y="2221592"/>
-                  </a:lnTo>
-                  <a:lnTo>
-                    <a:pt x="6206462" y="2201275"/>
-                  </a:lnTo>
-                  <a:lnTo>
-                    <a:pt x="6284096" y="2180669"/>
-                  </a:lnTo>
-                  <a:lnTo>
-                    <a:pt x="6361730" y="2159771"/>
-                  </a:lnTo>
-                  <a:lnTo>
-                    <a:pt x="6439364" y="2138576"/>
-                  </a:lnTo>
-                  <a:lnTo>
-                    <a:pt x="6516998" y="2117080"/>
-                  </a:lnTo>
-                  <a:lnTo>
-                    <a:pt x="6594632" y="2095279"/>
-                  </a:lnTo>
-                  <a:lnTo>
-                    <a:pt x="6672266" y="2073169"/>
-                  </a:lnTo>
-                  <a:lnTo>
-                    <a:pt x="6749900" y="2050744"/>
-                  </a:lnTo>
-                  <a:lnTo>
-                    <a:pt x="6827534" y="2028001"/>
-                  </a:lnTo>
-                  <a:lnTo>
-                    <a:pt x="6905168" y="2004936"/>
-                  </a:lnTo>
-                  <a:lnTo>
-                    <a:pt x="6982802" y="1981543"/>
-                  </a:lnTo>
-                  <a:lnTo>
-                    <a:pt x="7060436" y="1957817"/>
-                  </a:lnTo>
-                  <a:lnTo>
-                    <a:pt x="7138070" y="1933755"/>
-                  </a:lnTo>
-                  <a:lnTo>
-                    <a:pt x="7215704" y="1909351"/>
-                  </a:lnTo>
-                  <a:lnTo>
-                    <a:pt x="7293338" y="1884601"/>
-                  </a:lnTo>
-                  <a:lnTo>
-                    <a:pt x="7370972" y="1859499"/>
-                  </a:lnTo>
-                  <a:lnTo>
-                    <a:pt x="7370972" y="3631631"/>
-                  </a:lnTo>
-                  <a:lnTo>
-                    <a:pt x="7293338" y="3630050"/>
-                  </a:lnTo>
-                  <a:lnTo>
-                    <a:pt x="7215704" y="3628351"/>
-                  </a:lnTo>
-                  <a:lnTo>
-                    <a:pt x="7138070" y="3626523"/>
-                  </a:lnTo>
-                  <a:lnTo>
-                    <a:pt x="7060436" y="3624558"/>
-                  </a:lnTo>
-                  <a:lnTo>
-                    <a:pt x="6982802" y="3622445"/>
-                  </a:lnTo>
-                  <a:lnTo>
-                    <a:pt x="6905168" y="3620173"/>
-                  </a:lnTo>
-                  <a:lnTo>
-                    <a:pt x="6827534" y="3617731"/>
-                  </a:lnTo>
-                  <a:lnTo>
-                    <a:pt x="6749900" y="3615104"/>
-                  </a:lnTo>
-                  <a:lnTo>
-                    <a:pt x="6672266" y="3612280"/>
-                  </a:lnTo>
-                  <a:lnTo>
-                    <a:pt x="6594632" y="3609244"/>
-                  </a:lnTo>
-                  <a:lnTo>
-                    <a:pt x="6516998" y="3605979"/>
-                  </a:lnTo>
-                  <a:lnTo>
-                    <a:pt x="6439364" y="3602468"/>
-                  </a:lnTo>
-                  <a:lnTo>
-                    <a:pt x="6361730" y="3598694"/>
-                  </a:lnTo>
-                  <a:lnTo>
-                    <a:pt x="6284096" y="3594635"/>
-                  </a:lnTo>
-                  <a:lnTo>
-                    <a:pt x="6206462" y="3590271"/>
-                  </a:lnTo>
-                  <a:lnTo>
-                    <a:pt x="6128827" y="3585579"/>
-                  </a:lnTo>
-                  <a:lnTo>
-                    <a:pt x="6051193" y="3580534"/>
-                  </a:lnTo>
-                  <a:lnTo>
-                    <a:pt x="5973559" y="3575110"/>
-                  </a:lnTo>
-                  <a:lnTo>
-                    <a:pt x="5895925" y="3569277"/>
-                  </a:lnTo>
-                  <a:lnTo>
-                    <a:pt x="5818291" y="3563005"/>
-                  </a:lnTo>
-                  <a:lnTo>
-                    <a:pt x="5740657" y="3556262"/>
-                  </a:lnTo>
-                  <a:lnTo>
-                    <a:pt x="5663023" y="3549011"/>
-                  </a:lnTo>
-                  <a:lnTo>
-                    <a:pt x="5585389" y="3541215"/>
-                  </a:lnTo>
-                  <a:lnTo>
-                    <a:pt x="5507755" y="3532833"/>
-                  </a:lnTo>
-                  <a:lnTo>
-                    <a:pt x="5430121" y="3523819"/>
-                  </a:lnTo>
-                  <a:lnTo>
-                    <a:pt x="5352487" y="3514128"/>
-                  </a:lnTo>
-                  <a:lnTo>
-                    <a:pt x="5274853" y="3503708"/>
-                  </a:lnTo>
-                  <a:lnTo>
-                    <a:pt x="5197219" y="3492503"/>
-                  </a:lnTo>
-                  <a:lnTo>
-                    <a:pt x="5119585" y="3480456"/>
-                  </a:lnTo>
-                  <a:lnTo>
-                    <a:pt x="5041951" y="3467503"/>
-                  </a:lnTo>
-                  <a:lnTo>
-                    <a:pt x="4964317" y="3453575"/>
-                  </a:lnTo>
-                  <a:lnTo>
-                    <a:pt x="4886683" y="3438599"/>
-                  </a:lnTo>
-                  <a:lnTo>
-                    <a:pt x="4809049" y="3422497"/>
-                  </a:lnTo>
-                  <a:lnTo>
-                    <a:pt x="4731415" y="3405184"/>
-                  </a:lnTo>
-                  <a:lnTo>
-                    <a:pt x="4653781" y="3386568"/>
-                  </a:lnTo>
-                  <a:lnTo>
-                    <a:pt x="4576147" y="3366551"/>
-                  </a:lnTo>
-                  <a:lnTo>
-                    <a:pt x="4498513" y="3345029"/>
-                  </a:lnTo>
-                  <a:lnTo>
-                    <a:pt x="4420879" y="3321887"/>
-                  </a:lnTo>
-                  <a:lnTo>
-                    <a:pt x="4343244" y="3297005"/>
-                  </a:lnTo>
-                  <a:lnTo>
-                    <a:pt x="4265610" y="3270251"/>
-                  </a:lnTo>
-                  <a:lnTo>
-                    <a:pt x="4187976" y="3241484"/>
-                  </a:lnTo>
-                  <a:lnTo>
-                    <a:pt x="4110342" y="3210553"/>
-                  </a:lnTo>
-                  <a:lnTo>
-                    <a:pt x="4032708" y="3177295"/>
-                  </a:lnTo>
-                  <a:lnTo>
-                    <a:pt x="3955074" y="3141535"/>
-                  </a:lnTo>
-                  <a:lnTo>
-                    <a:pt x="3877440" y="3103085"/>
-                  </a:lnTo>
-                  <a:lnTo>
-                    <a:pt x="3799806" y="3061743"/>
-                  </a:lnTo>
-                  <a:lnTo>
-                    <a:pt x="3722172" y="3017290"/>
-                  </a:lnTo>
-                  <a:lnTo>
-                    <a:pt x="3644538" y="2969493"/>
-                  </a:lnTo>
-                  <a:lnTo>
-                    <a:pt x="3566904" y="2918101"/>
-                  </a:lnTo>
-                  <a:lnTo>
-                    <a:pt x="3489270" y="2862842"/>
-                  </a:lnTo>
-                  <a:lnTo>
-                    <a:pt x="3411636" y="2803426"/>
-                  </a:lnTo>
-                  <a:lnTo>
-                    <a:pt x="3334002" y="2791164"/>
-                  </a:lnTo>
-                  <a:lnTo>
-                    <a:pt x="3256368" y="2803223"/>
-                  </a:lnTo>
-                  <a:lnTo>
-                    <a:pt x="3178734" y="2815114"/>
-                  </a:lnTo>
-                  <a:lnTo>
-                    <a:pt x="3101100" y="2826838"/>
-                  </a:lnTo>
-                  <a:lnTo>
-                    <a:pt x="3023466" y="2838398"/>
-                  </a:lnTo>
-                  <a:lnTo>
-                    <a:pt x="2945832" y="2849797"/>
-                  </a:lnTo>
-                  <a:lnTo>
-                    <a:pt x="2868198" y="2861036"/>
-                  </a:lnTo>
-                  <a:lnTo>
-                    <a:pt x="2790564" y="2872117"/>
-                  </a:lnTo>
-                  <a:lnTo>
-                    <a:pt x="2712930" y="2883043"/>
-                  </a:lnTo>
-                  <a:lnTo>
-                    <a:pt x="2635295" y="2893817"/>
-                  </a:lnTo>
-                  <a:lnTo>
-                    <a:pt x="2557661" y="2904439"/>
-                  </a:lnTo>
-                  <a:lnTo>
-                    <a:pt x="2480027" y="2914913"/>
-                  </a:lnTo>
-                  <a:lnTo>
-                    <a:pt x="2402393" y="2925240"/>
-                  </a:lnTo>
-                  <a:lnTo>
-                    <a:pt x="2324759" y="2935423"/>
-                  </a:lnTo>
-                  <a:lnTo>
-                    <a:pt x="2247125" y="2945463"/>
-                  </a:lnTo>
-                  <a:lnTo>
-                    <a:pt x="2169491" y="2955363"/>
-                  </a:lnTo>
-                  <a:lnTo>
-                    <a:pt x="2091857" y="2965124"/>
-                  </a:lnTo>
-                  <a:lnTo>
-                    <a:pt x="2014223" y="2974748"/>
-                  </a:lnTo>
-                  <a:lnTo>
-                    <a:pt x="1936589" y="2984238"/>
-                  </a:lnTo>
-                  <a:lnTo>
-                    <a:pt x="1858955" y="2993595"/>
-                  </a:lnTo>
-                  <a:lnTo>
-                    <a:pt x="1781321" y="3002820"/>
-                  </a:lnTo>
-                  <a:lnTo>
-                    <a:pt x="1703687" y="3011917"/>
-                  </a:lnTo>
-                  <a:lnTo>
-                    <a:pt x="1626053" y="3020886"/>
-                  </a:lnTo>
-                  <a:lnTo>
-                    <a:pt x="1548419" y="3029730"/>
-                  </a:lnTo>
-                  <a:lnTo>
-                    <a:pt x="1470785" y="3038450"/>
-                  </a:lnTo>
-                  <a:lnTo>
-                    <a:pt x="1393151" y="3047048"/>
-                  </a:lnTo>
-                  <a:lnTo>
-                    <a:pt x="1315517" y="3055526"/>
-                  </a:lnTo>
-                  <a:lnTo>
-                    <a:pt x="1237883" y="3063884"/>
-                  </a:lnTo>
-                  <a:lnTo>
-                    <a:pt x="1160249" y="3072126"/>
-                  </a:lnTo>
-                  <a:lnTo>
-                    <a:pt x="1082615" y="3080253"/>
-                  </a:lnTo>
-                  <a:lnTo>
-                    <a:pt x="1004981" y="3088265"/>
-                  </a:lnTo>
-                  <a:lnTo>
-                    <a:pt x="927346" y="3096166"/>
-                  </a:lnTo>
-                  <a:lnTo>
-                    <a:pt x="849712" y="3103956"/>
-                  </a:lnTo>
-                  <a:lnTo>
-                    <a:pt x="772078" y="3111637"/>
-                  </a:lnTo>
-                  <a:lnTo>
-                    <a:pt x="694444" y="3119210"/>
-                  </a:lnTo>
-                  <a:lnTo>
-                    <a:pt x="616810" y="3126678"/>
-                  </a:lnTo>
-                  <a:lnTo>
-                    <a:pt x="539176" y="3134040"/>
-                  </a:lnTo>
-                  <a:lnTo>
-                    <a:pt x="461542" y="3141300"/>
-                  </a:lnTo>
-                  <a:lnTo>
-                    <a:pt x="383908" y="3148458"/>
-                  </a:lnTo>
-                  <a:lnTo>
-                    <a:pt x="306274" y="3155516"/>
-                  </a:lnTo>
-                  <a:lnTo>
-                    <a:pt x="228640" y="3162475"/>
-                  </a:lnTo>
-                  <a:lnTo>
-                    <a:pt x="151006" y="3169337"/>
-                  </a:lnTo>
-                  <a:lnTo>
-                    <a:pt x="73372" y="3176103"/>
-                  </a:lnTo>
-                  <a:lnTo>
-                    <a:pt x="0" y="3182407"/>
+                    <a:pt x="1781321" y="213170"/>
+                  </a:lnTo>
+                  <a:lnTo>
+                    <a:pt x="1858955" y="434499"/>
+                  </a:lnTo>
+                  <a:lnTo>
+                    <a:pt x="1936589" y="641585"/>
+                  </a:lnTo>
+                  <a:lnTo>
+                    <a:pt x="2014223" y="835346"/>
+                  </a:lnTo>
+                  <a:lnTo>
+                    <a:pt x="2091857" y="1016638"/>
+                  </a:lnTo>
+                  <a:lnTo>
+                    <a:pt x="2169491" y="1186264"/>
+                  </a:lnTo>
+                  <a:lnTo>
+                    <a:pt x="2247125" y="1344975"/>
+                  </a:lnTo>
+                  <a:lnTo>
+                    <a:pt x="2324759" y="1493473"/>
+                  </a:lnTo>
+                  <a:lnTo>
+                    <a:pt x="2402393" y="1632415"/>
+                  </a:lnTo>
+                  <a:lnTo>
+                    <a:pt x="2480027" y="1762416"/>
+                  </a:lnTo>
+                  <a:lnTo>
+                    <a:pt x="2557661" y="1884051"/>
+                  </a:lnTo>
+                  <a:lnTo>
+                    <a:pt x="2635295" y="1997860"/>
+                  </a:lnTo>
+                  <a:lnTo>
+                    <a:pt x="2712930" y="2104344"/>
+                  </a:lnTo>
+                  <a:lnTo>
+                    <a:pt x="2790564" y="2203977"/>
+                  </a:lnTo>
+                  <a:lnTo>
+                    <a:pt x="2868198" y="2297198"/>
+                  </a:lnTo>
+                  <a:lnTo>
+                    <a:pt x="2945832" y="2384421"/>
+                  </a:lnTo>
+                  <a:lnTo>
+                    <a:pt x="3023466" y="2466030"/>
+                  </a:lnTo>
+                  <a:lnTo>
+                    <a:pt x="3101100" y="2542389"/>
+                  </a:lnTo>
+                  <a:lnTo>
+                    <a:pt x="3178734" y="2613833"/>
+                  </a:lnTo>
+                  <a:lnTo>
+                    <a:pt x="3256368" y="2680680"/>
+                  </a:lnTo>
+                  <a:lnTo>
+                    <a:pt x="3334002" y="2743226"/>
+                  </a:lnTo>
+                  <a:lnTo>
+                    <a:pt x="3411636" y="2777283"/>
+                  </a:lnTo>
+                  <a:lnTo>
+                    <a:pt x="3489270" y="2759737"/>
+                  </a:lnTo>
+                  <a:lnTo>
+                    <a:pt x="3566904" y="2741840"/>
+                  </a:lnTo>
+                  <a:lnTo>
+                    <a:pt x="3644538" y="2723584"/>
+                  </a:lnTo>
+                  <a:lnTo>
+                    <a:pt x="3722172" y="2704961"/>
+                  </a:lnTo>
+                  <a:lnTo>
+                    <a:pt x="3799806" y="2685966"/>
+                  </a:lnTo>
+                  <a:lnTo>
+                    <a:pt x="3877440" y="2666590"/>
+                  </a:lnTo>
+                  <a:lnTo>
+                    <a:pt x="3955074" y="2646826"/>
+                  </a:lnTo>
+                  <a:lnTo>
+                    <a:pt x="4032708" y="2626665"/>
+                  </a:lnTo>
+                  <a:lnTo>
+                    <a:pt x="4110342" y="2606100"/>
+                  </a:lnTo>
+                  <a:lnTo>
+                    <a:pt x="4187976" y="2585123"/>
+                  </a:lnTo>
+                  <a:lnTo>
+                    <a:pt x="4265610" y="2563726"/>
+                  </a:lnTo>
+                  <a:lnTo>
+                    <a:pt x="4343244" y="2541900"/>
+                  </a:lnTo>
+                  <a:lnTo>
+                    <a:pt x="4420879" y="2519636"/>
+                  </a:lnTo>
+                  <a:lnTo>
+                    <a:pt x="4498513" y="2496926"/>
+                  </a:lnTo>
+                  <a:lnTo>
+                    <a:pt x="4576147" y="2473761"/>
+                  </a:lnTo>
+                  <a:lnTo>
+                    <a:pt x="4653781" y="2450131"/>
+                  </a:lnTo>
+                  <a:lnTo>
+                    <a:pt x="4731415" y="2426028"/>
+                  </a:lnTo>
+                  <a:lnTo>
+                    <a:pt x="4809049" y="2401442"/>
+                  </a:lnTo>
+                  <a:lnTo>
+                    <a:pt x="4886683" y="2376363"/>
+                  </a:lnTo>
+                  <a:lnTo>
+                    <a:pt x="4964317" y="2350781"/>
+                  </a:lnTo>
+                  <a:lnTo>
+                    <a:pt x="5041951" y="2324686"/>
+                  </a:lnTo>
+                  <a:lnTo>
+                    <a:pt x="5119585" y="2298069"/>
+                  </a:lnTo>
+                  <a:lnTo>
+                    <a:pt x="5197219" y="2270918"/>
+                  </a:lnTo>
+                  <a:lnTo>
+                    <a:pt x="5274853" y="2243222"/>
+                  </a:lnTo>
+                  <a:lnTo>
+                    <a:pt x="5352487" y="2214972"/>
+                  </a:lnTo>
+                  <a:lnTo>
+                    <a:pt x="5430121" y="2186155"/>
+                  </a:lnTo>
+                  <a:lnTo>
+                    <a:pt x="5507755" y="2156761"/>
+                  </a:lnTo>
+                  <a:lnTo>
+                    <a:pt x="5585389" y="2126777"/>
+                  </a:lnTo>
+                  <a:lnTo>
+                    <a:pt x="5663023" y="2096193"/>
+                  </a:lnTo>
+                  <a:lnTo>
+                    <a:pt x="5740657" y="2064995"/>
+                  </a:lnTo>
+                  <a:lnTo>
+                    <a:pt x="5818291" y="2033172"/>
+                  </a:lnTo>
+                  <a:lnTo>
+                    <a:pt x="5895925" y="2000712"/>
+                  </a:lnTo>
+                  <a:lnTo>
+                    <a:pt x="5973559" y="1967600"/>
+                  </a:lnTo>
+                  <a:lnTo>
+                    <a:pt x="6051193" y="1933825"/>
+                  </a:lnTo>
+                  <a:lnTo>
+                    <a:pt x="6128827" y="1899373"/>
+                  </a:lnTo>
+                  <a:lnTo>
+                    <a:pt x="6206462" y="1864231"/>
+                  </a:lnTo>
+                  <a:lnTo>
+                    <a:pt x="6284096" y="1828384"/>
+                  </a:lnTo>
+                  <a:lnTo>
+                    <a:pt x="6361730" y="1791818"/>
+                  </a:lnTo>
+                  <a:lnTo>
+                    <a:pt x="6439364" y="1754520"/>
+                  </a:lnTo>
+                  <a:lnTo>
+                    <a:pt x="6516998" y="1716474"/>
+                  </a:lnTo>
+                  <a:lnTo>
+                    <a:pt x="6594632" y="1677665"/>
+                  </a:lnTo>
+                  <a:lnTo>
+                    <a:pt x="6672266" y="1638079"/>
+                  </a:lnTo>
+                  <a:lnTo>
+                    <a:pt x="6749900" y="1597699"/>
+                  </a:lnTo>
+                  <a:lnTo>
+                    <a:pt x="6827534" y="1556510"/>
+                  </a:lnTo>
+                  <a:lnTo>
+                    <a:pt x="6905168" y="1514495"/>
+                  </a:lnTo>
+                  <a:lnTo>
+                    <a:pt x="6982802" y="1471638"/>
+                  </a:lnTo>
+                  <a:lnTo>
+                    <a:pt x="7060436" y="1427922"/>
+                  </a:lnTo>
+                  <a:lnTo>
+                    <a:pt x="7138070" y="1383329"/>
+                  </a:lnTo>
+                  <a:lnTo>
+                    <a:pt x="7215704" y="1337843"/>
+                  </a:lnTo>
+                  <a:lnTo>
+                    <a:pt x="7293338" y="1291445"/>
+                  </a:lnTo>
+                  <a:lnTo>
+                    <a:pt x="7370972" y="1244117"/>
+                  </a:lnTo>
+                  <a:lnTo>
+                    <a:pt x="7370972" y="3624023"/>
+                  </a:lnTo>
+                  <a:lnTo>
+                    <a:pt x="7293338" y="3622055"/>
+                  </a:lnTo>
+                  <a:lnTo>
+                    <a:pt x="7215704" y="3619951"/>
+                  </a:lnTo>
+                  <a:lnTo>
+                    <a:pt x="7138070" y="3617703"/>
+                  </a:lnTo>
+                  <a:lnTo>
+                    <a:pt x="7060436" y="3615300"/>
+                  </a:lnTo>
+                  <a:lnTo>
+                    <a:pt x="6982802" y="3612732"/>
+                  </a:lnTo>
+                  <a:lnTo>
+                    <a:pt x="6905168" y="3609987"/>
+                  </a:lnTo>
+                  <a:lnTo>
+                    <a:pt x="6827534" y="3607053"/>
+                  </a:lnTo>
+                  <a:lnTo>
+                    <a:pt x="6749900" y="3603917"/>
+                  </a:lnTo>
+                  <a:lnTo>
+                    <a:pt x="6672266" y="3600566"/>
+                  </a:lnTo>
+                  <a:lnTo>
+                    <a:pt x="6594632" y="3596985"/>
+                  </a:lnTo>
+                  <a:lnTo>
+                    <a:pt x="6516998" y="3593157"/>
+                  </a:lnTo>
+                  <a:lnTo>
+                    <a:pt x="6439364" y="3589065"/>
+                  </a:lnTo>
+                  <a:lnTo>
+                    <a:pt x="6361730" y="3584693"/>
+                  </a:lnTo>
+                  <a:lnTo>
+                    <a:pt x="6284096" y="3580020"/>
+                  </a:lnTo>
+                  <a:lnTo>
+                    <a:pt x="6206462" y="3575025"/>
+                  </a:lnTo>
+                  <a:lnTo>
+                    <a:pt x="6128827" y="3569687"/>
+                  </a:lnTo>
+                  <a:lnTo>
+                    <a:pt x="6051193" y="3563981"/>
+                  </a:lnTo>
+                  <a:lnTo>
+                    <a:pt x="5973559" y="3557883"/>
+                  </a:lnTo>
+                  <a:lnTo>
+                    <a:pt x="5895925" y="3551366"/>
+                  </a:lnTo>
+                  <a:lnTo>
+                    <a:pt x="5818291" y="3544401"/>
+                  </a:lnTo>
+                  <a:lnTo>
+                    <a:pt x="5740657" y="3536956"/>
+                  </a:lnTo>
+                  <a:lnTo>
+                    <a:pt x="5663023" y="3529000"/>
+                  </a:lnTo>
+                  <a:lnTo>
+                    <a:pt x="5585389" y="3520496"/>
+                  </a:lnTo>
+                  <a:lnTo>
+                    <a:pt x="5507755" y="3511408"/>
+                  </a:lnTo>
+                  <a:lnTo>
+                    <a:pt x="5430121" y="3501694"/>
+                  </a:lnTo>
+                  <a:lnTo>
+                    <a:pt x="5352487" y="3491313"/>
+                  </a:lnTo>
+                  <a:lnTo>
+                    <a:pt x="5274853" y="3480217"/>
+                  </a:lnTo>
+                  <a:lnTo>
+                    <a:pt x="5197219" y="3468359"/>
+                  </a:lnTo>
+                  <a:lnTo>
+                    <a:pt x="5119585" y="3455684"/>
+                  </a:lnTo>
+                  <a:lnTo>
+                    <a:pt x="5041951" y="3442139"/>
+                  </a:lnTo>
+                  <a:lnTo>
+                    <a:pt x="4964317" y="3427661"/>
+                  </a:lnTo>
+                  <a:lnTo>
+                    <a:pt x="4886683" y="3412188"/>
+                  </a:lnTo>
+                  <a:lnTo>
+                    <a:pt x="4809049" y="3395650"/>
+                  </a:lnTo>
+                  <a:lnTo>
+                    <a:pt x="4731415" y="3377976"/>
+                  </a:lnTo>
+                  <a:lnTo>
+                    <a:pt x="4653781" y="3359085"/>
+                  </a:lnTo>
+                  <a:lnTo>
+                    <a:pt x="4576147" y="3338896"/>
+                  </a:lnTo>
+                  <a:lnTo>
+                    <a:pt x="4498513" y="3317318"/>
+                  </a:lnTo>
+                  <a:lnTo>
+                    <a:pt x="4420879" y="3294255"/>
+                  </a:lnTo>
+                  <a:lnTo>
+                    <a:pt x="4343244" y="3269607"/>
+                  </a:lnTo>
+                  <a:lnTo>
+                    <a:pt x="4265610" y="3243264"/>
+                  </a:lnTo>
+                  <a:lnTo>
+                    <a:pt x="4187976" y="3215109"/>
+                  </a:lnTo>
+                  <a:lnTo>
+                    <a:pt x="4110342" y="3185017"/>
+                  </a:lnTo>
+                  <a:lnTo>
+                    <a:pt x="4032708" y="3152856"/>
+                  </a:lnTo>
+                  <a:lnTo>
+                    <a:pt x="3955074" y="3118483"/>
+                  </a:lnTo>
+                  <a:lnTo>
+                    <a:pt x="3877440" y="3081746"/>
+                  </a:lnTo>
+                  <a:lnTo>
+                    <a:pt x="3799806" y="3042482"/>
+                  </a:lnTo>
+                  <a:lnTo>
+                    <a:pt x="3722172" y="3000518"/>
+                  </a:lnTo>
+                  <a:lnTo>
+                    <a:pt x="3644538" y="2955668"/>
+                  </a:lnTo>
+                  <a:lnTo>
+                    <a:pt x="3566904" y="2907733"/>
+                  </a:lnTo>
+                  <a:lnTo>
+                    <a:pt x="3489270" y="2856501"/>
+                  </a:lnTo>
+                  <a:lnTo>
+                    <a:pt x="3411636" y="2801746"/>
+                  </a:lnTo>
+                  <a:lnTo>
+                    <a:pt x="3334002" y="2794484"/>
+                  </a:lnTo>
+                  <a:lnTo>
+                    <a:pt x="3256368" y="2811347"/>
+                  </a:lnTo>
+                  <a:lnTo>
+                    <a:pt x="3178734" y="2827878"/>
+                  </a:lnTo>
+                  <a:lnTo>
+                    <a:pt x="3101100" y="2844085"/>
+                  </a:lnTo>
+                  <a:lnTo>
+                    <a:pt x="3023466" y="2859973"/>
+                  </a:lnTo>
+                  <a:lnTo>
+                    <a:pt x="2945832" y="2875549"/>
+                  </a:lnTo>
+                  <a:lnTo>
+                    <a:pt x="2868198" y="2890819"/>
+                  </a:lnTo>
+                  <a:lnTo>
+                    <a:pt x="2790564" y="2905789"/>
+                  </a:lnTo>
+                  <a:lnTo>
+                    <a:pt x="2712930" y="2920465"/>
+                  </a:lnTo>
+                  <a:lnTo>
+                    <a:pt x="2635295" y="2934853"/>
+                  </a:lnTo>
+                  <a:lnTo>
+                    <a:pt x="2557661" y="2948957"/>
+                  </a:lnTo>
+                  <a:lnTo>
+                    <a:pt x="2480027" y="2962785"/>
+                  </a:lnTo>
+                  <a:lnTo>
+                    <a:pt x="2402393" y="2976341"/>
+                  </a:lnTo>
+                  <a:lnTo>
+                    <a:pt x="2324759" y="2989630"/>
+                  </a:lnTo>
+                  <a:lnTo>
+                    <a:pt x="2247125" y="3002658"/>
+                  </a:lnTo>
+                  <a:lnTo>
+                    <a:pt x="2169491" y="3015431"/>
+                  </a:lnTo>
+                  <a:lnTo>
+                    <a:pt x="2091857" y="3027952"/>
+                  </a:lnTo>
+                  <a:lnTo>
+                    <a:pt x="2014223" y="3040227"/>
+                  </a:lnTo>
+                  <a:lnTo>
+                    <a:pt x="1936589" y="3052261"/>
+                  </a:lnTo>
+                  <a:lnTo>
+                    <a:pt x="1858955" y="3064059"/>
+                  </a:lnTo>
+                  <a:lnTo>
+                    <a:pt x="1781321" y="3075625"/>
+                  </a:lnTo>
+                  <a:lnTo>
+                    <a:pt x="1703687" y="3086963"/>
+                  </a:lnTo>
+                  <a:lnTo>
+                    <a:pt x="1626053" y="3098079"/>
+                  </a:lnTo>
+                  <a:lnTo>
+                    <a:pt x="1548419" y="3108976"/>
+                  </a:lnTo>
+                  <a:lnTo>
+                    <a:pt x="1470785" y="3119659"/>
+                  </a:lnTo>
+                  <a:lnTo>
+                    <a:pt x="1393151" y="3130132"/>
+                  </a:lnTo>
+                  <a:lnTo>
+                    <a:pt x="1315517" y="3140400"/>
+                  </a:lnTo>
+                  <a:lnTo>
+                    <a:pt x="1237883" y="3150466"/>
+                  </a:lnTo>
+                  <a:lnTo>
+                    <a:pt x="1160249" y="3160333"/>
+                  </a:lnTo>
+                  <a:lnTo>
+                    <a:pt x="1082615" y="3170007"/>
+                  </a:lnTo>
+                  <a:lnTo>
+                    <a:pt x="1004981" y="3179491"/>
+                  </a:lnTo>
+                  <a:lnTo>
+                    <a:pt x="927346" y="3188789"/>
+                  </a:lnTo>
+                  <a:lnTo>
+                    <a:pt x="849712" y="3197904"/>
+                  </a:lnTo>
+                  <a:lnTo>
+                    <a:pt x="772078" y="3206839"/>
+                  </a:lnTo>
+                  <a:lnTo>
+                    <a:pt x="694444" y="3215599"/>
+                  </a:lnTo>
+                  <a:lnTo>
+                    <a:pt x="616810" y="3224187"/>
+                  </a:lnTo>
+                  <a:lnTo>
+                    <a:pt x="539176" y="3232607"/>
+                  </a:lnTo>
+                  <a:lnTo>
+                    <a:pt x="461542" y="3240860"/>
+                  </a:lnTo>
+                  <a:lnTo>
+                    <a:pt x="383908" y="3248952"/>
+                  </a:lnTo>
+                  <a:lnTo>
+                    <a:pt x="306274" y="3256885"/>
+                  </a:lnTo>
+                  <a:lnTo>
+                    <a:pt x="228640" y="3264661"/>
+                  </a:lnTo>
+                  <a:lnTo>
+                    <a:pt x="151006" y="3272285"/>
+                  </a:lnTo>
+                  <a:lnTo>
+                    <a:pt x="73372" y="3279759"/>
+                  </a:lnTo>
+                  <a:lnTo>
+                    <a:pt x="0" y="3286684"/>
                   </a:lnTo>
                   <a:close/>
                 </a:path>
@@ -3540,231 +3543,234 @@
           </p:nvSpPr>
           <p:spPr>
             <a:xfrm>
-              <a:off x="2667951" y="1896563"/>
-              <a:ext cx="5520539" cy="2778933"/>
+              <a:off x="2528878" y="1896563"/>
+              <a:ext cx="5659611" cy="2777283"/>
             </a:xfrm>
             <a:custGeom>
               <a:avLst/>
               <a:pathLst>
-                <a:path w="5520539" h="2778933">
+                <a:path w="5659611" h="2777283">
                   <a:moveTo>
                     <a:pt x="0" y="0"/>
                   </a:moveTo>
                   <a:lnTo>
-                    <a:pt x="8521" y="29915"/>
-                  </a:lnTo>
-                  <a:lnTo>
-                    <a:pt x="86155" y="283380"/>
-                  </a:lnTo>
-                  <a:lnTo>
-                    <a:pt x="163789" y="519112"/>
-                  </a:lnTo>
-                  <a:lnTo>
-                    <a:pt x="241423" y="738350"/>
-                  </a:lnTo>
-                  <a:lnTo>
-                    <a:pt x="319057" y="942250"/>
-                  </a:lnTo>
-                  <a:lnTo>
-                    <a:pt x="396692" y="1131883"/>
-                  </a:lnTo>
-                  <a:lnTo>
-                    <a:pt x="474326" y="1308249"/>
-                  </a:lnTo>
-                  <a:lnTo>
-                    <a:pt x="551960" y="1472275"/>
-                  </a:lnTo>
-                  <a:lnTo>
-                    <a:pt x="629594" y="1624825"/>
-                  </a:lnTo>
-                  <a:lnTo>
-                    <a:pt x="707228" y="1766702"/>
-                  </a:lnTo>
-                  <a:lnTo>
-                    <a:pt x="784862" y="1898653"/>
-                  </a:lnTo>
-                  <a:lnTo>
-                    <a:pt x="862496" y="2021371"/>
-                  </a:lnTo>
-                  <a:lnTo>
-                    <a:pt x="940130" y="2135504"/>
-                  </a:lnTo>
-                  <a:lnTo>
-                    <a:pt x="1017764" y="2241651"/>
-                  </a:lnTo>
-                  <a:lnTo>
-                    <a:pt x="1095398" y="2340371"/>
-                  </a:lnTo>
-                  <a:lnTo>
-                    <a:pt x="1173032" y="2432185"/>
-                  </a:lnTo>
-                  <a:lnTo>
-                    <a:pt x="1250666" y="2517575"/>
-                  </a:lnTo>
-                  <a:lnTo>
-                    <a:pt x="1328300" y="2596990"/>
-                  </a:lnTo>
-                  <a:lnTo>
-                    <a:pt x="1405934" y="2670849"/>
-                  </a:lnTo>
-                  <a:lnTo>
-                    <a:pt x="1483568" y="2739541"/>
-                  </a:lnTo>
-                  <a:lnTo>
-                    <a:pt x="1561202" y="2778933"/>
-                  </a:lnTo>
-                  <a:lnTo>
-                    <a:pt x="1638836" y="2766528"/>
-                  </a:lnTo>
-                  <a:lnTo>
-                    <a:pt x="1716470" y="2753948"/>
-                  </a:lnTo>
-                  <a:lnTo>
-                    <a:pt x="1794104" y="2741189"/>
-                  </a:lnTo>
-                  <a:lnTo>
-                    <a:pt x="1871738" y="2728248"/>
-                  </a:lnTo>
-                  <a:lnTo>
-                    <a:pt x="1949372" y="2715124"/>
-                  </a:lnTo>
-                  <a:lnTo>
-                    <a:pt x="2027006" y="2701814"/>
-                  </a:lnTo>
-                  <a:lnTo>
-                    <a:pt x="2104641" y="2688315"/>
-                  </a:lnTo>
-                  <a:lnTo>
-                    <a:pt x="2182275" y="2674624"/>
-                  </a:lnTo>
-                  <a:lnTo>
-                    <a:pt x="2259909" y="2660738"/>
-                  </a:lnTo>
-                  <a:lnTo>
-                    <a:pt x="2337543" y="2646656"/>
-                  </a:lnTo>
-                  <a:lnTo>
-                    <a:pt x="2415177" y="2632373"/>
-                  </a:lnTo>
-                  <a:lnTo>
-                    <a:pt x="2492811" y="2617888"/>
-                  </a:lnTo>
-                  <a:lnTo>
-                    <a:pt x="2570445" y="2603197"/>
-                  </a:lnTo>
-                  <a:lnTo>
-                    <a:pt x="2648079" y="2588298"/>
-                  </a:lnTo>
-                  <a:lnTo>
-                    <a:pt x="2725713" y="2573187"/>
-                  </a:lnTo>
-                  <a:lnTo>
-                    <a:pt x="2803347" y="2557861"/>
-                  </a:lnTo>
-                  <a:lnTo>
-                    <a:pt x="2880981" y="2542318"/>
-                  </a:lnTo>
-                  <a:lnTo>
-                    <a:pt x="2958615" y="2526555"/>
-                  </a:lnTo>
-                  <a:lnTo>
-                    <a:pt x="3036249" y="2510567"/>
-                  </a:lnTo>
-                  <a:lnTo>
-                    <a:pt x="3113883" y="2494353"/>
-                  </a:lnTo>
-                  <a:lnTo>
-                    <a:pt x="3191517" y="2477908"/>
-                  </a:lnTo>
-                  <a:lnTo>
-                    <a:pt x="3269151" y="2461230"/>
-                  </a:lnTo>
-                  <a:lnTo>
-                    <a:pt x="3346785" y="2444315"/>
-                  </a:lnTo>
-                  <a:lnTo>
-                    <a:pt x="3424419" y="2427159"/>
-                  </a:lnTo>
-                  <a:lnTo>
-                    <a:pt x="3502053" y="2409761"/>
-                  </a:lnTo>
-                  <a:lnTo>
-                    <a:pt x="3579687" y="2392115"/>
-                  </a:lnTo>
-                  <a:lnTo>
-                    <a:pt x="3657321" y="2374219"/>
-                  </a:lnTo>
-                  <a:lnTo>
-                    <a:pt x="3734955" y="2356068"/>
-                  </a:lnTo>
-                  <a:lnTo>
-                    <a:pt x="3812590" y="2337660"/>
-                  </a:lnTo>
-                  <a:lnTo>
-                    <a:pt x="3890224" y="2318991"/>
-                  </a:lnTo>
-                  <a:lnTo>
-                    <a:pt x="3967858" y="2300057"/>
-                  </a:lnTo>
-                  <a:lnTo>
-                    <a:pt x="4045492" y="2280853"/>
-                  </a:lnTo>
-                  <a:lnTo>
-                    <a:pt x="4123126" y="2261377"/>
-                  </a:lnTo>
-                  <a:lnTo>
-                    <a:pt x="4200760" y="2241625"/>
-                  </a:lnTo>
-                  <a:lnTo>
-                    <a:pt x="4278394" y="2221592"/>
-                  </a:lnTo>
-                  <a:lnTo>
-                    <a:pt x="4356028" y="2201275"/>
-                  </a:lnTo>
-                  <a:lnTo>
-                    <a:pt x="4433662" y="2180669"/>
-                  </a:lnTo>
-                  <a:lnTo>
-                    <a:pt x="4511296" y="2159771"/>
-                  </a:lnTo>
-                  <a:lnTo>
-                    <a:pt x="4588930" y="2138576"/>
-                  </a:lnTo>
-                  <a:lnTo>
-                    <a:pt x="4666564" y="2117080"/>
-                  </a:lnTo>
-                  <a:lnTo>
-                    <a:pt x="4744198" y="2095279"/>
-                  </a:lnTo>
-                  <a:lnTo>
-                    <a:pt x="4821832" y="2073169"/>
-                  </a:lnTo>
-                  <a:lnTo>
-                    <a:pt x="4899466" y="2050744"/>
-                  </a:lnTo>
-                  <a:lnTo>
-                    <a:pt x="4977100" y="2028001"/>
-                  </a:lnTo>
-                  <a:lnTo>
-                    <a:pt x="5054734" y="2004936"/>
-                  </a:lnTo>
-                  <a:lnTo>
-                    <a:pt x="5132368" y="1981543"/>
-                  </a:lnTo>
-                  <a:lnTo>
-                    <a:pt x="5210002" y="1957817"/>
-                  </a:lnTo>
-                  <a:lnTo>
-                    <a:pt x="5287636" y="1933755"/>
-                  </a:lnTo>
-                  <a:lnTo>
-                    <a:pt x="5365270" y="1909351"/>
-                  </a:lnTo>
-                  <a:lnTo>
-                    <a:pt x="5442904" y="1884601"/>
-                  </a:lnTo>
-                  <a:lnTo>
-                    <a:pt x="5520539" y="1859499"/>
+                    <a:pt x="69960" y="213170"/>
+                  </a:lnTo>
+                  <a:lnTo>
+                    <a:pt x="147594" y="434499"/>
+                  </a:lnTo>
+                  <a:lnTo>
+                    <a:pt x="225228" y="641585"/>
+                  </a:lnTo>
+                  <a:lnTo>
+                    <a:pt x="302862" y="835346"/>
+                  </a:lnTo>
+                  <a:lnTo>
+                    <a:pt x="380496" y="1016638"/>
+                  </a:lnTo>
+                  <a:lnTo>
+                    <a:pt x="458130" y="1186264"/>
+                  </a:lnTo>
+                  <a:lnTo>
+                    <a:pt x="535764" y="1344975"/>
+                  </a:lnTo>
+                  <a:lnTo>
+                    <a:pt x="613399" y="1493473"/>
+                  </a:lnTo>
+                  <a:lnTo>
+                    <a:pt x="691033" y="1632415"/>
+                  </a:lnTo>
+                  <a:lnTo>
+                    <a:pt x="768667" y="1762416"/>
+                  </a:lnTo>
+                  <a:lnTo>
+                    <a:pt x="846301" y="1884051"/>
+                  </a:lnTo>
+                  <a:lnTo>
+                    <a:pt x="923935" y="1997860"/>
+                  </a:lnTo>
+                  <a:lnTo>
+                    <a:pt x="1001569" y="2104344"/>
+                  </a:lnTo>
+                  <a:lnTo>
+                    <a:pt x="1079203" y="2203977"/>
+                  </a:lnTo>
+                  <a:lnTo>
+                    <a:pt x="1156837" y="2297198"/>
+                  </a:lnTo>
+                  <a:lnTo>
+                    <a:pt x="1234471" y="2384421"/>
+                  </a:lnTo>
+                  <a:lnTo>
+                    <a:pt x="1312105" y="2466030"/>
+                  </a:lnTo>
+                  <a:lnTo>
+                    <a:pt x="1389739" y="2542389"/>
+                  </a:lnTo>
+                  <a:lnTo>
+                    <a:pt x="1467373" y="2613833"/>
+                  </a:lnTo>
+                  <a:lnTo>
+                    <a:pt x="1545007" y="2680680"/>
+                  </a:lnTo>
+                  <a:lnTo>
+                    <a:pt x="1622641" y="2743226"/>
+                  </a:lnTo>
+                  <a:lnTo>
+                    <a:pt x="1700275" y="2777283"/>
+                  </a:lnTo>
+                  <a:lnTo>
+                    <a:pt x="1777909" y="2759737"/>
+                  </a:lnTo>
+                  <a:lnTo>
+                    <a:pt x="1855543" y="2741840"/>
+                  </a:lnTo>
+                  <a:lnTo>
+                    <a:pt x="1933177" y="2723584"/>
+                  </a:lnTo>
+                  <a:lnTo>
+                    <a:pt x="2010811" y="2704961"/>
+                  </a:lnTo>
+                  <a:lnTo>
+                    <a:pt x="2088445" y="2685966"/>
+                  </a:lnTo>
+                  <a:lnTo>
+                    <a:pt x="2166079" y="2666590"/>
+                  </a:lnTo>
+                  <a:lnTo>
+                    <a:pt x="2243713" y="2646826"/>
+                  </a:lnTo>
+                  <a:lnTo>
+                    <a:pt x="2321348" y="2626665"/>
+                  </a:lnTo>
+                  <a:lnTo>
+                    <a:pt x="2398982" y="2606100"/>
+                  </a:lnTo>
+                  <a:lnTo>
+                    <a:pt x="2476616" y="2585123"/>
+                  </a:lnTo>
+                  <a:lnTo>
+                    <a:pt x="2554250" y="2563726"/>
+                  </a:lnTo>
+                  <a:lnTo>
+                    <a:pt x="2631884" y="2541900"/>
+                  </a:lnTo>
+                  <a:lnTo>
+                    <a:pt x="2709518" y="2519636"/>
+                  </a:lnTo>
+                  <a:lnTo>
+                    <a:pt x="2787152" y="2496926"/>
+                  </a:lnTo>
+                  <a:lnTo>
+                    <a:pt x="2864786" y="2473761"/>
+                  </a:lnTo>
+                  <a:lnTo>
+                    <a:pt x="2942420" y="2450131"/>
+                  </a:lnTo>
+                  <a:lnTo>
+                    <a:pt x="3020054" y="2426028"/>
+                  </a:lnTo>
+                  <a:lnTo>
+                    <a:pt x="3097688" y="2401442"/>
+                  </a:lnTo>
+                  <a:lnTo>
+                    <a:pt x="3175322" y="2376363"/>
+                  </a:lnTo>
+                  <a:lnTo>
+                    <a:pt x="3252956" y="2350781"/>
+                  </a:lnTo>
+                  <a:lnTo>
+                    <a:pt x="3330590" y="2324686"/>
+                  </a:lnTo>
+                  <a:lnTo>
+                    <a:pt x="3408224" y="2298069"/>
+                  </a:lnTo>
+                  <a:lnTo>
+                    <a:pt x="3485858" y="2270918"/>
+                  </a:lnTo>
+                  <a:lnTo>
+                    <a:pt x="3563492" y="2243222"/>
+                  </a:lnTo>
+                  <a:lnTo>
+                    <a:pt x="3641126" y="2214972"/>
+                  </a:lnTo>
+                  <a:lnTo>
+                    <a:pt x="3718760" y="2186155"/>
+                  </a:lnTo>
+                  <a:lnTo>
+                    <a:pt x="3796394" y="2156761"/>
+                  </a:lnTo>
+                  <a:lnTo>
+                    <a:pt x="3874028" y="2126777"/>
+                  </a:lnTo>
+                  <a:lnTo>
+                    <a:pt x="3951662" y="2096193"/>
+                  </a:lnTo>
+                  <a:lnTo>
+                    <a:pt x="4029297" y="2064995"/>
+                  </a:lnTo>
+                  <a:lnTo>
+                    <a:pt x="4106931" y="2033172"/>
+                  </a:lnTo>
+                  <a:lnTo>
+                    <a:pt x="4184565" y="2000712"/>
+                  </a:lnTo>
+                  <a:lnTo>
+                    <a:pt x="4262199" y="1967600"/>
+                  </a:lnTo>
+                  <a:lnTo>
+                    <a:pt x="4339833" y="1933825"/>
+                  </a:lnTo>
+                  <a:lnTo>
+                    <a:pt x="4417467" y="1899373"/>
+                  </a:lnTo>
+                  <a:lnTo>
+                    <a:pt x="4495101" y="1864231"/>
+                  </a:lnTo>
+                  <a:lnTo>
+                    <a:pt x="4572735" y="1828384"/>
+                  </a:lnTo>
+                  <a:lnTo>
+                    <a:pt x="4650369" y="1791818"/>
+                  </a:lnTo>
+                  <a:lnTo>
+                    <a:pt x="4728003" y="1754520"/>
+                  </a:lnTo>
+                  <a:lnTo>
+                    <a:pt x="4805637" y="1716474"/>
+                  </a:lnTo>
+                  <a:lnTo>
+                    <a:pt x="4883271" y="1677665"/>
+                  </a:lnTo>
+                  <a:lnTo>
+                    <a:pt x="4960905" y="1638079"/>
+                  </a:lnTo>
+                  <a:lnTo>
+                    <a:pt x="5038539" y="1597699"/>
+                  </a:lnTo>
+                  <a:lnTo>
+                    <a:pt x="5116173" y="1556510"/>
+                  </a:lnTo>
+                  <a:lnTo>
+                    <a:pt x="5193807" y="1514495"/>
+                  </a:lnTo>
+                  <a:lnTo>
+                    <a:pt x="5271441" y="1471638"/>
+                  </a:lnTo>
+                  <a:lnTo>
+                    <a:pt x="5349075" y="1427922"/>
+                  </a:lnTo>
+                  <a:lnTo>
+                    <a:pt x="5426709" y="1383329"/>
+                  </a:lnTo>
+                  <a:lnTo>
+                    <a:pt x="5504343" y="1337843"/>
+                  </a:lnTo>
+                  <a:lnTo>
+                    <a:pt x="5581977" y="1291445"/>
+                  </a:lnTo>
+                  <a:lnTo>
+                    <a:pt x="5659611" y="1244117"/>
                   </a:lnTo>
                 </a:path>
               </a:pathLst>
@@ -3784,300 +3790,300 @@
           </p:nvSpPr>
           <p:spPr>
             <a:xfrm>
-              <a:off x="817517" y="4687727"/>
-              <a:ext cx="7370972" cy="840467"/>
+              <a:off x="817517" y="4691047"/>
+              <a:ext cx="7370972" cy="829539"/>
             </a:xfrm>
             <a:custGeom>
               <a:avLst/>
               <a:pathLst>
-                <a:path w="7370972" h="840467">
+                <a:path w="7370972" h="829539">
                   <a:moveTo>
-                    <a:pt x="7370972" y="840467"/>
+                    <a:pt x="7370972" y="829539"/>
                   </a:moveTo>
                   <a:lnTo>
-                    <a:pt x="7293338" y="838886"/>
-                  </a:lnTo>
-                  <a:lnTo>
-                    <a:pt x="7215704" y="837186"/>
-                  </a:lnTo>
-                  <a:lnTo>
-                    <a:pt x="7138070" y="835359"/>
-                  </a:lnTo>
-                  <a:lnTo>
-                    <a:pt x="7060436" y="833394"/>
-                  </a:lnTo>
-                  <a:lnTo>
-                    <a:pt x="6982802" y="831281"/>
-                  </a:lnTo>
-                  <a:lnTo>
-                    <a:pt x="6905168" y="829009"/>
-                  </a:lnTo>
-                  <a:lnTo>
-                    <a:pt x="6827534" y="826567"/>
-                  </a:lnTo>
-                  <a:lnTo>
-                    <a:pt x="6749900" y="823940"/>
-                  </a:lnTo>
-                  <a:lnTo>
-                    <a:pt x="6672266" y="821116"/>
-                  </a:lnTo>
-                  <a:lnTo>
-                    <a:pt x="6594632" y="818080"/>
-                  </a:lnTo>
-                  <a:lnTo>
-                    <a:pt x="6516998" y="814815"/>
-                  </a:lnTo>
-                  <a:lnTo>
-                    <a:pt x="6439364" y="811304"/>
-                  </a:lnTo>
-                  <a:lnTo>
-                    <a:pt x="6361730" y="807530"/>
-                  </a:lnTo>
-                  <a:lnTo>
-                    <a:pt x="6284096" y="803471"/>
-                  </a:lnTo>
-                  <a:lnTo>
-                    <a:pt x="6206462" y="799107"/>
-                  </a:lnTo>
-                  <a:lnTo>
-                    <a:pt x="6128827" y="794415"/>
-                  </a:lnTo>
-                  <a:lnTo>
-                    <a:pt x="6051193" y="789370"/>
-                  </a:lnTo>
-                  <a:lnTo>
-                    <a:pt x="5973559" y="783945"/>
-                  </a:lnTo>
-                  <a:lnTo>
-                    <a:pt x="5895925" y="778113"/>
-                  </a:lnTo>
-                  <a:lnTo>
-                    <a:pt x="5818291" y="771841"/>
-                  </a:lnTo>
-                  <a:lnTo>
-                    <a:pt x="5740657" y="765098"/>
-                  </a:lnTo>
-                  <a:lnTo>
-                    <a:pt x="5663023" y="757847"/>
-                  </a:lnTo>
-                  <a:lnTo>
-                    <a:pt x="5585389" y="750051"/>
-                  </a:lnTo>
-                  <a:lnTo>
-                    <a:pt x="5507755" y="741668"/>
-                  </a:lnTo>
-                  <a:lnTo>
-                    <a:pt x="5430121" y="732655"/>
-                  </a:lnTo>
-                  <a:lnTo>
-                    <a:pt x="5352487" y="722964"/>
-                  </a:lnTo>
-                  <a:lnTo>
-                    <a:pt x="5274853" y="712544"/>
-                  </a:lnTo>
-                  <a:lnTo>
-                    <a:pt x="5197219" y="701339"/>
-                  </a:lnTo>
-                  <a:lnTo>
-                    <a:pt x="5119585" y="689292"/>
-                  </a:lnTo>
-                  <a:lnTo>
-                    <a:pt x="5041951" y="676339"/>
-                  </a:lnTo>
-                  <a:lnTo>
-                    <a:pt x="4964317" y="662411"/>
-                  </a:lnTo>
-                  <a:lnTo>
-                    <a:pt x="4886683" y="647435"/>
-                  </a:lnTo>
-                  <a:lnTo>
-                    <a:pt x="4809049" y="631333"/>
-                  </a:lnTo>
-                  <a:lnTo>
-                    <a:pt x="4731415" y="614020"/>
-                  </a:lnTo>
-                  <a:lnTo>
-                    <a:pt x="4653781" y="595404"/>
-                  </a:lnTo>
-                  <a:lnTo>
-                    <a:pt x="4576147" y="575387"/>
-                  </a:lnTo>
-                  <a:lnTo>
-                    <a:pt x="4498513" y="553865"/>
-                  </a:lnTo>
-                  <a:lnTo>
-                    <a:pt x="4420879" y="530723"/>
-                  </a:lnTo>
-                  <a:lnTo>
-                    <a:pt x="4343244" y="505841"/>
-                  </a:lnTo>
-                  <a:lnTo>
-                    <a:pt x="4265610" y="479087"/>
-                  </a:lnTo>
-                  <a:lnTo>
-                    <a:pt x="4187976" y="450320"/>
-                  </a:lnTo>
-                  <a:lnTo>
-                    <a:pt x="4110342" y="419389"/>
-                  </a:lnTo>
-                  <a:lnTo>
-                    <a:pt x="4032708" y="386131"/>
-                  </a:lnTo>
-                  <a:lnTo>
-                    <a:pt x="3955074" y="350371"/>
-                  </a:lnTo>
-                  <a:lnTo>
-                    <a:pt x="3877440" y="311921"/>
-                  </a:lnTo>
-                  <a:lnTo>
-                    <a:pt x="3799806" y="270578"/>
-                  </a:lnTo>
-                  <a:lnTo>
-                    <a:pt x="3722172" y="226126"/>
-                  </a:lnTo>
-                  <a:lnTo>
-                    <a:pt x="3644538" y="178329"/>
-                  </a:lnTo>
-                  <a:lnTo>
-                    <a:pt x="3566904" y="126936"/>
-                  </a:lnTo>
-                  <a:lnTo>
-                    <a:pt x="3489270" y="71678"/>
-                  </a:lnTo>
-                  <a:lnTo>
-                    <a:pt x="3411636" y="12262"/>
+                    <a:pt x="7293338" y="827571"/>
+                  </a:lnTo>
+                  <a:lnTo>
+                    <a:pt x="7215704" y="825467"/>
+                  </a:lnTo>
+                  <a:lnTo>
+                    <a:pt x="7138070" y="823219"/>
+                  </a:lnTo>
+                  <a:lnTo>
+                    <a:pt x="7060436" y="820816"/>
+                  </a:lnTo>
+                  <a:lnTo>
+                    <a:pt x="6982802" y="818247"/>
+                  </a:lnTo>
+                  <a:lnTo>
+                    <a:pt x="6905168" y="815502"/>
+                  </a:lnTo>
+                  <a:lnTo>
+                    <a:pt x="6827534" y="812569"/>
+                  </a:lnTo>
+                  <a:lnTo>
+                    <a:pt x="6749900" y="809433"/>
+                  </a:lnTo>
+                  <a:lnTo>
+                    <a:pt x="6672266" y="806082"/>
+                  </a:lnTo>
+                  <a:lnTo>
+                    <a:pt x="6594632" y="802500"/>
+                  </a:lnTo>
+                  <a:lnTo>
+                    <a:pt x="6516998" y="798672"/>
+                  </a:lnTo>
+                  <a:lnTo>
+                    <a:pt x="6439364" y="794581"/>
+                  </a:lnTo>
+                  <a:lnTo>
+                    <a:pt x="6361730" y="790209"/>
+                  </a:lnTo>
+                  <a:lnTo>
+                    <a:pt x="6284096" y="785535"/>
+                  </a:lnTo>
+                  <a:lnTo>
+                    <a:pt x="6206462" y="780541"/>
+                  </a:lnTo>
+                  <a:lnTo>
+                    <a:pt x="6128827" y="775202"/>
+                  </a:lnTo>
+                  <a:lnTo>
+                    <a:pt x="6051193" y="769497"/>
+                  </a:lnTo>
+                  <a:lnTo>
+                    <a:pt x="5973559" y="763399"/>
+                  </a:lnTo>
+                  <a:lnTo>
+                    <a:pt x="5895925" y="756882"/>
+                  </a:lnTo>
+                  <a:lnTo>
+                    <a:pt x="5818291" y="749917"/>
+                  </a:lnTo>
+                  <a:lnTo>
+                    <a:pt x="5740657" y="742472"/>
+                  </a:lnTo>
+                  <a:lnTo>
+                    <a:pt x="5663023" y="734516"/>
+                  </a:lnTo>
+                  <a:lnTo>
+                    <a:pt x="5585389" y="726012"/>
+                  </a:lnTo>
+                  <a:lnTo>
+                    <a:pt x="5507755" y="716924"/>
+                  </a:lnTo>
+                  <a:lnTo>
+                    <a:pt x="5430121" y="707210"/>
+                  </a:lnTo>
+                  <a:lnTo>
+                    <a:pt x="5352487" y="696829"/>
+                  </a:lnTo>
+                  <a:lnTo>
+                    <a:pt x="5274853" y="685733"/>
+                  </a:lnTo>
+                  <a:lnTo>
+                    <a:pt x="5197219" y="673874"/>
+                  </a:lnTo>
+                  <a:lnTo>
+                    <a:pt x="5119585" y="661200"/>
+                  </a:lnTo>
+                  <a:lnTo>
+                    <a:pt x="5041951" y="647654"/>
+                  </a:lnTo>
+                  <a:lnTo>
+                    <a:pt x="4964317" y="633177"/>
+                  </a:lnTo>
+                  <a:lnTo>
+                    <a:pt x="4886683" y="617704"/>
+                  </a:lnTo>
+                  <a:lnTo>
+                    <a:pt x="4809049" y="601166"/>
+                  </a:lnTo>
+                  <a:lnTo>
+                    <a:pt x="4731415" y="583491"/>
+                  </a:lnTo>
+                  <a:lnTo>
+                    <a:pt x="4653781" y="564601"/>
+                  </a:lnTo>
+                  <a:lnTo>
+                    <a:pt x="4576147" y="544411"/>
+                  </a:lnTo>
+                  <a:lnTo>
+                    <a:pt x="4498513" y="522833"/>
+                  </a:lnTo>
+                  <a:lnTo>
+                    <a:pt x="4420879" y="499771"/>
+                  </a:lnTo>
+                  <a:lnTo>
+                    <a:pt x="4343244" y="475123"/>
+                  </a:lnTo>
+                  <a:lnTo>
+                    <a:pt x="4265610" y="448779"/>
+                  </a:lnTo>
+                  <a:lnTo>
+                    <a:pt x="4187976" y="420624"/>
+                  </a:lnTo>
+                  <a:lnTo>
+                    <a:pt x="4110342" y="390533"/>
+                  </a:lnTo>
+                  <a:lnTo>
+                    <a:pt x="4032708" y="358371"/>
+                  </a:lnTo>
+                  <a:lnTo>
+                    <a:pt x="3955074" y="323998"/>
+                  </a:lnTo>
+                  <a:lnTo>
+                    <a:pt x="3877440" y="287261"/>
+                  </a:lnTo>
+                  <a:lnTo>
+                    <a:pt x="3799806" y="247998"/>
+                  </a:lnTo>
+                  <a:lnTo>
+                    <a:pt x="3722172" y="206034"/>
+                  </a:lnTo>
+                  <a:lnTo>
+                    <a:pt x="3644538" y="161183"/>
+                  </a:lnTo>
+                  <a:lnTo>
+                    <a:pt x="3566904" y="113249"/>
+                  </a:lnTo>
+                  <a:lnTo>
+                    <a:pt x="3489270" y="62017"/>
+                  </a:lnTo>
+                  <a:lnTo>
+                    <a:pt x="3411636" y="7262"/>
                   </a:lnTo>
                   <a:lnTo>
                     <a:pt x="3334002" y="0"/>
                   </a:lnTo>
                   <a:lnTo>
-                    <a:pt x="3256368" y="12059"/>
-                  </a:lnTo>
-                  <a:lnTo>
-                    <a:pt x="3178734" y="23950"/>
-                  </a:lnTo>
-                  <a:lnTo>
-                    <a:pt x="3101100" y="35674"/>
-                  </a:lnTo>
-                  <a:lnTo>
-                    <a:pt x="3023466" y="47234"/>
-                  </a:lnTo>
-                  <a:lnTo>
-                    <a:pt x="2945832" y="58633"/>
-                  </a:lnTo>
-                  <a:lnTo>
-                    <a:pt x="2868198" y="69871"/>
-                  </a:lnTo>
-                  <a:lnTo>
-                    <a:pt x="2790564" y="80953"/>
-                  </a:lnTo>
-                  <a:lnTo>
-                    <a:pt x="2712930" y="91879"/>
-                  </a:lnTo>
-                  <a:lnTo>
-                    <a:pt x="2635295" y="102653"/>
-                  </a:lnTo>
-                  <a:lnTo>
-                    <a:pt x="2557661" y="113275"/>
-                  </a:lnTo>
-                  <a:lnTo>
-                    <a:pt x="2480027" y="123749"/>
-                  </a:lnTo>
-                  <a:lnTo>
-                    <a:pt x="2402393" y="134076"/>
-                  </a:lnTo>
-                  <a:lnTo>
-                    <a:pt x="2324759" y="144259"/>
-                  </a:lnTo>
-                  <a:lnTo>
-                    <a:pt x="2247125" y="154299"/>
-                  </a:lnTo>
-                  <a:lnTo>
-                    <a:pt x="2169491" y="164199"/>
-                  </a:lnTo>
-                  <a:lnTo>
-                    <a:pt x="2091857" y="173960"/>
-                  </a:lnTo>
-                  <a:lnTo>
-                    <a:pt x="2014223" y="183584"/>
-                  </a:lnTo>
-                  <a:lnTo>
-                    <a:pt x="1936589" y="193074"/>
-                  </a:lnTo>
-                  <a:lnTo>
-                    <a:pt x="1858955" y="202430"/>
-                  </a:lnTo>
-                  <a:lnTo>
-                    <a:pt x="1781321" y="211656"/>
-                  </a:lnTo>
-                  <a:lnTo>
-                    <a:pt x="1703687" y="220753"/>
-                  </a:lnTo>
-                  <a:lnTo>
-                    <a:pt x="1626053" y="229722"/>
-                  </a:lnTo>
-                  <a:lnTo>
-                    <a:pt x="1548419" y="238566"/>
-                  </a:lnTo>
-                  <a:lnTo>
-                    <a:pt x="1470785" y="247286"/>
-                  </a:lnTo>
-                  <a:lnTo>
-                    <a:pt x="1393151" y="255884"/>
-                  </a:lnTo>
-                  <a:lnTo>
-                    <a:pt x="1315517" y="264361"/>
-                  </a:lnTo>
-                  <a:lnTo>
-                    <a:pt x="1237883" y="272720"/>
-                  </a:lnTo>
-                  <a:lnTo>
-                    <a:pt x="1160249" y="280962"/>
-                  </a:lnTo>
-                  <a:lnTo>
-                    <a:pt x="1082615" y="289089"/>
-                  </a:lnTo>
-                  <a:lnTo>
-                    <a:pt x="1004981" y="297101"/>
-                  </a:lnTo>
-                  <a:lnTo>
-                    <a:pt x="927346" y="305002"/>
-                  </a:lnTo>
-                  <a:lnTo>
-                    <a:pt x="849712" y="312792"/>
-                  </a:lnTo>
-                  <a:lnTo>
-                    <a:pt x="772078" y="320473"/>
-                  </a:lnTo>
-                  <a:lnTo>
-                    <a:pt x="694444" y="328046"/>
-                  </a:lnTo>
-                  <a:lnTo>
-                    <a:pt x="616810" y="335513"/>
-                  </a:lnTo>
-                  <a:lnTo>
-                    <a:pt x="539176" y="342876"/>
-                  </a:lnTo>
-                  <a:lnTo>
-                    <a:pt x="461542" y="350136"/>
-                  </a:lnTo>
-                  <a:lnTo>
-                    <a:pt x="383908" y="357294"/>
-                  </a:lnTo>
-                  <a:lnTo>
-                    <a:pt x="306274" y="364352"/>
-                  </a:lnTo>
-                  <a:lnTo>
-                    <a:pt x="228640" y="371311"/>
-                  </a:lnTo>
-                  <a:lnTo>
-                    <a:pt x="151006" y="378173"/>
-                  </a:lnTo>
-                  <a:lnTo>
-                    <a:pt x="73372" y="384939"/>
-                  </a:lnTo>
-                  <a:lnTo>
-                    <a:pt x="0" y="391243"/>
+                    <a:pt x="3256368" y="16862"/>
+                  </a:lnTo>
+                  <a:lnTo>
+                    <a:pt x="3178734" y="33394"/>
+                  </a:lnTo>
+                  <a:lnTo>
+                    <a:pt x="3101100" y="49601"/>
+                  </a:lnTo>
+                  <a:lnTo>
+                    <a:pt x="3023466" y="65489"/>
+                  </a:lnTo>
+                  <a:lnTo>
+                    <a:pt x="2945832" y="81065"/>
+                  </a:lnTo>
+                  <a:lnTo>
+                    <a:pt x="2868198" y="96335"/>
+                  </a:lnTo>
+                  <a:lnTo>
+                    <a:pt x="2790564" y="111305"/>
+                  </a:lnTo>
+                  <a:lnTo>
+                    <a:pt x="2712930" y="125981"/>
+                  </a:lnTo>
+                  <a:lnTo>
+                    <a:pt x="2635295" y="140368"/>
+                  </a:lnTo>
+                  <a:lnTo>
+                    <a:pt x="2557661" y="154473"/>
+                  </a:lnTo>
+                  <a:lnTo>
+                    <a:pt x="2480027" y="168301"/>
+                  </a:lnTo>
+                  <a:lnTo>
+                    <a:pt x="2402393" y="181856"/>
+                  </a:lnTo>
+                  <a:lnTo>
+                    <a:pt x="2324759" y="195146"/>
+                  </a:lnTo>
+                  <a:lnTo>
+                    <a:pt x="2247125" y="208174"/>
+                  </a:lnTo>
+                  <a:lnTo>
+                    <a:pt x="2169491" y="220946"/>
+                  </a:lnTo>
+                  <a:lnTo>
+                    <a:pt x="2091857" y="233468"/>
+                  </a:lnTo>
+                  <a:lnTo>
+                    <a:pt x="2014223" y="245743"/>
+                  </a:lnTo>
+                  <a:lnTo>
+                    <a:pt x="1936589" y="257777"/>
+                  </a:lnTo>
+                  <a:lnTo>
+                    <a:pt x="1858955" y="269575"/>
+                  </a:lnTo>
+                  <a:lnTo>
+                    <a:pt x="1781321" y="281140"/>
+                  </a:lnTo>
+                  <a:lnTo>
+                    <a:pt x="1703687" y="292479"/>
+                  </a:lnTo>
+                  <a:lnTo>
+                    <a:pt x="1626053" y="303595"/>
+                  </a:lnTo>
+                  <a:lnTo>
+                    <a:pt x="1548419" y="314492"/>
+                  </a:lnTo>
+                  <a:lnTo>
+                    <a:pt x="1470785" y="325175"/>
+                  </a:lnTo>
+                  <a:lnTo>
+                    <a:pt x="1393151" y="335648"/>
+                  </a:lnTo>
+                  <a:lnTo>
+                    <a:pt x="1315517" y="345916"/>
+                  </a:lnTo>
+                  <a:lnTo>
+                    <a:pt x="1237883" y="355981"/>
+                  </a:lnTo>
+                  <a:lnTo>
+                    <a:pt x="1160249" y="365849"/>
+                  </a:lnTo>
+                  <a:lnTo>
+                    <a:pt x="1082615" y="375523"/>
+                  </a:lnTo>
+                  <a:lnTo>
+                    <a:pt x="1004981" y="385007"/>
+                  </a:lnTo>
+                  <a:lnTo>
+                    <a:pt x="927346" y="394304"/>
+                  </a:lnTo>
+                  <a:lnTo>
+                    <a:pt x="849712" y="403419"/>
+                  </a:lnTo>
+                  <a:lnTo>
+                    <a:pt x="772078" y="412355"/>
+                  </a:lnTo>
+                  <a:lnTo>
+                    <a:pt x="694444" y="421115"/>
+                  </a:lnTo>
+                  <a:lnTo>
+                    <a:pt x="616810" y="429703"/>
+                  </a:lnTo>
+                  <a:lnTo>
+                    <a:pt x="539176" y="438122"/>
+                  </a:lnTo>
+                  <a:lnTo>
+                    <a:pt x="461542" y="446376"/>
+                  </a:lnTo>
+                  <a:lnTo>
+                    <a:pt x="383908" y="454468"/>
+                  </a:lnTo>
+                  <a:lnTo>
+                    <a:pt x="306274" y="462400"/>
+                  </a:lnTo>
+                  <a:lnTo>
+                    <a:pt x="228640" y="470177"/>
+                  </a:lnTo>
+                  <a:lnTo>
+                    <a:pt x="151006" y="477801"/>
+                  </a:lnTo>
+                  <a:lnTo>
+                    <a:pt x="73372" y="485275"/>
+                  </a:lnTo>
+                  <a:lnTo>
+                    <a:pt x="0" y="492200"/>
                   </a:lnTo>
                 </a:path>
               </a:pathLst>
@@ -4097,300 +4103,300 @@
           </p:nvSpPr>
           <p:spPr>
             <a:xfrm>
-              <a:off x="817517" y="2438710"/>
-              <a:ext cx="7370972" cy="2916388"/>
+              <a:off x="817517" y="3142810"/>
+              <a:ext cx="7370972" cy="2143847"/>
             </a:xfrm>
             <a:custGeom>
               <a:avLst/>
               <a:pathLst>
-                <a:path w="7370972" h="2916388">
+                <a:path w="7370972" h="2143847">
                   <a:moveTo>
                     <a:pt x="0" y="0"/>
                   </a:moveTo>
                   <a:lnTo>
-                    <a:pt x="73372" y="84784"/>
-                  </a:lnTo>
-                  <a:lnTo>
-                    <a:pt x="151006" y="171910"/>
-                  </a:lnTo>
-                  <a:lnTo>
-                    <a:pt x="228640" y="256527"/>
-                  </a:lnTo>
-                  <a:lnTo>
-                    <a:pt x="306274" y="338708"/>
-                  </a:lnTo>
-                  <a:lnTo>
-                    <a:pt x="383908" y="418522"/>
-                  </a:lnTo>
-                  <a:lnTo>
-                    <a:pt x="461542" y="496038"/>
-                  </a:lnTo>
-                  <a:lnTo>
-                    <a:pt x="539176" y="571322"/>
-                  </a:lnTo>
-                  <a:lnTo>
-                    <a:pt x="616810" y="644438"/>
-                  </a:lnTo>
-                  <a:lnTo>
-                    <a:pt x="694444" y="715448"/>
-                  </a:lnTo>
-                  <a:lnTo>
-                    <a:pt x="772078" y="784414"/>
-                  </a:lnTo>
-                  <a:lnTo>
-                    <a:pt x="849712" y="851394"/>
-                  </a:lnTo>
-                  <a:lnTo>
-                    <a:pt x="927346" y="916445"/>
-                  </a:lnTo>
-                  <a:lnTo>
-                    <a:pt x="1004981" y="979624"/>
-                  </a:lnTo>
-                  <a:lnTo>
-                    <a:pt x="1082615" y="1040982"/>
-                  </a:lnTo>
-                  <a:lnTo>
-                    <a:pt x="1160249" y="1100574"/>
-                  </a:lnTo>
-                  <a:lnTo>
-                    <a:pt x="1237883" y="1158451"/>
-                  </a:lnTo>
-                  <a:lnTo>
-                    <a:pt x="1315517" y="1214660"/>
-                  </a:lnTo>
-                  <a:lnTo>
-                    <a:pt x="1393151" y="1269251"/>
-                  </a:lnTo>
-                  <a:lnTo>
-                    <a:pt x="1470785" y="1322270"/>
-                  </a:lnTo>
-                  <a:lnTo>
-                    <a:pt x="1548419" y="1373762"/>
-                  </a:lnTo>
-                  <a:lnTo>
-                    <a:pt x="1626053" y="1423772"/>
-                  </a:lnTo>
-                  <a:lnTo>
-                    <a:pt x="1703687" y="1472341"/>
-                  </a:lnTo>
-                  <a:lnTo>
-                    <a:pt x="1781321" y="1519512"/>
-                  </a:lnTo>
-                  <a:lnTo>
-                    <a:pt x="1858955" y="1565325"/>
-                  </a:lnTo>
-                  <a:lnTo>
-                    <a:pt x="1936589" y="1609819"/>
-                  </a:lnTo>
-                  <a:lnTo>
-                    <a:pt x="2014223" y="1653031"/>
-                  </a:lnTo>
-                  <a:lnTo>
-                    <a:pt x="2091857" y="1694999"/>
-                  </a:lnTo>
-                  <a:lnTo>
-                    <a:pt x="2169491" y="1735758"/>
-                  </a:lnTo>
-                  <a:lnTo>
-                    <a:pt x="2247125" y="1775344"/>
-                  </a:lnTo>
-                  <a:lnTo>
-                    <a:pt x="2324759" y="1813790"/>
-                  </a:lnTo>
-                  <a:lnTo>
-                    <a:pt x="2402393" y="1851129"/>
-                  </a:lnTo>
-                  <a:lnTo>
-                    <a:pt x="2480027" y="1887393"/>
-                  </a:lnTo>
-                  <a:lnTo>
-                    <a:pt x="2557661" y="1922612"/>
-                  </a:lnTo>
-                  <a:lnTo>
-                    <a:pt x="2635295" y="1956818"/>
-                  </a:lnTo>
-                  <a:lnTo>
-                    <a:pt x="2712930" y="1990038"/>
-                  </a:lnTo>
-                  <a:lnTo>
-                    <a:pt x="2790564" y="2022302"/>
-                  </a:lnTo>
-                  <a:lnTo>
-                    <a:pt x="2868198" y="2053637"/>
-                  </a:lnTo>
-                  <a:lnTo>
-                    <a:pt x="2945832" y="2084069"/>
-                  </a:lnTo>
-                  <a:lnTo>
-                    <a:pt x="3023466" y="2113625"/>
-                  </a:lnTo>
-                  <a:lnTo>
-                    <a:pt x="3101100" y="2142330"/>
-                  </a:lnTo>
-                  <a:lnTo>
-                    <a:pt x="3178734" y="2170209"/>
-                  </a:lnTo>
-                  <a:lnTo>
-                    <a:pt x="3256368" y="2197285"/>
-                  </a:lnTo>
-                  <a:lnTo>
-                    <a:pt x="3334002" y="2223581"/>
-                  </a:lnTo>
-                  <a:lnTo>
-                    <a:pt x="3411636" y="2249120"/>
-                  </a:lnTo>
-                  <a:lnTo>
-                    <a:pt x="3489270" y="2273923"/>
-                  </a:lnTo>
-                  <a:lnTo>
-                    <a:pt x="3566904" y="2298012"/>
-                  </a:lnTo>
-                  <a:lnTo>
-                    <a:pt x="3644538" y="2321408"/>
-                  </a:lnTo>
-                  <a:lnTo>
-                    <a:pt x="3722172" y="2344130"/>
-                  </a:lnTo>
-                  <a:lnTo>
-                    <a:pt x="3799806" y="2366198"/>
-                  </a:lnTo>
-                  <a:lnTo>
-                    <a:pt x="3877440" y="2387630"/>
-                  </a:lnTo>
-                  <a:lnTo>
-                    <a:pt x="3955074" y="2408445"/>
-                  </a:lnTo>
-                  <a:lnTo>
-                    <a:pt x="4032708" y="2428661"/>
-                  </a:lnTo>
-                  <a:lnTo>
-                    <a:pt x="4110342" y="2448294"/>
-                  </a:lnTo>
-                  <a:lnTo>
-                    <a:pt x="4187976" y="2467362"/>
-                  </a:lnTo>
-                  <a:lnTo>
-                    <a:pt x="4265610" y="2485882"/>
-                  </a:lnTo>
-                  <a:lnTo>
-                    <a:pt x="4343244" y="2503867"/>
-                  </a:lnTo>
-                  <a:lnTo>
-                    <a:pt x="4420879" y="2521335"/>
-                  </a:lnTo>
-                  <a:lnTo>
-                    <a:pt x="4498513" y="2538300"/>
-                  </a:lnTo>
-                  <a:lnTo>
-                    <a:pt x="4576147" y="2554777"/>
-                  </a:lnTo>
-                  <a:lnTo>
-                    <a:pt x="4653781" y="2570779"/>
-                  </a:lnTo>
-                  <a:lnTo>
-                    <a:pt x="4731415" y="2586320"/>
-                  </a:lnTo>
-                  <a:lnTo>
-                    <a:pt x="4809049" y="2601414"/>
-                  </a:lnTo>
-                  <a:lnTo>
-                    <a:pt x="4886683" y="2616073"/>
-                  </a:lnTo>
-                  <a:lnTo>
-                    <a:pt x="4964317" y="2630310"/>
-                  </a:lnTo>
-                  <a:lnTo>
-                    <a:pt x="5041951" y="2644137"/>
-                  </a:lnTo>
-                  <a:lnTo>
-                    <a:pt x="5119585" y="2657566"/>
-                  </a:lnTo>
-                  <a:lnTo>
-                    <a:pt x="5197219" y="2670608"/>
-                  </a:lnTo>
-                  <a:lnTo>
-                    <a:pt x="5274853" y="2683275"/>
-                  </a:lnTo>
-                  <a:lnTo>
-                    <a:pt x="5352487" y="2695577"/>
-                  </a:lnTo>
-                  <a:lnTo>
-                    <a:pt x="5430121" y="2707525"/>
-                  </a:lnTo>
-                  <a:lnTo>
-                    <a:pt x="5507755" y="2719128"/>
-                  </a:lnTo>
-                  <a:lnTo>
-                    <a:pt x="5585389" y="2730398"/>
-                  </a:lnTo>
-                  <a:lnTo>
-                    <a:pt x="5663023" y="2741343"/>
-                  </a:lnTo>
-                  <a:lnTo>
-                    <a:pt x="5740657" y="2751973"/>
-                  </a:lnTo>
-                  <a:lnTo>
-                    <a:pt x="5818291" y="2762296"/>
-                  </a:lnTo>
-                  <a:lnTo>
-                    <a:pt x="5895925" y="2772323"/>
-                  </a:lnTo>
-                  <a:lnTo>
-                    <a:pt x="5973559" y="2782061"/>
-                  </a:lnTo>
-                  <a:lnTo>
-                    <a:pt x="6051193" y="2791518"/>
-                  </a:lnTo>
-                  <a:lnTo>
-                    <a:pt x="6128827" y="2800703"/>
-                  </a:lnTo>
-                  <a:lnTo>
-                    <a:pt x="6206462" y="2809624"/>
-                  </a:lnTo>
-                  <a:lnTo>
-                    <a:pt x="6284096" y="2818287"/>
-                  </a:lnTo>
-                  <a:lnTo>
-                    <a:pt x="6361730" y="2826701"/>
-                  </a:lnTo>
-                  <a:lnTo>
-                    <a:pt x="6439364" y="2834873"/>
-                  </a:lnTo>
-                  <a:lnTo>
-                    <a:pt x="6516998" y="2842810"/>
-                  </a:lnTo>
-                  <a:lnTo>
-                    <a:pt x="6594632" y="2850518"/>
-                  </a:lnTo>
-                  <a:lnTo>
-                    <a:pt x="6672266" y="2858004"/>
-                  </a:lnTo>
-                  <a:lnTo>
-                    <a:pt x="6749900" y="2865275"/>
-                  </a:lnTo>
-                  <a:lnTo>
-                    <a:pt x="6827534" y="2872336"/>
-                  </a:lnTo>
-                  <a:lnTo>
-                    <a:pt x="6905168" y="2879194"/>
-                  </a:lnTo>
-                  <a:lnTo>
-                    <a:pt x="6982802" y="2885854"/>
-                  </a:lnTo>
-                  <a:lnTo>
-                    <a:pt x="7060436" y="2892323"/>
-                  </a:lnTo>
-                  <a:lnTo>
-                    <a:pt x="7138070" y="2898605"/>
-                  </a:lnTo>
-                  <a:lnTo>
-                    <a:pt x="7215704" y="2904707"/>
-                  </a:lnTo>
-                  <a:lnTo>
-                    <a:pt x="7293338" y="2910632"/>
-                  </a:lnTo>
-                  <a:lnTo>
-                    <a:pt x="7370972" y="2916388"/>
+                    <a:pt x="73372" y="52520"/>
+                  </a:lnTo>
+                  <a:lnTo>
+                    <a:pt x="151006" y="106809"/>
+                  </a:lnTo>
+                  <a:lnTo>
+                    <a:pt x="228640" y="159846"/>
+                  </a:lnTo>
+                  <a:lnTo>
+                    <a:pt x="306274" y="211660"/>
+                  </a:lnTo>
+                  <a:lnTo>
+                    <a:pt x="383908" y="262279"/>
+                  </a:lnTo>
+                  <a:lnTo>
+                    <a:pt x="461542" y="311730"/>
+                  </a:lnTo>
+                  <a:lnTo>
+                    <a:pt x="539176" y="360041"/>
+                  </a:lnTo>
+                  <a:lnTo>
+                    <a:pt x="616810" y="407237"/>
+                  </a:lnTo>
+                  <a:lnTo>
+                    <a:pt x="694444" y="453345"/>
+                  </a:lnTo>
+                  <a:lnTo>
+                    <a:pt x="772078" y="498390"/>
+                  </a:lnTo>
+                  <a:lnTo>
+                    <a:pt x="849712" y="542396"/>
+                  </a:lnTo>
+                  <a:lnTo>
+                    <a:pt x="927346" y="585386"/>
+                  </a:lnTo>
+                  <a:lnTo>
+                    <a:pt x="1004981" y="627386"/>
+                  </a:lnTo>
+                  <a:lnTo>
+                    <a:pt x="1082615" y="668416"/>
+                  </a:lnTo>
+                  <a:lnTo>
+                    <a:pt x="1160249" y="708501"/>
+                  </a:lnTo>
+                  <a:lnTo>
+                    <a:pt x="1237883" y="747660"/>
+                  </a:lnTo>
+                  <a:lnTo>
+                    <a:pt x="1315517" y="785917"/>
+                  </a:lnTo>
+                  <a:lnTo>
+                    <a:pt x="1393151" y="823291"/>
+                  </a:lnTo>
+                  <a:lnTo>
+                    <a:pt x="1470785" y="859804"/>
+                  </a:lnTo>
+                  <a:lnTo>
+                    <a:pt x="1548419" y="895474"/>
+                  </a:lnTo>
+                  <a:lnTo>
+                    <a:pt x="1626053" y="930321"/>
+                  </a:lnTo>
+                  <a:lnTo>
+                    <a:pt x="1703687" y="964365"/>
+                  </a:lnTo>
+                  <a:lnTo>
+                    <a:pt x="1781321" y="997624"/>
+                  </a:lnTo>
+                  <a:lnTo>
+                    <a:pt x="1858955" y="1030115"/>
+                  </a:lnTo>
+                  <a:lnTo>
+                    <a:pt x="1936589" y="1061857"/>
+                  </a:lnTo>
+                  <a:lnTo>
+                    <a:pt x="2014223" y="1092867"/>
+                  </a:lnTo>
+                  <a:lnTo>
+                    <a:pt x="2091857" y="1123162"/>
+                  </a:lnTo>
+                  <a:lnTo>
+                    <a:pt x="2169491" y="1152758"/>
+                  </a:lnTo>
+                  <a:lnTo>
+                    <a:pt x="2247125" y="1181672"/>
+                  </a:lnTo>
+                  <a:lnTo>
+                    <a:pt x="2324759" y="1209919"/>
+                  </a:lnTo>
+                  <a:lnTo>
+                    <a:pt x="2402393" y="1237514"/>
+                  </a:lnTo>
+                  <a:lnTo>
+                    <a:pt x="2480027" y="1264473"/>
+                  </a:lnTo>
+                  <a:lnTo>
+                    <a:pt x="2557661" y="1290810"/>
+                  </a:lnTo>
+                  <a:lnTo>
+                    <a:pt x="2635295" y="1316539"/>
+                  </a:lnTo>
+                  <a:lnTo>
+                    <a:pt x="2712930" y="1341675"/>
+                  </a:lnTo>
+                  <a:lnTo>
+                    <a:pt x="2790564" y="1366232"/>
+                  </a:lnTo>
+                  <a:lnTo>
+                    <a:pt x="2868198" y="1390222"/>
+                  </a:lnTo>
+                  <a:lnTo>
+                    <a:pt x="2945832" y="1413659"/>
+                  </a:lnTo>
+                  <a:lnTo>
+                    <a:pt x="3023466" y="1436555"/>
+                  </a:lnTo>
+                  <a:lnTo>
+                    <a:pt x="3101100" y="1458923"/>
+                  </a:lnTo>
+                  <a:lnTo>
+                    <a:pt x="3178734" y="1480775"/>
+                  </a:lnTo>
+                  <a:lnTo>
+                    <a:pt x="3256368" y="1502123"/>
+                  </a:lnTo>
+                  <a:lnTo>
+                    <a:pt x="3334002" y="1522979"/>
+                  </a:lnTo>
+                  <a:lnTo>
+                    <a:pt x="3411636" y="1543354"/>
+                  </a:lnTo>
+                  <a:lnTo>
+                    <a:pt x="3489270" y="1563259"/>
+                  </a:lnTo>
+                  <a:lnTo>
+                    <a:pt x="3566904" y="1582705"/>
+                  </a:lnTo>
+                  <a:lnTo>
+                    <a:pt x="3644538" y="1601702"/>
+                  </a:lnTo>
+                  <a:lnTo>
+                    <a:pt x="3722172" y="1620262"/>
+                  </a:lnTo>
+                  <a:lnTo>
+                    <a:pt x="3799806" y="1638393"/>
+                  </a:lnTo>
+                  <a:lnTo>
+                    <a:pt x="3877440" y="1656106"/>
+                  </a:lnTo>
+                  <a:lnTo>
+                    <a:pt x="3955074" y="1673410"/>
+                  </a:lnTo>
+                  <a:lnTo>
+                    <a:pt x="4032708" y="1690316"/>
+                  </a:lnTo>
+                  <a:lnTo>
+                    <a:pt x="4110342" y="1706831"/>
+                  </a:lnTo>
+                  <a:lnTo>
+                    <a:pt x="4187976" y="1722966"/>
+                  </a:lnTo>
+                  <a:lnTo>
+                    <a:pt x="4265610" y="1738728"/>
+                  </a:lnTo>
+                  <a:lnTo>
+                    <a:pt x="4343244" y="1754127"/>
+                  </a:lnTo>
+                  <a:lnTo>
+                    <a:pt x="4420879" y="1769171"/>
+                  </a:lnTo>
+                  <a:lnTo>
+                    <a:pt x="4498513" y="1783868"/>
+                  </a:lnTo>
+                  <a:lnTo>
+                    <a:pt x="4576147" y="1798225"/>
+                  </a:lnTo>
+                  <a:lnTo>
+                    <a:pt x="4653781" y="1812252"/>
+                  </a:lnTo>
+                  <a:lnTo>
+                    <a:pt x="4731415" y="1825955"/>
+                  </a:lnTo>
+                  <a:lnTo>
+                    <a:pt x="4809049" y="1839342"/>
+                  </a:lnTo>
+                  <a:lnTo>
+                    <a:pt x="4886683" y="1852421"/>
+                  </a:lnTo>
+                  <a:lnTo>
+                    <a:pt x="4964317" y="1865198"/>
+                  </a:lnTo>
+                  <a:lnTo>
+                    <a:pt x="5041951" y="1877680"/>
+                  </a:lnTo>
+                  <a:lnTo>
+                    <a:pt x="5119585" y="1889874"/>
+                  </a:lnTo>
+                  <a:lnTo>
+                    <a:pt x="5197219" y="1901787"/>
+                  </a:lnTo>
+                  <a:lnTo>
+                    <a:pt x="5274853" y="1913425"/>
+                  </a:lnTo>
+                  <a:lnTo>
+                    <a:pt x="5352487" y="1924795"/>
+                  </a:lnTo>
+                  <a:lnTo>
+                    <a:pt x="5430121" y="1935902"/>
+                  </a:lnTo>
+                  <a:lnTo>
+                    <a:pt x="5507755" y="1946753"/>
+                  </a:lnTo>
+                  <a:lnTo>
+                    <a:pt x="5585389" y="1957355"/>
+                  </a:lnTo>
+                  <a:lnTo>
+                    <a:pt x="5663023" y="1967711"/>
+                  </a:lnTo>
+                  <a:lnTo>
+                    <a:pt x="5740657" y="1977829"/>
+                  </a:lnTo>
+                  <a:lnTo>
+                    <a:pt x="5818291" y="1987713"/>
+                  </a:lnTo>
+                  <a:lnTo>
+                    <a:pt x="5895925" y="1997370"/>
+                  </a:lnTo>
+                  <a:lnTo>
+                    <a:pt x="5973559" y="2006803"/>
+                  </a:lnTo>
+                  <a:lnTo>
+                    <a:pt x="6051193" y="2016019"/>
+                  </a:lnTo>
+                  <a:lnTo>
+                    <a:pt x="6128827" y="2025023"/>
+                  </a:lnTo>
+                  <a:lnTo>
+                    <a:pt x="6206462" y="2033819"/>
+                  </a:lnTo>
+                  <a:lnTo>
+                    <a:pt x="6284096" y="2042412"/>
+                  </a:lnTo>
+                  <a:lnTo>
+                    <a:pt x="6361730" y="2050807"/>
+                  </a:lnTo>
+                  <a:lnTo>
+                    <a:pt x="6439364" y="2059008"/>
+                  </a:lnTo>
+                  <a:lnTo>
+                    <a:pt x="6516998" y="2067020"/>
+                  </a:lnTo>
+                  <a:lnTo>
+                    <a:pt x="6594632" y="2074847"/>
+                  </a:lnTo>
+                  <a:lnTo>
+                    <a:pt x="6672266" y="2082494"/>
+                  </a:lnTo>
+                  <a:lnTo>
+                    <a:pt x="6749900" y="2089964"/>
+                  </a:lnTo>
+                  <a:lnTo>
+                    <a:pt x="6827534" y="2097262"/>
+                  </a:lnTo>
+                  <a:lnTo>
+                    <a:pt x="6905168" y="2104392"/>
+                  </a:lnTo>
+                  <a:lnTo>
+                    <a:pt x="6982802" y="2111358"/>
+                  </a:lnTo>
+                  <a:lnTo>
+                    <a:pt x="7060436" y="2118162"/>
+                  </a:lnTo>
+                  <a:lnTo>
+                    <a:pt x="7138070" y="2124810"/>
+                  </a:lnTo>
+                  <a:lnTo>
+                    <a:pt x="7215704" y="2131304"/>
+                  </a:lnTo>
+                  <a:lnTo>
+                    <a:pt x="7293338" y="2137649"/>
+                  </a:lnTo>
+                  <a:lnTo>
+                    <a:pt x="7370972" y="2143847"/>
                   </a:lnTo>
                 </a:path>
               </a:pathLst>

--- a/docs/plots/carbo/jx_carbo_linsubhr_ratio_hosp10.pptx
+++ b/docs/plots/carbo/jx_carbo_linsubhr_ratio_hosp10.pptx
@@ -3003,521 +3003,518 @@
           <p:spPr>
             <a:xfrm>
               <a:off x="817517" y="1896563"/>
-              <a:ext cx="7370972" cy="3624023"/>
+              <a:ext cx="7370972" cy="3631631"/>
             </a:xfrm>
             <a:custGeom>
               <a:avLst/>
               <a:pathLst>
-                <a:path w="7370972" h="3624023">
+                <a:path w="7370972" h="3631631">
                   <a:moveTo>
-                    <a:pt x="1711360" y="0"/>
+                    <a:pt x="1850433" y="0"/>
                   </a:moveTo>
                   <a:lnTo>
-                    <a:pt x="1781321" y="213170"/>
-                  </a:lnTo>
-                  <a:lnTo>
-                    <a:pt x="1858955" y="434499"/>
-                  </a:lnTo>
-                  <a:lnTo>
-                    <a:pt x="1936589" y="641585"/>
-                  </a:lnTo>
-                  <a:lnTo>
-                    <a:pt x="2014223" y="835346"/>
-                  </a:lnTo>
-                  <a:lnTo>
-                    <a:pt x="2091857" y="1016638"/>
-                  </a:lnTo>
-                  <a:lnTo>
-                    <a:pt x="2169491" y="1186264"/>
-                  </a:lnTo>
-                  <a:lnTo>
-                    <a:pt x="2247125" y="1344975"/>
-                  </a:lnTo>
-                  <a:lnTo>
-                    <a:pt x="2324759" y="1493473"/>
-                  </a:lnTo>
-                  <a:lnTo>
-                    <a:pt x="2402393" y="1632415"/>
-                  </a:lnTo>
-                  <a:lnTo>
-                    <a:pt x="2480027" y="1762416"/>
-                  </a:lnTo>
-                  <a:lnTo>
-                    <a:pt x="2557661" y="1884051"/>
-                  </a:lnTo>
-                  <a:lnTo>
-                    <a:pt x="2635295" y="1997860"/>
-                  </a:lnTo>
-                  <a:lnTo>
-                    <a:pt x="2712930" y="2104344"/>
-                  </a:lnTo>
-                  <a:lnTo>
-                    <a:pt x="2790564" y="2203977"/>
-                  </a:lnTo>
-                  <a:lnTo>
-                    <a:pt x="2868198" y="2297198"/>
-                  </a:lnTo>
-                  <a:lnTo>
-                    <a:pt x="2945832" y="2384421"/>
-                  </a:lnTo>
-                  <a:lnTo>
-                    <a:pt x="3023466" y="2466030"/>
-                  </a:lnTo>
-                  <a:lnTo>
-                    <a:pt x="3101100" y="2542389"/>
-                  </a:lnTo>
-                  <a:lnTo>
-                    <a:pt x="3178734" y="2613833"/>
-                  </a:lnTo>
-                  <a:lnTo>
-                    <a:pt x="3256368" y="2680680"/>
-                  </a:lnTo>
-                  <a:lnTo>
-                    <a:pt x="3334002" y="2743226"/>
-                  </a:lnTo>
-                  <a:lnTo>
-                    <a:pt x="3411636" y="2777283"/>
-                  </a:lnTo>
-                  <a:lnTo>
-                    <a:pt x="3489270" y="2759737"/>
-                  </a:lnTo>
-                  <a:lnTo>
-                    <a:pt x="3566904" y="2741840"/>
-                  </a:lnTo>
-                  <a:lnTo>
-                    <a:pt x="3644538" y="2723584"/>
-                  </a:lnTo>
-                  <a:lnTo>
-                    <a:pt x="3722172" y="2704961"/>
-                  </a:lnTo>
-                  <a:lnTo>
-                    <a:pt x="3799806" y="2685966"/>
-                  </a:lnTo>
-                  <a:lnTo>
-                    <a:pt x="3877440" y="2666590"/>
-                  </a:lnTo>
-                  <a:lnTo>
-                    <a:pt x="3955074" y="2646826"/>
-                  </a:lnTo>
-                  <a:lnTo>
-                    <a:pt x="4032708" y="2626665"/>
-                  </a:lnTo>
-                  <a:lnTo>
-                    <a:pt x="4110342" y="2606100"/>
-                  </a:lnTo>
-                  <a:lnTo>
-                    <a:pt x="4187976" y="2585123"/>
-                  </a:lnTo>
-                  <a:lnTo>
-                    <a:pt x="4265610" y="2563726"/>
-                  </a:lnTo>
-                  <a:lnTo>
-                    <a:pt x="4343244" y="2541900"/>
-                  </a:lnTo>
-                  <a:lnTo>
-                    <a:pt x="4420879" y="2519636"/>
-                  </a:lnTo>
-                  <a:lnTo>
-                    <a:pt x="4498513" y="2496926"/>
-                  </a:lnTo>
-                  <a:lnTo>
-                    <a:pt x="4576147" y="2473761"/>
-                  </a:lnTo>
-                  <a:lnTo>
-                    <a:pt x="4653781" y="2450131"/>
-                  </a:lnTo>
-                  <a:lnTo>
-                    <a:pt x="4731415" y="2426028"/>
-                  </a:lnTo>
-                  <a:lnTo>
-                    <a:pt x="4809049" y="2401442"/>
-                  </a:lnTo>
-                  <a:lnTo>
-                    <a:pt x="4886683" y="2376363"/>
-                  </a:lnTo>
-                  <a:lnTo>
-                    <a:pt x="4964317" y="2350781"/>
-                  </a:lnTo>
-                  <a:lnTo>
-                    <a:pt x="5041951" y="2324686"/>
-                  </a:lnTo>
-                  <a:lnTo>
-                    <a:pt x="5119585" y="2298069"/>
-                  </a:lnTo>
-                  <a:lnTo>
-                    <a:pt x="5197219" y="2270918"/>
-                  </a:lnTo>
-                  <a:lnTo>
-                    <a:pt x="5274853" y="2243222"/>
-                  </a:lnTo>
-                  <a:lnTo>
-                    <a:pt x="5352487" y="2214972"/>
-                  </a:lnTo>
-                  <a:lnTo>
-                    <a:pt x="5430121" y="2186155"/>
-                  </a:lnTo>
-                  <a:lnTo>
-                    <a:pt x="5507755" y="2156761"/>
-                  </a:lnTo>
-                  <a:lnTo>
-                    <a:pt x="5585389" y="2126777"/>
-                  </a:lnTo>
-                  <a:lnTo>
-                    <a:pt x="5663023" y="2096193"/>
-                  </a:lnTo>
-                  <a:lnTo>
-                    <a:pt x="5740657" y="2064995"/>
-                  </a:lnTo>
-                  <a:lnTo>
-                    <a:pt x="5818291" y="2033172"/>
-                  </a:lnTo>
-                  <a:lnTo>
-                    <a:pt x="5895925" y="2000712"/>
-                  </a:lnTo>
-                  <a:lnTo>
-                    <a:pt x="5973559" y="1967600"/>
-                  </a:lnTo>
-                  <a:lnTo>
-                    <a:pt x="6051193" y="1933825"/>
-                  </a:lnTo>
-                  <a:lnTo>
-                    <a:pt x="6128827" y="1899373"/>
-                  </a:lnTo>
-                  <a:lnTo>
-                    <a:pt x="6206462" y="1864231"/>
-                  </a:lnTo>
-                  <a:lnTo>
-                    <a:pt x="6284096" y="1828384"/>
-                  </a:lnTo>
-                  <a:lnTo>
-                    <a:pt x="6361730" y="1791818"/>
-                  </a:lnTo>
-                  <a:lnTo>
-                    <a:pt x="6439364" y="1754520"/>
-                  </a:lnTo>
-                  <a:lnTo>
-                    <a:pt x="6516998" y="1716474"/>
-                  </a:lnTo>
-                  <a:lnTo>
-                    <a:pt x="6594632" y="1677665"/>
-                  </a:lnTo>
-                  <a:lnTo>
-                    <a:pt x="6672266" y="1638079"/>
-                  </a:lnTo>
-                  <a:lnTo>
-                    <a:pt x="6749900" y="1597699"/>
-                  </a:lnTo>
-                  <a:lnTo>
-                    <a:pt x="6827534" y="1556510"/>
-                  </a:lnTo>
-                  <a:lnTo>
-                    <a:pt x="6905168" y="1514495"/>
-                  </a:lnTo>
-                  <a:lnTo>
-                    <a:pt x="6982802" y="1471638"/>
-                  </a:lnTo>
-                  <a:lnTo>
-                    <a:pt x="7060436" y="1427922"/>
-                  </a:lnTo>
-                  <a:lnTo>
-                    <a:pt x="7138070" y="1383329"/>
-                  </a:lnTo>
-                  <a:lnTo>
-                    <a:pt x="7215704" y="1337843"/>
-                  </a:lnTo>
-                  <a:lnTo>
-                    <a:pt x="7293338" y="1291445"/>
-                  </a:lnTo>
-                  <a:lnTo>
-                    <a:pt x="7370972" y="1244117"/>
-                  </a:lnTo>
-                  <a:lnTo>
-                    <a:pt x="7370972" y="3624023"/>
-                  </a:lnTo>
-                  <a:lnTo>
-                    <a:pt x="7293338" y="3622055"/>
-                  </a:lnTo>
-                  <a:lnTo>
-                    <a:pt x="7215704" y="3619951"/>
-                  </a:lnTo>
-                  <a:lnTo>
-                    <a:pt x="7138070" y="3617703"/>
-                  </a:lnTo>
-                  <a:lnTo>
-                    <a:pt x="7060436" y="3615300"/>
-                  </a:lnTo>
-                  <a:lnTo>
-                    <a:pt x="6982802" y="3612732"/>
-                  </a:lnTo>
-                  <a:lnTo>
-                    <a:pt x="6905168" y="3609987"/>
-                  </a:lnTo>
-                  <a:lnTo>
-                    <a:pt x="6827534" y="3607053"/>
-                  </a:lnTo>
-                  <a:lnTo>
-                    <a:pt x="6749900" y="3603917"/>
-                  </a:lnTo>
-                  <a:lnTo>
-                    <a:pt x="6672266" y="3600566"/>
-                  </a:lnTo>
-                  <a:lnTo>
-                    <a:pt x="6594632" y="3596985"/>
-                  </a:lnTo>
-                  <a:lnTo>
-                    <a:pt x="6516998" y="3593157"/>
-                  </a:lnTo>
-                  <a:lnTo>
-                    <a:pt x="6439364" y="3589065"/>
-                  </a:lnTo>
-                  <a:lnTo>
-                    <a:pt x="6361730" y="3584693"/>
-                  </a:lnTo>
-                  <a:lnTo>
-                    <a:pt x="6284096" y="3580020"/>
-                  </a:lnTo>
-                  <a:lnTo>
-                    <a:pt x="6206462" y="3575025"/>
-                  </a:lnTo>
-                  <a:lnTo>
-                    <a:pt x="6128827" y="3569687"/>
-                  </a:lnTo>
-                  <a:lnTo>
-                    <a:pt x="6051193" y="3563981"/>
-                  </a:lnTo>
-                  <a:lnTo>
-                    <a:pt x="5973559" y="3557883"/>
-                  </a:lnTo>
-                  <a:lnTo>
-                    <a:pt x="5895925" y="3551366"/>
-                  </a:lnTo>
-                  <a:lnTo>
-                    <a:pt x="5818291" y="3544401"/>
-                  </a:lnTo>
-                  <a:lnTo>
-                    <a:pt x="5740657" y="3536956"/>
-                  </a:lnTo>
-                  <a:lnTo>
-                    <a:pt x="5663023" y="3529000"/>
-                  </a:lnTo>
-                  <a:lnTo>
-                    <a:pt x="5585389" y="3520496"/>
-                  </a:lnTo>
-                  <a:lnTo>
-                    <a:pt x="5507755" y="3511408"/>
-                  </a:lnTo>
-                  <a:lnTo>
-                    <a:pt x="5430121" y="3501694"/>
-                  </a:lnTo>
-                  <a:lnTo>
-                    <a:pt x="5352487" y="3491313"/>
-                  </a:lnTo>
-                  <a:lnTo>
-                    <a:pt x="5274853" y="3480217"/>
-                  </a:lnTo>
-                  <a:lnTo>
-                    <a:pt x="5197219" y="3468359"/>
-                  </a:lnTo>
-                  <a:lnTo>
-                    <a:pt x="5119585" y="3455684"/>
-                  </a:lnTo>
-                  <a:lnTo>
-                    <a:pt x="5041951" y="3442139"/>
-                  </a:lnTo>
-                  <a:lnTo>
-                    <a:pt x="4964317" y="3427661"/>
-                  </a:lnTo>
-                  <a:lnTo>
-                    <a:pt x="4886683" y="3412188"/>
-                  </a:lnTo>
-                  <a:lnTo>
-                    <a:pt x="4809049" y="3395650"/>
-                  </a:lnTo>
-                  <a:lnTo>
-                    <a:pt x="4731415" y="3377976"/>
-                  </a:lnTo>
-                  <a:lnTo>
-                    <a:pt x="4653781" y="3359085"/>
-                  </a:lnTo>
-                  <a:lnTo>
-                    <a:pt x="4576147" y="3338896"/>
-                  </a:lnTo>
-                  <a:lnTo>
-                    <a:pt x="4498513" y="3317318"/>
-                  </a:lnTo>
-                  <a:lnTo>
-                    <a:pt x="4420879" y="3294255"/>
-                  </a:lnTo>
-                  <a:lnTo>
-                    <a:pt x="4343244" y="3269607"/>
-                  </a:lnTo>
-                  <a:lnTo>
-                    <a:pt x="4265610" y="3243264"/>
-                  </a:lnTo>
-                  <a:lnTo>
-                    <a:pt x="4187976" y="3215109"/>
-                  </a:lnTo>
-                  <a:lnTo>
-                    <a:pt x="4110342" y="3185017"/>
-                  </a:lnTo>
-                  <a:lnTo>
-                    <a:pt x="4032708" y="3152856"/>
-                  </a:lnTo>
-                  <a:lnTo>
-                    <a:pt x="3955074" y="3118483"/>
-                  </a:lnTo>
-                  <a:lnTo>
-                    <a:pt x="3877440" y="3081746"/>
-                  </a:lnTo>
-                  <a:lnTo>
-                    <a:pt x="3799806" y="3042482"/>
-                  </a:lnTo>
-                  <a:lnTo>
-                    <a:pt x="3722172" y="3000518"/>
-                  </a:lnTo>
-                  <a:lnTo>
-                    <a:pt x="3644538" y="2955668"/>
-                  </a:lnTo>
-                  <a:lnTo>
-                    <a:pt x="3566904" y="2907733"/>
-                  </a:lnTo>
-                  <a:lnTo>
-                    <a:pt x="3489270" y="2856501"/>
-                  </a:lnTo>
-                  <a:lnTo>
-                    <a:pt x="3411636" y="2801746"/>
-                  </a:lnTo>
-                  <a:lnTo>
-                    <a:pt x="3334002" y="2794484"/>
-                  </a:lnTo>
-                  <a:lnTo>
-                    <a:pt x="3256368" y="2811347"/>
-                  </a:lnTo>
-                  <a:lnTo>
-                    <a:pt x="3178734" y="2827878"/>
-                  </a:lnTo>
-                  <a:lnTo>
-                    <a:pt x="3101100" y="2844085"/>
-                  </a:lnTo>
-                  <a:lnTo>
-                    <a:pt x="3023466" y="2859973"/>
-                  </a:lnTo>
-                  <a:lnTo>
-                    <a:pt x="2945832" y="2875549"/>
-                  </a:lnTo>
-                  <a:lnTo>
-                    <a:pt x="2868198" y="2890819"/>
-                  </a:lnTo>
-                  <a:lnTo>
-                    <a:pt x="2790564" y="2905789"/>
-                  </a:lnTo>
-                  <a:lnTo>
-                    <a:pt x="2712930" y="2920465"/>
-                  </a:lnTo>
-                  <a:lnTo>
-                    <a:pt x="2635295" y="2934853"/>
-                  </a:lnTo>
-                  <a:lnTo>
-                    <a:pt x="2557661" y="2948957"/>
-                  </a:lnTo>
-                  <a:lnTo>
-                    <a:pt x="2480027" y="2962785"/>
-                  </a:lnTo>
-                  <a:lnTo>
-                    <a:pt x="2402393" y="2976341"/>
-                  </a:lnTo>
-                  <a:lnTo>
-                    <a:pt x="2324759" y="2989630"/>
-                  </a:lnTo>
-                  <a:lnTo>
-                    <a:pt x="2247125" y="3002658"/>
-                  </a:lnTo>
-                  <a:lnTo>
-                    <a:pt x="2169491" y="3015431"/>
-                  </a:lnTo>
-                  <a:lnTo>
-                    <a:pt x="2091857" y="3027952"/>
-                  </a:lnTo>
-                  <a:lnTo>
-                    <a:pt x="2014223" y="3040227"/>
-                  </a:lnTo>
-                  <a:lnTo>
-                    <a:pt x="1936589" y="3052261"/>
-                  </a:lnTo>
-                  <a:lnTo>
-                    <a:pt x="1858955" y="3064059"/>
-                  </a:lnTo>
-                  <a:lnTo>
-                    <a:pt x="1781321" y="3075625"/>
-                  </a:lnTo>
-                  <a:lnTo>
-                    <a:pt x="1703687" y="3086963"/>
-                  </a:lnTo>
-                  <a:lnTo>
-                    <a:pt x="1626053" y="3098079"/>
-                  </a:lnTo>
-                  <a:lnTo>
-                    <a:pt x="1548419" y="3108976"/>
-                  </a:lnTo>
-                  <a:lnTo>
-                    <a:pt x="1470785" y="3119659"/>
-                  </a:lnTo>
-                  <a:lnTo>
-                    <a:pt x="1393151" y="3130132"/>
-                  </a:lnTo>
-                  <a:lnTo>
-                    <a:pt x="1315517" y="3140400"/>
-                  </a:lnTo>
-                  <a:lnTo>
-                    <a:pt x="1237883" y="3150466"/>
-                  </a:lnTo>
-                  <a:lnTo>
-                    <a:pt x="1160249" y="3160333"/>
-                  </a:lnTo>
-                  <a:lnTo>
-                    <a:pt x="1082615" y="3170007"/>
-                  </a:lnTo>
-                  <a:lnTo>
-                    <a:pt x="1004981" y="3179491"/>
-                  </a:lnTo>
-                  <a:lnTo>
-                    <a:pt x="927346" y="3188789"/>
-                  </a:lnTo>
-                  <a:lnTo>
-                    <a:pt x="849712" y="3197904"/>
-                  </a:lnTo>
-                  <a:lnTo>
-                    <a:pt x="772078" y="3206839"/>
-                  </a:lnTo>
-                  <a:lnTo>
-                    <a:pt x="694444" y="3215599"/>
-                  </a:lnTo>
-                  <a:lnTo>
-                    <a:pt x="616810" y="3224187"/>
-                  </a:lnTo>
-                  <a:lnTo>
-                    <a:pt x="539176" y="3232607"/>
-                  </a:lnTo>
-                  <a:lnTo>
-                    <a:pt x="461542" y="3240860"/>
-                  </a:lnTo>
-                  <a:lnTo>
-                    <a:pt x="383908" y="3248952"/>
-                  </a:lnTo>
-                  <a:lnTo>
-                    <a:pt x="306274" y="3256885"/>
-                  </a:lnTo>
-                  <a:lnTo>
-                    <a:pt x="228640" y="3264661"/>
-                  </a:lnTo>
-                  <a:lnTo>
-                    <a:pt x="151006" y="3272285"/>
-                  </a:lnTo>
-                  <a:lnTo>
-                    <a:pt x="73372" y="3279759"/>
-                  </a:lnTo>
-                  <a:lnTo>
-                    <a:pt x="0" y="3286684"/>
+                    <a:pt x="1858955" y="29915"/>
+                  </a:lnTo>
+                  <a:lnTo>
+                    <a:pt x="1936589" y="283380"/>
+                  </a:lnTo>
+                  <a:lnTo>
+                    <a:pt x="2014223" y="519112"/>
+                  </a:lnTo>
+                  <a:lnTo>
+                    <a:pt x="2091857" y="738350"/>
+                  </a:lnTo>
+                  <a:lnTo>
+                    <a:pt x="2169491" y="942250"/>
+                  </a:lnTo>
+                  <a:lnTo>
+                    <a:pt x="2247125" y="1131883"/>
+                  </a:lnTo>
+                  <a:lnTo>
+                    <a:pt x="2324759" y="1308249"/>
+                  </a:lnTo>
+                  <a:lnTo>
+                    <a:pt x="2402393" y="1472275"/>
+                  </a:lnTo>
+                  <a:lnTo>
+                    <a:pt x="2480027" y="1624825"/>
+                  </a:lnTo>
+                  <a:lnTo>
+                    <a:pt x="2557661" y="1766702"/>
+                  </a:lnTo>
+                  <a:lnTo>
+                    <a:pt x="2635295" y="1898653"/>
+                  </a:lnTo>
+                  <a:lnTo>
+                    <a:pt x="2712930" y="2021371"/>
+                  </a:lnTo>
+                  <a:lnTo>
+                    <a:pt x="2790564" y="2135504"/>
+                  </a:lnTo>
+                  <a:lnTo>
+                    <a:pt x="2868198" y="2241651"/>
+                  </a:lnTo>
+                  <a:lnTo>
+                    <a:pt x="2945832" y="2340371"/>
+                  </a:lnTo>
+                  <a:lnTo>
+                    <a:pt x="3023466" y="2432185"/>
+                  </a:lnTo>
+                  <a:lnTo>
+                    <a:pt x="3101100" y="2517575"/>
+                  </a:lnTo>
+                  <a:lnTo>
+                    <a:pt x="3178734" y="2596990"/>
+                  </a:lnTo>
+                  <a:lnTo>
+                    <a:pt x="3256368" y="2670849"/>
+                  </a:lnTo>
+                  <a:lnTo>
+                    <a:pt x="3334002" y="2739541"/>
+                  </a:lnTo>
+                  <a:lnTo>
+                    <a:pt x="3411636" y="2778933"/>
+                  </a:lnTo>
+                  <a:lnTo>
+                    <a:pt x="3489270" y="2766528"/>
+                  </a:lnTo>
+                  <a:lnTo>
+                    <a:pt x="3566904" y="2753948"/>
+                  </a:lnTo>
+                  <a:lnTo>
+                    <a:pt x="3644538" y="2741189"/>
+                  </a:lnTo>
+                  <a:lnTo>
+                    <a:pt x="3722172" y="2728248"/>
+                  </a:lnTo>
+                  <a:lnTo>
+                    <a:pt x="3799806" y="2715124"/>
+                  </a:lnTo>
+                  <a:lnTo>
+                    <a:pt x="3877440" y="2701814"/>
+                  </a:lnTo>
+                  <a:lnTo>
+                    <a:pt x="3955074" y="2688315"/>
+                  </a:lnTo>
+                  <a:lnTo>
+                    <a:pt x="4032708" y="2674624"/>
+                  </a:lnTo>
+                  <a:lnTo>
+                    <a:pt x="4110342" y="2660738"/>
+                  </a:lnTo>
+                  <a:lnTo>
+                    <a:pt x="4187976" y="2646656"/>
+                  </a:lnTo>
+                  <a:lnTo>
+                    <a:pt x="4265610" y="2632373"/>
+                  </a:lnTo>
+                  <a:lnTo>
+                    <a:pt x="4343244" y="2617888"/>
+                  </a:lnTo>
+                  <a:lnTo>
+                    <a:pt x="4420879" y="2603197"/>
+                  </a:lnTo>
+                  <a:lnTo>
+                    <a:pt x="4498513" y="2588298"/>
+                  </a:lnTo>
+                  <a:lnTo>
+                    <a:pt x="4576147" y="2573187"/>
+                  </a:lnTo>
+                  <a:lnTo>
+                    <a:pt x="4653781" y="2557861"/>
+                  </a:lnTo>
+                  <a:lnTo>
+                    <a:pt x="4731415" y="2542318"/>
+                  </a:lnTo>
+                  <a:lnTo>
+                    <a:pt x="4809049" y="2526555"/>
+                  </a:lnTo>
+                  <a:lnTo>
+                    <a:pt x="4886683" y="2510567"/>
+                  </a:lnTo>
+                  <a:lnTo>
+                    <a:pt x="4964317" y="2494353"/>
+                  </a:lnTo>
+                  <a:lnTo>
+                    <a:pt x="5041951" y="2477908"/>
+                  </a:lnTo>
+                  <a:lnTo>
+                    <a:pt x="5119585" y="2461230"/>
+                  </a:lnTo>
+                  <a:lnTo>
+                    <a:pt x="5197219" y="2444315"/>
+                  </a:lnTo>
+                  <a:lnTo>
+                    <a:pt x="5274853" y="2427159"/>
+                  </a:lnTo>
+                  <a:lnTo>
+                    <a:pt x="5352487" y="2409761"/>
+                  </a:lnTo>
+                  <a:lnTo>
+                    <a:pt x="5430121" y="2392115"/>
+                  </a:lnTo>
+                  <a:lnTo>
+                    <a:pt x="5507755" y="2374219"/>
+                  </a:lnTo>
+                  <a:lnTo>
+                    <a:pt x="5585389" y="2356068"/>
+                  </a:lnTo>
+                  <a:lnTo>
+                    <a:pt x="5663023" y="2337660"/>
+                  </a:lnTo>
+                  <a:lnTo>
+                    <a:pt x="5740657" y="2318991"/>
+                  </a:lnTo>
+                  <a:lnTo>
+                    <a:pt x="5818291" y="2300057"/>
+                  </a:lnTo>
+                  <a:lnTo>
+                    <a:pt x="5895925" y="2280853"/>
+                  </a:lnTo>
+                  <a:lnTo>
+                    <a:pt x="5973559" y="2261377"/>
+                  </a:lnTo>
+                  <a:lnTo>
+                    <a:pt x="6051193" y="2241625"/>
+                  </a:lnTo>
+                  <a:lnTo>
+                    <a:pt x="6128827" y="2221592"/>
+                  </a:lnTo>
+                  <a:lnTo>
+                    <a:pt x="6206462" y="2201275"/>
+                  </a:lnTo>
+                  <a:lnTo>
+                    <a:pt x="6284096" y="2180669"/>
+                  </a:lnTo>
+                  <a:lnTo>
+                    <a:pt x="6361730" y="2159771"/>
+                  </a:lnTo>
+                  <a:lnTo>
+                    <a:pt x="6439364" y="2138576"/>
+                  </a:lnTo>
+                  <a:lnTo>
+                    <a:pt x="6516998" y="2117080"/>
+                  </a:lnTo>
+                  <a:lnTo>
+                    <a:pt x="6594632" y="2095279"/>
+                  </a:lnTo>
+                  <a:lnTo>
+                    <a:pt x="6672266" y="2073169"/>
+                  </a:lnTo>
+                  <a:lnTo>
+                    <a:pt x="6749900" y="2050744"/>
+                  </a:lnTo>
+                  <a:lnTo>
+                    <a:pt x="6827534" y="2028001"/>
+                  </a:lnTo>
+                  <a:lnTo>
+                    <a:pt x="6905168" y="2004936"/>
+                  </a:lnTo>
+                  <a:lnTo>
+                    <a:pt x="6982802" y="1981543"/>
+                  </a:lnTo>
+                  <a:lnTo>
+                    <a:pt x="7060436" y="1957817"/>
+                  </a:lnTo>
+                  <a:lnTo>
+                    <a:pt x="7138070" y="1933755"/>
+                  </a:lnTo>
+                  <a:lnTo>
+                    <a:pt x="7215704" y="1909351"/>
+                  </a:lnTo>
+                  <a:lnTo>
+                    <a:pt x="7293338" y="1884601"/>
+                  </a:lnTo>
+                  <a:lnTo>
+                    <a:pt x="7370972" y="1859499"/>
+                  </a:lnTo>
+                  <a:lnTo>
+                    <a:pt x="7370972" y="3631631"/>
+                  </a:lnTo>
+                  <a:lnTo>
+                    <a:pt x="7293338" y="3630050"/>
+                  </a:lnTo>
+                  <a:lnTo>
+                    <a:pt x="7215704" y="3628351"/>
+                  </a:lnTo>
+                  <a:lnTo>
+                    <a:pt x="7138070" y="3626523"/>
+                  </a:lnTo>
+                  <a:lnTo>
+                    <a:pt x="7060436" y="3624558"/>
+                  </a:lnTo>
+                  <a:lnTo>
+                    <a:pt x="6982802" y="3622445"/>
+                  </a:lnTo>
+                  <a:lnTo>
+                    <a:pt x="6905168" y="3620173"/>
+                  </a:lnTo>
+                  <a:lnTo>
+                    <a:pt x="6827534" y="3617731"/>
+                  </a:lnTo>
+                  <a:lnTo>
+                    <a:pt x="6749900" y="3615104"/>
+                  </a:lnTo>
+                  <a:lnTo>
+                    <a:pt x="6672266" y="3612280"/>
+                  </a:lnTo>
+                  <a:lnTo>
+                    <a:pt x="6594632" y="3609244"/>
+                  </a:lnTo>
+                  <a:lnTo>
+                    <a:pt x="6516998" y="3605979"/>
+                  </a:lnTo>
+                  <a:lnTo>
+                    <a:pt x="6439364" y="3602468"/>
+                  </a:lnTo>
+                  <a:lnTo>
+                    <a:pt x="6361730" y="3598694"/>
+                  </a:lnTo>
+                  <a:lnTo>
+                    <a:pt x="6284096" y="3594635"/>
+                  </a:lnTo>
+                  <a:lnTo>
+                    <a:pt x="6206462" y="3590271"/>
+                  </a:lnTo>
+                  <a:lnTo>
+                    <a:pt x="6128827" y="3585579"/>
+                  </a:lnTo>
+                  <a:lnTo>
+                    <a:pt x="6051193" y="3580534"/>
+                  </a:lnTo>
+                  <a:lnTo>
+                    <a:pt x="5973559" y="3575110"/>
+                  </a:lnTo>
+                  <a:lnTo>
+                    <a:pt x="5895925" y="3569277"/>
+                  </a:lnTo>
+                  <a:lnTo>
+                    <a:pt x="5818291" y="3563005"/>
+                  </a:lnTo>
+                  <a:lnTo>
+                    <a:pt x="5740657" y="3556262"/>
+                  </a:lnTo>
+                  <a:lnTo>
+                    <a:pt x="5663023" y="3549011"/>
+                  </a:lnTo>
+                  <a:lnTo>
+                    <a:pt x="5585389" y="3541215"/>
+                  </a:lnTo>
+                  <a:lnTo>
+                    <a:pt x="5507755" y="3532833"/>
+                  </a:lnTo>
+                  <a:lnTo>
+                    <a:pt x="5430121" y="3523819"/>
+                  </a:lnTo>
+                  <a:lnTo>
+                    <a:pt x="5352487" y="3514128"/>
+                  </a:lnTo>
+                  <a:lnTo>
+                    <a:pt x="5274853" y="3503708"/>
+                  </a:lnTo>
+                  <a:lnTo>
+                    <a:pt x="5197219" y="3492503"/>
+                  </a:lnTo>
+                  <a:lnTo>
+                    <a:pt x="5119585" y="3480456"/>
+                  </a:lnTo>
+                  <a:lnTo>
+                    <a:pt x="5041951" y="3467503"/>
+                  </a:lnTo>
+                  <a:lnTo>
+                    <a:pt x="4964317" y="3453575"/>
+                  </a:lnTo>
+                  <a:lnTo>
+                    <a:pt x="4886683" y="3438599"/>
+                  </a:lnTo>
+                  <a:lnTo>
+                    <a:pt x="4809049" y="3422497"/>
+                  </a:lnTo>
+                  <a:lnTo>
+                    <a:pt x="4731415" y="3405184"/>
+                  </a:lnTo>
+                  <a:lnTo>
+                    <a:pt x="4653781" y="3386568"/>
+                  </a:lnTo>
+                  <a:lnTo>
+                    <a:pt x="4576147" y="3366551"/>
+                  </a:lnTo>
+                  <a:lnTo>
+                    <a:pt x="4498513" y="3345029"/>
+                  </a:lnTo>
+                  <a:lnTo>
+                    <a:pt x="4420879" y="3321887"/>
+                  </a:lnTo>
+                  <a:lnTo>
+                    <a:pt x="4343244" y="3297005"/>
+                  </a:lnTo>
+                  <a:lnTo>
+                    <a:pt x="4265610" y="3270251"/>
+                  </a:lnTo>
+                  <a:lnTo>
+                    <a:pt x="4187976" y="3241484"/>
+                  </a:lnTo>
+                  <a:lnTo>
+                    <a:pt x="4110342" y="3210553"/>
+                  </a:lnTo>
+                  <a:lnTo>
+                    <a:pt x="4032708" y="3177295"/>
+                  </a:lnTo>
+                  <a:lnTo>
+                    <a:pt x="3955074" y="3141535"/>
+                  </a:lnTo>
+                  <a:lnTo>
+                    <a:pt x="3877440" y="3103085"/>
+                  </a:lnTo>
+                  <a:lnTo>
+                    <a:pt x="3799806" y="3061743"/>
+                  </a:lnTo>
+                  <a:lnTo>
+                    <a:pt x="3722172" y="3017290"/>
+                  </a:lnTo>
+                  <a:lnTo>
+                    <a:pt x="3644538" y="2969493"/>
+                  </a:lnTo>
+                  <a:lnTo>
+                    <a:pt x="3566904" y="2918101"/>
+                  </a:lnTo>
+                  <a:lnTo>
+                    <a:pt x="3489270" y="2862842"/>
+                  </a:lnTo>
+                  <a:lnTo>
+                    <a:pt x="3411636" y="2803426"/>
+                  </a:lnTo>
+                  <a:lnTo>
+                    <a:pt x="3334002" y="2791164"/>
+                  </a:lnTo>
+                  <a:lnTo>
+                    <a:pt x="3256368" y="2803223"/>
+                  </a:lnTo>
+                  <a:lnTo>
+                    <a:pt x="3178734" y="2815114"/>
+                  </a:lnTo>
+                  <a:lnTo>
+                    <a:pt x="3101100" y="2826838"/>
+                  </a:lnTo>
+                  <a:lnTo>
+                    <a:pt x="3023466" y="2838398"/>
+                  </a:lnTo>
+                  <a:lnTo>
+                    <a:pt x="2945832" y="2849797"/>
+                  </a:lnTo>
+                  <a:lnTo>
+                    <a:pt x="2868198" y="2861036"/>
+                  </a:lnTo>
+                  <a:lnTo>
+                    <a:pt x="2790564" y="2872117"/>
+                  </a:lnTo>
+                  <a:lnTo>
+                    <a:pt x="2712930" y="2883043"/>
+                  </a:lnTo>
+                  <a:lnTo>
+                    <a:pt x="2635295" y="2893817"/>
+                  </a:lnTo>
+                  <a:lnTo>
+                    <a:pt x="2557661" y="2904439"/>
+                  </a:lnTo>
+                  <a:lnTo>
+                    <a:pt x="2480027" y="2914913"/>
+                  </a:lnTo>
+                  <a:lnTo>
+                    <a:pt x="2402393" y="2925240"/>
+                  </a:lnTo>
+                  <a:lnTo>
+                    <a:pt x="2324759" y="2935423"/>
+                  </a:lnTo>
+                  <a:lnTo>
+                    <a:pt x="2247125" y="2945463"/>
+                  </a:lnTo>
+                  <a:lnTo>
+                    <a:pt x="2169491" y="2955363"/>
+                  </a:lnTo>
+                  <a:lnTo>
+                    <a:pt x="2091857" y="2965124"/>
+                  </a:lnTo>
+                  <a:lnTo>
+                    <a:pt x="2014223" y="2974748"/>
+                  </a:lnTo>
+                  <a:lnTo>
+                    <a:pt x="1936589" y="2984238"/>
+                  </a:lnTo>
+                  <a:lnTo>
+                    <a:pt x="1858955" y="2993595"/>
+                  </a:lnTo>
+                  <a:lnTo>
+                    <a:pt x="1781321" y="3002820"/>
+                  </a:lnTo>
+                  <a:lnTo>
+                    <a:pt x="1703687" y="3011917"/>
+                  </a:lnTo>
+                  <a:lnTo>
+                    <a:pt x="1626053" y="3020886"/>
+                  </a:lnTo>
+                  <a:lnTo>
+                    <a:pt x="1548419" y="3029730"/>
+                  </a:lnTo>
+                  <a:lnTo>
+                    <a:pt x="1470785" y="3038450"/>
+                  </a:lnTo>
+                  <a:lnTo>
+                    <a:pt x="1393151" y="3047048"/>
+                  </a:lnTo>
+                  <a:lnTo>
+                    <a:pt x="1315517" y="3055526"/>
+                  </a:lnTo>
+                  <a:lnTo>
+                    <a:pt x="1237883" y="3063884"/>
+                  </a:lnTo>
+                  <a:lnTo>
+                    <a:pt x="1160249" y="3072126"/>
+                  </a:lnTo>
+                  <a:lnTo>
+                    <a:pt x="1082615" y="3080253"/>
+                  </a:lnTo>
+                  <a:lnTo>
+                    <a:pt x="1004981" y="3088265"/>
+                  </a:lnTo>
+                  <a:lnTo>
+                    <a:pt x="927346" y="3096166"/>
+                  </a:lnTo>
+                  <a:lnTo>
+                    <a:pt x="849712" y="3103956"/>
+                  </a:lnTo>
+                  <a:lnTo>
+                    <a:pt x="772078" y="3111637"/>
+                  </a:lnTo>
+                  <a:lnTo>
+                    <a:pt x="694444" y="3119210"/>
+                  </a:lnTo>
+                  <a:lnTo>
+                    <a:pt x="616810" y="3126678"/>
+                  </a:lnTo>
+                  <a:lnTo>
+                    <a:pt x="539176" y="3134040"/>
+                  </a:lnTo>
+                  <a:lnTo>
+                    <a:pt x="461542" y="3141300"/>
+                  </a:lnTo>
+                  <a:lnTo>
+                    <a:pt x="383908" y="3148458"/>
+                  </a:lnTo>
+                  <a:lnTo>
+                    <a:pt x="306274" y="3155516"/>
+                  </a:lnTo>
+                  <a:lnTo>
+                    <a:pt x="228640" y="3162475"/>
+                  </a:lnTo>
+                  <a:lnTo>
+                    <a:pt x="151006" y="3169337"/>
+                  </a:lnTo>
+                  <a:lnTo>
+                    <a:pt x="73372" y="3176103"/>
+                  </a:lnTo>
+                  <a:lnTo>
+                    <a:pt x="0" y="3182407"/>
                   </a:lnTo>
                   <a:close/>
                 </a:path>
@@ -3543,234 +3540,231 @@
           </p:nvSpPr>
           <p:spPr>
             <a:xfrm>
-              <a:off x="2528878" y="1896563"/>
-              <a:ext cx="5659611" cy="2777283"/>
+              <a:off x="2667951" y="1896563"/>
+              <a:ext cx="5520539" cy="2778933"/>
             </a:xfrm>
             <a:custGeom>
               <a:avLst/>
               <a:pathLst>
-                <a:path w="5659611" h="2777283">
+                <a:path w="5520539" h="2778933">
                   <a:moveTo>
                     <a:pt x="0" y="0"/>
                   </a:moveTo>
                   <a:lnTo>
-                    <a:pt x="69960" y="213170"/>
-                  </a:lnTo>
-                  <a:lnTo>
-                    <a:pt x="147594" y="434499"/>
-                  </a:lnTo>
-                  <a:lnTo>
-                    <a:pt x="225228" y="641585"/>
-                  </a:lnTo>
-                  <a:lnTo>
-                    <a:pt x="302862" y="835346"/>
-                  </a:lnTo>
-                  <a:lnTo>
-                    <a:pt x="380496" y="1016638"/>
-                  </a:lnTo>
-                  <a:lnTo>
-                    <a:pt x="458130" y="1186264"/>
-                  </a:lnTo>
-                  <a:lnTo>
-                    <a:pt x="535764" y="1344975"/>
-                  </a:lnTo>
-                  <a:lnTo>
-                    <a:pt x="613399" y="1493473"/>
-                  </a:lnTo>
-                  <a:lnTo>
-                    <a:pt x="691033" y="1632415"/>
-                  </a:lnTo>
-                  <a:lnTo>
-                    <a:pt x="768667" y="1762416"/>
-                  </a:lnTo>
-                  <a:lnTo>
-                    <a:pt x="846301" y="1884051"/>
-                  </a:lnTo>
-                  <a:lnTo>
-                    <a:pt x="923935" y="1997860"/>
-                  </a:lnTo>
-                  <a:lnTo>
-                    <a:pt x="1001569" y="2104344"/>
-                  </a:lnTo>
-                  <a:lnTo>
-                    <a:pt x="1079203" y="2203977"/>
-                  </a:lnTo>
-                  <a:lnTo>
-                    <a:pt x="1156837" y="2297198"/>
-                  </a:lnTo>
-                  <a:lnTo>
-                    <a:pt x="1234471" y="2384421"/>
-                  </a:lnTo>
-                  <a:lnTo>
-                    <a:pt x="1312105" y="2466030"/>
-                  </a:lnTo>
-                  <a:lnTo>
-                    <a:pt x="1389739" y="2542389"/>
-                  </a:lnTo>
-                  <a:lnTo>
-                    <a:pt x="1467373" y="2613833"/>
-                  </a:lnTo>
-                  <a:lnTo>
-                    <a:pt x="1545007" y="2680680"/>
-                  </a:lnTo>
-                  <a:lnTo>
-                    <a:pt x="1622641" y="2743226"/>
-                  </a:lnTo>
-                  <a:lnTo>
-                    <a:pt x="1700275" y="2777283"/>
-                  </a:lnTo>
-                  <a:lnTo>
-                    <a:pt x="1777909" y="2759737"/>
-                  </a:lnTo>
-                  <a:lnTo>
-                    <a:pt x="1855543" y="2741840"/>
-                  </a:lnTo>
-                  <a:lnTo>
-                    <a:pt x="1933177" y="2723584"/>
-                  </a:lnTo>
-                  <a:lnTo>
-                    <a:pt x="2010811" y="2704961"/>
-                  </a:lnTo>
-                  <a:lnTo>
-                    <a:pt x="2088445" y="2685966"/>
-                  </a:lnTo>
-                  <a:lnTo>
-                    <a:pt x="2166079" y="2666590"/>
-                  </a:lnTo>
-                  <a:lnTo>
-                    <a:pt x="2243713" y="2646826"/>
-                  </a:lnTo>
-                  <a:lnTo>
-                    <a:pt x="2321348" y="2626665"/>
-                  </a:lnTo>
-                  <a:lnTo>
-                    <a:pt x="2398982" y="2606100"/>
-                  </a:lnTo>
-                  <a:lnTo>
-                    <a:pt x="2476616" y="2585123"/>
-                  </a:lnTo>
-                  <a:lnTo>
-                    <a:pt x="2554250" y="2563726"/>
-                  </a:lnTo>
-                  <a:lnTo>
-                    <a:pt x="2631884" y="2541900"/>
-                  </a:lnTo>
-                  <a:lnTo>
-                    <a:pt x="2709518" y="2519636"/>
-                  </a:lnTo>
-                  <a:lnTo>
-                    <a:pt x="2787152" y="2496926"/>
-                  </a:lnTo>
-                  <a:lnTo>
-                    <a:pt x="2864786" y="2473761"/>
-                  </a:lnTo>
-                  <a:lnTo>
-                    <a:pt x="2942420" y="2450131"/>
-                  </a:lnTo>
-                  <a:lnTo>
-                    <a:pt x="3020054" y="2426028"/>
-                  </a:lnTo>
-                  <a:lnTo>
-                    <a:pt x="3097688" y="2401442"/>
-                  </a:lnTo>
-                  <a:lnTo>
-                    <a:pt x="3175322" y="2376363"/>
-                  </a:lnTo>
-                  <a:lnTo>
-                    <a:pt x="3252956" y="2350781"/>
-                  </a:lnTo>
-                  <a:lnTo>
-                    <a:pt x="3330590" y="2324686"/>
-                  </a:lnTo>
-                  <a:lnTo>
-                    <a:pt x="3408224" y="2298069"/>
-                  </a:lnTo>
-                  <a:lnTo>
-                    <a:pt x="3485858" y="2270918"/>
-                  </a:lnTo>
-                  <a:lnTo>
-                    <a:pt x="3563492" y="2243222"/>
-                  </a:lnTo>
-                  <a:lnTo>
-                    <a:pt x="3641126" y="2214972"/>
-                  </a:lnTo>
-                  <a:lnTo>
-                    <a:pt x="3718760" y="2186155"/>
-                  </a:lnTo>
-                  <a:lnTo>
-                    <a:pt x="3796394" y="2156761"/>
-                  </a:lnTo>
-                  <a:lnTo>
-                    <a:pt x="3874028" y="2126777"/>
-                  </a:lnTo>
-                  <a:lnTo>
-                    <a:pt x="3951662" y="2096193"/>
-                  </a:lnTo>
-                  <a:lnTo>
-                    <a:pt x="4029297" y="2064995"/>
-                  </a:lnTo>
-                  <a:lnTo>
-                    <a:pt x="4106931" y="2033172"/>
-                  </a:lnTo>
-                  <a:lnTo>
-                    <a:pt x="4184565" y="2000712"/>
-                  </a:lnTo>
-                  <a:lnTo>
-                    <a:pt x="4262199" y="1967600"/>
-                  </a:lnTo>
-                  <a:lnTo>
-                    <a:pt x="4339833" y="1933825"/>
-                  </a:lnTo>
-                  <a:lnTo>
-                    <a:pt x="4417467" y="1899373"/>
-                  </a:lnTo>
-                  <a:lnTo>
-                    <a:pt x="4495101" y="1864231"/>
-                  </a:lnTo>
-                  <a:lnTo>
-                    <a:pt x="4572735" y="1828384"/>
-                  </a:lnTo>
-                  <a:lnTo>
-                    <a:pt x="4650369" y="1791818"/>
-                  </a:lnTo>
-                  <a:lnTo>
-                    <a:pt x="4728003" y="1754520"/>
-                  </a:lnTo>
-                  <a:lnTo>
-                    <a:pt x="4805637" y="1716474"/>
-                  </a:lnTo>
-                  <a:lnTo>
-                    <a:pt x="4883271" y="1677665"/>
-                  </a:lnTo>
-                  <a:lnTo>
-                    <a:pt x="4960905" y="1638079"/>
-                  </a:lnTo>
-                  <a:lnTo>
-                    <a:pt x="5038539" y="1597699"/>
-                  </a:lnTo>
-                  <a:lnTo>
-                    <a:pt x="5116173" y="1556510"/>
-                  </a:lnTo>
-                  <a:lnTo>
-                    <a:pt x="5193807" y="1514495"/>
-                  </a:lnTo>
-                  <a:lnTo>
-                    <a:pt x="5271441" y="1471638"/>
-                  </a:lnTo>
-                  <a:lnTo>
-                    <a:pt x="5349075" y="1427922"/>
-                  </a:lnTo>
-                  <a:lnTo>
-                    <a:pt x="5426709" y="1383329"/>
-                  </a:lnTo>
-                  <a:lnTo>
-                    <a:pt x="5504343" y="1337843"/>
-                  </a:lnTo>
-                  <a:lnTo>
-                    <a:pt x="5581977" y="1291445"/>
-                  </a:lnTo>
-                  <a:lnTo>
-                    <a:pt x="5659611" y="1244117"/>
+                    <a:pt x="8521" y="29915"/>
+                  </a:lnTo>
+                  <a:lnTo>
+                    <a:pt x="86155" y="283380"/>
+                  </a:lnTo>
+                  <a:lnTo>
+                    <a:pt x="163789" y="519112"/>
+                  </a:lnTo>
+                  <a:lnTo>
+                    <a:pt x="241423" y="738350"/>
+                  </a:lnTo>
+                  <a:lnTo>
+                    <a:pt x="319057" y="942250"/>
+                  </a:lnTo>
+                  <a:lnTo>
+                    <a:pt x="396692" y="1131883"/>
+                  </a:lnTo>
+                  <a:lnTo>
+                    <a:pt x="474326" y="1308249"/>
+                  </a:lnTo>
+                  <a:lnTo>
+                    <a:pt x="551960" y="1472275"/>
+                  </a:lnTo>
+                  <a:lnTo>
+                    <a:pt x="629594" y="1624825"/>
+                  </a:lnTo>
+                  <a:lnTo>
+                    <a:pt x="707228" y="1766702"/>
+                  </a:lnTo>
+                  <a:lnTo>
+                    <a:pt x="784862" y="1898653"/>
+                  </a:lnTo>
+                  <a:lnTo>
+                    <a:pt x="862496" y="2021371"/>
+                  </a:lnTo>
+                  <a:lnTo>
+                    <a:pt x="940130" y="2135504"/>
+                  </a:lnTo>
+                  <a:lnTo>
+                    <a:pt x="1017764" y="2241651"/>
+                  </a:lnTo>
+                  <a:lnTo>
+                    <a:pt x="1095398" y="2340371"/>
+                  </a:lnTo>
+                  <a:lnTo>
+                    <a:pt x="1173032" y="2432185"/>
+                  </a:lnTo>
+                  <a:lnTo>
+                    <a:pt x="1250666" y="2517575"/>
+                  </a:lnTo>
+                  <a:lnTo>
+                    <a:pt x="1328300" y="2596990"/>
+                  </a:lnTo>
+                  <a:lnTo>
+                    <a:pt x="1405934" y="2670849"/>
+                  </a:lnTo>
+                  <a:lnTo>
+                    <a:pt x="1483568" y="2739541"/>
+                  </a:lnTo>
+                  <a:lnTo>
+                    <a:pt x="1561202" y="2778933"/>
+                  </a:lnTo>
+                  <a:lnTo>
+                    <a:pt x="1638836" y="2766528"/>
+                  </a:lnTo>
+                  <a:lnTo>
+                    <a:pt x="1716470" y="2753948"/>
+                  </a:lnTo>
+                  <a:lnTo>
+                    <a:pt x="1794104" y="2741189"/>
+                  </a:lnTo>
+                  <a:lnTo>
+                    <a:pt x="1871738" y="2728248"/>
+                  </a:lnTo>
+                  <a:lnTo>
+                    <a:pt x="1949372" y="2715124"/>
+                  </a:lnTo>
+                  <a:lnTo>
+                    <a:pt x="2027006" y="2701814"/>
+                  </a:lnTo>
+                  <a:lnTo>
+                    <a:pt x="2104641" y="2688315"/>
+                  </a:lnTo>
+                  <a:lnTo>
+                    <a:pt x="2182275" y="2674624"/>
+                  </a:lnTo>
+                  <a:lnTo>
+                    <a:pt x="2259909" y="2660738"/>
+                  </a:lnTo>
+                  <a:lnTo>
+                    <a:pt x="2337543" y="2646656"/>
+                  </a:lnTo>
+                  <a:lnTo>
+                    <a:pt x="2415177" y="2632373"/>
+                  </a:lnTo>
+                  <a:lnTo>
+                    <a:pt x="2492811" y="2617888"/>
+                  </a:lnTo>
+                  <a:lnTo>
+                    <a:pt x="2570445" y="2603197"/>
+                  </a:lnTo>
+                  <a:lnTo>
+                    <a:pt x="2648079" y="2588298"/>
+                  </a:lnTo>
+                  <a:lnTo>
+                    <a:pt x="2725713" y="2573187"/>
+                  </a:lnTo>
+                  <a:lnTo>
+                    <a:pt x="2803347" y="2557861"/>
+                  </a:lnTo>
+                  <a:lnTo>
+                    <a:pt x="2880981" y="2542318"/>
+                  </a:lnTo>
+                  <a:lnTo>
+                    <a:pt x="2958615" y="2526555"/>
+                  </a:lnTo>
+                  <a:lnTo>
+                    <a:pt x="3036249" y="2510567"/>
+                  </a:lnTo>
+                  <a:lnTo>
+                    <a:pt x="3113883" y="2494353"/>
+                  </a:lnTo>
+                  <a:lnTo>
+                    <a:pt x="3191517" y="2477908"/>
+                  </a:lnTo>
+                  <a:lnTo>
+                    <a:pt x="3269151" y="2461230"/>
+                  </a:lnTo>
+                  <a:lnTo>
+                    <a:pt x="3346785" y="2444315"/>
+                  </a:lnTo>
+                  <a:lnTo>
+                    <a:pt x="3424419" y="2427159"/>
+                  </a:lnTo>
+                  <a:lnTo>
+                    <a:pt x="3502053" y="2409761"/>
+                  </a:lnTo>
+                  <a:lnTo>
+                    <a:pt x="3579687" y="2392115"/>
+                  </a:lnTo>
+                  <a:lnTo>
+                    <a:pt x="3657321" y="2374219"/>
+                  </a:lnTo>
+                  <a:lnTo>
+                    <a:pt x="3734955" y="2356068"/>
+                  </a:lnTo>
+                  <a:lnTo>
+                    <a:pt x="3812590" y="2337660"/>
+                  </a:lnTo>
+                  <a:lnTo>
+                    <a:pt x="3890224" y="2318991"/>
+                  </a:lnTo>
+                  <a:lnTo>
+                    <a:pt x="3967858" y="2300057"/>
+                  </a:lnTo>
+                  <a:lnTo>
+                    <a:pt x="4045492" y="2280853"/>
+                  </a:lnTo>
+                  <a:lnTo>
+                    <a:pt x="4123126" y="2261377"/>
+                  </a:lnTo>
+                  <a:lnTo>
+                    <a:pt x="4200760" y="2241625"/>
+                  </a:lnTo>
+                  <a:lnTo>
+                    <a:pt x="4278394" y="2221592"/>
+                  </a:lnTo>
+                  <a:lnTo>
+                    <a:pt x="4356028" y="2201275"/>
+                  </a:lnTo>
+                  <a:lnTo>
+                    <a:pt x="4433662" y="2180669"/>
+                  </a:lnTo>
+                  <a:lnTo>
+                    <a:pt x="4511296" y="2159771"/>
+                  </a:lnTo>
+                  <a:lnTo>
+                    <a:pt x="4588930" y="2138576"/>
+                  </a:lnTo>
+                  <a:lnTo>
+                    <a:pt x="4666564" y="2117080"/>
+                  </a:lnTo>
+                  <a:lnTo>
+                    <a:pt x="4744198" y="2095279"/>
+                  </a:lnTo>
+                  <a:lnTo>
+                    <a:pt x="4821832" y="2073169"/>
+                  </a:lnTo>
+                  <a:lnTo>
+                    <a:pt x="4899466" y="2050744"/>
+                  </a:lnTo>
+                  <a:lnTo>
+                    <a:pt x="4977100" y="2028001"/>
+                  </a:lnTo>
+                  <a:lnTo>
+                    <a:pt x="5054734" y="2004936"/>
+                  </a:lnTo>
+                  <a:lnTo>
+                    <a:pt x="5132368" y="1981543"/>
+                  </a:lnTo>
+                  <a:lnTo>
+                    <a:pt x="5210002" y="1957817"/>
+                  </a:lnTo>
+                  <a:lnTo>
+                    <a:pt x="5287636" y="1933755"/>
+                  </a:lnTo>
+                  <a:lnTo>
+                    <a:pt x="5365270" y="1909351"/>
+                  </a:lnTo>
+                  <a:lnTo>
+                    <a:pt x="5442904" y="1884601"/>
+                  </a:lnTo>
+                  <a:lnTo>
+                    <a:pt x="5520539" y="1859499"/>
                   </a:lnTo>
                 </a:path>
               </a:pathLst>
@@ -3790,300 +3784,300 @@
           </p:nvSpPr>
           <p:spPr>
             <a:xfrm>
-              <a:off x="817517" y="4691047"/>
-              <a:ext cx="7370972" cy="829539"/>
+              <a:off x="817517" y="4687727"/>
+              <a:ext cx="7370972" cy="840467"/>
             </a:xfrm>
             <a:custGeom>
               <a:avLst/>
               <a:pathLst>
-                <a:path w="7370972" h="829539">
+                <a:path w="7370972" h="840467">
                   <a:moveTo>
-                    <a:pt x="7370972" y="829539"/>
+                    <a:pt x="7370972" y="840467"/>
                   </a:moveTo>
                   <a:lnTo>
-                    <a:pt x="7293338" y="827571"/>
-                  </a:lnTo>
-                  <a:lnTo>
-                    <a:pt x="7215704" y="825467"/>
-                  </a:lnTo>
-                  <a:lnTo>
-                    <a:pt x="7138070" y="823219"/>
-                  </a:lnTo>
-                  <a:lnTo>
-                    <a:pt x="7060436" y="820816"/>
-                  </a:lnTo>
-                  <a:lnTo>
-                    <a:pt x="6982802" y="818247"/>
-                  </a:lnTo>
-                  <a:lnTo>
-                    <a:pt x="6905168" y="815502"/>
-                  </a:lnTo>
-                  <a:lnTo>
-                    <a:pt x="6827534" y="812569"/>
-                  </a:lnTo>
-                  <a:lnTo>
-                    <a:pt x="6749900" y="809433"/>
-                  </a:lnTo>
-                  <a:lnTo>
-                    <a:pt x="6672266" y="806082"/>
-                  </a:lnTo>
-                  <a:lnTo>
-                    <a:pt x="6594632" y="802500"/>
-                  </a:lnTo>
-                  <a:lnTo>
-                    <a:pt x="6516998" y="798672"/>
-                  </a:lnTo>
-                  <a:lnTo>
-                    <a:pt x="6439364" y="794581"/>
-                  </a:lnTo>
-                  <a:lnTo>
-                    <a:pt x="6361730" y="790209"/>
-                  </a:lnTo>
-                  <a:lnTo>
-                    <a:pt x="6284096" y="785535"/>
-                  </a:lnTo>
-                  <a:lnTo>
-                    <a:pt x="6206462" y="780541"/>
-                  </a:lnTo>
-                  <a:lnTo>
-                    <a:pt x="6128827" y="775202"/>
-                  </a:lnTo>
-                  <a:lnTo>
-                    <a:pt x="6051193" y="769497"/>
-                  </a:lnTo>
-                  <a:lnTo>
-                    <a:pt x="5973559" y="763399"/>
-                  </a:lnTo>
-                  <a:lnTo>
-                    <a:pt x="5895925" y="756882"/>
-                  </a:lnTo>
-                  <a:lnTo>
-                    <a:pt x="5818291" y="749917"/>
-                  </a:lnTo>
-                  <a:lnTo>
-                    <a:pt x="5740657" y="742472"/>
-                  </a:lnTo>
-                  <a:lnTo>
-                    <a:pt x="5663023" y="734516"/>
-                  </a:lnTo>
-                  <a:lnTo>
-                    <a:pt x="5585389" y="726012"/>
-                  </a:lnTo>
-                  <a:lnTo>
-                    <a:pt x="5507755" y="716924"/>
-                  </a:lnTo>
-                  <a:lnTo>
-                    <a:pt x="5430121" y="707210"/>
-                  </a:lnTo>
-                  <a:lnTo>
-                    <a:pt x="5352487" y="696829"/>
-                  </a:lnTo>
-                  <a:lnTo>
-                    <a:pt x="5274853" y="685733"/>
-                  </a:lnTo>
-                  <a:lnTo>
-                    <a:pt x="5197219" y="673874"/>
-                  </a:lnTo>
-                  <a:lnTo>
-                    <a:pt x="5119585" y="661200"/>
-                  </a:lnTo>
-                  <a:lnTo>
-                    <a:pt x="5041951" y="647654"/>
-                  </a:lnTo>
-                  <a:lnTo>
-                    <a:pt x="4964317" y="633177"/>
-                  </a:lnTo>
-                  <a:lnTo>
-                    <a:pt x="4886683" y="617704"/>
-                  </a:lnTo>
-                  <a:lnTo>
-                    <a:pt x="4809049" y="601166"/>
-                  </a:lnTo>
-                  <a:lnTo>
-                    <a:pt x="4731415" y="583491"/>
-                  </a:lnTo>
-                  <a:lnTo>
-                    <a:pt x="4653781" y="564601"/>
-                  </a:lnTo>
-                  <a:lnTo>
-                    <a:pt x="4576147" y="544411"/>
-                  </a:lnTo>
-                  <a:lnTo>
-                    <a:pt x="4498513" y="522833"/>
-                  </a:lnTo>
-                  <a:lnTo>
-                    <a:pt x="4420879" y="499771"/>
-                  </a:lnTo>
-                  <a:lnTo>
-                    <a:pt x="4343244" y="475123"/>
-                  </a:lnTo>
-                  <a:lnTo>
-                    <a:pt x="4265610" y="448779"/>
-                  </a:lnTo>
-                  <a:lnTo>
-                    <a:pt x="4187976" y="420624"/>
-                  </a:lnTo>
-                  <a:lnTo>
-                    <a:pt x="4110342" y="390533"/>
-                  </a:lnTo>
-                  <a:lnTo>
-                    <a:pt x="4032708" y="358371"/>
-                  </a:lnTo>
-                  <a:lnTo>
-                    <a:pt x="3955074" y="323998"/>
-                  </a:lnTo>
-                  <a:lnTo>
-                    <a:pt x="3877440" y="287261"/>
-                  </a:lnTo>
-                  <a:lnTo>
-                    <a:pt x="3799806" y="247998"/>
-                  </a:lnTo>
-                  <a:lnTo>
-                    <a:pt x="3722172" y="206034"/>
-                  </a:lnTo>
-                  <a:lnTo>
-                    <a:pt x="3644538" y="161183"/>
-                  </a:lnTo>
-                  <a:lnTo>
-                    <a:pt x="3566904" y="113249"/>
-                  </a:lnTo>
-                  <a:lnTo>
-                    <a:pt x="3489270" y="62017"/>
-                  </a:lnTo>
-                  <a:lnTo>
-                    <a:pt x="3411636" y="7262"/>
+                    <a:pt x="7293338" y="838886"/>
+                  </a:lnTo>
+                  <a:lnTo>
+                    <a:pt x="7215704" y="837186"/>
+                  </a:lnTo>
+                  <a:lnTo>
+                    <a:pt x="7138070" y="835359"/>
+                  </a:lnTo>
+                  <a:lnTo>
+                    <a:pt x="7060436" y="833394"/>
+                  </a:lnTo>
+                  <a:lnTo>
+                    <a:pt x="6982802" y="831281"/>
+                  </a:lnTo>
+                  <a:lnTo>
+                    <a:pt x="6905168" y="829009"/>
+                  </a:lnTo>
+                  <a:lnTo>
+                    <a:pt x="6827534" y="826567"/>
+                  </a:lnTo>
+                  <a:lnTo>
+                    <a:pt x="6749900" y="823940"/>
+                  </a:lnTo>
+                  <a:lnTo>
+                    <a:pt x="6672266" y="821116"/>
+                  </a:lnTo>
+                  <a:lnTo>
+                    <a:pt x="6594632" y="818080"/>
+                  </a:lnTo>
+                  <a:lnTo>
+                    <a:pt x="6516998" y="814815"/>
+                  </a:lnTo>
+                  <a:lnTo>
+                    <a:pt x="6439364" y="811304"/>
+                  </a:lnTo>
+                  <a:lnTo>
+                    <a:pt x="6361730" y="807530"/>
+                  </a:lnTo>
+                  <a:lnTo>
+                    <a:pt x="6284096" y="803471"/>
+                  </a:lnTo>
+                  <a:lnTo>
+                    <a:pt x="6206462" y="799107"/>
+                  </a:lnTo>
+                  <a:lnTo>
+                    <a:pt x="6128827" y="794415"/>
+                  </a:lnTo>
+                  <a:lnTo>
+                    <a:pt x="6051193" y="789370"/>
+                  </a:lnTo>
+                  <a:lnTo>
+                    <a:pt x="5973559" y="783945"/>
+                  </a:lnTo>
+                  <a:lnTo>
+                    <a:pt x="5895925" y="778113"/>
+                  </a:lnTo>
+                  <a:lnTo>
+                    <a:pt x="5818291" y="771841"/>
+                  </a:lnTo>
+                  <a:lnTo>
+                    <a:pt x="5740657" y="765098"/>
+                  </a:lnTo>
+                  <a:lnTo>
+                    <a:pt x="5663023" y="757847"/>
+                  </a:lnTo>
+                  <a:lnTo>
+                    <a:pt x="5585389" y="750051"/>
+                  </a:lnTo>
+                  <a:lnTo>
+                    <a:pt x="5507755" y="741668"/>
+                  </a:lnTo>
+                  <a:lnTo>
+                    <a:pt x="5430121" y="732655"/>
+                  </a:lnTo>
+                  <a:lnTo>
+                    <a:pt x="5352487" y="722964"/>
+                  </a:lnTo>
+                  <a:lnTo>
+                    <a:pt x="5274853" y="712544"/>
+                  </a:lnTo>
+                  <a:lnTo>
+                    <a:pt x="5197219" y="701339"/>
+                  </a:lnTo>
+                  <a:lnTo>
+                    <a:pt x="5119585" y="689292"/>
+                  </a:lnTo>
+                  <a:lnTo>
+                    <a:pt x="5041951" y="676339"/>
+                  </a:lnTo>
+                  <a:lnTo>
+                    <a:pt x="4964317" y="662411"/>
+                  </a:lnTo>
+                  <a:lnTo>
+                    <a:pt x="4886683" y="647435"/>
+                  </a:lnTo>
+                  <a:lnTo>
+                    <a:pt x="4809049" y="631333"/>
+                  </a:lnTo>
+                  <a:lnTo>
+                    <a:pt x="4731415" y="614020"/>
+                  </a:lnTo>
+                  <a:lnTo>
+                    <a:pt x="4653781" y="595404"/>
+                  </a:lnTo>
+                  <a:lnTo>
+                    <a:pt x="4576147" y="575387"/>
+                  </a:lnTo>
+                  <a:lnTo>
+                    <a:pt x="4498513" y="553865"/>
+                  </a:lnTo>
+                  <a:lnTo>
+                    <a:pt x="4420879" y="530723"/>
+                  </a:lnTo>
+                  <a:lnTo>
+                    <a:pt x="4343244" y="505841"/>
+                  </a:lnTo>
+                  <a:lnTo>
+                    <a:pt x="4265610" y="479087"/>
+                  </a:lnTo>
+                  <a:lnTo>
+                    <a:pt x="4187976" y="450320"/>
+                  </a:lnTo>
+                  <a:lnTo>
+                    <a:pt x="4110342" y="419389"/>
+                  </a:lnTo>
+                  <a:lnTo>
+                    <a:pt x="4032708" y="386131"/>
+                  </a:lnTo>
+                  <a:lnTo>
+                    <a:pt x="3955074" y="350371"/>
+                  </a:lnTo>
+                  <a:lnTo>
+                    <a:pt x="3877440" y="311921"/>
+                  </a:lnTo>
+                  <a:lnTo>
+                    <a:pt x="3799806" y="270578"/>
+                  </a:lnTo>
+                  <a:lnTo>
+                    <a:pt x="3722172" y="226126"/>
+                  </a:lnTo>
+                  <a:lnTo>
+                    <a:pt x="3644538" y="178329"/>
+                  </a:lnTo>
+                  <a:lnTo>
+                    <a:pt x="3566904" y="126936"/>
+                  </a:lnTo>
+                  <a:lnTo>
+                    <a:pt x="3489270" y="71678"/>
+                  </a:lnTo>
+                  <a:lnTo>
+                    <a:pt x="3411636" y="12262"/>
                   </a:lnTo>
                   <a:lnTo>
                     <a:pt x="3334002" y="0"/>
                   </a:lnTo>
                   <a:lnTo>
-                    <a:pt x="3256368" y="16862"/>
-                  </a:lnTo>
-                  <a:lnTo>
-                    <a:pt x="3178734" y="33394"/>
-                  </a:lnTo>
-                  <a:lnTo>
-                    <a:pt x="3101100" y="49601"/>
-                  </a:lnTo>
-                  <a:lnTo>
-                    <a:pt x="3023466" y="65489"/>
-                  </a:lnTo>
-                  <a:lnTo>
-                    <a:pt x="2945832" y="81065"/>
-                  </a:lnTo>
-                  <a:lnTo>
-                    <a:pt x="2868198" y="96335"/>
-                  </a:lnTo>
-                  <a:lnTo>
-                    <a:pt x="2790564" y="111305"/>
-                  </a:lnTo>
-                  <a:lnTo>
-                    <a:pt x="2712930" y="125981"/>
-                  </a:lnTo>
-                  <a:lnTo>
-                    <a:pt x="2635295" y="140368"/>
-                  </a:lnTo>
-                  <a:lnTo>
-                    <a:pt x="2557661" y="154473"/>
-                  </a:lnTo>
-                  <a:lnTo>
-                    <a:pt x="2480027" y="168301"/>
-                  </a:lnTo>
-                  <a:lnTo>
-                    <a:pt x="2402393" y="181856"/>
-                  </a:lnTo>
-                  <a:lnTo>
-                    <a:pt x="2324759" y="195146"/>
-                  </a:lnTo>
-                  <a:lnTo>
-                    <a:pt x="2247125" y="208174"/>
-                  </a:lnTo>
-                  <a:lnTo>
-                    <a:pt x="2169491" y="220946"/>
-                  </a:lnTo>
-                  <a:lnTo>
-                    <a:pt x="2091857" y="233468"/>
-                  </a:lnTo>
-                  <a:lnTo>
-                    <a:pt x="2014223" y="245743"/>
-                  </a:lnTo>
-                  <a:lnTo>
-                    <a:pt x="1936589" y="257777"/>
-                  </a:lnTo>
-                  <a:lnTo>
-                    <a:pt x="1858955" y="269575"/>
-                  </a:lnTo>
-                  <a:lnTo>
-                    <a:pt x="1781321" y="281140"/>
-                  </a:lnTo>
-                  <a:lnTo>
-                    <a:pt x="1703687" y="292479"/>
-                  </a:lnTo>
-                  <a:lnTo>
-                    <a:pt x="1626053" y="303595"/>
-                  </a:lnTo>
-                  <a:lnTo>
-                    <a:pt x="1548419" y="314492"/>
-                  </a:lnTo>
-                  <a:lnTo>
-                    <a:pt x="1470785" y="325175"/>
-                  </a:lnTo>
-                  <a:lnTo>
-                    <a:pt x="1393151" y="335648"/>
-                  </a:lnTo>
-                  <a:lnTo>
-                    <a:pt x="1315517" y="345916"/>
-                  </a:lnTo>
-                  <a:lnTo>
-                    <a:pt x="1237883" y="355981"/>
-                  </a:lnTo>
-                  <a:lnTo>
-                    <a:pt x="1160249" y="365849"/>
-                  </a:lnTo>
-                  <a:lnTo>
-                    <a:pt x="1082615" y="375523"/>
-                  </a:lnTo>
-                  <a:lnTo>
-                    <a:pt x="1004981" y="385007"/>
-                  </a:lnTo>
-                  <a:lnTo>
-                    <a:pt x="927346" y="394304"/>
-                  </a:lnTo>
-                  <a:lnTo>
-                    <a:pt x="849712" y="403419"/>
-                  </a:lnTo>
-                  <a:lnTo>
-                    <a:pt x="772078" y="412355"/>
-                  </a:lnTo>
-                  <a:lnTo>
-                    <a:pt x="694444" y="421115"/>
-                  </a:lnTo>
-                  <a:lnTo>
-                    <a:pt x="616810" y="429703"/>
-                  </a:lnTo>
-                  <a:lnTo>
-                    <a:pt x="539176" y="438122"/>
-                  </a:lnTo>
-                  <a:lnTo>
-                    <a:pt x="461542" y="446376"/>
-                  </a:lnTo>
-                  <a:lnTo>
-                    <a:pt x="383908" y="454468"/>
-                  </a:lnTo>
-                  <a:lnTo>
-                    <a:pt x="306274" y="462400"/>
-                  </a:lnTo>
-                  <a:lnTo>
-                    <a:pt x="228640" y="470177"/>
-                  </a:lnTo>
-                  <a:lnTo>
-                    <a:pt x="151006" y="477801"/>
-                  </a:lnTo>
-                  <a:lnTo>
-                    <a:pt x="73372" y="485275"/>
-                  </a:lnTo>
-                  <a:lnTo>
-                    <a:pt x="0" y="492200"/>
+                    <a:pt x="3256368" y="12059"/>
+                  </a:lnTo>
+                  <a:lnTo>
+                    <a:pt x="3178734" y="23950"/>
+                  </a:lnTo>
+                  <a:lnTo>
+                    <a:pt x="3101100" y="35674"/>
+                  </a:lnTo>
+                  <a:lnTo>
+                    <a:pt x="3023466" y="47234"/>
+                  </a:lnTo>
+                  <a:lnTo>
+                    <a:pt x="2945832" y="58633"/>
+                  </a:lnTo>
+                  <a:lnTo>
+                    <a:pt x="2868198" y="69871"/>
+                  </a:lnTo>
+                  <a:lnTo>
+                    <a:pt x="2790564" y="80953"/>
+                  </a:lnTo>
+                  <a:lnTo>
+                    <a:pt x="2712930" y="91879"/>
+                  </a:lnTo>
+                  <a:lnTo>
+                    <a:pt x="2635295" y="102653"/>
+                  </a:lnTo>
+                  <a:lnTo>
+                    <a:pt x="2557661" y="113275"/>
+                  </a:lnTo>
+                  <a:lnTo>
+                    <a:pt x="2480027" y="123749"/>
+                  </a:lnTo>
+                  <a:lnTo>
+                    <a:pt x="2402393" y="134076"/>
+                  </a:lnTo>
+                  <a:lnTo>
+                    <a:pt x="2324759" y="144259"/>
+                  </a:lnTo>
+                  <a:lnTo>
+                    <a:pt x="2247125" y="154299"/>
+                  </a:lnTo>
+                  <a:lnTo>
+                    <a:pt x="2169491" y="164199"/>
+                  </a:lnTo>
+                  <a:lnTo>
+                    <a:pt x="2091857" y="173960"/>
+                  </a:lnTo>
+                  <a:lnTo>
+                    <a:pt x="2014223" y="183584"/>
+                  </a:lnTo>
+                  <a:lnTo>
+                    <a:pt x="1936589" y="193074"/>
+                  </a:lnTo>
+                  <a:lnTo>
+                    <a:pt x="1858955" y="202430"/>
+                  </a:lnTo>
+                  <a:lnTo>
+                    <a:pt x="1781321" y="211656"/>
+                  </a:lnTo>
+                  <a:lnTo>
+                    <a:pt x="1703687" y="220753"/>
+                  </a:lnTo>
+                  <a:lnTo>
+                    <a:pt x="1626053" y="229722"/>
+                  </a:lnTo>
+                  <a:lnTo>
+                    <a:pt x="1548419" y="238566"/>
+                  </a:lnTo>
+                  <a:lnTo>
+                    <a:pt x="1470785" y="247286"/>
+                  </a:lnTo>
+                  <a:lnTo>
+                    <a:pt x="1393151" y="255884"/>
+                  </a:lnTo>
+                  <a:lnTo>
+                    <a:pt x="1315517" y="264361"/>
+                  </a:lnTo>
+                  <a:lnTo>
+                    <a:pt x="1237883" y="272720"/>
+                  </a:lnTo>
+                  <a:lnTo>
+                    <a:pt x="1160249" y="280962"/>
+                  </a:lnTo>
+                  <a:lnTo>
+                    <a:pt x="1082615" y="289089"/>
+                  </a:lnTo>
+                  <a:lnTo>
+                    <a:pt x="1004981" y="297101"/>
+                  </a:lnTo>
+                  <a:lnTo>
+                    <a:pt x="927346" y="305002"/>
+                  </a:lnTo>
+                  <a:lnTo>
+                    <a:pt x="849712" y="312792"/>
+                  </a:lnTo>
+                  <a:lnTo>
+                    <a:pt x="772078" y="320473"/>
+                  </a:lnTo>
+                  <a:lnTo>
+                    <a:pt x="694444" y="328046"/>
+                  </a:lnTo>
+                  <a:lnTo>
+                    <a:pt x="616810" y="335513"/>
+                  </a:lnTo>
+                  <a:lnTo>
+                    <a:pt x="539176" y="342876"/>
+                  </a:lnTo>
+                  <a:lnTo>
+                    <a:pt x="461542" y="350136"/>
+                  </a:lnTo>
+                  <a:lnTo>
+                    <a:pt x="383908" y="357294"/>
+                  </a:lnTo>
+                  <a:lnTo>
+                    <a:pt x="306274" y="364352"/>
+                  </a:lnTo>
+                  <a:lnTo>
+                    <a:pt x="228640" y="371311"/>
+                  </a:lnTo>
+                  <a:lnTo>
+                    <a:pt x="151006" y="378173"/>
+                  </a:lnTo>
+                  <a:lnTo>
+                    <a:pt x="73372" y="384939"/>
+                  </a:lnTo>
+                  <a:lnTo>
+                    <a:pt x="0" y="391243"/>
                   </a:lnTo>
                 </a:path>
               </a:pathLst>
@@ -4103,300 +4097,300 @@
           </p:nvSpPr>
           <p:spPr>
             <a:xfrm>
-              <a:off x="817517" y="3142810"/>
-              <a:ext cx="7370972" cy="2143847"/>
+              <a:off x="817517" y="2438710"/>
+              <a:ext cx="7370972" cy="2916388"/>
             </a:xfrm>
             <a:custGeom>
               <a:avLst/>
               <a:pathLst>
-                <a:path w="7370972" h="2143847">
+                <a:path w="7370972" h="2916388">
                   <a:moveTo>
                     <a:pt x="0" y="0"/>
                   </a:moveTo>
                   <a:lnTo>
-                    <a:pt x="73372" y="52520"/>
-                  </a:lnTo>
-                  <a:lnTo>
-                    <a:pt x="151006" y="106809"/>
-                  </a:lnTo>
-                  <a:lnTo>
-                    <a:pt x="228640" y="159846"/>
-                  </a:lnTo>
-                  <a:lnTo>
-                    <a:pt x="306274" y="211660"/>
-                  </a:lnTo>
-                  <a:lnTo>
-                    <a:pt x="383908" y="262279"/>
-                  </a:lnTo>
-                  <a:lnTo>
-                    <a:pt x="461542" y="311730"/>
-                  </a:lnTo>
-                  <a:lnTo>
-                    <a:pt x="539176" y="360041"/>
-                  </a:lnTo>
-                  <a:lnTo>
-                    <a:pt x="616810" y="407237"/>
-                  </a:lnTo>
-                  <a:lnTo>
-                    <a:pt x="694444" y="453345"/>
-                  </a:lnTo>
-                  <a:lnTo>
-                    <a:pt x="772078" y="498390"/>
-                  </a:lnTo>
-                  <a:lnTo>
-                    <a:pt x="849712" y="542396"/>
-                  </a:lnTo>
-                  <a:lnTo>
-                    <a:pt x="927346" y="585386"/>
-                  </a:lnTo>
-                  <a:lnTo>
-                    <a:pt x="1004981" y="627386"/>
-                  </a:lnTo>
-                  <a:lnTo>
-                    <a:pt x="1082615" y="668416"/>
-                  </a:lnTo>
-                  <a:lnTo>
-                    <a:pt x="1160249" y="708501"/>
-                  </a:lnTo>
-                  <a:lnTo>
-                    <a:pt x="1237883" y="747660"/>
-                  </a:lnTo>
-                  <a:lnTo>
-                    <a:pt x="1315517" y="785917"/>
-                  </a:lnTo>
-                  <a:lnTo>
-                    <a:pt x="1393151" y="823291"/>
-                  </a:lnTo>
-                  <a:lnTo>
-                    <a:pt x="1470785" y="859804"/>
-                  </a:lnTo>
-                  <a:lnTo>
-                    <a:pt x="1548419" y="895474"/>
-                  </a:lnTo>
-                  <a:lnTo>
-                    <a:pt x="1626053" y="930321"/>
-                  </a:lnTo>
-                  <a:lnTo>
-                    <a:pt x="1703687" y="964365"/>
-                  </a:lnTo>
-                  <a:lnTo>
-                    <a:pt x="1781321" y="997624"/>
-                  </a:lnTo>
-                  <a:lnTo>
-                    <a:pt x="1858955" y="1030115"/>
-                  </a:lnTo>
-                  <a:lnTo>
-                    <a:pt x="1936589" y="1061857"/>
-                  </a:lnTo>
-                  <a:lnTo>
-                    <a:pt x="2014223" y="1092867"/>
-                  </a:lnTo>
-                  <a:lnTo>
-                    <a:pt x="2091857" y="1123162"/>
-                  </a:lnTo>
-                  <a:lnTo>
-                    <a:pt x="2169491" y="1152758"/>
-                  </a:lnTo>
-                  <a:lnTo>
-                    <a:pt x="2247125" y="1181672"/>
-                  </a:lnTo>
-                  <a:lnTo>
-                    <a:pt x="2324759" y="1209919"/>
-                  </a:lnTo>
-                  <a:lnTo>
-                    <a:pt x="2402393" y="1237514"/>
-                  </a:lnTo>
-                  <a:lnTo>
-                    <a:pt x="2480027" y="1264473"/>
-                  </a:lnTo>
-                  <a:lnTo>
-                    <a:pt x="2557661" y="1290810"/>
-                  </a:lnTo>
-                  <a:lnTo>
-                    <a:pt x="2635295" y="1316539"/>
-                  </a:lnTo>
-                  <a:lnTo>
-                    <a:pt x="2712930" y="1341675"/>
-                  </a:lnTo>
-                  <a:lnTo>
-                    <a:pt x="2790564" y="1366232"/>
-                  </a:lnTo>
-                  <a:lnTo>
-                    <a:pt x="2868198" y="1390222"/>
-                  </a:lnTo>
-                  <a:lnTo>
-                    <a:pt x="2945832" y="1413659"/>
-                  </a:lnTo>
-                  <a:lnTo>
-                    <a:pt x="3023466" y="1436555"/>
-                  </a:lnTo>
-                  <a:lnTo>
-                    <a:pt x="3101100" y="1458923"/>
-                  </a:lnTo>
-                  <a:lnTo>
-                    <a:pt x="3178734" y="1480775"/>
-                  </a:lnTo>
-                  <a:lnTo>
-                    <a:pt x="3256368" y="1502123"/>
-                  </a:lnTo>
-                  <a:lnTo>
-                    <a:pt x="3334002" y="1522979"/>
-                  </a:lnTo>
-                  <a:lnTo>
-                    <a:pt x="3411636" y="1543354"/>
-                  </a:lnTo>
-                  <a:lnTo>
-                    <a:pt x="3489270" y="1563259"/>
-                  </a:lnTo>
-                  <a:lnTo>
-                    <a:pt x="3566904" y="1582705"/>
-                  </a:lnTo>
-                  <a:lnTo>
-                    <a:pt x="3644538" y="1601702"/>
-                  </a:lnTo>
-                  <a:lnTo>
-                    <a:pt x="3722172" y="1620262"/>
-                  </a:lnTo>
-                  <a:lnTo>
-                    <a:pt x="3799806" y="1638393"/>
-                  </a:lnTo>
-                  <a:lnTo>
-                    <a:pt x="3877440" y="1656106"/>
-                  </a:lnTo>
-                  <a:lnTo>
-                    <a:pt x="3955074" y="1673410"/>
-                  </a:lnTo>
-                  <a:lnTo>
-                    <a:pt x="4032708" y="1690316"/>
-                  </a:lnTo>
-                  <a:lnTo>
-                    <a:pt x="4110342" y="1706831"/>
-                  </a:lnTo>
-                  <a:lnTo>
-                    <a:pt x="4187976" y="1722966"/>
-                  </a:lnTo>
-                  <a:lnTo>
-                    <a:pt x="4265610" y="1738728"/>
-                  </a:lnTo>
-                  <a:lnTo>
-                    <a:pt x="4343244" y="1754127"/>
-                  </a:lnTo>
-                  <a:lnTo>
-                    <a:pt x="4420879" y="1769171"/>
-                  </a:lnTo>
-                  <a:lnTo>
-                    <a:pt x="4498513" y="1783868"/>
-                  </a:lnTo>
-                  <a:lnTo>
-                    <a:pt x="4576147" y="1798225"/>
-                  </a:lnTo>
-                  <a:lnTo>
-                    <a:pt x="4653781" y="1812252"/>
-                  </a:lnTo>
-                  <a:lnTo>
-                    <a:pt x="4731415" y="1825955"/>
-                  </a:lnTo>
-                  <a:lnTo>
-                    <a:pt x="4809049" y="1839342"/>
-                  </a:lnTo>
-                  <a:lnTo>
-                    <a:pt x="4886683" y="1852421"/>
-                  </a:lnTo>
-                  <a:lnTo>
-                    <a:pt x="4964317" y="1865198"/>
-                  </a:lnTo>
-                  <a:lnTo>
-                    <a:pt x="5041951" y="1877680"/>
-                  </a:lnTo>
-                  <a:lnTo>
-                    <a:pt x="5119585" y="1889874"/>
-                  </a:lnTo>
-                  <a:lnTo>
-                    <a:pt x="5197219" y="1901787"/>
-                  </a:lnTo>
-                  <a:lnTo>
-                    <a:pt x="5274853" y="1913425"/>
-                  </a:lnTo>
-                  <a:lnTo>
-                    <a:pt x="5352487" y="1924795"/>
-                  </a:lnTo>
-                  <a:lnTo>
-                    <a:pt x="5430121" y="1935902"/>
-                  </a:lnTo>
-                  <a:lnTo>
-                    <a:pt x="5507755" y="1946753"/>
-                  </a:lnTo>
-                  <a:lnTo>
-                    <a:pt x="5585389" y="1957355"/>
-                  </a:lnTo>
-                  <a:lnTo>
-                    <a:pt x="5663023" y="1967711"/>
-                  </a:lnTo>
-                  <a:lnTo>
-                    <a:pt x="5740657" y="1977829"/>
-                  </a:lnTo>
-                  <a:lnTo>
-                    <a:pt x="5818291" y="1987713"/>
-                  </a:lnTo>
-                  <a:lnTo>
-                    <a:pt x="5895925" y="1997370"/>
-                  </a:lnTo>
-                  <a:lnTo>
-                    <a:pt x="5973559" y="2006803"/>
-                  </a:lnTo>
-                  <a:lnTo>
-                    <a:pt x="6051193" y="2016019"/>
-                  </a:lnTo>
-                  <a:lnTo>
-                    <a:pt x="6128827" y="2025023"/>
-                  </a:lnTo>
-                  <a:lnTo>
-                    <a:pt x="6206462" y="2033819"/>
-                  </a:lnTo>
-                  <a:lnTo>
-                    <a:pt x="6284096" y="2042412"/>
-                  </a:lnTo>
-                  <a:lnTo>
-                    <a:pt x="6361730" y="2050807"/>
-                  </a:lnTo>
-                  <a:lnTo>
-                    <a:pt x="6439364" y="2059008"/>
-                  </a:lnTo>
-                  <a:lnTo>
-                    <a:pt x="6516998" y="2067020"/>
-                  </a:lnTo>
-                  <a:lnTo>
-                    <a:pt x="6594632" y="2074847"/>
-                  </a:lnTo>
-                  <a:lnTo>
-                    <a:pt x="6672266" y="2082494"/>
-                  </a:lnTo>
-                  <a:lnTo>
-                    <a:pt x="6749900" y="2089964"/>
-                  </a:lnTo>
-                  <a:lnTo>
-                    <a:pt x="6827534" y="2097262"/>
-                  </a:lnTo>
-                  <a:lnTo>
-                    <a:pt x="6905168" y="2104392"/>
-                  </a:lnTo>
-                  <a:lnTo>
-                    <a:pt x="6982802" y="2111358"/>
-                  </a:lnTo>
-                  <a:lnTo>
-                    <a:pt x="7060436" y="2118162"/>
-                  </a:lnTo>
-                  <a:lnTo>
-                    <a:pt x="7138070" y="2124810"/>
-                  </a:lnTo>
-                  <a:lnTo>
-                    <a:pt x="7215704" y="2131304"/>
-                  </a:lnTo>
-                  <a:lnTo>
-                    <a:pt x="7293338" y="2137649"/>
-                  </a:lnTo>
-                  <a:lnTo>
-                    <a:pt x="7370972" y="2143847"/>
+                    <a:pt x="73372" y="84784"/>
+                  </a:lnTo>
+                  <a:lnTo>
+                    <a:pt x="151006" y="171910"/>
+                  </a:lnTo>
+                  <a:lnTo>
+                    <a:pt x="228640" y="256527"/>
+                  </a:lnTo>
+                  <a:lnTo>
+                    <a:pt x="306274" y="338708"/>
+                  </a:lnTo>
+                  <a:lnTo>
+                    <a:pt x="383908" y="418522"/>
+                  </a:lnTo>
+                  <a:lnTo>
+                    <a:pt x="461542" y="496038"/>
+                  </a:lnTo>
+                  <a:lnTo>
+                    <a:pt x="539176" y="571322"/>
+                  </a:lnTo>
+                  <a:lnTo>
+                    <a:pt x="616810" y="644438"/>
+                  </a:lnTo>
+                  <a:lnTo>
+                    <a:pt x="694444" y="715448"/>
+                  </a:lnTo>
+                  <a:lnTo>
+                    <a:pt x="772078" y="784414"/>
+                  </a:lnTo>
+                  <a:lnTo>
+                    <a:pt x="849712" y="851394"/>
+                  </a:lnTo>
+                  <a:lnTo>
+                    <a:pt x="927346" y="916445"/>
+                  </a:lnTo>
+                  <a:lnTo>
+                    <a:pt x="1004981" y="979624"/>
+                  </a:lnTo>
+                  <a:lnTo>
+                    <a:pt x="1082615" y="1040982"/>
+                  </a:lnTo>
+                  <a:lnTo>
+                    <a:pt x="1160249" y="1100574"/>
+                  </a:lnTo>
+                  <a:lnTo>
+                    <a:pt x="1237883" y="1158451"/>
+                  </a:lnTo>
+                  <a:lnTo>
+                    <a:pt x="1315517" y="1214660"/>
+                  </a:lnTo>
+                  <a:lnTo>
+                    <a:pt x="1393151" y="1269251"/>
+                  </a:lnTo>
+                  <a:lnTo>
+                    <a:pt x="1470785" y="1322270"/>
+                  </a:lnTo>
+                  <a:lnTo>
+                    <a:pt x="1548419" y="1373762"/>
+                  </a:lnTo>
+                  <a:lnTo>
+                    <a:pt x="1626053" y="1423772"/>
+                  </a:lnTo>
+                  <a:lnTo>
+                    <a:pt x="1703687" y="1472341"/>
+                  </a:lnTo>
+                  <a:lnTo>
+                    <a:pt x="1781321" y="1519512"/>
+                  </a:lnTo>
+                  <a:lnTo>
+                    <a:pt x="1858955" y="1565325"/>
+                  </a:lnTo>
+                  <a:lnTo>
+                    <a:pt x="1936589" y="1609819"/>
+                  </a:lnTo>
+                  <a:lnTo>
+                    <a:pt x="2014223" y="1653031"/>
+                  </a:lnTo>
+                  <a:lnTo>
+                    <a:pt x="2091857" y="1694999"/>
+                  </a:lnTo>
+                  <a:lnTo>
+                    <a:pt x="2169491" y="1735758"/>
+                  </a:lnTo>
+                  <a:lnTo>
+                    <a:pt x="2247125" y="1775344"/>
+                  </a:lnTo>
+                  <a:lnTo>
+                    <a:pt x="2324759" y="1813790"/>
+                  </a:lnTo>
+                  <a:lnTo>
+                    <a:pt x="2402393" y="1851129"/>
+                  </a:lnTo>
+                  <a:lnTo>
+                    <a:pt x="2480027" y="1887393"/>
+                  </a:lnTo>
+                  <a:lnTo>
+                    <a:pt x="2557661" y="1922612"/>
+                  </a:lnTo>
+                  <a:lnTo>
+                    <a:pt x="2635295" y="1956818"/>
+                  </a:lnTo>
+                  <a:lnTo>
+                    <a:pt x="2712930" y="1990038"/>
+                  </a:lnTo>
+                  <a:lnTo>
+                    <a:pt x="2790564" y="2022302"/>
+                  </a:lnTo>
+                  <a:lnTo>
+                    <a:pt x="2868198" y="2053637"/>
+                  </a:lnTo>
+                  <a:lnTo>
+                    <a:pt x="2945832" y="2084069"/>
+                  </a:lnTo>
+                  <a:lnTo>
+                    <a:pt x="3023466" y="2113625"/>
+                  </a:lnTo>
+                  <a:lnTo>
+                    <a:pt x="3101100" y="2142330"/>
+                  </a:lnTo>
+                  <a:lnTo>
+                    <a:pt x="3178734" y="2170209"/>
+                  </a:lnTo>
+                  <a:lnTo>
+                    <a:pt x="3256368" y="2197285"/>
+                  </a:lnTo>
+                  <a:lnTo>
+                    <a:pt x="3334002" y="2223581"/>
+                  </a:lnTo>
+                  <a:lnTo>
+                    <a:pt x="3411636" y="2249120"/>
+                  </a:lnTo>
+                  <a:lnTo>
+                    <a:pt x="3489270" y="2273923"/>
+                  </a:lnTo>
+                  <a:lnTo>
+                    <a:pt x="3566904" y="2298012"/>
+                  </a:lnTo>
+                  <a:lnTo>
+                    <a:pt x="3644538" y="2321408"/>
+                  </a:lnTo>
+                  <a:lnTo>
+                    <a:pt x="3722172" y="2344130"/>
+                  </a:lnTo>
+                  <a:lnTo>
+                    <a:pt x="3799806" y="2366198"/>
+                  </a:lnTo>
+                  <a:lnTo>
+                    <a:pt x="3877440" y="2387630"/>
+                  </a:lnTo>
+                  <a:lnTo>
+                    <a:pt x="3955074" y="2408445"/>
+                  </a:lnTo>
+                  <a:lnTo>
+                    <a:pt x="4032708" y="2428661"/>
+                  </a:lnTo>
+                  <a:lnTo>
+                    <a:pt x="4110342" y="2448294"/>
+                  </a:lnTo>
+                  <a:lnTo>
+                    <a:pt x="4187976" y="2467362"/>
+                  </a:lnTo>
+                  <a:lnTo>
+                    <a:pt x="4265610" y="2485882"/>
+                  </a:lnTo>
+                  <a:lnTo>
+                    <a:pt x="4343244" y="2503867"/>
+                  </a:lnTo>
+                  <a:lnTo>
+                    <a:pt x="4420879" y="2521335"/>
+                  </a:lnTo>
+                  <a:lnTo>
+                    <a:pt x="4498513" y="2538300"/>
+                  </a:lnTo>
+                  <a:lnTo>
+                    <a:pt x="4576147" y="2554777"/>
+                  </a:lnTo>
+                  <a:lnTo>
+                    <a:pt x="4653781" y="2570779"/>
+                  </a:lnTo>
+                  <a:lnTo>
+                    <a:pt x="4731415" y="2586320"/>
+                  </a:lnTo>
+                  <a:lnTo>
+                    <a:pt x="4809049" y="2601414"/>
+                  </a:lnTo>
+                  <a:lnTo>
+                    <a:pt x="4886683" y="2616073"/>
+                  </a:lnTo>
+                  <a:lnTo>
+                    <a:pt x="4964317" y="2630310"/>
+                  </a:lnTo>
+                  <a:lnTo>
+                    <a:pt x="5041951" y="2644137"/>
+                  </a:lnTo>
+                  <a:lnTo>
+                    <a:pt x="5119585" y="2657566"/>
+                  </a:lnTo>
+                  <a:lnTo>
+                    <a:pt x="5197219" y="2670608"/>
+                  </a:lnTo>
+                  <a:lnTo>
+                    <a:pt x="5274853" y="2683275"/>
+                  </a:lnTo>
+                  <a:lnTo>
+                    <a:pt x="5352487" y="2695577"/>
+                  </a:lnTo>
+                  <a:lnTo>
+                    <a:pt x="5430121" y="2707525"/>
+                  </a:lnTo>
+                  <a:lnTo>
+                    <a:pt x="5507755" y="2719128"/>
+                  </a:lnTo>
+                  <a:lnTo>
+                    <a:pt x="5585389" y="2730398"/>
+                  </a:lnTo>
+                  <a:lnTo>
+                    <a:pt x="5663023" y="2741343"/>
+                  </a:lnTo>
+                  <a:lnTo>
+                    <a:pt x="5740657" y="2751973"/>
+                  </a:lnTo>
+                  <a:lnTo>
+                    <a:pt x="5818291" y="2762296"/>
+                  </a:lnTo>
+                  <a:lnTo>
+                    <a:pt x="5895925" y="2772323"/>
+                  </a:lnTo>
+                  <a:lnTo>
+                    <a:pt x="5973559" y="2782061"/>
+                  </a:lnTo>
+                  <a:lnTo>
+                    <a:pt x="6051193" y="2791518"/>
+                  </a:lnTo>
+                  <a:lnTo>
+                    <a:pt x="6128827" y="2800703"/>
+                  </a:lnTo>
+                  <a:lnTo>
+                    <a:pt x="6206462" y="2809624"/>
+                  </a:lnTo>
+                  <a:lnTo>
+                    <a:pt x="6284096" y="2818287"/>
+                  </a:lnTo>
+                  <a:lnTo>
+                    <a:pt x="6361730" y="2826701"/>
+                  </a:lnTo>
+                  <a:lnTo>
+                    <a:pt x="6439364" y="2834873"/>
+                  </a:lnTo>
+                  <a:lnTo>
+                    <a:pt x="6516998" y="2842810"/>
+                  </a:lnTo>
+                  <a:lnTo>
+                    <a:pt x="6594632" y="2850518"/>
+                  </a:lnTo>
+                  <a:lnTo>
+                    <a:pt x="6672266" y="2858004"/>
+                  </a:lnTo>
+                  <a:lnTo>
+                    <a:pt x="6749900" y="2865275"/>
+                  </a:lnTo>
+                  <a:lnTo>
+                    <a:pt x="6827534" y="2872336"/>
+                  </a:lnTo>
+                  <a:lnTo>
+                    <a:pt x="6905168" y="2879194"/>
+                  </a:lnTo>
+                  <a:lnTo>
+                    <a:pt x="6982802" y="2885854"/>
+                  </a:lnTo>
+                  <a:lnTo>
+                    <a:pt x="7060436" y="2892323"/>
+                  </a:lnTo>
+                  <a:lnTo>
+                    <a:pt x="7138070" y="2898605"/>
+                  </a:lnTo>
+                  <a:lnTo>
+                    <a:pt x="7215704" y="2904707"/>
+                  </a:lnTo>
+                  <a:lnTo>
+                    <a:pt x="7293338" y="2910632"/>
+                  </a:lnTo>
+                  <a:lnTo>
+                    <a:pt x="7370972" y="2916388"/>
                   </a:lnTo>
                 </a:path>
               </a:pathLst>

--- a/docs/plots/carbo/jx_carbo_linsubhr_ratio_hosp10.pptx
+++ b/docs/plots/carbo/jx_carbo_linsubhr_ratio_hosp10.pptx
@@ -3061,7 +3061,7 @@
                     <a:pt x="3023466" y="2432185"/>
                   </a:lnTo>
                   <a:lnTo>
-                    <a:pt x="3101100" y="2517575"/>
+                    <a:pt x="3101100" y="2517574"/>
                   </a:lnTo>
                   <a:lnTo>
                     <a:pt x="3178734" y="2596990"/>
@@ -3133,7 +3133,7 @@
                     <a:pt x="4886683" y="2510567"/>
                   </a:lnTo>
                   <a:lnTo>
-                    <a:pt x="4964317" y="2494353"/>
+                    <a:pt x="4964317" y="2494352"/>
                   </a:lnTo>
                   <a:lnTo>
                     <a:pt x="5041951" y="2477908"/>
@@ -3211,7 +3211,7 @@
                     <a:pt x="6905168" y="2004936"/>
                   </a:lnTo>
                   <a:lnTo>
-                    <a:pt x="6982802" y="1981543"/>
+                    <a:pt x="6982802" y="1981542"/>
                   </a:lnTo>
                   <a:lnTo>
                     <a:pt x="7060436" y="1957817"/>
@@ -3274,7 +3274,7 @@
                     <a:pt x="6284096" y="3594635"/>
                   </a:lnTo>
                   <a:lnTo>
-                    <a:pt x="6206462" y="3590271"/>
+                    <a:pt x="6206462" y="3590272"/>
                   </a:lnTo>
                   <a:lnTo>
                     <a:pt x="6128827" y="3585579"/>
@@ -3541,12 +3541,12 @@
           <p:spPr>
             <a:xfrm>
               <a:off x="2667951" y="1896563"/>
-              <a:ext cx="5520539" cy="2778933"/>
+              <a:ext cx="5520538" cy="2778933"/>
             </a:xfrm>
             <a:custGeom>
               <a:avLst/>
               <a:pathLst>
-                <a:path w="5520539" h="2778933">
+                <a:path w="5520538" h="2778933">
                   <a:moveTo>
                     <a:pt x="0" y="0"/>
                   </a:moveTo>
@@ -3566,7 +3566,7 @@
                     <a:pt x="319057" y="942250"/>
                   </a:lnTo>
                   <a:lnTo>
-                    <a:pt x="396692" y="1131883"/>
+                    <a:pt x="396691" y="1131883"/>
                   </a:lnTo>
                   <a:lnTo>
                     <a:pt x="474326" y="1308249"/>
@@ -3599,7 +3599,7 @@
                     <a:pt x="1173032" y="2432185"/>
                   </a:lnTo>
                   <a:lnTo>
-                    <a:pt x="1250666" y="2517575"/>
+                    <a:pt x="1250666" y="2517574"/>
                   </a:lnTo>
                   <a:lnTo>
                     <a:pt x="1328300" y="2596990"/>
@@ -3632,7 +3632,7 @@
                     <a:pt x="2027006" y="2701814"/>
                   </a:lnTo>
                   <a:lnTo>
-                    <a:pt x="2104641" y="2688315"/>
+                    <a:pt x="2104640" y="2688315"/>
                   </a:lnTo>
                   <a:lnTo>
                     <a:pt x="2182275" y="2674624"/>
@@ -3671,7 +3671,7 @@
                     <a:pt x="3036249" y="2510567"/>
                   </a:lnTo>
                   <a:lnTo>
-                    <a:pt x="3113883" y="2494353"/>
+                    <a:pt x="3113883" y="2494352"/>
                   </a:lnTo>
                   <a:lnTo>
                     <a:pt x="3191517" y="2477908"/>
@@ -3698,7 +3698,7 @@
                     <a:pt x="3734955" y="2356068"/>
                   </a:lnTo>
                   <a:lnTo>
-                    <a:pt x="3812590" y="2337660"/>
+                    <a:pt x="3812589" y="2337660"/>
                   </a:lnTo>
                   <a:lnTo>
                     <a:pt x="3890224" y="2318991"/>
@@ -3749,7 +3749,7 @@
                     <a:pt x="5054734" y="2004936"/>
                   </a:lnTo>
                   <a:lnTo>
-                    <a:pt x="5132368" y="1981543"/>
+                    <a:pt x="5132368" y="1981542"/>
                   </a:lnTo>
                   <a:lnTo>
                     <a:pt x="5210002" y="1957817"/>
@@ -3764,7 +3764,7 @@
                     <a:pt x="5442904" y="1884601"/>
                   </a:lnTo>
                   <a:lnTo>
-                    <a:pt x="5520539" y="1859499"/>
+                    <a:pt x="5520538" y="1859499"/>
                   </a:lnTo>
                 </a:path>
               </a:pathLst>
@@ -4005,7 +4005,7 @@
                     <a:pt x="1936589" y="193074"/>
                   </a:lnTo>
                   <a:lnTo>
-                    <a:pt x="1858955" y="202430"/>
+                    <a:pt x="1858955" y="202431"/>
                   </a:lnTo>
                   <a:lnTo>
                     <a:pt x="1781321" y="211656"/>
@@ -4150,7 +4150,7 @@
                     <a:pt x="1082615" y="1040982"/>
                   </a:lnTo>
                   <a:lnTo>
-                    <a:pt x="1160249" y="1100574"/>
+                    <a:pt x="1160249" y="1100575"/>
                   </a:lnTo>
                   <a:lnTo>
                     <a:pt x="1237883" y="1158451"/>
@@ -4267,19 +4267,19 @@
                     <a:pt x="4110342" y="2448294"/>
                   </a:lnTo>
                   <a:lnTo>
-                    <a:pt x="4187976" y="2467362"/>
+                    <a:pt x="4187976" y="2467363"/>
                   </a:lnTo>
                   <a:lnTo>
                     <a:pt x="4265610" y="2485882"/>
                   </a:lnTo>
                   <a:lnTo>
-                    <a:pt x="4343244" y="2503867"/>
-                  </a:lnTo>
-                  <a:lnTo>
-                    <a:pt x="4420879" y="2521335"/>
-                  </a:lnTo>
-                  <a:lnTo>
-                    <a:pt x="4498513" y="2538300"/>
+                    <a:pt x="4343244" y="2503868"/>
+                  </a:lnTo>
+                  <a:lnTo>
+                    <a:pt x="4420879" y="2521336"/>
+                  </a:lnTo>
+                  <a:lnTo>
+                    <a:pt x="4498513" y="2538301"/>
                   </a:lnTo>
                   <a:lnTo>
                     <a:pt x="4576147" y="2554777"/>
@@ -4351,7 +4351,7 @@
                     <a:pt x="6284096" y="2818287"/>
                   </a:lnTo>
                   <a:lnTo>
-                    <a:pt x="6361730" y="2826701"/>
+                    <a:pt x="6361730" y="2826702"/>
                   </a:lnTo>
                   <a:lnTo>
                     <a:pt x="6439364" y="2834873"/>

--- a/docs/plots/carbo/jx_carbo_linsubhr_ratio_hosp10.pptx
+++ b/docs/plots/carbo/jx_carbo_linsubhr_ratio_hosp10.pptx
@@ -2271,7 +2271,7 @@
           </p:nvSpPr>
           <p:spPr>
             <a:xfrm>
-              <a:off x="817517" y="5114368"/>
+              <a:off x="817517" y="5142518"/>
               <a:ext cx="7799693" cy="0"/>
             </a:xfrm>
             <a:custGeom>
@@ -2314,7 +2314,7 @@
           </p:nvSpPr>
           <p:spPr>
             <a:xfrm>
-              <a:off x="817517" y="4244691"/>
+              <a:off x="817517" y="4313054"/>
               <a:ext cx="7799693" cy="0"/>
             </a:xfrm>
             <a:custGeom>
@@ -2357,7 +2357,7 @@
           </p:nvSpPr>
           <p:spPr>
             <a:xfrm>
-              <a:off x="817517" y="3375014"/>
+              <a:off x="817517" y="3483591"/>
               <a:ext cx="7799693" cy="0"/>
             </a:xfrm>
             <a:custGeom>
@@ -2400,7 +2400,7 @@
           </p:nvSpPr>
           <p:spPr>
             <a:xfrm>
-              <a:off x="817517" y="2505337"/>
+              <a:off x="817517" y="2654127"/>
               <a:ext cx="7799693" cy="0"/>
             </a:xfrm>
             <a:custGeom>
@@ -2443,15 +2443,15 @@
           </p:nvSpPr>
           <p:spPr>
             <a:xfrm>
-              <a:off x="1615213" y="1896563"/>
-              <a:ext cx="0" cy="3826579"/>
+              <a:off x="1615213" y="2073503"/>
+              <a:ext cx="0" cy="3649639"/>
             </a:xfrm>
             <a:custGeom>
               <a:avLst/>
               <a:pathLst>
-                <a:path w="0" h="3826579">
+                <a:path w="0" h="3649639">
                   <a:moveTo>
-                    <a:pt x="0" y="3826579"/>
+                    <a:pt x="0" y="3649639"/>
                   </a:moveTo>
                   <a:lnTo>
                     <a:pt x="0" y="0"/>
@@ -2486,15 +2486,15 @@
           </p:nvSpPr>
           <p:spPr>
             <a:xfrm>
-              <a:off x="3387871" y="1896563"/>
-              <a:ext cx="0" cy="3826579"/>
+              <a:off x="3387871" y="2073503"/>
+              <a:ext cx="0" cy="3649639"/>
             </a:xfrm>
             <a:custGeom>
               <a:avLst/>
               <a:pathLst>
-                <a:path w="0" h="3826579">
+                <a:path w="0" h="3649639">
                   <a:moveTo>
-                    <a:pt x="0" y="3826579"/>
+                    <a:pt x="0" y="3649639"/>
                   </a:moveTo>
                   <a:lnTo>
                     <a:pt x="0" y="0"/>
@@ -2529,15 +2529,15 @@
           </p:nvSpPr>
           <p:spPr>
             <a:xfrm>
-              <a:off x="5160528" y="1896563"/>
-              <a:ext cx="0" cy="3826579"/>
+              <a:off x="5160528" y="2073503"/>
+              <a:ext cx="0" cy="3649639"/>
             </a:xfrm>
             <a:custGeom>
               <a:avLst/>
               <a:pathLst>
-                <a:path w="0" h="3826579">
+                <a:path w="0" h="3649639">
                   <a:moveTo>
-                    <a:pt x="0" y="3826579"/>
+                    <a:pt x="0" y="3649639"/>
                   </a:moveTo>
                   <a:lnTo>
                     <a:pt x="0" y="0"/>
@@ -2572,15 +2572,15 @@
           </p:nvSpPr>
           <p:spPr>
             <a:xfrm>
-              <a:off x="6933186" y="1896563"/>
-              <a:ext cx="0" cy="3826579"/>
+              <a:off x="6933186" y="2073503"/>
+              <a:ext cx="0" cy="3649639"/>
             </a:xfrm>
             <a:custGeom>
               <a:avLst/>
               <a:pathLst>
-                <a:path w="0" h="3826579">
+                <a:path w="0" h="3649639">
                   <a:moveTo>
-                    <a:pt x="0" y="3826579"/>
+                    <a:pt x="0" y="3649639"/>
                   </a:moveTo>
                   <a:lnTo>
                     <a:pt x="0" y="0"/>
@@ -2615,7 +2615,7 @@
           </p:nvSpPr>
           <p:spPr>
             <a:xfrm>
-              <a:off x="817517" y="5549207"/>
+              <a:off x="817517" y="5557249"/>
               <a:ext cx="7799693" cy="0"/>
             </a:xfrm>
             <a:custGeom>
@@ -2658,7 +2658,7 @@
           </p:nvSpPr>
           <p:spPr>
             <a:xfrm>
-              <a:off x="817517" y="4679530"/>
+              <a:off x="817517" y="4727786"/>
               <a:ext cx="7799693" cy="0"/>
             </a:xfrm>
             <a:custGeom>
@@ -2701,7 +2701,7 @@
           </p:nvSpPr>
           <p:spPr>
             <a:xfrm>
-              <a:off x="817517" y="3809853"/>
+              <a:off x="817517" y="3898322"/>
               <a:ext cx="7799693" cy="0"/>
             </a:xfrm>
             <a:custGeom>
@@ -2744,7 +2744,7 @@
           </p:nvSpPr>
           <p:spPr>
             <a:xfrm>
-              <a:off x="817517" y="2940175"/>
+              <a:off x="817517" y="3068859"/>
               <a:ext cx="7799693" cy="0"/>
             </a:xfrm>
             <a:custGeom>
@@ -2787,7 +2787,7 @@
           </p:nvSpPr>
           <p:spPr>
             <a:xfrm>
-              <a:off x="817517" y="2070498"/>
+              <a:off x="817517" y="2239395"/>
               <a:ext cx="7799693" cy="0"/>
             </a:xfrm>
             <a:custGeom>
@@ -2830,15 +2830,15 @@
           </p:nvSpPr>
           <p:spPr>
             <a:xfrm>
-              <a:off x="2501542" y="1896563"/>
-              <a:ext cx="0" cy="3826579"/>
+              <a:off x="2501542" y="2073503"/>
+              <a:ext cx="0" cy="3649639"/>
             </a:xfrm>
             <a:custGeom>
               <a:avLst/>
               <a:pathLst>
-                <a:path w="0" h="3826579">
+                <a:path w="0" h="3649639">
                   <a:moveTo>
-                    <a:pt x="0" y="3826579"/>
+                    <a:pt x="0" y="3649639"/>
                   </a:moveTo>
                   <a:lnTo>
                     <a:pt x="0" y="0"/>
@@ -2873,15 +2873,15 @@
           </p:nvSpPr>
           <p:spPr>
             <a:xfrm>
-              <a:off x="4274200" y="1896563"/>
-              <a:ext cx="0" cy="3826579"/>
+              <a:off x="4274200" y="2073503"/>
+              <a:ext cx="0" cy="3649639"/>
             </a:xfrm>
             <a:custGeom>
               <a:avLst/>
               <a:pathLst>
-                <a:path w="0" h="3826579">
+                <a:path w="0" h="3649639">
                   <a:moveTo>
-                    <a:pt x="0" y="3826579"/>
+                    <a:pt x="0" y="3649639"/>
                   </a:moveTo>
                   <a:lnTo>
                     <a:pt x="0" y="0"/>
@@ -2916,15 +2916,15 @@
           </p:nvSpPr>
           <p:spPr>
             <a:xfrm>
-              <a:off x="6046857" y="1896563"/>
-              <a:ext cx="0" cy="3826579"/>
+              <a:off x="6046857" y="2073503"/>
+              <a:ext cx="0" cy="3649639"/>
             </a:xfrm>
             <a:custGeom>
               <a:avLst/>
               <a:pathLst>
-                <a:path w="0" h="3826579">
+                <a:path w="0" h="3649639">
                   <a:moveTo>
-                    <a:pt x="0" y="3826579"/>
+                    <a:pt x="0" y="3649639"/>
                   </a:moveTo>
                   <a:lnTo>
                     <a:pt x="0" y="0"/>
@@ -2959,15 +2959,15 @@
           </p:nvSpPr>
           <p:spPr>
             <a:xfrm>
-              <a:off x="7819515" y="1896563"/>
-              <a:ext cx="0" cy="3826579"/>
+              <a:off x="7819515" y="2073503"/>
+              <a:ext cx="0" cy="3649639"/>
             </a:xfrm>
             <a:custGeom>
               <a:avLst/>
               <a:pathLst>
-                <a:path w="0" h="3826579">
+                <a:path w="0" h="3649639">
                   <a:moveTo>
-                    <a:pt x="0" y="3826579"/>
+                    <a:pt x="0" y="3649639"/>
                   </a:moveTo>
                   <a:lnTo>
                     <a:pt x="0" y="0"/>
@@ -3002,519 +3002,519 @@
           </p:nvSpPr>
           <p:spPr>
             <a:xfrm>
-              <a:off x="817517" y="1896563"/>
-              <a:ext cx="7370972" cy="3631631"/>
+              <a:off x="817517" y="2073503"/>
+              <a:ext cx="7370972" cy="3463706"/>
             </a:xfrm>
             <a:custGeom>
               <a:avLst/>
               <a:pathLst>
-                <a:path w="7370972" h="3631631">
+                <a:path w="7370972" h="3463706">
                   <a:moveTo>
                     <a:pt x="1850433" y="0"/>
                   </a:moveTo>
                   <a:lnTo>
-                    <a:pt x="1858955" y="29915"/>
-                  </a:lnTo>
-                  <a:lnTo>
-                    <a:pt x="1936589" y="283380"/>
-                  </a:lnTo>
-                  <a:lnTo>
-                    <a:pt x="2014223" y="519112"/>
-                  </a:lnTo>
-                  <a:lnTo>
-                    <a:pt x="2091857" y="738350"/>
-                  </a:lnTo>
-                  <a:lnTo>
-                    <a:pt x="2169491" y="942250"/>
-                  </a:lnTo>
-                  <a:lnTo>
-                    <a:pt x="2247125" y="1131883"/>
-                  </a:lnTo>
-                  <a:lnTo>
-                    <a:pt x="2324759" y="1308249"/>
-                  </a:lnTo>
-                  <a:lnTo>
-                    <a:pt x="2402393" y="1472275"/>
-                  </a:lnTo>
-                  <a:lnTo>
-                    <a:pt x="2480027" y="1624825"/>
-                  </a:lnTo>
-                  <a:lnTo>
-                    <a:pt x="2557661" y="1766702"/>
-                  </a:lnTo>
-                  <a:lnTo>
-                    <a:pt x="2635295" y="1898653"/>
-                  </a:lnTo>
-                  <a:lnTo>
-                    <a:pt x="2712930" y="2021371"/>
-                  </a:lnTo>
-                  <a:lnTo>
-                    <a:pt x="2790564" y="2135504"/>
-                  </a:lnTo>
-                  <a:lnTo>
-                    <a:pt x="2868198" y="2241651"/>
-                  </a:lnTo>
-                  <a:lnTo>
-                    <a:pt x="2945832" y="2340371"/>
-                  </a:lnTo>
-                  <a:lnTo>
-                    <a:pt x="3023466" y="2432185"/>
-                  </a:lnTo>
-                  <a:lnTo>
-                    <a:pt x="3101100" y="2517574"/>
-                  </a:lnTo>
-                  <a:lnTo>
-                    <a:pt x="3178734" y="2596990"/>
-                  </a:lnTo>
-                  <a:lnTo>
-                    <a:pt x="3256368" y="2670849"/>
-                  </a:lnTo>
-                  <a:lnTo>
-                    <a:pt x="3334002" y="2739541"/>
-                  </a:lnTo>
-                  <a:lnTo>
-                    <a:pt x="3411636" y="2778933"/>
-                  </a:lnTo>
-                  <a:lnTo>
-                    <a:pt x="3489270" y="2766528"/>
-                  </a:lnTo>
-                  <a:lnTo>
-                    <a:pt x="3566904" y="2753948"/>
-                  </a:lnTo>
-                  <a:lnTo>
-                    <a:pt x="3644538" y="2741189"/>
-                  </a:lnTo>
-                  <a:lnTo>
-                    <a:pt x="3722172" y="2728248"/>
-                  </a:lnTo>
-                  <a:lnTo>
-                    <a:pt x="3799806" y="2715124"/>
-                  </a:lnTo>
-                  <a:lnTo>
-                    <a:pt x="3877440" y="2701814"/>
-                  </a:lnTo>
-                  <a:lnTo>
-                    <a:pt x="3955074" y="2688315"/>
-                  </a:lnTo>
-                  <a:lnTo>
-                    <a:pt x="4032708" y="2674624"/>
-                  </a:lnTo>
-                  <a:lnTo>
-                    <a:pt x="4110342" y="2660738"/>
-                  </a:lnTo>
-                  <a:lnTo>
-                    <a:pt x="4187976" y="2646656"/>
-                  </a:lnTo>
-                  <a:lnTo>
-                    <a:pt x="4265610" y="2632373"/>
-                  </a:lnTo>
-                  <a:lnTo>
-                    <a:pt x="4343244" y="2617888"/>
-                  </a:lnTo>
-                  <a:lnTo>
-                    <a:pt x="4420879" y="2603197"/>
-                  </a:lnTo>
-                  <a:lnTo>
-                    <a:pt x="4498513" y="2588298"/>
-                  </a:lnTo>
-                  <a:lnTo>
-                    <a:pt x="4576147" y="2573187"/>
-                  </a:lnTo>
-                  <a:lnTo>
-                    <a:pt x="4653781" y="2557861"/>
-                  </a:lnTo>
-                  <a:lnTo>
-                    <a:pt x="4731415" y="2542318"/>
-                  </a:lnTo>
-                  <a:lnTo>
-                    <a:pt x="4809049" y="2526555"/>
-                  </a:lnTo>
-                  <a:lnTo>
-                    <a:pt x="4886683" y="2510567"/>
-                  </a:lnTo>
-                  <a:lnTo>
-                    <a:pt x="4964317" y="2494352"/>
-                  </a:lnTo>
-                  <a:lnTo>
-                    <a:pt x="5041951" y="2477908"/>
-                  </a:lnTo>
-                  <a:lnTo>
-                    <a:pt x="5119585" y="2461230"/>
-                  </a:lnTo>
-                  <a:lnTo>
-                    <a:pt x="5197219" y="2444315"/>
-                  </a:lnTo>
-                  <a:lnTo>
-                    <a:pt x="5274853" y="2427159"/>
-                  </a:lnTo>
-                  <a:lnTo>
-                    <a:pt x="5352487" y="2409761"/>
-                  </a:lnTo>
-                  <a:lnTo>
-                    <a:pt x="5430121" y="2392115"/>
-                  </a:lnTo>
-                  <a:lnTo>
-                    <a:pt x="5507755" y="2374219"/>
-                  </a:lnTo>
-                  <a:lnTo>
-                    <a:pt x="5585389" y="2356068"/>
-                  </a:lnTo>
-                  <a:lnTo>
-                    <a:pt x="5663023" y="2337660"/>
-                  </a:lnTo>
-                  <a:lnTo>
-                    <a:pt x="5740657" y="2318991"/>
-                  </a:lnTo>
-                  <a:lnTo>
-                    <a:pt x="5818291" y="2300057"/>
-                  </a:lnTo>
-                  <a:lnTo>
-                    <a:pt x="5895925" y="2280853"/>
-                  </a:lnTo>
-                  <a:lnTo>
-                    <a:pt x="5973559" y="2261377"/>
-                  </a:lnTo>
-                  <a:lnTo>
-                    <a:pt x="6051193" y="2241625"/>
-                  </a:lnTo>
-                  <a:lnTo>
-                    <a:pt x="6128827" y="2221592"/>
-                  </a:lnTo>
-                  <a:lnTo>
-                    <a:pt x="6206462" y="2201275"/>
-                  </a:lnTo>
-                  <a:lnTo>
-                    <a:pt x="6284096" y="2180669"/>
-                  </a:lnTo>
-                  <a:lnTo>
-                    <a:pt x="6361730" y="2159771"/>
-                  </a:lnTo>
-                  <a:lnTo>
-                    <a:pt x="6439364" y="2138576"/>
-                  </a:lnTo>
-                  <a:lnTo>
-                    <a:pt x="6516998" y="2117080"/>
-                  </a:lnTo>
-                  <a:lnTo>
-                    <a:pt x="6594632" y="2095279"/>
-                  </a:lnTo>
-                  <a:lnTo>
-                    <a:pt x="6672266" y="2073169"/>
-                  </a:lnTo>
-                  <a:lnTo>
-                    <a:pt x="6749900" y="2050744"/>
-                  </a:lnTo>
-                  <a:lnTo>
-                    <a:pt x="6827534" y="2028001"/>
-                  </a:lnTo>
-                  <a:lnTo>
-                    <a:pt x="6905168" y="2004936"/>
-                  </a:lnTo>
-                  <a:lnTo>
-                    <a:pt x="6982802" y="1981542"/>
-                  </a:lnTo>
-                  <a:lnTo>
-                    <a:pt x="7060436" y="1957817"/>
-                  </a:lnTo>
-                  <a:lnTo>
-                    <a:pt x="7138070" y="1933755"/>
-                  </a:lnTo>
-                  <a:lnTo>
-                    <a:pt x="7215704" y="1909351"/>
-                  </a:lnTo>
-                  <a:lnTo>
-                    <a:pt x="7293338" y="1884601"/>
-                  </a:lnTo>
-                  <a:lnTo>
-                    <a:pt x="7370972" y="1859499"/>
-                  </a:lnTo>
-                  <a:lnTo>
-                    <a:pt x="7370972" y="3631631"/>
-                  </a:lnTo>
-                  <a:lnTo>
-                    <a:pt x="7293338" y="3630050"/>
-                  </a:lnTo>
-                  <a:lnTo>
-                    <a:pt x="7215704" y="3628351"/>
-                  </a:lnTo>
-                  <a:lnTo>
-                    <a:pt x="7138070" y="3626523"/>
-                  </a:lnTo>
-                  <a:lnTo>
-                    <a:pt x="7060436" y="3624558"/>
-                  </a:lnTo>
-                  <a:lnTo>
-                    <a:pt x="6982802" y="3622445"/>
-                  </a:lnTo>
-                  <a:lnTo>
-                    <a:pt x="6905168" y="3620173"/>
-                  </a:lnTo>
-                  <a:lnTo>
-                    <a:pt x="6827534" y="3617731"/>
-                  </a:lnTo>
-                  <a:lnTo>
-                    <a:pt x="6749900" y="3615104"/>
-                  </a:lnTo>
-                  <a:lnTo>
-                    <a:pt x="6672266" y="3612280"/>
-                  </a:lnTo>
-                  <a:lnTo>
-                    <a:pt x="6594632" y="3609244"/>
-                  </a:lnTo>
-                  <a:lnTo>
-                    <a:pt x="6516998" y="3605979"/>
-                  </a:lnTo>
-                  <a:lnTo>
-                    <a:pt x="6439364" y="3602468"/>
-                  </a:lnTo>
-                  <a:lnTo>
-                    <a:pt x="6361730" y="3598694"/>
-                  </a:lnTo>
-                  <a:lnTo>
-                    <a:pt x="6284096" y="3594635"/>
-                  </a:lnTo>
-                  <a:lnTo>
-                    <a:pt x="6206462" y="3590272"/>
-                  </a:lnTo>
-                  <a:lnTo>
-                    <a:pt x="6128827" y="3585579"/>
-                  </a:lnTo>
-                  <a:lnTo>
-                    <a:pt x="6051193" y="3580534"/>
-                  </a:lnTo>
-                  <a:lnTo>
-                    <a:pt x="5973559" y="3575110"/>
-                  </a:lnTo>
-                  <a:lnTo>
-                    <a:pt x="5895925" y="3569277"/>
-                  </a:lnTo>
-                  <a:lnTo>
-                    <a:pt x="5818291" y="3563005"/>
-                  </a:lnTo>
-                  <a:lnTo>
-                    <a:pt x="5740657" y="3556262"/>
-                  </a:lnTo>
-                  <a:lnTo>
-                    <a:pt x="5663023" y="3549011"/>
-                  </a:lnTo>
-                  <a:lnTo>
-                    <a:pt x="5585389" y="3541215"/>
-                  </a:lnTo>
-                  <a:lnTo>
-                    <a:pt x="5507755" y="3532833"/>
-                  </a:lnTo>
-                  <a:lnTo>
-                    <a:pt x="5430121" y="3523819"/>
-                  </a:lnTo>
-                  <a:lnTo>
-                    <a:pt x="5352487" y="3514128"/>
-                  </a:lnTo>
-                  <a:lnTo>
-                    <a:pt x="5274853" y="3503708"/>
-                  </a:lnTo>
-                  <a:lnTo>
-                    <a:pt x="5197219" y="3492503"/>
-                  </a:lnTo>
-                  <a:lnTo>
-                    <a:pt x="5119585" y="3480456"/>
-                  </a:lnTo>
-                  <a:lnTo>
-                    <a:pt x="5041951" y="3467503"/>
-                  </a:lnTo>
-                  <a:lnTo>
-                    <a:pt x="4964317" y="3453575"/>
-                  </a:lnTo>
-                  <a:lnTo>
-                    <a:pt x="4886683" y="3438599"/>
-                  </a:lnTo>
-                  <a:lnTo>
-                    <a:pt x="4809049" y="3422497"/>
-                  </a:lnTo>
-                  <a:lnTo>
-                    <a:pt x="4731415" y="3405184"/>
-                  </a:lnTo>
-                  <a:lnTo>
-                    <a:pt x="4653781" y="3386568"/>
-                  </a:lnTo>
-                  <a:lnTo>
-                    <a:pt x="4576147" y="3366551"/>
-                  </a:lnTo>
-                  <a:lnTo>
-                    <a:pt x="4498513" y="3345029"/>
-                  </a:lnTo>
-                  <a:lnTo>
-                    <a:pt x="4420879" y="3321887"/>
-                  </a:lnTo>
-                  <a:lnTo>
-                    <a:pt x="4343244" y="3297005"/>
-                  </a:lnTo>
-                  <a:lnTo>
-                    <a:pt x="4265610" y="3270251"/>
-                  </a:lnTo>
-                  <a:lnTo>
-                    <a:pt x="4187976" y="3241484"/>
-                  </a:lnTo>
-                  <a:lnTo>
-                    <a:pt x="4110342" y="3210553"/>
-                  </a:lnTo>
-                  <a:lnTo>
-                    <a:pt x="4032708" y="3177295"/>
-                  </a:lnTo>
-                  <a:lnTo>
-                    <a:pt x="3955074" y="3141535"/>
-                  </a:lnTo>
-                  <a:lnTo>
-                    <a:pt x="3877440" y="3103085"/>
-                  </a:lnTo>
-                  <a:lnTo>
-                    <a:pt x="3799806" y="3061743"/>
-                  </a:lnTo>
-                  <a:lnTo>
-                    <a:pt x="3722172" y="3017290"/>
-                  </a:lnTo>
-                  <a:lnTo>
-                    <a:pt x="3644538" y="2969493"/>
-                  </a:lnTo>
-                  <a:lnTo>
-                    <a:pt x="3566904" y="2918101"/>
-                  </a:lnTo>
-                  <a:lnTo>
-                    <a:pt x="3489270" y="2862842"/>
-                  </a:lnTo>
-                  <a:lnTo>
-                    <a:pt x="3411636" y="2803426"/>
-                  </a:lnTo>
-                  <a:lnTo>
-                    <a:pt x="3334002" y="2791164"/>
-                  </a:lnTo>
-                  <a:lnTo>
-                    <a:pt x="3256368" y="2803223"/>
-                  </a:lnTo>
-                  <a:lnTo>
-                    <a:pt x="3178734" y="2815114"/>
-                  </a:lnTo>
-                  <a:lnTo>
-                    <a:pt x="3101100" y="2826838"/>
-                  </a:lnTo>
-                  <a:lnTo>
-                    <a:pt x="3023466" y="2838398"/>
-                  </a:lnTo>
-                  <a:lnTo>
-                    <a:pt x="2945832" y="2849797"/>
-                  </a:lnTo>
-                  <a:lnTo>
-                    <a:pt x="2868198" y="2861036"/>
-                  </a:lnTo>
-                  <a:lnTo>
-                    <a:pt x="2790564" y="2872117"/>
-                  </a:lnTo>
-                  <a:lnTo>
-                    <a:pt x="2712930" y="2883043"/>
-                  </a:lnTo>
-                  <a:lnTo>
-                    <a:pt x="2635295" y="2893817"/>
-                  </a:lnTo>
-                  <a:lnTo>
-                    <a:pt x="2557661" y="2904439"/>
-                  </a:lnTo>
-                  <a:lnTo>
-                    <a:pt x="2480027" y="2914913"/>
-                  </a:lnTo>
-                  <a:lnTo>
-                    <a:pt x="2402393" y="2925240"/>
-                  </a:lnTo>
-                  <a:lnTo>
-                    <a:pt x="2324759" y="2935423"/>
-                  </a:lnTo>
-                  <a:lnTo>
-                    <a:pt x="2247125" y="2945463"/>
-                  </a:lnTo>
-                  <a:lnTo>
-                    <a:pt x="2169491" y="2955363"/>
-                  </a:lnTo>
-                  <a:lnTo>
-                    <a:pt x="2091857" y="2965124"/>
-                  </a:lnTo>
-                  <a:lnTo>
-                    <a:pt x="2014223" y="2974748"/>
-                  </a:lnTo>
-                  <a:lnTo>
-                    <a:pt x="1936589" y="2984238"/>
-                  </a:lnTo>
-                  <a:lnTo>
-                    <a:pt x="1858955" y="2993595"/>
-                  </a:lnTo>
-                  <a:lnTo>
-                    <a:pt x="1781321" y="3002820"/>
-                  </a:lnTo>
-                  <a:lnTo>
-                    <a:pt x="1703687" y="3011917"/>
-                  </a:lnTo>
-                  <a:lnTo>
-                    <a:pt x="1626053" y="3020886"/>
-                  </a:lnTo>
-                  <a:lnTo>
-                    <a:pt x="1548419" y="3029730"/>
-                  </a:lnTo>
-                  <a:lnTo>
-                    <a:pt x="1470785" y="3038450"/>
-                  </a:lnTo>
-                  <a:lnTo>
-                    <a:pt x="1393151" y="3047048"/>
-                  </a:lnTo>
-                  <a:lnTo>
-                    <a:pt x="1315517" y="3055526"/>
-                  </a:lnTo>
-                  <a:lnTo>
-                    <a:pt x="1237883" y="3063884"/>
-                  </a:lnTo>
-                  <a:lnTo>
-                    <a:pt x="1160249" y="3072126"/>
-                  </a:lnTo>
-                  <a:lnTo>
-                    <a:pt x="1082615" y="3080253"/>
-                  </a:lnTo>
-                  <a:lnTo>
-                    <a:pt x="1004981" y="3088265"/>
-                  </a:lnTo>
-                  <a:lnTo>
-                    <a:pt x="927346" y="3096166"/>
-                  </a:lnTo>
-                  <a:lnTo>
-                    <a:pt x="849712" y="3103956"/>
-                  </a:lnTo>
-                  <a:lnTo>
-                    <a:pt x="772078" y="3111637"/>
-                  </a:lnTo>
-                  <a:lnTo>
-                    <a:pt x="694444" y="3119210"/>
-                  </a:lnTo>
-                  <a:lnTo>
-                    <a:pt x="616810" y="3126678"/>
-                  </a:lnTo>
-                  <a:lnTo>
-                    <a:pt x="539176" y="3134040"/>
-                  </a:lnTo>
-                  <a:lnTo>
-                    <a:pt x="461542" y="3141300"/>
-                  </a:lnTo>
-                  <a:lnTo>
-                    <a:pt x="383908" y="3148458"/>
-                  </a:lnTo>
-                  <a:lnTo>
-                    <a:pt x="306274" y="3155516"/>
-                  </a:lnTo>
-                  <a:lnTo>
-                    <a:pt x="228640" y="3162475"/>
-                  </a:lnTo>
-                  <a:lnTo>
-                    <a:pt x="151006" y="3169337"/>
-                  </a:lnTo>
-                  <a:lnTo>
-                    <a:pt x="73372" y="3176103"/>
-                  </a:lnTo>
-                  <a:lnTo>
-                    <a:pt x="0" y="3182407"/>
+                    <a:pt x="1858955" y="28532"/>
+                  </a:lnTo>
+                  <a:lnTo>
+                    <a:pt x="1936589" y="270277"/>
+                  </a:lnTo>
+                  <a:lnTo>
+                    <a:pt x="2014223" y="495108"/>
+                  </a:lnTo>
+                  <a:lnTo>
+                    <a:pt x="2091857" y="704209"/>
+                  </a:lnTo>
+                  <a:lnTo>
+                    <a:pt x="2169491" y="898680"/>
+                  </a:lnTo>
+                  <a:lnTo>
+                    <a:pt x="2247125" y="1079545"/>
+                  </a:lnTo>
+                  <a:lnTo>
+                    <a:pt x="2324759" y="1247756"/>
+                  </a:lnTo>
+                  <a:lnTo>
+                    <a:pt x="2402393" y="1404198"/>
+                  </a:lnTo>
+                  <a:lnTo>
+                    <a:pt x="2480027" y="1549694"/>
+                  </a:lnTo>
+                  <a:lnTo>
+                    <a:pt x="2557661" y="1685011"/>
+                  </a:lnTo>
+                  <a:lnTo>
+                    <a:pt x="2635295" y="1810860"/>
+                  </a:lnTo>
+                  <a:lnTo>
+                    <a:pt x="2712930" y="1927904"/>
+                  </a:lnTo>
+                  <a:lnTo>
+                    <a:pt x="2790564" y="2036759"/>
+                  </a:lnTo>
+                  <a:lnTo>
+                    <a:pt x="2868198" y="2137998"/>
+                  </a:lnTo>
+                  <a:lnTo>
+                    <a:pt x="2945832" y="2232153"/>
+                  </a:lnTo>
+                  <a:lnTo>
+                    <a:pt x="3023466" y="2319721"/>
+                  </a:lnTo>
+                  <a:lnTo>
+                    <a:pt x="3101100" y="2401163"/>
+                  </a:lnTo>
+                  <a:lnTo>
+                    <a:pt x="3178734" y="2476906"/>
+                  </a:lnTo>
+                  <a:lnTo>
+                    <a:pt x="3256368" y="2547350"/>
+                  </a:lnTo>
+                  <a:lnTo>
+                    <a:pt x="3334002" y="2612865"/>
+                  </a:lnTo>
+                  <a:lnTo>
+                    <a:pt x="3411636" y="2650436"/>
+                  </a:lnTo>
+                  <a:lnTo>
+                    <a:pt x="3489270" y="2638605"/>
+                  </a:lnTo>
+                  <a:lnTo>
+                    <a:pt x="3566904" y="2626606"/>
+                  </a:lnTo>
+                  <a:lnTo>
+                    <a:pt x="3644538" y="2614437"/>
+                  </a:lnTo>
+                  <a:lnTo>
+                    <a:pt x="3722172" y="2602095"/>
+                  </a:lnTo>
+                  <a:lnTo>
+                    <a:pt x="3799806" y="2589578"/>
+                  </a:lnTo>
+                  <a:lnTo>
+                    <a:pt x="3877440" y="2576883"/>
+                  </a:lnTo>
+                  <a:lnTo>
+                    <a:pt x="3955074" y="2564008"/>
+                  </a:lnTo>
+                  <a:lnTo>
+                    <a:pt x="4032708" y="2550950"/>
+                  </a:lnTo>
+                  <a:lnTo>
+                    <a:pt x="4110342" y="2537707"/>
+                  </a:lnTo>
+                  <a:lnTo>
+                    <a:pt x="4187976" y="2524275"/>
+                  </a:lnTo>
+                  <a:lnTo>
+                    <a:pt x="4265610" y="2510653"/>
+                  </a:lnTo>
+                  <a:lnTo>
+                    <a:pt x="4343244" y="2496838"/>
+                  </a:lnTo>
+                  <a:lnTo>
+                    <a:pt x="4420879" y="2482826"/>
+                  </a:lnTo>
+                  <a:lnTo>
+                    <a:pt x="4498513" y="2468616"/>
+                  </a:lnTo>
+                  <a:lnTo>
+                    <a:pt x="4576147" y="2454204"/>
+                  </a:lnTo>
+                  <a:lnTo>
+                    <a:pt x="4653781" y="2439587"/>
+                  </a:lnTo>
+                  <a:lnTo>
+                    <a:pt x="4731415" y="2424762"/>
+                  </a:lnTo>
+                  <a:lnTo>
+                    <a:pt x="4809049" y="2409728"/>
+                  </a:lnTo>
+                  <a:lnTo>
+                    <a:pt x="4886683" y="2394479"/>
+                  </a:lnTo>
+                  <a:lnTo>
+                    <a:pt x="4964317" y="2379015"/>
+                  </a:lnTo>
+                  <a:lnTo>
+                    <a:pt x="5041951" y="2363330"/>
+                  </a:lnTo>
+                  <a:lnTo>
+                    <a:pt x="5119585" y="2347423"/>
+                  </a:lnTo>
+                  <a:lnTo>
+                    <a:pt x="5197219" y="2331290"/>
+                  </a:lnTo>
+                  <a:lnTo>
+                    <a:pt x="5274853" y="2314928"/>
+                  </a:lnTo>
+                  <a:lnTo>
+                    <a:pt x="5352487" y="2298334"/>
+                  </a:lnTo>
+                  <a:lnTo>
+                    <a:pt x="5430121" y="2281504"/>
+                  </a:lnTo>
+                  <a:lnTo>
+                    <a:pt x="5507755" y="2264436"/>
+                  </a:lnTo>
+                  <a:lnTo>
+                    <a:pt x="5585389" y="2247125"/>
+                  </a:lnTo>
+                  <a:lnTo>
+                    <a:pt x="5663023" y="2229568"/>
+                  </a:lnTo>
+                  <a:lnTo>
+                    <a:pt x="5740657" y="2211762"/>
+                  </a:lnTo>
+                  <a:lnTo>
+                    <a:pt x="5818291" y="2193703"/>
+                  </a:lnTo>
+                  <a:lnTo>
+                    <a:pt x="5895925" y="2175387"/>
+                  </a:lnTo>
+                  <a:lnTo>
+                    <a:pt x="5973559" y="2156812"/>
+                  </a:lnTo>
+                  <a:lnTo>
+                    <a:pt x="6051193" y="2137973"/>
+                  </a:lnTo>
+                  <a:lnTo>
+                    <a:pt x="6128827" y="2118867"/>
+                  </a:lnTo>
+                  <a:lnTo>
+                    <a:pt x="6206462" y="2099489"/>
+                  </a:lnTo>
+                  <a:lnTo>
+                    <a:pt x="6284096" y="2079836"/>
+                  </a:lnTo>
+                  <a:lnTo>
+                    <a:pt x="6361730" y="2059904"/>
+                  </a:lnTo>
+                  <a:lnTo>
+                    <a:pt x="6439364" y="2039689"/>
+                  </a:lnTo>
+                  <a:lnTo>
+                    <a:pt x="6516998" y="2019187"/>
+                  </a:lnTo>
+                  <a:lnTo>
+                    <a:pt x="6594632" y="1998394"/>
+                  </a:lnTo>
+                  <a:lnTo>
+                    <a:pt x="6672266" y="1977306"/>
+                  </a:lnTo>
+                  <a:lnTo>
+                    <a:pt x="6749900" y="1955918"/>
+                  </a:lnTo>
+                  <a:lnTo>
+                    <a:pt x="6827534" y="1934227"/>
+                  </a:lnTo>
+                  <a:lnTo>
+                    <a:pt x="6905168" y="1912228"/>
+                  </a:lnTo>
+                  <a:lnTo>
+                    <a:pt x="6982802" y="1889917"/>
+                  </a:lnTo>
+                  <a:lnTo>
+                    <a:pt x="7060436" y="1867288"/>
+                  </a:lnTo>
+                  <a:lnTo>
+                    <a:pt x="7138070" y="1844339"/>
+                  </a:lnTo>
+                  <a:lnTo>
+                    <a:pt x="7215704" y="1821063"/>
+                  </a:lnTo>
+                  <a:lnTo>
+                    <a:pt x="7293338" y="1797458"/>
+                  </a:lnTo>
+                  <a:lnTo>
+                    <a:pt x="7370972" y="1773517"/>
+                  </a:lnTo>
+                  <a:lnTo>
+                    <a:pt x="7370972" y="3463706"/>
+                  </a:lnTo>
+                  <a:lnTo>
+                    <a:pt x="7293338" y="3462198"/>
+                  </a:lnTo>
+                  <a:lnTo>
+                    <a:pt x="7215704" y="3460577"/>
+                  </a:lnTo>
+                  <a:lnTo>
+                    <a:pt x="7138070" y="3458834"/>
+                  </a:lnTo>
+                  <a:lnTo>
+                    <a:pt x="7060436" y="3456960"/>
+                  </a:lnTo>
+                  <a:lnTo>
+                    <a:pt x="6982802" y="3454945"/>
+                  </a:lnTo>
+                  <a:lnTo>
+                    <a:pt x="6905168" y="3452778"/>
+                  </a:lnTo>
+                  <a:lnTo>
+                    <a:pt x="6827534" y="3450448"/>
+                  </a:lnTo>
+                  <a:lnTo>
+                    <a:pt x="6749900" y="3447943"/>
+                  </a:lnTo>
+                  <a:lnTo>
+                    <a:pt x="6672266" y="3445250"/>
+                  </a:lnTo>
+                  <a:lnTo>
+                    <a:pt x="6594632" y="3442354"/>
+                  </a:lnTo>
+                  <a:lnTo>
+                    <a:pt x="6516998" y="3439240"/>
+                  </a:lnTo>
+                  <a:lnTo>
+                    <a:pt x="6439364" y="3435892"/>
+                  </a:lnTo>
+                  <a:lnTo>
+                    <a:pt x="6361730" y="3432292"/>
+                  </a:lnTo>
+                  <a:lnTo>
+                    <a:pt x="6284096" y="3428421"/>
+                  </a:lnTo>
+                  <a:lnTo>
+                    <a:pt x="6206462" y="3424259"/>
+                  </a:lnTo>
+                  <a:lnTo>
+                    <a:pt x="6128827" y="3419783"/>
+                  </a:lnTo>
+                  <a:lnTo>
+                    <a:pt x="6051193" y="3414972"/>
+                  </a:lnTo>
+                  <a:lnTo>
+                    <a:pt x="5973559" y="3409798"/>
+                  </a:lnTo>
+                  <a:lnTo>
+                    <a:pt x="5895925" y="3404235"/>
+                  </a:lnTo>
+                  <a:lnTo>
+                    <a:pt x="5818291" y="3398253"/>
+                  </a:lnTo>
+                  <a:lnTo>
+                    <a:pt x="5740657" y="3391822"/>
+                  </a:lnTo>
+                  <a:lnTo>
+                    <a:pt x="5663023" y="3384906"/>
+                  </a:lnTo>
+                  <a:lnTo>
+                    <a:pt x="5585389" y="3377471"/>
+                  </a:lnTo>
+                  <a:lnTo>
+                    <a:pt x="5507755" y="3369476"/>
+                  </a:lnTo>
+                  <a:lnTo>
+                    <a:pt x="5430121" y="3360879"/>
+                  </a:lnTo>
+                  <a:lnTo>
+                    <a:pt x="5352487" y="3351636"/>
+                  </a:lnTo>
+                  <a:lnTo>
+                    <a:pt x="5274853" y="3341698"/>
+                  </a:lnTo>
+                  <a:lnTo>
+                    <a:pt x="5197219" y="3331011"/>
+                  </a:lnTo>
+                  <a:lnTo>
+                    <a:pt x="5119585" y="3319521"/>
+                  </a:lnTo>
+                  <a:lnTo>
+                    <a:pt x="5041951" y="3307167"/>
+                  </a:lnTo>
+                  <a:lnTo>
+                    <a:pt x="4964317" y="3293883"/>
+                  </a:lnTo>
+                  <a:lnTo>
+                    <a:pt x="4886683" y="3279600"/>
+                  </a:lnTo>
+                  <a:lnTo>
+                    <a:pt x="4809049" y="3264242"/>
+                  </a:lnTo>
+                  <a:lnTo>
+                    <a:pt x="4731415" y="3247729"/>
+                  </a:lnTo>
+                  <a:lnTo>
+                    <a:pt x="4653781" y="3229974"/>
+                  </a:lnTo>
+                  <a:lnTo>
+                    <a:pt x="4576147" y="3210883"/>
+                  </a:lnTo>
+                  <a:lnTo>
+                    <a:pt x="4498513" y="3190356"/>
+                  </a:lnTo>
+                  <a:lnTo>
+                    <a:pt x="4420879" y="3168284"/>
+                  </a:lnTo>
+                  <a:lnTo>
+                    <a:pt x="4343244" y="3144553"/>
+                  </a:lnTo>
+                  <a:lnTo>
+                    <a:pt x="4265610" y="3119036"/>
+                  </a:lnTo>
+                  <a:lnTo>
+                    <a:pt x="4187976" y="3091599"/>
+                  </a:lnTo>
+                  <a:lnTo>
+                    <a:pt x="4110342" y="3062098"/>
+                  </a:lnTo>
+                  <a:lnTo>
+                    <a:pt x="4032708" y="3030378"/>
+                  </a:lnTo>
+                  <a:lnTo>
+                    <a:pt x="3955074" y="2996272"/>
+                  </a:lnTo>
+                  <a:lnTo>
+                    <a:pt x="3877440" y="2959600"/>
+                  </a:lnTo>
+                  <a:lnTo>
+                    <a:pt x="3799806" y="2920169"/>
+                  </a:lnTo>
+                  <a:lnTo>
+                    <a:pt x="3722172" y="2877771"/>
+                  </a:lnTo>
+                  <a:lnTo>
+                    <a:pt x="3644538" y="2832185"/>
+                  </a:lnTo>
+                  <a:lnTo>
+                    <a:pt x="3566904" y="2783169"/>
+                  </a:lnTo>
+                  <a:lnTo>
+                    <a:pt x="3489270" y="2730465"/>
+                  </a:lnTo>
+                  <a:lnTo>
+                    <a:pt x="3411636" y="2673797"/>
+                  </a:lnTo>
+                  <a:lnTo>
+                    <a:pt x="3334002" y="2662101"/>
+                  </a:lnTo>
+                  <a:lnTo>
+                    <a:pt x="3256368" y="2673603"/>
+                  </a:lnTo>
+                  <a:lnTo>
+                    <a:pt x="3178734" y="2684944"/>
+                  </a:lnTo>
+                  <a:lnTo>
+                    <a:pt x="3101100" y="2696126"/>
+                  </a:lnTo>
+                  <a:lnTo>
+                    <a:pt x="3023466" y="2707152"/>
+                  </a:lnTo>
+                  <a:lnTo>
+                    <a:pt x="2945832" y="2718023"/>
+                  </a:lnTo>
+                  <a:lnTo>
+                    <a:pt x="2868198" y="2728742"/>
+                  </a:lnTo>
+                  <a:lnTo>
+                    <a:pt x="2790564" y="2739311"/>
+                  </a:lnTo>
+                  <a:lnTo>
+                    <a:pt x="2712930" y="2749732"/>
+                  </a:lnTo>
+                  <a:lnTo>
+                    <a:pt x="2635295" y="2760008"/>
+                  </a:lnTo>
+                  <a:lnTo>
+                    <a:pt x="2557661" y="2770139"/>
+                  </a:lnTo>
+                  <a:lnTo>
+                    <a:pt x="2480027" y="2780129"/>
+                  </a:lnTo>
+                  <a:lnTo>
+                    <a:pt x="2402393" y="2789978"/>
+                  </a:lnTo>
+                  <a:lnTo>
+                    <a:pt x="2324759" y="2799690"/>
+                  </a:lnTo>
+                  <a:lnTo>
+                    <a:pt x="2247125" y="2809266"/>
+                  </a:lnTo>
+                  <a:lnTo>
+                    <a:pt x="2169491" y="2818708"/>
+                  </a:lnTo>
+                  <a:lnTo>
+                    <a:pt x="2091857" y="2828018"/>
+                  </a:lnTo>
+                  <a:lnTo>
+                    <a:pt x="2014223" y="2837197"/>
+                  </a:lnTo>
+                  <a:lnTo>
+                    <a:pt x="1936589" y="2846248"/>
+                  </a:lnTo>
+                  <a:lnTo>
+                    <a:pt x="1858955" y="2855172"/>
+                  </a:lnTo>
+                  <a:lnTo>
+                    <a:pt x="1781321" y="2863971"/>
+                  </a:lnTo>
+                  <a:lnTo>
+                    <a:pt x="1703687" y="2872647"/>
+                  </a:lnTo>
+                  <a:lnTo>
+                    <a:pt x="1626053" y="2881202"/>
+                  </a:lnTo>
+                  <a:lnTo>
+                    <a:pt x="1548419" y="2889637"/>
+                  </a:lnTo>
+                  <a:lnTo>
+                    <a:pt x="1470785" y="2897953"/>
+                  </a:lnTo>
+                  <a:lnTo>
+                    <a:pt x="1393151" y="2906154"/>
+                  </a:lnTo>
+                  <a:lnTo>
+                    <a:pt x="1315517" y="2914239"/>
+                  </a:lnTo>
+                  <a:lnTo>
+                    <a:pt x="1237883" y="2922211"/>
+                  </a:lnTo>
+                  <a:lnTo>
+                    <a:pt x="1160249" y="2930072"/>
+                  </a:lnTo>
+                  <a:lnTo>
+                    <a:pt x="1082615" y="2937823"/>
+                  </a:lnTo>
+                  <a:lnTo>
+                    <a:pt x="1004981" y="2945465"/>
+                  </a:lnTo>
+                  <a:lnTo>
+                    <a:pt x="927346" y="2953000"/>
+                  </a:lnTo>
+                  <a:lnTo>
+                    <a:pt x="849712" y="2960430"/>
+                  </a:lnTo>
+                  <a:lnTo>
+                    <a:pt x="772078" y="2967756"/>
+                  </a:lnTo>
+                  <a:lnTo>
+                    <a:pt x="694444" y="2974979"/>
+                  </a:lnTo>
+                  <a:lnTo>
+                    <a:pt x="616810" y="2982101"/>
+                  </a:lnTo>
+                  <a:lnTo>
+                    <a:pt x="539176" y="2989123"/>
+                  </a:lnTo>
+                  <a:lnTo>
+                    <a:pt x="461542" y="2996048"/>
+                  </a:lnTo>
+                  <a:lnTo>
+                    <a:pt x="383908" y="3002875"/>
+                  </a:lnTo>
+                  <a:lnTo>
+                    <a:pt x="306274" y="3009606"/>
+                  </a:lnTo>
+                  <a:lnTo>
+                    <a:pt x="228640" y="3016244"/>
+                  </a:lnTo>
+                  <a:lnTo>
+                    <a:pt x="151006" y="3022788"/>
+                  </a:lnTo>
+                  <a:lnTo>
+                    <a:pt x="73372" y="3029241"/>
+                  </a:lnTo>
+                  <a:lnTo>
+                    <a:pt x="0" y="3035254"/>
                   </a:lnTo>
                   <a:close/>
                 </a:path>
@@ -3540,231 +3540,231 @@
           </p:nvSpPr>
           <p:spPr>
             <a:xfrm>
-              <a:off x="2667951" y="1896563"/>
-              <a:ext cx="5520538" cy="2778933"/>
+              <a:off x="2667951" y="2073503"/>
+              <a:ext cx="5520538" cy="2650436"/>
             </a:xfrm>
             <a:custGeom>
               <a:avLst/>
               <a:pathLst>
-                <a:path w="5520538" h="2778933">
+                <a:path w="5520538" h="2650436">
                   <a:moveTo>
                     <a:pt x="0" y="0"/>
                   </a:moveTo>
                   <a:lnTo>
-                    <a:pt x="8521" y="29915"/>
-                  </a:lnTo>
-                  <a:lnTo>
-                    <a:pt x="86155" y="283380"/>
-                  </a:lnTo>
-                  <a:lnTo>
-                    <a:pt x="163789" y="519112"/>
-                  </a:lnTo>
-                  <a:lnTo>
-                    <a:pt x="241423" y="738350"/>
-                  </a:lnTo>
-                  <a:lnTo>
-                    <a:pt x="319057" y="942250"/>
-                  </a:lnTo>
-                  <a:lnTo>
-                    <a:pt x="396691" y="1131883"/>
-                  </a:lnTo>
-                  <a:lnTo>
-                    <a:pt x="474326" y="1308249"/>
-                  </a:lnTo>
-                  <a:lnTo>
-                    <a:pt x="551960" y="1472275"/>
-                  </a:lnTo>
-                  <a:lnTo>
-                    <a:pt x="629594" y="1624825"/>
-                  </a:lnTo>
-                  <a:lnTo>
-                    <a:pt x="707228" y="1766702"/>
-                  </a:lnTo>
-                  <a:lnTo>
-                    <a:pt x="784862" y="1898653"/>
-                  </a:lnTo>
-                  <a:lnTo>
-                    <a:pt x="862496" y="2021371"/>
-                  </a:lnTo>
-                  <a:lnTo>
-                    <a:pt x="940130" y="2135504"/>
-                  </a:lnTo>
-                  <a:lnTo>
-                    <a:pt x="1017764" y="2241651"/>
-                  </a:lnTo>
-                  <a:lnTo>
-                    <a:pt x="1095398" y="2340371"/>
-                  </a:lnTo>
-                  <a:lnTo>
-                    <a:pt x="1173032" y="2432185"/>
-                  </a:lnTo>
-                  <a:lnTo>
-                    <a:pt x="1250666" y="2517574"/>
-                  </a:lnTo>
-                  <a:lnTo>
-                    <a:pt x="1328300" y="2596990"/>
-                  </a:lnTo>
-                  <a:lnTo>
-                    <a:pt x="1405934" y="2670849"/>
-                  </a:lnTo>
-                  <a:lnTo>
-                    <a:pt x="1483568" y="2739541"/>
-                  </a:lnTo>
-                  <a:lnTo>
-                    <a:pt x="1561202" y="2778933"/>
-                  </a:lnTo>
-                  <a:lnTo>
-                    <a:pt x="1638836" y="2766528"/>
-                  </a:lnTo>
-                  <a:lnTo>
-                    <a:pt x="1716470" y="2753948"/>
-                  </a:lnTo>
-                  <a:lnTo>
-                    <a:pt x="1794104" y="2741189"/>
-                  </a:lnTo>
-                  <a:lnTo>
-                    <a:pt x="1871738" y="2728248"/>
-                  </a:lnTo>
-                  <a:lnTo>
-                    <a:pt x="1949372" y="2715124"/>
-                  </a:lnTo>
-                  <a:lnTo>
-                    <a:pt x="2027006" y="2701814"/>
-                  </a:lnTo>
-                  <a:lnTo>
-                    <a:pt x="2104640" y="2688315"/>
-                  </a:lnTo>
-                  <a:lnTo>
-                    <a:pt x="2182275" y="2674624"/>
-                  </a:lnTo>
-                  <a:lnTo>
-                    <a:pt x="2259909" y="2660738"/>
-                  </a:lnTo>
-                  <a:lnTo>
-                    <a:pt x="2337543" y="2646656"/>
-                  </a:lnTo>
-                  <a:lnTo>
-                    <a:pt x="2415177" y="2632373"/>
-                  </a:lnTo>
-                  <a:lnTo>
-                    <a:pt x="2492811" y="2617888"/>
-                  </a:lnTo>
-                  <a:lnTo>
-                    <a:pt x="2570445" y="2603197"/>
-                  </a:lnTo>
-                  <a:lnTo>
-                    <a:pt x="2648079" y="2588298"/>
-                  </a:lnTo>
-                  <a:lnTo>
-                    <a:pt x="2725713" y="2573187"/>
-                  </a:lnTo>
-                  <a:lnTo>
-                    <a:pt x="2803347" y="2557861"/>
-                  </a:lnTo>
-                  <a:lnTo>
-                    <a:pt x="2880981" y="2542318"/>
-                  </a:lnTo>
-                  <a:lnTo>
-                    <a:pt x="2958615" y="2526555"/>
-                  </a:lnTo>
-                  <a:lnTo>
-                    <a:pt x="3036249" y="2510567"/>
-                  </a:lnTo>
-                  <a:lnTo>
-                    <a:pt x="3113883" y="2494352"/>
-                  </a:lnTo>
-                  <a:lnTo>
-                    <a:pt x="3191517" y="2477908"/>
-                  </a:lnTo>
-                  <a:lnTo>
-                    <a:pt x="3269151" y="2461230"/>
-                  </a:lnTo>
-                  <a:lnTo>
-                    <a:pt x="3346785" y="2444315"/>
-                  </a:lnTo>
-                  <a:lnTo>
-                    <a:pt x="3424419" y="2427159"/>
-                  </a:lnTo>
-                  <a:lnTo>
-                    <a:pt x="3502053" y="2409761"/>
-                  </a:lnTo>
-                  <a:lnTo>
-                    <a:pt x="3579687" y="2392115"/>
-                  </a:lnTo>
-                  <a:lnTo>
-                    <a:pt x="3657321" y="2374219"/>
-                  </a:lnTo>
-                  <a:lnTo>
-                    <a:pt x="3734955" y="2356068"/>
-                  </a:lnTo>
-                  <a:lnTo>
-                    <a:pt x="3812589" y="2337660"/>
-                  </a:lnTo>
-                  <a:lnTo>
-                    <a:pt x="3890224" y="2318991"/>
-                  </a:lnTo>
-                  <a:lnTo>
-                    <a:pt x="3967858" y="2300057"/>
-                  </a:lnTo>
-                  <a:lnTo>
-                    <a:pt x="4045492" y="2280853"/>
-                  </a:lnTo>
-                  <a:lnTo>
-                    <a:pt x="4123126" y="2261377"/>
-                  </a:lnTo>
-                  <a:lnTo>
-                    <a:pt x="4200760" y="2241625"/>
-                  </a:lnTo>
-                  <a:lnTo>
-                    <a:pt x="4278394" y="2221592"/>
-                  </a:lnTo>
-                  <a:lnTo>
-                    <a:pt x="4356028" y="2201275"/>
-                  </a:lnTo>
-                  <a:lnTo>
-                    <a:pt x="4433662" y="2180669"/>
-                  </a:lnTo>
-                  <a:lnTo>
-                    <a:pt x="4511296" y="2159771"/>
-                  </a:lnTo>
-                  <a:lnTo>
-                    <a:pt x="4588930" y="2138576"/>
-                  </a:lnTo>
-                  <a:lnTo>
-                    <a:pt x="4666564" y="2117080"/>
-                  </a:lnTo>
-                  <a:lnTo>
-                    <a:pt x="4744198" y="2095279"/>
-                  </a:lnTo>
-                  <a:lnTo>
-                    <a:pt x="4821832" y="2073169"/>
-                  </a:lnTo>
-                  <a:lnTo>
-                    <a:pt x="4899466" y="2050744"/>
-                  </a:lnTo>
-                  <a:lnTo>
-                    <a:pt x="4977100" y="2028001"/>
-                  </a:lnTo>
-                  <a:lnTo>
-                    <a:pt x="5054734" y="2004936"/>
-                  </a:lnTo>
-                  <a:lnTo>
-                    <a:pt x="5132368" y="1981542"/>
-                  </a:lnTo>
-                  <a:lnTo>
-                    <a:pt x="5210002" y="1957817"/>
-                  </a:lnTo>
-                  <a:lnTo>
-                    <a:pt x="5287636" y="1933755"/>
-                  </a:lnTo>
-                  <a:lnTo>
-                    <a:pt x="5365270" y="1909351"/>
-                  </a:lnTo>
-                  <a:lnTo>
-                    <a:pt x="5442904" y="1884601"/>
-                  </a:lnTo>
-                  <a:lnTo>
-                    <a:pt x="5520538" y="1859499"/>
+                    <a:pt x="8521" y="28532"/>
+                  </a:lnTo>
+                  <a:lnTo>
+                    <a:pt x="86155" y="270277"/>
+                  </a:lnTo>
+                  <a:lnTo>
+                    <a:pt x="163789" y="495108"/>
+                  </a:lnTo>
+                  <a:lnTo>
+                    <a:pt x="241423" y="704209"/>
+                  </a:lnTo>
+                  <a:lnTo>
+                    <a:pt x="319057" y="898680"/>
+                  </a:lnTo>
+                  <a:lnTo>
+                    <a:pt x="396691" y="1079545"/>
+                  </a:lnTo>
+                  <a:lnTo>
+                    <a:pt x="474326" y="1247756"/>
+                  </a:lnTo>
+                  <a:lnTo>
+                    <a:pt x="551960" y="1404198"/>
+                  </a:lnTo>
+                  <a:lnTo>
+                    <a:pt x="629594" y="1549694"/>
+                  </a:lnTo>
+                  <a:lnTo>
+                    <a:pt x="707228" y="1685011"/>
+                  </a:lnTo>
+                  <a:lnTo>
+                    <a:pt x="784862" y="1810860"/>
+                  </a:lnTo>
+                  <a:lnTo>
+                    <a:pt x="862496" y="1927904"/>
+                  </a:lnTo>
+                  <a:lnTo>
+                    <a:pt x="940130" y="2036759"/>
+                  </a:lnTo>
+                  <a:lnTo>
+                    <a:pt x="1017764" y="2137998"/>
+                  </a:lnTo>
+                  <a:lnTo>
+                    <a:pt x="1095398" y="2232153"/>
+                  </a:lnTo>
+                  <a:lnTo>
+                    <a:pt x="1173032" y="2319721"/>
+                  </a:lnTo>
+                  <a:lnTo>
+                    <a:pt x="1250666" y="2401163"/>
+                  </a:lnTo>
+                  <a:lnTo>
+                    <a:pt x="1328300" y="2476906"/>
+                  </a:lnTo>
+                  <a:lnTo>
+                    <a:pt x="1405934" y="2547350"/>
+                  </a:lnTo>
+                  <a:lnTo>
+                    <a:pt x="1483568" y="2612865"/>
+                  </a:lnTo>
+                  <a:lnTo>
+                    <a:pt x="1561202" y="2650436"/>
+                  </a:lnTo>
+                  <a:lnTo>
+                    <a:pt x="1638836" y="2638605"/>
+                  </a:lnTo>
+                  <a:lnTo>
+                    <a:pt x="1716470" y="2626606"/>
+                  </a:lnTo>
+                  <a:lnTo>
+                    <a:pt x="1794104" y="2614437"/>
+                  </a:lnTo>
+                  <a:lnTo>
+                    <a:pt x="1871738" y="2602095"/>
+                  </a:lnTo>
+                  <a:lnTo>
+                    <a:pt x="1949372" y="2589578"/>
+                  </a:lnTo>
+                  <a:lnTo>
+                    <a:pt x="2027006" y="2576883"/>
+                  </a:lnTo>
+                  <a:lnTo>
+                    <a:pt x="2104640" y="2564008"/>
+                  </a:lnTo>
+                  <a:lnTo>
+                    <a:pt x="2182275" y="2550950"/>
+                  </a:lnTo>
+                  <a:lnTo>
+                    <a:pt x="2259909" y="2537707"/>
+                  </a:lnTo>
+                  <a:lnTo>
+                    <a:pt x="2337543" y="2524275"/>
+                  </a:lnTo>
+                  <a:lnTo>
+                    <a:pt x="2415177" y="2510653"/>
+                  </a:lnTo>
+                  <a:lnTo>
+                    <a:pt x="2492811" y="2496838"/>
+                  </a:lnTo>
+                  <a:lnTo>
+                    <a:pt x="2570445" y="2482826"/>
+                  </a:lnTo>
+                  <a:lnTo>
+                    <a:pt x="2648079" y="2468616"/>
+                  </a:lnTo>
+                  <a:lnTo>
+                    <a:pt x="2725713" y="2454204"/>
+                  </a:lnTo>
+                  <a:lnTo>
+                    <a:pt x="2803347" y="2439587"/>
+                  </a:lnTo>
+                  <a:lnTo>
+                    <a:pt x="2880981" y="2424762"/>
+                  </a:lnTo>
+                  <a:lnTo>
+                    <a:pt x="2958615" y="2409728"/>
+                  </a:lnTo>
+                  <a:lnTo>
+                    <a:pt x="3036249" y="2394479"/>
+                  </a:lnTo>
+                  <a:lnTo>
+                    <a:pt x="3113883" y="2379015"/>
+                  </a:lnTo>
+                  <a:lnTo>
+                    <a:pt x="3191517" y="2363330"/>
+                  </a:lnTo>
+                  <a:lnTo>
+                    <a:pt x="3269151" y="2347423"/>
+                  </a:lnTo>
+                  <a:lnTo>
+                    <a:pt x="3346785" y="2331290"/>
+                  </a:lnTo>
+                  <a:lnTo>
+                    <a:pt x="3424419" y="2314928"/>
+                  </a:lnTo>
+                  <a:lnTo>
+                    <a:pt x="3502053" y="2298334"/>
+                  </a:lnTo>
+                  <a:lnTo>
+                    <a:pt x="3579687" y="2281504"/>
+                  </a:lnTo>
+                  <a:lnTo>
+                    <a:pt x="3657321" y="2264436"/>
+                  </a:lnTo>
+                  <a:lnTo>
+                    <a:pt x="3734955" y="2247125"/>
+                  </a:lnTo>
+                  <a:lnTo>
+                    <a:pt x="3812589" y="2229568"/>
+                  </a:lnTo>
+                  <a:lnTo>
+                    <a:pt x="3890224" y="2211762"/>
+                  </a:lnTo>
+                  <a:lnTo>
+                    <a:pt x="3967858" y="2193703"/>
+                  </a:lnTo>
+                  <a:lnTo>
+                    <a:pt x="4045492" y="2175387"/>
+                  </a:lnTo>
+                  <a:lnTo>
+                    <a:pt x="4123126" y="2156812"/>
+                  </a:lnTo>
+                  <a:lnTo>
+                    <a:pt x="4200760" y="2137973"/>
+                  </a:lnTo>
+                  <a:lnTo>
+                    <a:pt x="4278394" y="2118867"/>
+                  </a:lnTo>
+                  <a:lnTo>
+                    <a:pt x="4356028" y="2099489"/>
+                  </a:lnTo>
+                  <a:lnTo>
+                    <a:pt x="4433662" y="2079836"/>
+                  </a:lnTo>
+                  <a:lnTo>
+                    <a:pt x="4511296" y="2059904"/>
+                  </a:lnTo>
+                  <a:lnTo>
+                    <a:pt x="4588930" y="2039689"/>
+                  </a:lnTo>
+                  <a:lnTo>
+                    <a:pt x="4666564" y="2019187"/>
+                  </a:lnTo>
+                  <a:lnTo>
+                    <a:pt x="4744198" y="1998394"/>
+                  </a:lnTo>
+                  <a:lnTo>
+                    <a:pt x="4821832" y="1977306"/>
+                  </a:lnTo>
+                  <a:lnTo>
+                    <a:pt x="4899466" y="1955918"/>
+                  </a:lnTo>
+                  <a:lnTo>
+                    <a:pt x="4977100" y="1934227"/>
+                  </a:lnTo>
+                  <a:lnTo>
+                    <a:pt x="5054734" y="1912228"/>
+                  </a:lnTo>
+                  <a:lnTo>
+                    <a:pt x="5132368" y="1889917"/>
+                  </a:lnTo>
+                  <a:lnTo>
+                    <a:pt x="5210002" y="1867288"/>
+                  </a:lnTo>
+                  <a:lnTo>
+                    <a:pt x="5287636" y="1844339"/>
+                  </a:lnTo>
+                  <a:lnTo>
+                    <a:pt x="5365270" y="1821063"/>
+                  </a:lnTo>
+                  <a:lnTo>
+                    <a:pt x="5442904" y="1797458"/>
+                  </a:lnTo>
+                  <a:lnTo>
+                    <a:pt x="5520538" y="1773517"/>
                   </a:lnTo>
                 </a:path>
               </a:pathLst>
@@ -3784,300 +3784,300 @@
           </p:nvSpPr>
           <p:spPr>
             <a:xfrm>
-              <a:off x="817517" y="4687727"/>
-              <a:ext cx="7370972" cy="840467"/>
+              <a:off x="817517" y="4735604"/>
+              <a:ext cx="7370972" cy="801604"/>
             </a:xfrm>
             <a:custGeom>
               <a:avLst/>
               <a:pathLst>
-                <a:path w="7370972" h="840467">
+                <a:path w="7370972" h="801604">
                   <a:moveTo>
-                    <a:pt x="7370972" y="840467"/>
+                    <a:pt x="7370972" y="801604"/>
                   </a:moveTo>
                   <a:lnTo>
-                    <a:pt x="7293338" y="838886"/>
-                  </a:lnTo>
-                  <a:lnTo>
-                    <a:pt x="7215704" y="837186"/>
-                  </a:lnTo>
-                  <a:lnTo>
-                    <a:pt x="7138070" y="835359"/>
-                  </a:lnTo>
-                  <a:lnTo>
-                    <a:pt x="7060436" y="833394"/>
-                  </a:lnTo>
-                  <a:lnTo>
-                    <a:pt x="6982802" y="831281"/>
-                  </a:lnTo>
-                  <a:lnTo>
-                    <a:pt x="6905168" y="829009"/>
-                  </a:lnTo>
-                  <a:lnTo>
-                    <a:pt x="6827534" y="826567"/>
-                  </a:lnTo>
-                  <a:lnTo>
-                    <a:pt x="6749900" y="823940"/>
-                  </a:lnTo>
-                  <a:lnTo>
-                    <a:pt x="6672266" y="821116"/>
-                  </a:lnTo>
-                  <a:lnTo>
-                    <a:pt x="6594632" y="818080"/>
-                  </a:lnTo>
-                  <a:lnTo>
-                    <a:pt x="6516998" y="814815"/>
-                  </a:lnTo>
-                  <a:lnTo>
-                    <a:pt x="6439364" y="811304"/>
-                  </a:lnTo>
-                  <a:lnTo>
-                    <a:pt x="6361730" y="807530"/>
-                  </a:lnTo>
-                  <a:lnTo>
-                    <a:pt x="6284096" y="803471"/>
-                  </a:lnTo>
-                  <a:lnTo>
-                    <a:pt x="6206462" y="799107"/>
-                  </a:lnTo>
-                  <a:lnTo>
-                    <a:pt x="6128827" y="794415"/>
-                  </a:lnTo>
-                  <a:lnTo>
-                    <a:pt x="6051193" y="789370"/>
-                  </a:lnTo>
-                  <a:lnTo>
-                    <a:pt x="5973559" y="783945"/>
-                  </a:lnTo>
-                  <a:lnTo>
-                    <a:pt x="5895925" y="778113"/>
-                  </a:lnTo>
-                  <a:lnTo>
-                    <a:pt x="5818291" y="771841"/>
-                  </a:lnTo>
-                  <a:lnTo>
-                    <a:pt x="5740657" y="765098"/>
-                  </a:lnTo>
-                  <a:lnTo>
-                    <a:pt x="5663023" y="757847"/>
-                  </a:lnTo>
-                  <a:lnTo>
-                    <a:pt x="5585389" y="750051"/>
-                  </a:lnTo>
-                  <a:lnTo>
-                    <a:pt x="5507755" y="741668"/>
-                  </a:lnTo>
-                  <a:lnTo>
-                    <a:pt x="5430121" y="732655"/>
-                  </a:lnTo>
-                  <a:lnTo>
-                    <a:pt x="5352487" y="722964"/>
-                  </a:lnTo>
-                  <a:lnTo>
-                    <a:pt x="5274853" y="712544"/>
-                  </a:lnTo>
-                  <a:lnTo>
-                    <a:pt x="5197219" y="701339"/>
-                  </a:lnTo>
-                  <a:lnTo>
-                    <a:pt x="5119585" y="689292"/>
-                  </a:lnTo>
-                  <a:lnTo>
-                    <a:pt x="5041951" y="676339"/>
-                  </a:lnTo>
-                  <a:lnTo>
-                    <a:pt x="4964317" y="662411"/>
-                  </a:lnTo>
-                  <a:lnTo>
-                    <a:pt x="4886683" y="647435"/>
-                  </a:lnTo>
-                  <a:lnTo>
-                    <a:pt x="4809049" y="631333"/>
-                  </a:lnTo>
-                  <a:lnTo>
-                    <a:pt x="4731415" y="614020"/>
-                  </a:lnTo>
-                  <a:lnTo>
-                    <a:pt x="4653781" y="595404"/>
-                  </a:lnTo>
-                  <a:lnTo>
-                    <a:pt x="4576147" y="575387"/>
-                  </a:lnTo>
-                  <a:lnTo>
-                    <a:pt x="4498513" y="553865"/>
-                  </a:lnTo>
-                  <a:lnTo>
-                    <a:pt x="4420879" y="530723"/>
-                  </a:lnTo>
-                  <a:lnTo>
-                    <a:pt x="4343244" y="505841"/>
-                  </a:lnTo>
-                  <a:lnTo>
-                    <a:pt x="4265610" y="479087"/>
-                  </a:lnTo>
-                  <a:lnTo>
-                    <a:pt x="4187976" y="450320"/>
-                  </a:lnTo>
-                  <a:lnTo>
-                    <a:pt x="4110342" y="419389"/>
-                  </a:lnTo>
-                  <a:lnTo>
-                    <a:pt x="4032708" y="386131"/>
-                  </a:lnTo>
-                  <a:lnTo>
-                    <a:pt x="3955074" y="350371"/>
-                  </a:lnTo>
-                  <a:lnTo>
-                    <a:pt x="3877440" y="311921"/>
-                  </a:lnTo>
-                  <a:lnTo>
-                    <a:pt x="3799806" y="270578"/>
-                  </a:lnTo>
-                  <a:lnTo>
-                    <a:pt x="3722172" y="226126"/>
-                  </a:lnTo>
-                  <a:lnTo>
-                    <a:pt x="3644538" y="178329"/>
-                  </a:lnTo>
-                  <a:lnTo>
-                    <a:pt x="3566904" y="126936"/>
-                  </a:lnTo>
-                  <a:lnTo>
-                    <a:pt x="3489270" y="71678"/>
-                  </a:lnTo>
-                  <a:lnTo>
-                    <a:pt x="3411636" y="12262"/>
+                    <a:pt x="7293338" y="800096"/>
+                  </a:lnTo>
+                  <a:lnTo>
+                    <a:pt x="7215704" y="798475"/>
+                  </a:lnTo>
+                  <a:lnTo>
+                    <a:pt x="7138070" y="796732"/>
+                  </a:lnTo>
+                  <a:lnTo>
+                    <a:pt x="7060436" y="794858"/>
+                  </a:lnTo>
+                  <a:lnTo>
+                    <a:pt x="6982802" y="792843"/>
+                  </a:lnTo>
+                  <a:lnTo>
+                    <a:pt x="6905168" y="790676"/>
+                  </a:lnTo>
+                  <a:lnTo>
+                    <a:pt x="6827534" y="788347"/>
+                  </a:lnTo>
+                  <a:lnTo>
+                    <a:pt x="6749900" y="785842"/>
+                  </a:lnTo>
+                  <a:lnTo>
+                    <a:pt x="6672266" y="783148"/>
+                  </a:lnTo>
+                  <a:lnTo>
+                    <a:pt x="6594632" y="780252"/>
+                  </a:lnTo>
+                  <a:lnTo>
+                    <a:pt x="6516998" y="777138"/>
+                  </a:lnTo>
+                  <a:lnTo>
+                    <a:pt x="6439364" y="773790"/>
+                  </a:lnTo>
+                  <a:lnTo>
+                    <a:pt x="6361730" y="770190"/>
+                  </a:lnTo>
+                  <a:lnTo>
+                    <a:pt x="6284096" y="766319"/>
+                  </a:lnTo>
+                  <a:lnTo>
+                    <a:pt x="6206462" y="762157"/>
+                  </a:lnTo>
+                  <a:lnTo>
+                    <a:pt x="6128827" y="757682"/>
+                  </a:lnTo>
+                  <a:lnTo>
+                    <a:pt x="6051193" y="752870"/>
+                  </a:lnTo>
+                  <a:lnTo>
+                    <a:pt x="5973559" y="747696"/>
+                  </a:lnTo>
+                  <a:lnTo>
+                    <a:pt x="5895925" y="742133"/>
+                  </a:lnTo>
+                  <a:lnTo>
+                    <a:pt x="5818291" y="736151"/>
+                  </a:lnTo>
+                  <a:lnTo>
+                    <a:pt x="5740657" y="729720"/>
+                  </a:lnTo>
+                  <a:lnTo>
+                    <a:pt x="5663023" y="722805"/>
+                  </a:lnTo>
+                  <a:lnTo>
+                    <a:pt x="5585389" y="715369"/>
+                  </a:lnTo>
+                  <a:lnTo>
+                    <a:pt x="5507755" y="707374"/>
+                  </a:lnTo>
+                  <a:lnTo>
+                    <a:pt x="5430121" y="698778"/>
+                  </a:lnTo>
+                  <a:lnTo>
+                    <a:pt x="5352487" y="689534"/>
+                  </a:lnTo>
+                  <a:lnTo>
+                    <a:pt x="5274853" y="679596"/>
+                  </a:lnTo>
+                  <a:lnTo>
+                    <a:pt x="5197219" y="668910"/>
+                  </a:lnTo>
+                  <a:lnTo>
+                    <a:pt x="5119585" y="657420"/>
+                  </a:lnTo>
+                  <a:lnTo>
+                    <a:pt x="5041951" y="645065"/>
+                  </a:lnTo>
+                  <a:lnTo>
+                    <a:pt x="4964317" y="631781"/>
+                  </a:lnTo>
+                  <a:lnTo>
+                    <a:pt x="4886683" y="617498"/>
+                  </a:lnTo>
+                  <a:lnTo>
+                    <a:pt x="4809049" y="602141"/>
+                  </a:lnTo>
+                  <a:lnTo>
+                    <a:pt x="4731415" y="585628"/>
+                  </a:lnTo>
+                  <a:lnTo>
+                    <a:pt x="4653781" y="567872"/>
+                  </a:lnTo>
+                  <a:lnTo>
+                    <a:pt x="4576147" y="548781"/>
+                  </a:lnTo>
+                  <a:lnTo>
+                    <a:pt x="4498513" y="528254"/>
+                  </a:lnTo>
+                  <a:lnTo>
+                    <a:pt x="4420879" y="506183"/>
+                  </a:lnTo>
+                  <a:lnTo>
+                    <a:pt x="4343244" y="482451"/>
+                  </a:lnTo>
+                  <a:lnTo>
+                    <a:pt x="4265610" y="456934"/>
+                  </a:lnTo>
+                  <a:lnTo>
+                    <a:pt x="4187976" y="429497"/>
+                  </a:lnTo>
+                  <a:lnTo>
+                    <a:pt x="4110342" y="399996"/>
+                  </a:lnTo>
+                  <a:lnTo>
+                    <a:pt x="4032708" y="368276"/>
+                  </a:lnTo>
+                  <a:lnTo>
+                    <a:pt x="3955074" y="334170"/>
+                  </a:lnTo>
+                  <a:lnTo>
+                    <a:pt x="3877440" y="297498"/>
+                  </a:lnTo>
+                  <a:lnTo>
+                    <a:pt x="3799806" y="258067"/>
+                  </a:lnTo>
+                  <a:lnTo>
+                    <a:pt x="3722172" y="215670"/>
+                  </a:lnTo>
+                  <a:lnTo>
+                    <a:pt x="3644538" y="170083"/>
+                  </a:lnTo>
+                  <a:lnTo>
+                    <a:pt x="3566904" y="121067"/>
+                  </a:lnTo>
+                  <a:lnTo>
+                    <a:pt x="3489270" y="68363"/>
+                  </a:lnTo>
+                  <a:lnTo>
+                    <a:pt x="3411636" y="11695"/>
                   </a:lnTo>
                   <a:lnTo>
                     <a:pt x="3334002" y="0"/>
                   </a:lnTo>
                   <a:lnTo>
-                    <a:pt x="3256368" y="12059"/>
-                  </a:lnTo>
-                  <a:lnTo>
-                    <a:pt x="3178734" y="23950"/>
-                  </a:lnTo>
-                  <a:lnTo>
-                    <a:pt x="3101100" y="35674"/>
-                  </a:lnTo>
-                  <a:lnTo>
-                    <a:pt x="3023466" y="47234"/>
-                  </a:lnTo>
-                  <a:lnTo>
-                    <a:pt x="2945832" y="58633"/>
-                  </a:lnTo>
-                  <a:lnTo>
-                    <a:pt x="2868198" y="69871"/>
-                  </a:lnTo>
-                  <a:lnTo>
-                    <a:pt x="2790564" y="80953"/>
-                  </a:lnTo>
-                  <a:lnTo>
-                    <a:pt x="2712930" y="91879"/>
-                  </a:lnTo>
-                  <a:lnTo>
-                    <a:pt x="2635295" y="102653"/>
-                  </a:lnTo>
-                  <a:lnTo>
-                    <a:pt x="2557661" y="113275"/>
-                  </a:lnTo>
-                  <a:lnTo>
-                    <a:pt x="2480027" y="123749"/>
-                  </a:lnTo>
-                  <a:lnTo>
-                    <a:pt x="2402393" y="134076"/>
-                  </a:lnTo>
-                  <a:lnTo>
-                    <a:pt x="2324759" y="144259"/>
-                  </a:lnTo>
-                  <a:lnTo>
-                    <a:pt x="2247125" y="154299"/>
-                  </a:lnTo>
-                  <a:lnTo>
-                    <a:pt x="2169491" y="164199"/>
-                  </a:lnTo>
-                  <a:lnTo>
-                    <a:pt x="2091857" y="173960"/>
-                  </a:lnTo>
-                  <a:lnTo>
-                    <a:pt x="2014223" y="183584"/>
-                  </a:lnTo>
-                  <a:lnTo>
-                    <a:pt x="1936589" y="193074"/>
-                  </a:lnTo>
-                  <a:lnTo>
-                    <a:pt x="1858955" y="202431"/>
-                  </a:lnTo>
-                  <a:lnTo>
-                    <a:pt x="1781321" y="211656"/>
-                  </a:lnTo>
-                  <a:lnTo>
-                    <a:pt x="1703687" y="220753"/>
-                  </a:lnTo>
-                  <a:lnTo>
-                    <a:pt x="1626053" y="229722"/>
-                  </a:lnTo>
-                  <a:lnTo>
-                    <a:pt x="1548419" y="238566"/>
-                  </a:lnTo>
-                  <a:lnTo>
-                    <a:pt x="1470785" y="247286"/>
-                  </a:lnTo>
-                  <a:lnTo>
-                    <a:pt x="1393151" y="255884"/>
-                  </a:lnTo>
-                  <a:lnTo>
-                    <a:pt x="1315517" y="264361"/>
-                  </a:lnTo>
-                  <a:lnTo>
-                    <a:pt x="1237883" y="272720"/>
-                  </a:lnTo>
-                  <a:lnTo>
-                    <a:pt x="1160249" y="280962"/>
-                  </a:lnTo>
-                  <a:lnTo>
-                    <a:pt x="1082615" y="289089"/>
-                  </a:lnTo>
-                  <a:lnTo>
-                    <a:pt x="1004981" y="297101"/>
-                  </a:lnTo>
-                  <a:lnTo>
-                    <a:pt x="927346" y="305002"/>
-                  </a:lnTo>
-                  <a:lnTo>
-                    <a:pt x="849712" y="312792"/>
-                  </a:lnTo>
-                  <a:lnTo>
-                    <a:pt x="772078" y="320473"/>
-                  </a:lnTo>
-                  <a:lnTo>
-                    <a:pt x="694444" y="328046"/>
-                  </a:lnTo>
-                  <a:lnTo>
-                    <a:pt x="616810" y="335513"/>
-                  </a:lnTo>
-                  <a:lnTo>
-                    <a:pt x="539176" y="342876"/>
-                  </a:lnTo>
-                  <a:lnTo>
-                    <a:pt x="461542" y="350136"/>
-                  </a:lnTo>
-                  <a:lnTo>
-                    <a:pt x="383908" y="357294"/>
-                  </a:lnTo>
-                  <a:lnTo>
-                    <a:pt x="306274" y="364352"/>
-                  </a:lnTo>
-                  <a:lnTo>
-                    <a:pt x="228640" y="371311"/>
-                  </a:lnTo>
-                  <a:lnTo>
-                    <a:pt x="151006" y="378173"/>
-                  </a:lnTo>
-                  <a:lnTo>
-                    <a:pt x="73372" y="384939"/>
-                  </a:lnTo>
-                  <a:lnTo>
-                    <a:pt x="0" y="391243"/>
+                    <a:pt x="3256368" y="11501"/>
+                  </a:lnTo>
+                  <a:lnTo>
+                    <a:pt x="3178734" y="22842"/>
+                  </a:lnTo>
+                  <a:lnTo>
+                    <a:pt x="3101100" y="34025"/>
+                  </a:lnTo>
+                  <a:lnTo>
+                    <a:pt x="3023466" y="45050"/>
+                  </a:lnTo>
+                  <a:lnTo>
+                    <a:pt x="2945832" y="55921"/>
+                  </a:lnTo>
+                  <a:lnTo>
+                    <a:pt x="2868198" y="66641"/>
+                  </a:lnTo>
+                  <a:lnTo>
+                    <a:pt x="2790564" y="77210"/>
+                  </a:lnTo>
+                  <a:lnTo>
+                    <a:pt x="2712930" y="87631"/>
+                  </a:lnTo>
+                  <a:lnTo>
+                    <a:pt x="2635295" y="97906"/>
+                  </a:lnTo>
+                  <a:lnTo>
+                    <a:pt x="2557661" y="108037"/>
+                  </a:lnTo>
+                  <a:lnTo>
+                    <a:pt x="2480027" y="118027"/>
+                  </a:lnTo>
+                  <a:lnTo>
+                    <a:pt x="2402393" y="127877"/>
+                  </a:lnTo>
+                  <a:lnTo>
+                    <a:pt x="2324759" y="137588"/>
+                  </a:lnTo>
+                  <a:lnTo>
+                    <a:pt x="2247125" y="147164"/>
+                  </a:lnTo>
+                  <a:lnTo>
+                    <a:pt x="2169491" y="156606"/>
+                  </a:lnTo>
+                  <a:lnTo>
+                    <a:pt x="2091857" y="165916"/>
+                  </a:lnTo>
+                  <a:lnTo>
+                    <a:pt x="2014223" y="175095"/>
+                  </a:lnTo>
+                  <a:lnTo>
+                    <a:pt x="1936589" y="184146"/>
+                  </a:lnTo>
+                  <a:lnTo>
+                    <a:pt x="1858955" y="193070"/>
+                  </a:lnTo>
+                  <a:lnTo>
+                    <a:pt x="1781321" y="201869"/>
+                  </a:lnTo>
+                  <a:lnTo>
+                    <a:pt x="1703687" y="210545"/>
+                  </a:lnTo>
+                  <a:lnTo>
+                    <a:pt x="1626053" y="219100"/>
+                  </a:lnTo>
+                  <a:lnTo>
+                    <a:pt x="1548419" y="227535"/>
+                  </a:lnTo>
+                  <a:lnTo>
+                    <a:pt x="1470785" y="235852"/>
+                  </a:lnTo>
+                  <a:lnTo>
+                    <a:pt x="1393151" y="244052"/>
+                  </a:lnTo>
+                  <a:lnTo>
+                    <a:pt x="1315517" y="252137"/>
+                  </a:lnTo>
+                  <a:lnTo>
+                    <a:pt x="1237883" y="260110"/>
+                  </a:lnTo>
+                  <a:lnTo>
+                    <a:pt x="1160249" y="267971"/>
+                  </a:lnTo>
+                  <a:lnTo>
+                    <a:pt x="1082615" y="275721"/>
+                  </a:lnTo>
+                  <a:lnTo>
+                    <a:pt x="1004981" y="283363"/>
+                  </a:lnTo>
+                  <a:lnTo>
+                    <a:pt x="927346" y="290899"/>
+                  </a:lnTo>
+                  <a:lnTo>
+                    <a:pt x="849712" y="298328"/>
+                  </a:lnTo>
+                  <a:lnTo>
+                    <a:pt x="772078" y="305654"/>
+                  </a:lnTo>
+                  <a:lnTo>
+                    <a:pt x="694444" y="312877"/>
+                  </a:lnTo>
+                  <a:lnTo>
+                    <a:pt x="616810" y="319999"/>
+                  </a:lnTo>
+                  <a:lnTo>
+                    <a:pt x="539176" y="327022"/>
+                  </a:lnTo>
+                  <a:lnTo>
+                    <a:pt x="461542" y="333946"/>
+                  </a:lnTo>
+                  <a:lnTo>
+                    <a:pt x="383908" y="340773"/>
+                  </a:lnTo>
+                  <a:lnTo>
+                    <a:pt x="306274" y="347505"/>
+                  </a:lnTo>
+                  <a:lnTo>
+                    <a:pt x="228640" y="354142"/>
+                  </a:lnTo>
+                  <a:lnTo>
+                    <a:pt x="151006" y="360686"/>
+                  </a:lnTo>
+                  <a:lnTo>
+                    <a:pt x="73372" y="367139"/>
+                  </a:lnTo>
+                  <a:lnTo>
+                    <a:pt x="0" y="373152"/>
                   </a:lnTo>
                 </a:path>
               </a:pathLst>
@@ -4097,300 +4097,300 @@
           </p:nvSpPr>
           <p:spPr>
             <a:xfrm>
-              <a:off x="817517" y="2438710"/>
-              <a:ext cx="7370972" cy="2916388"/>
+              <a:off x="817517" y="2590581"/>
+              <a:ext cx="7370972" cy="2781535"/>
             </a:xfrm>
             <a:custGeom>
               <a:avLst/>
               <a:pathLst>
-                <a:path w="7370972" h="2916388">
+                <a:path w="7370972" h="2781535">
                   <a:moveTo>
                     <a:pt x="0" y="0"/>
                   </a:moveTo>
                   <a:lnTo>
-                    <a:pt x="73372" y="84784"/>
-                  </a:lnTo>
-                  <a:lnTo>
-                    <a:pt x="151006" y="171910"/>
-                  </a:lnTo>
-                  <a:lnTo>
-                    <a:pt x="228640" y="256527"/>
-                  </a:lnTo>
-                  <a:lnTo>
-                    <a:pt x="306274" y="338708"/>
-                  </a:lnTo>
-                  <a:lnTo>
-                    <a:pt x="383908" y="418522"/>
-                  </a:lnTo>
-                  <a:lnTo>
-                    <a:pt x="461542" y="496038"/>
-                  </a:lnTo>
-                  <a:lnTo>
-                    <a:pt x="539176" y="571322"/>
-                  </a:lnTo>
-                  <a:lnTo>
-                    <a:pt x="616810" y="644438"/>
-                  </a:lnTo>
-                  <a:lnTo>
-                    <a:pt x="694444" y="715448"/>
-                  </a:lnTo>
-                  <a:lnTo>
-                    <a:pt x="772078" y="784414"/>
-                  </a:lnTo>
-                  <a:lnTo>
-                    <a:pt x="849712" y="851394"/>
-                  </a:lnTo>
-                  <a:lnTo>
-                    <a:pt x="927346" y="916445"/>
-                  </a:lnTo>
-                  <a:lnTo>
-                    <a:pt x="1004981" y="979624"/>
-                  </a:lnTo>
-                  <a:lnTo>
-                    <a:pt x="1082615" y="1040982"/>
-                  </a:lnTo>
-                  <a:lnTo>
-                    <a:pt x="1160249" y="1100575"/>
-                  </a:lnTo>
-                  <a:lnTo>
-                    <a:pt x="1237883" y="1158451"/>
-                  </a:lnTo>
-                  <a:lnTo>
-                    <a:pt x="1315517" y="1214660"/>
-                  </a:lnTo>
-                  <a:lnTo>
-                    <a:pt x="1393151" y="1269251"/>
-                  </a:lnTo>
-                  <a:lnTo>
-                    <a:pt x="1470785" y="1322270"/>
-                  </a:lnTo>
-                  <a:lnTo>
-                    <a:pt x="1548419" y="1373762"/>
-                  </a:lnTo>
-                  <a:lnTo>
-                    <a:pt x="1626053" y="1423772"/>
-                  </a:lnTo>
-                  <a:lnTo>
-                    <a:pt x="1703687" y="1472341"/>
-                  </a:lnTo>
-                  <a:lnTo>
-                    <a:pt x="1781321" y="1519512"/>
-                  </a:lnTo>
-                  <a:lnTo>
-                    <a:pt x="1858955" y="1565325"/>
-                  </a:lnTo>
-                  <a:lnTo>
-                    <a:pt x="1936589" y="1609819"/>
-                  </a:lnTo>
-                  <a:lnTo>
-                    <a:pt x="2014223" y="1653031"/>
-                  </a:lnTo>
-                  <a:lnTo>
-                    <a:pt x="2091857" y="1694999"/>
-                  </a:lnTo>
-                  <a:lnTo>
-                    <a:pt x="2169491" y="1735758"/>
-                  </a:lnTo>
-                  <a:lnTo>
-                    <a:pt x="2247125" y="1775344"/>
-                  </a:lnTo>
-                  <a:lnTo>
-                    <a:pt x="2324759" y="1813790"/>
-                  </a:lnTo>
-                  <a:lnTo>
-                    <a:pt x="2402393" y="1851129"/>
-                  </a:lnTo>
-                  <a:lnTo>
-                    <a:pt x="2480027" y="1887393"/>
-                  </a:lnTo>
-                  <a:lnTo>
-                    <a:pt x="2557661" y="1922612"/>
-                  </a:lnTo>
-                  <a:lnTo>
-                    <a:pt x="2635295" y="1956818"/>
-                  </a:lnTo>
-                  <a:lnTo>
-                    <a:pt x="2712930" y="1990038"/>
-                  </a:lnTo>
-                  <a:lnTo>
-                    <a:pt x="2790564" y="2022302"/>
-                  </a:lnTo>
-                  <a:lnTo>
-                    <a:pt x="2868198" y="2053637"/>
-                  </a:lnTo>
-                  <a:lnTo>
-                    <a:pt x="2945832" y="2084069"/>
-                  </a:lnTo>
-                  <a:lnTo>
-                    <a:pt x="3023466" y="2113625"/>
-                  </a:lnTo>
-                  <a:lnTo>
-                    <a:pt x="3101100" y="2142330"/>
-                  </a:lnTo>
-                  <a:lnTo>
-                    <a:pt x="3178734" y="2170209"/>
-                  </a:lnTo>
-                  <a:lnTo>
-                    <a:pt x="3256368" y="2197285"/>
-                  </a:lnTo>
-                  <a:lnTo>
-                    <a:pt x="3334002" y="2223581"/>
-                  </a:lnTo>
-                  <a:lnTo>
-                    <a:pt x="3411636" y="2249120"/>
-                  </a:lnTo>
-                  <a:lnTo>
-                    <a:pt x="3489270" y="2273923"/>
-                  </a:lnTo>
-                  <a:lnTo>
-                    <a:pt x="3566904" y="2298012"/>
-                  </a:lnTo>
-                  <a:lnTo>
-                    <a:pt x="3644538" y="2321408"/>
-                  </a:lnTo>
-                  <a:lnTo>
-                    <a:pt x="3722172" y="2344130"/>
-                  </a:lnTo>
-                  <a:lnTo>
-                    <a:pt x="3799806" y="2366198"/>
-                  </a:lnTo>
-                  <a:lnTo>
-                    <a:pt x="3877440" y="2387630"/>
-                  </a:lnTo>
-                  <a:lnTo>
-                    <a:pt x="3955074" y="2408445"/>
-                  </a:lnTo>
-                  <a:lnTo>
-                    <a:pt x="4032708" y="2428661"/>
-                  </a:lnTo>
-                  <a:lnTo>
-                    <a:pt x="4110342" y="2448294"/>
-                  </a:lnTo>
-                  <a:lnTo>
-                    <a:pt x="4187976" y="2467363"/>
-                  </a:lnTo>
-                  <a:lnTo>
-                    <a:pt x="4265610" y="2485882"/>
-                  </a:lnTo>
-                  <a:lnTo>
-                    <a:pt x="4343244" y="2503868"/>
-                  </a:lnTo>
-                  <a:lnTo>
-                    <a:pt x="4420879" y="2521336"/>
-                  </a:lnTo>
-                  <a:lnTo>
-                    <a:pt x="4498513" y="2538301"/>
-                  </a:lnTo>
-                  <a:lnTo>
-                    <a:pt x="4576147" y="2554777"/>
-                  </a:lnTo>
-                  <a:lnTo>
-                    <a:pt x="4653781" y="2570779"/>
-                  </a:lnTo>
-                  <a:lnTo>
-                    <a:pt x="4731415" y="2586320"/>
-                  </a:lnTo>
-                  <a:lnTo>
-                    <a:pt x="4809049" y="2601414"/>
-                  </a:lnTo>
-                  <a:lnTo>
-                    <a:pt x="4886683" y="2616073"/>
-                  </a:lnTo>
-                  <a:lnTo>
-                    <a:pt x="4964317" y="2630310"/>
-                  </a:lnTo>
-                  <a:lnTo>
-                    <a:pt x="5041951" y="2644137"/>
-                  </a:lnTo>
-                  <a:lnTo>
-                    <a:pt x="5119585" y="2657566"/>
-                  </a:lnTo>
-                  <a:lnTo>
-                    <a:pt x="5197219" y="2670608"/>
-                  </a:lnTo>
-                  <a:lnTo>
-                    <a:pt x="5274853" y="2683275"/>
-                  </a:lnTo>
-                  <a:lnTo>
-                    <a:pt x="5352487" y="2695577"/>
-                  </a:lnTo>
-                  <a:lnTo>
-                    <a:pt x="5430121" y="2707525"/>
-                  </a:lnTo>
-                  <a:lnTo>
-                    <a:pt x="5507755" y="2719128"/>
-                  </a:lnTo>
-                  <a:lnTo>
-                    <a:pt x="5585389" y="2730398"/>
-                  </a:lnTo>
-                  <a:lnTo>
-                    <a:pt x="5663023" y="2741343"/>
-                  </a:lnTo>
-                  <a:lnTo>
-                    <a:pt x="5740657" y="2751973"/>
-                  </a:lnTo>
-                  <a:lnTo>
-                    <a:pt x="5818291" y="2762296"/>
-                  </a:lnTo>
-                  <a:lnTo>
-                    <a:pt x="5895925" y="2772323"/>
-                  </a:lnTo>
-                  <a:lnTo>
-                    <a:pt x="5973559" y="2782061"/>
-                  </a:lnTo>
-                  <a:lnTo>
-                    <a:pt x="6051193" y="2791518"/>
-                  </a:lnTo>
-                  <a:lnTo>
-                    <a:pt x="6128827" y="2800703"/>
-                  </a:lnTo>
-                  <a:lnTo>
-                    <a:pt x="6206462" y="2809624"/>
-                  </a:lnTo>
-                  <a:lnTo>
-                    <a:pt x="6284096" y="2818287"/>
-                  </a:lnTo>
-                  <a:lnTo>
-                    <a:pt x="6361730" y="2826702"/>
-                  </a:lnTo>
-                  <a:lnTo>
-                    <a:pt x="6439364" y="2834873"/>
-                  </a:lnTo>
-                  <a:lnTo>
-                    <a:pt x="6516998" y="2842810"/>
-                  </a:lnTo>
-                  <a:lnTo>
-                    <a:pt x="6594632" y="2850518"/>
-                  </a:lnTo>
-                  <a:lnTo>
-                    <a:pt x="6672266" y="2858004"/>
-                  </a:lnTo>
-                  <a:lnTo>
-                    <a:pt x="6749900" y="2865275"/>
-                  </a:lnTo>
-                  <a:lnTo>
-                    <a:pt x="6827534" y="2872336"/>
-                  </a:lnTo>
-                  <a:lnTo>
-                    <a:pt x="6905168" y="2879194"/>
-                  </a:lnTo>
-                  <a:lnTo>
-                    <a:pt x="6982802" y="2885854"/>
-                  </a:lnTo>
-                  <a:lnTo>
-                    <a:pt x="7060436" y="2892323"/>
-                  </a:lnTo>
-                  <a:lnTo>
-                    <a:pt x="7138070" y="2898605"/>
-                  </a:lnTo>
-                  <a:lnTo>
-                    <a:pt x="7215704" y="2904707"/>
-                  </a:lnTo>
-                  <a:lnTo>
-                    <a:pt x="7293338" y="2910632"/>
-                  </a:lnTo>
-                  <a:lnTo>
-                    <a:pt x="7370972" y="2916388"/>
+                    <a:pt x="73372" y="80864"/>
+                  </a:lnTo>
+                  <a:lnTo>
+                    <a:pt x="151006" y="163961"/>
+                  </a:lnTo>
+                  <a:lnTo>
+                    <a:pt x="228640" y="244666"/>
+                  </a:lnTo>
+                  <a:lnTo>
+                    <a:pt x="306274" y="323046"/>
+                  </a:lnTo>
+                  <a:lnTo>
+                    <a:pt x="383908" y="399170"/>
+                  </a:lnTo>
+                  <a:lnTo>
+                    <a:pt x="461542" y="473101"/>
+                  </a:lnTo>
+                  <a:lnTo>
+                    <a:pt x="539176" y="544904"/>
+                  </a:lnTo>
+                  <a:lnTo>
+                    <a:pt x="616810" y="614639"/>
+                  </a:lnTo>
+                  <a:lnTo>
+                    <a:pt x="694444" y="682366"/>
+                  </a:lnTo>
+                  <a:lnTo>
+                    <a:pt x="772078" y="748143"/>
+                  </a:lnTo>
+                  <a:lnTo>
+                    <a:pt x="849712" y="812026"/>
+                  </a:lnTo>
+                  <a:lnTo>
+                    <a:pt x="927346" y="874069"/>
+                  </a:lnTo>
+                  <a:lnTo>
+                    <a:pt x="1004981" y="934326"/>
+                  </a:lnTo>
+                  <a:lnTo>
+                    <a:pt x="1082615" y="992848"/>
+                  </a:lnTo>
+                  <a:lnTo>
+                    <a:pt x="1160249" y="1049684"/>
+                  </a:lnTo>
+                  <a:lnTo>
+                    <a:pt x="1237883" y="1104884"/>
+                  </a:lnTo>
+                  <a:lnTo>
+                    <a:pt x="1315517" y="1158495"/>
+                  </a:lnTo>
+                  <a:lnTo>
+                    <a:pt x="1393151" y="1210561"/>
+                  </a:lnTo>
+                  <a:lnTo>
+                    <a:pt x="1470785" y="1261129"/>
+                  </a:lnTo>
+                  <a:lnTo>
+                    <a:pt x="1548419" y="1310240"/>
+                  </a:lnTo>
+                  <a:lnTo>
+                    <a:pt x="1626053" y="1357937"/>
+                  </a:lnTo>
+                  <a:lnTo>
+                    <a:pt x="1703687" y="1404261"/>
+                  </a:lnTo>
+                  <a:lnTo>
+                    <a:pt x="1781321" y="1449251"/>
+                  </a:lnTo>
+                  <a:lnTo>
+                    <a:pt x="1858955" y="1492945"/>
+                  </a:lnTo>
+                  <a:lnTo>
+                    <a:pt x="1936589" y="1535381"/>
+                  </a:lnTo>
+                  <a:lnTo>
+                    <a:pt x="2014223" y="1576595"/>
+                  </a:lnTo>
+                  <a:lnTo>
+                    <a:pt x="2091857" y="1616623"/>
+                  </a:lnTo>
+                  <a:lnTo>
+                    <a:pt x="2169491" y="1655498"/>
+                  </a:lnTo>
+                  <a:lnTo>
+                    <a:pt x="2247125" y="1693253"/>
+                  </a:lnTo>
+                  <a:lnTo>
+                    <a:pt x="2324759" y="1729921"/>
+                  </a:lnTo>
+                  <a:lnTo>
+                    <a:pt x="2402393" y="1765534"/>
+                  </a:lnTo>
+                  <a:lnTo>
+                    <a:pt x="2480027" y="1800120"/>
+                  </a:lnTo>
+                  <a:lnTo>
+                    <a:pt x="2557661" y="1833711"/>
+                  </a:lnTo>
+                  <a:lnTo>
+                    <a:pt x="2635295" y="1866335"/>
+                  </a:lnTo>
+                  <a:lnTo>
+                    <a:pt x="2712930" y="1898019"/>
+                  </a:lnTo>
+                  <a:lnTo>
+                    <a:pt x="2790564" y="1928791"/>
+                  </a:lnTo>
+                  <a:lnTo>
+                    <a:pt x="2868198" y="1958677"/>
+                  </a:lnTo>
+                  <a:lnTo>
+                    <a:pt x="2945832" y="1987703"/>
+                  </a:lnTo>
+                  <a:lnTo>
+                    <a:pt x="3023466" y="2015892"/>
+                  </a:lnTo>
+                  <a:lnTo>
+                    <a:pt x="3101100" y="2043270"/>
+                  </a:lnTo>
+                  <a:lnTo>
+                    <a:pt x="3178734" y="2069859"/>
+                  </a:lnTo>
+                  <a:lnTo>
+                    <a:pt x="3256368" y="2095683"/>
+                  </a:lnTo>
+                  <a:lnTo>
+                    <a:pt x="3334002" y="2120763"/>
+                  </a:lnTo>
+                  <a:lnTo>
+                    <a:pt x="3411636" y="2145121"/>
+                  </a:lnTo>
+                  <a:lnTo>
+                    <a:pt x="3489270" y="2168778"/>
+                  </a:lnTo>
+                  <a:lnTo>
+                    <a:pt x="3566904" y="2191753"/>
+                  </a:lnTo>
+                  <a:lnTo>
+                    <a:pt x="3644538" y="2214067"/>
+                  </a:lnTo>
+                  <a:lnTo>
+                    <a:pt x="3722172" y="2235738"/>
+                  </a:lnTo>
+                  <a:lnTo>
+                    <a:pt x="3799806" y="2256786"/>
+                  </a:lnTo>
+                  <a:lnTo>
+                    <a:pt x="3877440" y="2277227"/>
+                  </a:lnTo>
+                  <a:lnTo>
+                    <a:pt x="3955074" y="2297079"/>
+                  </a:lnTo>
+                  <a:lnTo>
+                    <a:pt x="4032708" y="2316360"/>
+                  </a:lnTo>
+                  <a:lnTo>
+                    <a:pt x="4110342" y="2335086"/>
+                  </a:lnTo>
+                  <a:lnTo>
+                    <a:pt x="4187976" y="2353273"/>
+                  </a:lnTo>
+                  <a:lnTo>
+                    <a:pt x="4265610" y="2370935"/>
+                  </a:lnTo>
+                  <a:lnTo>
+                    <a:pt x="4343244" y="2388090"/>
+                  </a:lnTo>
+                  <a:lnTo>
+                    <a:pt x="4420879" y="2404750"/>
+                  </a:lnTo>
+                  <a:lnTo>
+                    <a:pt x="4498513" y="2420930"/>
+                  </a:lnTo>
+                  <a:lnTo>
+                    <a:pt x="4576147" y="2436645"/>
+                  </a:lnTo>
+                  <a:lnTo>
+                    <a:pt x="4653781" y="2451907"/>
+                  </a:lnTo>
+                  <a:lnTo>
+                    <a:pt x="4731415" y="2466730"/>
+                  </a:lnTo>
+                  <a:lnTo>
+                    <a:pt x="4809049" y="2481126"/>
+                  </a:lnTo>
+                  <a:lnTo>
+                    <a:pt x="4886683" y="2495107"/>
+                  </a:lnTo>
+                  <a:lnTo>
+                    <a:pt x="4964317" y="2508686"/>
+                  </a:lnTo>
+                  <a:lnTo>
+                    <a:pt x="5041951" y="2521873"/>
+                  </a:lnTo>
+                  <a:lnTo>
+                    <a:pt x="5119585" y="2534681"/>
+                  </a:lnTo>
+                  <a:lnTo>
+                    <a:pt x="5197219" y="2547120"/>
+                  </a:lnTo>
+                  <a:lnTo>
+                    <a:pt x="5274853" y="2559201"/>
+                  </a:lnTo>
+                  <a:lnTo>
+                    <a:pt x="5352487" y="2570934"/>
+                  </a:lnTo>
+                  <a:lnTo>
+                    <a:pt x="5430121" y="2582330"/>
+                  </a:lnTo>
+                  <a:lnTo>
+                    <a:pt x="5507755" y="2593397"/>
+                  </a:lnTo>
+                  <a:lnTo>
+                    <a:pt x="5585389" y="2604145"/>
+                  </a:lnTo>
+                  <a:lnTo>
+                    <a:pt x="5663023" y="2614584"/>
+                  </a:lnTo>
+                  <a:lnTo>
+                    <a:pt x="5740657" y="2624722"/>
+                  </a:lnTo>
+                  <a:lnTo>
+                    <a:pt x="5818291" y="2634569"/>
+                  </a:lnTo>
+                  <a:lnTo>
+                    <a:pt x="5895925" y="2644132"/>
+                  </a:lnTo>
+                  <a:lnTo>
+                    <a:pt x="5973559" y="2653419"/>
+                  </a:lnTo>
+                  <a:lnTo>
+                    <a:pt x="6051193" y="2662439"/>
+                  </a:lnTo>
+                  <a:lnTo>
+                    <a:pt x="6128827" y="2671200"/>
+                  </a:lnTo>
+                  <a:lnTo>
+                    <a:pt x="6206462" y="2679708"/>
+                  </a:lnTo>
+                  <a:lnTo>
+                    <a:pt x="6284096" y="2687971"/>
+                  </a:lnTo>
+                  <a:lnTo>
+                    <a:pt x="6361730" y="2695996"/>
+                  </a:lnTo>
+                  <a:lnTo>
+                    <a:pt x="6439364" y="2703790"/>
+                  </a:lnTo>
+                  <a:lnTo>
+                    <a:pt x="6516998" y="2711360"/>
+                  </a:lnTo>
+                  <a:lnTo>
+                    <a:pt x="6594632" y="2718711"/>
+                  </a:lnTo>
+                  <a:lnTo>
+                    <a:pt x="6672266" y="2725851"/>
+                  </a:lnTo>
+                  <a:lnTo>
+                    <a:pt x="6749900" y="2732786"/>
+                  </a:lnTo>
+                  <a:lnTo>
+                    <a:pt x="6827534" y="2739520"/>
+                  </a:lnTo>
+                  <a:lnTo>
+                    <a:pt x="6905168" y="2746061"/>
+                  </a:lnTo>
+                  <a:lnTo>
+                    <a:pt x="6982802" y="2752413"/>
+                  </a:lnTo>
+                  <a:lnTo>
+                    <a:pt x="7060436" y="2758583"/>
+                  </a:lnTo>
+                  <a:lnTo>
+                    <a:pt x="7138070" y="2764575"/>
+                  </a:lnTo>
+                  <a:lnTo>
+                    <a:pt x="7215704" y="2770394"/>
+                  </a:lnTo>
+                  <a:lnTo>
+                    <a:pt x="7293338" y="2776046"/>
+                  </a:lnTo>
+                  <a:lnTo>
+                    <a:pt x="7370972" y="2781535"/>
                   </a:lnTo>
                 </a:path>
               </a:pathLst>
@@ -4419,7 +4419,7 @@
           </p:nvSpPr>
           <p:spPr>
             <a:xfrm>
-              <a:off x="817517" y="4679530"/>
+              <a:off x="817517" y="4727786"/>
               <a:ext cx="7799693" cy="0"/>
             </a:xfrm>
             <a:custGeom>
@@ -4462,15 +4462,15 @@
           </p:nvSpPr>
           <p:spPr>
             <a:xfrm>
-              <a:off x="4203673" y="1896563"/>
-              <a:ext cx="0" cy="3826579"/>
+              <a:off x="4203673" y="2073503"/>
+              <a:ext cx="0" cy="3649639"/>
             </a:xfrm>
             <a:custGeom>
               <a:avLst/>
               <a:pathLst>
-                <a:path w="0" h="3826579">
+                <a:path w="0" h="3649639">
                   <a:moveTo>
-                    <a:pt x="0" y="3826579"/>
+                    <a:pt x="0" y="3649639"/>
                   </a:moveTo>
                   <a:lnTo>
                     <a:pt x="0" y="0"/>
@@ -4505,7 +4505,7 @@
           </p:nvSpPr>
           <p:spPr>
             <a:xfrm>
-              <a:off x="692708" y="5509156"/>
+              <a:off x="692708" y="5517199"/>
               <a:ext cx="62179" cy="80101"/>
             </a:xfrm>
             <a:prstGeom prst="rect">
@@ -4551,7 +4551,7 @@
           </p:nvSpPr>
           <p:spPr>
             <a:xfrm>
-              <a:off x="692708" y="4639479"/>
+              <a:off x="692708" y="4687735"/>
               <a:ext cx="62179" cy="80101"/>
             </a:xfrm>
             <a:prstGeom prst="rect">
@@ -4597,7 +4597,7 @@
           </p:nvSpPr>
           <p:spPr>
             <a:xfrm>
-              <a:off x="692708" y="3769802"/>
+              <a:off x="692708" y="3858272"/>
               <a:ext cx="62179" cy="80101"/>
             </a:xfrm>
             <a:prstGeom prst="rect">
@@ -4643,7 +4643,7 @@
           </p:nvSpPr>
           <p:spPr>
             <a:xfrm>
-              <a:off x="692708" y="2900125"/>
+              <a:off x="692708" y="3028808"/>
               <a:ext cx="62179" cy="80101"/>
             </a:xfrm>
             <a:prstGeom prst="rect">
@@ -4689,7 +4689,7 @@
           </p:nvSpPr>
           <p:spPr>
             <a:xfrm>
-              <a:off x="692708" y="2030448"/>
+              <a:off x="692708" y="2199345"/>
               <a:ext cx="62179" cy="80101"/>
             </a:xfrm>
             <a:prstGeom prst="rect">
@@ -4965,7 +4965,7 @@
           </p:nvSpPr>
           <p:spPr>
             <a:xfrm rot="-5400000">
-              <a:off x="68446" y="3759743"/>
+              <a:off x="68446" y="3848213"/>
               <a:ext cx="1016904" cy="100218"/>
             </a:xfrm>
             <a:prstGeom prst="rect">
@@ -5006,6 +5006,52 @@
         <p:sp>
           <p:nvSpPr>
             <p:cNvPr id="38" name="tx38"/>
+            <p:cNvSpPr/>
+            <p:nvPr/>
+          </p:nvSpPr>
+          <p:spPr>
+            <a:xfrm>
+              <a:off x="817517" y="1896563"/>
+              <a:ext cx="4166463" cy="82021"/>
+            </a:xfrm>
+            <a:prstGeom prst="rect">
+              <a:avLst/>
+            </a:prstGeom>
+            <a:noFill/>
+          </p:spPr>
+          <p:txBody>
+            <a:bodyPr lIns="0" rIns="0" tIns="0" bIns="0" anchorCtr="1" anchor="ctr" wrap="none"/>
+            <a:lstStyle/>
+            <a:p>
+              <a:pPr algn="l" marL="0" marR="0" indent="0">
+                <a:lnSpc>
+                  <a:spcPts val="900"/>
+                </a:lnSpc>
+                <a:spcBef>
+                  <a:spcPts val="0"/>
+                </a:spcBef>
+                <a:spcAft>
+                  <a:spcPts val="0"/>
+                </a:spcAft>
+              </a:pPr>
+              <a:r>
+                <a:rPr sz="900">
+                  <a:solidFill>
+                    <a:srgbClr val="404040">
+                      <a:alpha val="100000"/>
+                    </a:srgbClr>
+                  </a:solidFill>
+                  <a:latin typeface="Helvetica"/>
+                  <a:cs typeface="Helvetica"/>
+                </a:rPr>
+                <a:t>subHR = 0.72 (95% CI 0.44-1.17), p = 0.186   (per 0.1-unit increase in eGFR ratio)</a:t>
+              </a:r>
+            </a:p>
+          </p:txBody>
+        </p:sp>
+        <p:sp>
+          <p:nvSpPr>
+            <p:cNvPr id="39" name="tx39"/>
             <p:cNvSpPr/>
             <p:nvPr/>
           </p:nvSpPr>

--- a/docs/plots/carbo/jx_carbo_linsubhr_ratio_hosp10.pptx
+++ b/docs/plots/carbo/jx_carbo_linsubhr_ratio_hosp10.pptx
@@ -2271,26 +2271,26 @@
           </p:nvSpPr>
           <p:spPr>
             <a:xfrm>
-              <a:off x="817517" y="5142518"/>
-              <a:ext cx="7799693" cy="0"/>
+              <a:off x="915645" y="5071743"/>
+              <a:ext cx="7682587" cy="0"/>
             </a:xfrm>
             <a:custGeom>
               <a:avLst/>
               <a:pathLst>
-                <a:path w="7799693" h="0">
+                <a:path w="7682587" h="0">
                   <a:moveTo>
                     <a:pt x="0" y="0"/>
                   </a:moveTo>
                   <a:lnTo>
-                    <a:pt x="7799693" y="0"/>
-                  </a:lnTo>
-                  <a:lnTo>
-                    <a:pt x="7799693" y="0"/>
+                    <a:pt x="7682587" y="0"/>
+                  </a:lnTo>
+                  <a:lnTo>
+                    <a:pt x="7682587" y="0"/>
                   </a:lnTo>
                 </a:path>
               </a:pathLst>
             </a:custGeom>
-            <a:ln w="6775" cap="flat">
+            <a:ln w="8623" cap="flat">
               <a:solidFill>
                 <a:srgbClr val="EBEBEB">
                   <a:alpha val="100000"/>
@@ -2314,26 +2314,26 @@
           </p:nvSpPr>
           <p:spPr>
             <a:xfrm>
-              <a:off x="817517" y="4313054"/>
-              <a:ext cx="7799693" cy="0"/>
+              <a:off x="915645" y="4298074"/>
+              <a:ext cx="7682587" cy="0"/>
             </a:xfrm>
             <a:custGeom>
               <a:avLst/>
               <a:pathLst>
-                <a:path w="7799693" h="0">
+                <a:path w="7682587" h="0">
                   <a:moveTo>
                     <a:pt x="0" y="0"/>
                   </a:moveTo>
                   <a:lnTo>
-                    <a:pt x="7799693" y="0"/>
-                  </a:lnTo>
-                  <a:lnTo>
-                    <a:pt x="7799693" y="0"/>
+                    <a:pt x="7682587" y="0"/>
+                  </a:lnTo>
+                  <a:lnTo>
+                    <a:pt x="7682587" y="0"/>
                   </a:lnTo>
                 </a:path>
               </a:pathLst>
             </a:custGeom>
-            <a:ln w="6775" cap="flat">
+            <a:ln w="8623" cap="flat">
               <a:solidFill>
                 <a:srgbClr val="EBEBEB">
                   <a:alpha val="100000"/>
@@ -2357,26 +2357,26 @@
           </p:nvSpPr>
           <p:spPr>
             <a:xfrm>
-              <a:off x="817517" y="3483591"/>
-              <a:ext cx="7799693" cy="0"/>
+              <a:off x="915645" y="3524405"/>
+              <a:ext cx="7682587" cy="0"/>
             </a:xfrm>
             <a:custGeom>
               <a:avLst/>
               <a:pathLst>
-                <a:path w="7799693" h="0">
+                <a:path w="7682587" h="0">
                   <a:moveTo>
                     <a:pt x="0" y="0"/>
                   </a:moveTo>
                   <a:lnTo>
-                    <a:pt x="7799693" y="0"/>
-                  </a:lnTo>
-                  <a:lnTo>
-                    <a:pt x="7799693" y="0"/>
+                    <a:pt x="7682587" y="0"/>
+                  </a:lnTo>
+                  <a:lnTo>
+                    <a:pt x="7682587" y="0"/>
                   </a:lnTo>
                 </a:path>
               </a:pathLst>
             </a:custGeom>
-            <a:ln w="6775" cap="flat">
+            <a:ln w="8623" cap="flat">
               <a:solidFill>
                 <a:srgbClr val="EBEBEB">
                   <a:alpha val="100000"/>
@@ -2400,26 +2400,26 @@
           </p:nvSpPr>
           <p:spPr>
             <a:xfrm>
-              <a:off x="817517" y="2654127"/>
-              <a:ext cx="7799693" cy="0"/>
+              <a:off x="915645" y="2750737"/>
+              <a:ext cx="7682587" cy="0"/>
             </a:xfrm>
             <a:custGeom>
               <a:avLst/>
               <a:pathLst>
-                <a:path w="7799693" h="0">
+                <a:path w="7682587" h="0">
                   <a:moveTo>
                     <a:pt x="0" y="0"/>
                   </a:moveTo>
                   <a:lnTo>
-                    <a:pt x="7799693" y="0"/>
-                  </a:lnTo>
-                  <a:lnTo>
-                    <a:pt x="7799693" y="0"/>
+                    <a:pt x="7682587" y="0"/>
+                  </a:lnTo>
+                  <a:lnTo>
+                    <a:pt x="7682587" y="0"/>
                   </a:lnTo>
                 </a:path>
               </a:pathLst>
             </a:custGeom>
-            <a:ln w="6775" cap="flat">
+            <a:ln w="8623" cap="flat">
               <a:solidFill>
                 <a:srgbClr val="EBEBEB">
                   <a:alpha val="100000"/>
@@ -2443,15 +2443,15 @@
           </p:nvSpPr>
           <p:spPr>
             <a:xfrm>
-              <a:off x="1615213" y="2073503"/>
-              <a:ext cx="0" cy="3649639"/>
+              <a:off x="1701364" y="2209169"/>
+              <a:ext cx="0" cy="3404141"/>
             </a:xfrm>
             <a:custGeom>
               <a:avLst/>
               <a:pathLst>
-                <a:path w="0" h="3649639">
+                <a:path w="0" h="3404141">
                   <a:moveTo>
-                    <a:pt x="0" y="3649639"/>
+                    <a:pt x="0" y="3404141"/>
                   </a:moveTo>
                   <a:lnTo>
                     <a:pt x="0" y="0"/>
@@ -2462,7 +2462,7 @@
                 </a:path>
               </a:pathLst>
             </a:custGeom>
-            <a:ln w="6775" cap="flat">
+            <a:ln w="8623" cap="flat">
               <a:solidFill>
                 <a:srgbClr val="EBEBEB">
                   <a:alpha val="100000"/>
@@ -2486,15 +2486,15 @@
           </p:nvSpPr>
           <p:spPr>
             <a:xfrm>
-              <a:off x="3387871" y="2073503"/>
-              <a:ext cx="0" cy="3649639"/>
+              <a:off x="3447406" y="2209169"/>
+              <a:ext cx="0" cy="3404141"/>
             </a:xfrm>
             <a:custGeom>
               <a:avLst/>
               <a:pathLst>
-                <a:path w="0" h="3649639">
+                <a:path w="0" h="3404141">
                   <a:moveTo>
-                    <a:pt x="0" y="3649639"/>
+                    <a:pt x="0" y="3404141"/>
                   </a:moveTo>
                   <a:lnTo>
                     <a:pt x="0" y="0"/>
@@ -2505,7 +2505,7 @@
                 </a:path>
               </a:pathLst>
             </a:custGeom>
-            <a:ln w="6775" cap="flat">
+            <a:ln w="8623" cap="flat">
               <a:solidFill>
                 <a:srgbClr val="EBEBEB">
                   <a:alpha val="100000"/>
@@ -2529,15 +2529,15 @@
           </p:nvSpPr>
           <p:spPr>
             <a:xfrm>
-              <a:off x="5160528" y="2073503"/>
-              <a:ext cx="0" cy="3649639"/>
+              <a:off x="5193449" y="2209169"/>
+              <a:ext cx="0" cy="3404141"/>
             </a:xfrm>
             <a:custGeom>
               <a:avLst/>
               <a:pathLst>
-                <a:path w="0" h="3649639">
+                <a:path w="0" h="3404141">
                   <a:moveTo>
-                    <a:pt x="0" y="3649639"/>
+                    <a:pt x="0" y="3404141"/>
                   </a:moveTo>
                   <a:lnTo>
                     <a:pt x="0" y="0"/>
@@ -2548,7 +2548,7 @@
                 </a:path>
               </a:pathLst>
             </a:custGeom>
-            <a:ln w="6775" cap="flat">
+            <a:ln w="8623" cap="flat">
               <a:solidFill>
                 <a:srgbClr val="EBEBEB">
                   <a:alpha val="100000"/>
@@ -2572,15 +2572,15 @@
           </p:nvSpPr>
           <p:spPr>
             <a:xfrm>
-              <a:off x="6933186" y="2073503"/>
-              <a:ext cx="0" cy="3649639"/>
+              <a:off x="6939491" y="2209169"/>
+              <a:ext cx="0" cy="3404141"/>
             </a:xfrm>
             <a:custGeom>
               <a:avLst/>
               <a:pathLst>
-                <a:path w="0" h="3649639">
+                <a:path w="0" h="3404141">
                   <a:moveTo>
-                    <a:pt x="0" y="3649639"/>
+                    <a:pt x="0" y="3404141"/>
                   </a:moveTo>
                   <a:lnTo>
                     <a:pt x="0" y="0"/>
@@ -2591,7 +2591,7 @@
                 </a:path>
               </a:pathLst>
             </a:custGeom>
-            <a:ln w="6775" cap="flat">
+            <a:ln w="8623" cap="flat">
               <a:solidFill>
                 <a:srgbClr val="EBEBEB">
                   <a:alpha val="100000"/>
@@ -2615,26 +2615,26 @@
           </p:nvSpPr>
           <p:spPr>
             <a:xfrm>
-              <a:off x="817517" y="5557249"/>
-              <a:ext cx="7799693" cy="0"/>
+              <a:off x="915645" y="5458577"/>
+              <a:ext cx="7682587" cy="0"/>
             </a:xfrm>
             <a:custGeom>
               <a:avLst/>
               <a:pathLst>
-                <a:path w="7799693" h="0">
+                <a:path w="7682587" h="0">
                   <a:moveTo>
                     <a:pt x="0" y="0"/>
                   </a:moveTo>
                   <a:lnTo>
-                    <a:pt x="7799693" y="0"/>
-                  </a:lnTo>
-                  <a:lnTo>
-                    <a:pt x="7799693" y="0"/>
+                    <a:pt x="7682587" y="0"/>
+                  </a:lnTo>
+                  <a:lnTo>
+                    <a:pt x="7682587" y="0"/>
                   </a:lnTo>
                 </a:path>
               </a:pathLst>
             </a:custGeom>
-            <a:ln w="13550" cap="flat">
+            <a:ln w="17246" cap="flat">
               <a:solidFill>
                 <a:srgbClr val="EBEBEB">
                   <a:alpha val="100000"/>
@@ -2658,26 +2658,26 @@
           </p:nvSpPr>
           <p:spPr>
             <a:xfrm>
-              <a:off x="817517" y="4727786"/>
-              <a:ext cx="7799693" cy="0"/>
+              <a:off x="915645" y="4684908"/>
+              <a:ext cx="7682587" cy="0"/>
             </a:xfrm>
             <a:custGeom>
               <a:avLst/>
               <a:pathLst>
-                <a:path w="7799693" h="0">
+                <a:path w="7682587" h="0">
                   <a:moveTo>
                     <a:pt x="0" y="0"/>
                   </a:moveTo>
                   <a:lnTo>
-                    <a:pt x="7799693" y="0"/>
-                  </a:lnTo>
-                  <a:lnTo>
-                    <a:pt x="7799693" y="0"/>
+                    <a:pt x="7682587" y="0"/>
+                  </a:lnTo>
+                  <a:lnTo>
+                    <a:pt x="7682587" y="0"/>
                   </a:lnTo>
                 </a:path>
               </a:pathLst>
             </a:custGeom>
-            <a:ln w="13550" cap="flat">
+            <a:ln w="17246" cap="flat">
               <a:solidFill>
                 <a:srgbClr val="EBEBEB">
                   <a:alpha val="100000"/>
@@ -2701,26 +2701,26 @@
           </p:nvSpPr>
           <p:spPr>
             <a:xfrm>
-              <a:off x="817517" y="3898322"/>
-              <a:ext cx="7799693" cy="0"/>
+              <a:off x="915645" y="3911240"/>
+              <a:ext cx="7682587" cy="0"/>
             </a:xfrm>
             <a:custGeom>
               <a:avLst/>
               <a:pathLst>
-                <a:path w="7799693" h="0">
+                <a:path w="7682587" h="0">
                   <a:moveTo>
                     <a:pt x="0" y="0"/>
                   </a:moveTo>
                   <a:lnTo>
-                    <a:pt x="7799693" y="0"/>
-                  </a:lnTo>
-                  <a:lnTo>
-                    <a:pt x="7799693" y="0"/>
+                    <a:pt x="7682587" y="0"/>
+                  </a:lnTo>
+                  <a:lnTo>
+                    <a:pt x="7682587" y="0"/>
                   </a:lnTo>
                 </a:path>
               </a:pathLst>
             </a:custGeom>
-            <a:ln w="13550" cap="flat">
+            <a:ln w="17246" cap="flat">
               <a:solidFill>
                 <a:srgbClr val="EBEBEB">
                   <a:alpha val="100000"/>
@@ -2744,26 +2744,26 @@
           </p:nvSpPr>
           <p:spPr>
             <a:xfrm>
-              <a:off x="817517" y="3068859"/>
-              <a:ext cx="7799693" cy="0"/>
+              <a:off x="915645" y="3137571"/>
+              <a:ext cx="7682587" cy="0"/>
             </a:xfrm>
             <a:custGeom>
               <a:avLst/>
               <a:pathLst>
-                <a:path w="7799693" h="0">
+                <a:path w="7682587" h="0">
                   <a:moveTo>
                     <a:pt x="0" y="0"/>
                   </a:moveTo>
                   <a:lnTo>
-                    <a:pt x="7799693" y="0"/>
-                  </a:lnTo>
-                  <a:lnTo>
-                    <a:pt x="7799693" y="0"/>
+                    <a:pt x="7682587" y="0"/>
+                  </a:lnTo>
+                  <a:lnTo>
+                    <a:pt x="7682587" y="0"/>
                   </a:lnTo>
                 </a:path>
               </a:pathLst>
             </a:custGeom>
-            <a:ln w="13550" cap="flat">
+            <a:ln w="17246" cap="flat">
               <a:solidFill>
                 <a:srgbClr val="EBEBEB">
                   <a:alpha val="100000"/>
@@ -2787,26 +2787,26 @@
           </p:nvSpPr>
           <p:spPr>
             <a:xfrm>
-              <a:off x="817517" y="2239395"/>
-              <a:ext cx="7799693" cy="0"/>
+              <a:off x="915645" y="2363903"/>
+              <a:ext cx="7682587" cy="0"/>
             </a:xfrm>
             <a:custGeom>
               <a:avLst/>
               <a:pathLst>
-                <a:path w="7799693" h="0">
+                <a:path w="7682587" h="0">
                   <a:moveTo>
                     <a:pt x="0" y="0"/>
                   </a:moveTo>
                   <a:lnTo>
-                    <a:pt x="7799693" y="0"/>
-                  </a:lnTo>
-                  <a:lnTo>
-                    <a:pt x="7799693" y="0"/>
+                    <a:pt x="7682587" y="0"/>
+                  </a:lnTo>
+                  <a:lnTo>
+                    <a:pt x="7682587" y="0"/>
                   </a:lnTo>
                 </a:path>
               </a:pathLst>
             </a:custGeom>
-            <a:ln w="13550" cap="flat">
+            <a:ln w="17246" cap="flat">
               <a:solidFill>
                 <a:srgbClr val="EBEBEB">
                   <a:alpha val="100000"/>
@@ -2830,15 +2830,15 @@
           </p:nvSpPr>
           <p:spPr>
             <a:xfrm>
-              <a:off x="2501542" y="2073503"/>
-              <a:ext cx="0" cy="3649639"/>
+              <a:off x="2574385" y="2209169"/>
+              <a:ext cx="0" cy="3404141"/>
             </a:xfrm>
             <a:custGeom>
               <a:avLst/>
               <a:pathLst>
-                <a:path w="0" h="3649639">
+                <a:path w="0" h="3404141">
                   <a:moveTo>
-                    <a:pt x="0" y="3649639"/>
+                    <a:pt x="0" y="3404141"/>
                   </a:moveTo>
                   <a:lnTo>
                     <a:pt x="0" y="0"/>
@@ -2849,7 +2849,7 @@
                 </a:path>
               </a:pathLst>
             </a:custGeom>
-            <a:ln w="13550" cap="flat">
+            <a:ln w="17246" cap="flat">
               <a:solidFill>
                 <a:srgbClr val="EBEBEB">
                   <a:alpha val="100000"/>
@@ -2873,15 +2873,15 @@
           </p:nvSpPr>
           <p:spPr>
             <a:xfrm>
-              <a:off x="4274200" y="2073503"/>
-              <a:ext cx="0" cy="3649639"/>
+              <a:off x="4320427" y="2209169"/>
+              <a:ext cx="0" cy="3404141"/>
             </a:xfrm>
             <a:custGeom>
               <a:avLst/>
               <a:pathLst>
-                <a:path w="0" h="3649639">
+                <a:path w="0" h="3404141">
                   <a:moveTo>
-                    <a:pt x="0" y="3649639"/>
+                    <a:pt x="0" y="3404141"/>
                   </a:moveTo>
                   <a:lnTo>
                     <a:pt x="0" y="0"/>
@@ -2892,7 +2892,7 @@
                 </a:path>
               </a:pathLst>
             </a:custGeom>
-            <a:ln w="13550" cap="flat">
+            <a:ln w="17246" cap="flat">
               <a:solidFill>
                 <a:srgbClr val="EBEBEB">
                   <a:alpha val="100000"/>
@@ -2916,15 +2916,15 @@
           </p:nvSpPr>
           <p:spPr>
             <a:xfrm>
-              <a:off x="6046857" y="2073503"/>
-              <a:ext cx="0" cy="3649639"/>
+              <a:off x="6066470" y="2209169"/>
+              <a:ext cx="0" cy="3404141"/>
             </a:xfrm>
             <a:custGeom>
               <a:avLst/>
               <a:pathLst>
-                <a:path w="0" h="3649639">
+                <a:path w="0" h="3404141">
                   <a:moveTo>
-                    <a:pt x="0" y="3649639"/>
+                    <a:pt x="0" y="3404141"/>
                   </a:moveTo>
                   <a:lnTo>
                     <a:pt x="0" y="0"/>
@@ -2935,7 +2935,7 @@
                 </a:path>
               </a:pathLst>
             </a:custGeom>
-            <a:ln w="13550" cap="flat">
+            <a:ln w="17246" cap="flat">
               <a:solidFill>
                 <a:srgbClr val="EBEBEB">
                   <a:alpha val="100000"/>
@@ -2959,15 +2959,15 @@
           </p:nvSpPr>
           <p:spPr>
             <a:xfrm>
-              <a:off x="7819515" y="2073503"/>
-              <a:ext cx="0" cy="3649639"/>
+              <a:off x="7812512" y="2209169"/>
+              <a:ext cx="0" cy="3404141"/>
             </a:xfrm>
             <a:custGeom>
               <a:avLst/>
               <a:pathLst>
-                <a:path w="0" h="3649639">
+                <a:path w="0" h="3404141">
                   <a:moveTo>
-                    <a:pt x="0" y="3649639"/>
+                    <a:pt x="0" y="3404141"/>
                   </a:moveTo>
                   <a:lnTo>
                     <a:pt x="0" y="0"/>
@@ -2978,7 +2978,7 @@
                 </a:path>
               </a:pathLst>
             </a:custGeom>
-            <a:ln w="13550" cap="flat">
+            <a:ln w="17246" cap="flat">
               <a:solidFill>
                 <a:srgbClr val="EBEBEB">
                   <a:alpha val="100000"/>
@@ -3002,519 +3002,519 @@
           </p:nvSpPr>
           <p:spPr>
             <a:xfrm>
-              <a:off x="817517" y="2073503"/>
-              <a:ext cx="7370972" cy="3463706"/>
+              <a:off x="915645" y="2209169"/>
+              <a:ext cx="7260303" cy="3230715"/>
             </a:xfrm>
             <a:custGeom>
               <a:avLst/>
               <a:pathLst>
-                <a:path w="7370972" h="3463706">
+                <a:path w="7260303" h="3230715">
                   <a:moveTo>
-                    <a:pt x="1850433" y="0"/>
+                    <a:pt x="1822651" y="0"/>
                   </a:moveTo>
                   <a:lnTo>
-                    <a:pt x="1858955" y="28532"/>
-                  </a:lnTo>
-                  <a:lnTo>
-                    <a:pt x="1936589" y="270277"/>
-                  </a:lnTo>
-                  <a:lnTo>
-                    <a:pt x="2014223" y="495108"/>
-                  </a:lnTo>
-                  <a:lnTo>
-                    <a:pt x="2091857" y="704209"/>
-                  </a:lnTo>
-                  <a:lnTo>
-                    <a:pt x="2169491" y="898680"/>
-                  </a:lnTo>
-                  <a:lnTo>
-                    <a:pt x="2247125" y="1079545"/>
-                  </a:lnTo>
-                  <a:lnTo>
-                    <a:pt x="2324759" y="1247756"/>
-                  </a:lnTo>
-                  <a:lnTo>
-                    <a:pt x="2402393" y="1404198"/>
-                  </a:lnTo>
-                  <a:lnTo>
-                    <a:pt x="2480027" y="1549694"/>
-                  </a:lnTo>
-                  <a:lnTo>
-                    <a:pt x="2557661" y="1685011"/>
-                  </a:lnTo>
-                  <a:lnTo>
-                    <a:pt x="2635295" y="1810860"/>
-                  </a:lnTo>
-                  <a:lnTo>
-                    <a:pt x="2712930" y="1927904"/>
-                  </a:lnTo>
-                  <a:lnTo>
-                    <a:pt x="2790564" y="2036759"/>
-                  </a:lnTo>
-                  <a:lnTo>
-                    <a:pt x="2868198" y="2137998"/>
-                  </a:lnTo>
-                  <a:lnTo>
-                    <a:pt x="2945832" y="2232153"/>
-                  </a:lnTo>
-                  <a:lnTo>
-                    <a:pt x="3023466" y="2319721"/>
-                  </a:lnTo>
-                  <a:lnTo>
-                    <a:pt x="3101100" y="2401163"/>
-                  </a:lnTo>
-                  <a:lnTo>
-                    <a:pt x="3178734" y="2476906"/>
-                  </a:lnTo>
-                  <a:lnTo>
-                    <a:pt x="3256368" y="2547350"/>
-                  </a:lnTo>
-                  <a:lnTo>
-                    <a:pt x="3334002" y="2612865"/>
-                  </a:lnTo>
-                  <a:lnTo>
-                    <a:pt x="3411636" y="2650436"/>
-                  </a:lnTo>
-                  <a:lnTo>
-                    <a:pt x="3489270" y="2638605"/>
-                  </a:lnTo>
-                  <a:lnTo>
-                    <a:pt x="3566904" y="2626606"/>
-                  </a:lnTo>
-                  <a:lnTo>
-                    <a:pt x="3644538" y="2614437"/>
-                  </a:lnTo>
-                  <a:lnTo>
-                    <a:pt x="3722172" y="2602095"/>
-                  </a:lnTo>
-                  <a:lnTo>
-                    <a:pt x="3799806" y="2589578"/>
-                  </a:lnTo>
-                  <a:lnTo>
-                    <a:pt x="3877440" y="2576883"/>
-                  </a:lnTo>
-                  <a:lnTo>
-                    <a:pt x="3955074" y="2564008"/>
-                  </a:lnTo>
-                  <a:lnTo>
-                    <a:pt x="4032708" y="2550950"/>
-                  </a:lnTo>
-                  <a:lnTo>
-                    <a:pt x="4110342" y="2537707"/>
-                  </a:lnTo>
-                  <a:lnTo>
-                    <a:pt x="4187976" y="2524275"/>
-                  </a:lnTo>
-                  <a:lnTo>
-                    <a:pt x="4265610" y="2510653"/>
-                  </a:lnTo>
-                  <a:lnTo>
-                    <a:pt x="4343244" y="2496838"/>
-                  </a:lnTo>
-                  <a:lnTo>
-                    <a:pt x="4420879" y="2482826"/>
-                  </a:lnTo>
-                  <a:lnTo>
-                    <a:pt x="4498513" y="2468616"/>
-                  </a:lnTo>
-                  <a:lnTo>
-                    <a:pt x="4576147" y="2454204"/>
-                  </a:lnTo>
-                  <a:lnTo>
-                    <a:pt x="4653781" y="2439587"/>
-                  </a:lnTo>
-                  <a:lnTo>
-                    <a:pt x="4731415" y="2424762"/>
-                  </a:lnTo>
-                  <a:lnTo>
-                    <a:pt x="4809049" y="2409728"/>
-                  </a:lnTo>
-                  <a:lnTo>
-                    <a:pt x="4886683" y="2394479"/>
-                  </a:lnTo>
-                  <a:lnTo>
-                    <a:pt x="4964317" y="2379015"/>
-                  </a:lnTo>
-                  <a:lnTo>
-                    <a:pt x="5041951" y="2363330"/>
-                  </a:lnTo>
-                  <a:lnTo>
-                    <a:pt x="5119585" y="2347423"/>
-                  </a:lnTo>
-                  <a:lnTo>
-                    <a:pt x="5197219" y="2331290"/>
-                  </a:lnTo>
-                  <a:lnTo>
-                    <a:pt x="5274853" y="2314928"/>
-                  </a:lnTo>
-                  <a:lnTo>
-                    <a:pt x="5352487" y="2298334"/>
-                  </a:lnTo>
-                  <a:lnTo>
-                    <a:pt x="5430121" y="2281504"/>
-                  </a:lnTo>
-                  <a:lnTo>
-                    <a:pt x="5507755" y="2264436"/>
-                  </a:lnTo>
-                  <a:lnTo>
-                    <a:pt x="5585389" y="2247125"/>
-                  </a:lnTo>
-                  <a:lnTo>
-                    <a:pt x="5663023" y="2229568"/>
-                  </a:lnTo>
-                  <a:lnTo>
-                    <a:pt x="5740657" y="2211762"/>
-                  </a:lnTo>
-                  <a:lnTo>
-                    <a:pt x="5818291" y="2193703"/>
-                  </a:lnTo>
-                  <a:lnTo>
-                    <a:pt x="5895925" y="2175387"/>
-                  </a:lnTo>
-                  <a:lnTo>
-                    <a:pt x="5973559" y="2156812"/>
-                  </a:lnTo>
-                  <a:lnTo>
-                    <a:pt x="6051193" y="2137973"/>
-                  </a:lnTo>
-                  <a:lnTo>
-                    <a:pt x="6128827" y="2118867"/>
-                  </a:lnTo>
-                  <a:lnTo>
-                    <a:pt x="6206462" y="2099489"/>
-                  </a:lnTo>
-                  <a:lnTo>
-                    <a:pt x="6284096" y="2079836"/>
-                  </a:lnTo>
-                  <a:lnTo>
-                    <a:pt x="6361730" y="2059904"/>
-                  </a:lnTo>
-                  <a:lnTo>
-                    <a:pt x="6439364" y="2039689"/>
-                  </a:lnTo>
-                  <a:lnTo>
-                    <a:pt x="6516998" y="2019187"/>
-                  </a:lnTo>
-                  <a:lnTo>
-                    <a:pt x="6594632" y="1998394"/>
-                  </a:lnTo>
-                  <a:lnTo>
-                    <a:pt x="6672266" y="1977306"/>
-                  </a:lnTo>
-                  <a:lnTo>
-                    <a:pt x="6749900" y="1955918"/>
-                  </a:lnTo>
-                  <a:lnTo>
-                    <a:pt x="6827534" y="1934227"/>
-                  </a:lnTo>
-                  <a:lnTo>
-                    <a:pt x="6905168" y="1912228"/>
-                  </a:lnTo>
-                  <a:lnTo>
-                    <a:pt x="6982802" y="1889917"/>
-                  </a:lnTo>
-                  <a:lnTo>
-                    <a:pt x="7060436" y="1867288"/>
-                  </a:lnTo>
-                  <a:lnTo>
-                    <a:pt x="7138070" y="1844339"/>
-                  </a:lnTo>
-                  <a:lnTo>
-                    <a:pt x="7215704" y="1821063"/>
-                  </a:lnTo>
-                  <a:lnTo>
-                    <a:pt x="7293338" y="1797458"/>
-                  </a:lnTo>
-                  <a:lnTo>
-                    <a:pt x="7370972" y="1773517"/>
-                  </a:lnTo>
-                  <a:lnTo>
-                    <a:pt x="7370972" y="3463706"/>
-                  </a:lnTo>
-                  <a:lnTo>
-                    <a:pt x="7293338" y="3462198"/>
-                  </a:lnTo>
-                  <a:lnTo>
-                    <a:pt x="7215704" y="3460577"/>
-                  </a:lnTo>
-                  <a:lnTo>
-                    <a:pt x="7138070" y="3458834"/>
-                  </a:lnTo>
-                  <a:lnTo>
-                    <a:pt x="7060436" y="3456960"/>
-                  </a:lnTo>
-                  <a:lnTo>
-                    <a:pt x="6982802" y="3454945"/>
-                  </a:lnTo>
-                  <a:lnTo>
-                    <a:pt x="6905168" y="3452778"/>
-                  </a:lnTo>
-                  <a:lnTo>
-                    <a:pt x="6827534" y="3450448"/>
-                  </a:lnTo>
-                  <a:lnTo>
-                    <a:pt x="6749900" y="3447943"/>
-                  </a:lnTo>
-                  <a:lnTo>
-                    <a:pt x="6672266" y="3445250"/>
-                  </a:lnTo>
-                  <a:lnTo>
-                    <a:pt x="6594632" y="3442354"/>
-                  </a:lnTo>
-                  <a:lnTo>
-                    <a:pt x="6516998" y="3439240"/>
-                  </a:lnTo>
-                  <a:lnTo>
-                    <a:pt x="6439364" y="3435892"/>
-                  </a:lnTo>
-                  <a:lnTo>
-                    <a:pt x="6361730" y="3432292"/>
-                  </a:lnTo>
-                  <a:lnTo>
-                    <a:pt x="6284096" y="3428421"/>
-                  </a:lnTo>
-                  <a:lnTo>
-                    <a:pt x="6206462" y="3424259"/>
-                  </a:lnTo>
-                  <a:lnTo>
-                    <a:pt x="6128827" y="3419783"/>
-                  </a:lnTo>
-                  <a:lnTo>
-                    <a:pt x="6051193" y="3414972"/>
-                  </a:lnTo>
-                  <a:lnTo>
-                    <a:pt x="5973559" y="3409798"/>
-                  </a:lnTo>
-                  <a:lnTo>
-                    <a:pt x="5895925" y="3404235"/>
-                  </a:lnTo>
-                  <a:lnTo>
-                    <a:pt x="5818291" y="3398253"/>
-                  </a:lnTo>
-                  <a:lnTo>
-                    <a:pt x="5740657" y="3391822"/>
-                  </a:lnTo>
-                  <a:lnTo>
-                    <a:pt x="5663023" y="3384906"/>
-                  </a:lnTo>
-                  <a:lnTo>
-                    <a:pt x="5585389" y="3377471"/>
-                  </a:lnTo>
-                  <a:lnTo>
-                    <a:pt x="5507755" y="3369476"/>
-                  </a:lnTo>
-                  <a:lnTo>
-                    <a:pt x="5430121" y="3360879"/>
-                  </a:lnTo>
-                  <a:lnTo>
-                    <a:pt x="5352487" y="3351636"/>
-                  </a:lnTo>
-                  <a:lnTo>
-                    <a:pt x="5274853" y="3341698"/>
-                  </a:lnTo>
-                  <a:lnTo>
-                    <a:pt x="5197219" y="3331011"/>
-                  </a:lnTo>
-                  <a:lnTo>
-                    <a:pt x="5119585" y="3319521"/>
-                  </a:lnTo>
-                  <a:lnTo>
-                    <a:pt x="5041951" y="3307167"/>
-                  </a:lnTo>
-                  <a:lnTo>
-                    <a:pt x="4964317" y="3293883"/>
-                  </a:lnTo>
-                  <a:lnTo>
-                    <a:pt x="4886683" y="3279600"/>
-                  </a:lnTo>
-                  <a:lnTo>
-                    <a:pt x="4809049" y="3264242"/>
-                  </a:lnTo>
-                  <a:lnTo>
-                    <a:pt x="4731415" y="3247729"/>
-                  </a:lnTo>
-                  <a:lnTo>
-                    <a:pt x="4653781" y="3229974"/>
-                  </a:lnTo>
-                  <a:lnTo>
-                    <a:pt x="4576147" y="3210883"/>
-                  </a:lnTo>
-                  <a:lnTo>
-                    <a:pt x="4498513" y="3190356"/>
-                  </a:lnTo>
-                  <a:lnTo>
-                    <a:pt x="4420879" y="3168284"/>
-                  </a:lnTo>
-                  <a:lnTo>
-                    <a:pt x="4343244" y="3144553"/>
-                  </a:lnTo>
-                  <a:lnTo>
-                    <a:pt x="4265610" y="3119036"/>
-                  </a:lnTo>
-                  <a:lnTo>
-                    <a:pt x="4187976" y="3091599"/>
-                  </a:lnTo>
-                  <a:lnTo>
-                    <a:pt x="4110342" y="3062098"/>
-                  </a:lnTo>
-                  <a:lnTo>
-                    <a:pt x="4032708" y="3030378"/>
-                  </a:lnTo>
-                  <a:lnTo>
-                    <a:pt x="3955074" y="2996272"/>
-                  </a:lnTo>
-                  <a:lnTo>
-                    <a:pt x="3877440" y="2959600"/>
-                  </a:lnTo>
-                  <a:lnTo>
-                    <a:pt x="3799806" y="2920169"/>
-                  </a:lnTo>
-                  <a:lnTo>
-                    <a:pt x="3722172" y="2877771"/>
-                  </a:lnTo>
-                  <a:lnTo>
-                    <a:pt x="3644538" y="2832185"/>
-                  </a:lnTo>
-                  <a:lnTo>
-                    <a:pt x="3566904" y="2783169"/>
-                  </a:lnTo>
-                  <a:lnTo>
-                    <a:pt x="3489270" y="2730465"/>
-                  </a:lnTo>
-                  <a:lnTo>
-                    <a:pt x="3411636" y="2673797"/>
-                  </a:lnTo>
-                  <a:lnTo>
-                    <a:pt x="3334002" y="2662101"/>
-                  </a:lnTo>
-                  <a:lnTo>
-                    <a:pt x="3256368" y="2673603"/>
-                  </a:lnTo>
-                  <a:lnTo>
-                    <a:pt x="3178734" y="2684944"/>
-                  </a:lnTo>
-                  <a:lnTo>
-                    <a:pt x="3101100" y="2696126"/>
-                  </a:lnTo>
-                  <a:lnTo>
-                    <a:pt x="3023466" y="2707152"/>
-                  </a:lnTo>
-                  <a:lnTo>
-                    <a:pt x="2945832" y="2718023"/>
-                  </a:lnTo>
-                  <a:lnTo>
-                    <a:pt x="2868198" y="2728742"/>
-                  </a:lnTo>
-                  <a:lnTo>
-                    <a:pt x="2790564" y="2739311"/>
-                  </a:lnTo>
-                  <a:lnTo>
-                    <a:pt x="2712930" y="2749732"/>
-                  </a:lnTo>
-                  <a:lnTo>
-                    <a:pt x="2635295" y="2760008"/>
-                  </a:lnTo>
-                  <a:lnTo>
-                    <a:pt x="2557661" y="2770139"/>
-                  </a:lnTo>
-                  <a:lnTo>
-                    <a:pt x="2480027" y="2780129"/>
-                  </a:lnTo>
-                  <a:lnTo>
-                    <a:pt x="2402393" y="2789978"/>
-                  </a:lnTo>
-                  <a:lnTo>
-                    <a:pt x="2324759" y="2799690"/>
-                  </a:lnTo>
-                  <a:lnTo>
-                    <a:pt x="2247125" y="2809266"/>
-                  </a:lnTo>
-                  <a:lnTo>
-                    <a:pt x="2169491" y="2818708"/>
-                  </a:lnTo>
-                  <a:lnTo>
-                    <a:pt x="2091857" y="2828018"/>
-                  </a:lnTo>
-                  <a:lnTo>
-                    <a:pt x="2014223" y="2837197"/>
-                  </a:lnTo>
-                  <a:lnTo>
-                    <a:pt x="1936589" y="2846248"/>
-                  </a:lnTo>
-                  <a:lnTo>
-                    <a:pt x="1858955" y="2855172"/>
-                  </a:lnTo>
-                  <a:lnTo>
-                    <a:pt x="1781321" y="2863971"/>
-                  </a:lnTo>
-                  <a:lnTo>
-                    <a:pt x="1703687" y="2872647"/>
-                  </a:lnTo>
-                  <a:lnTo>
-                    <a:pt x="1626053" y="2881202"/>
-                  </a:lnTo>
-                  <a:lnTo>
-                    <a:pt x="1548419" y="2889637"/>
-                  </a:lnTo>
-                  <a:lnTo>
-                    <a:pt x="1470785" y="2897953"/>
-                  </a:lnTo>
-                  <a:lnTo>
-                    <a:pt x="1393151" y="2906154"/>
-                  </a:lnTo>
-                  <a:lnTo>
-                    <a:pt x="1315517" y="2914239"/>
-                  </a:lnTo>
-                  <a:lnTo>
-                    <a:pt x="1237883" y="2922211"/>
-                  </a:lnTo>
-                  <a:lnTo>
-                    <a:pt x="1160249" y="2930072"/>
-                  </a:lnTo>
-                  <a:lnTo>
-                    <a:pt x="1082615" y="2937823"/>
-                  </a:lnTo>
-                  <a:lnTo>
-                    <a:pt x="1004981" y="2945465"/>
-                  </a:lnTo>
-                  <a:lnTo>
-                    <a:pt x="927346" y="2953000"/>
-                  </a:lnTo>
-                  <a:lnTo>
-                    <a:pt x="849712" y="2960430"/>
-                  </a:lnTo>
-                  <a:lnTo>
-                    <a:pt x="772078" y="2967756"/>
-                  </a:lnTo>
-                  <a:lnTo>
-                    <a:pt x="694444" y="2974979"/>
-                  </a:lnTo>
-                  <a:lnTo>
-                    <a:pt x="616810" y="2982101"/>
-                  </a:lnTo>
-                  <a:lnTo>
-                    <a:pt x="539176" y="2989123"/>
-                  </a:lnTo>
-                  <a:lnTo>
-                    <a:pt x="461542" y="2996048"/>
-                  </a:lnTo>
-                  <a:lnTo>
-                    <a:pt x="383908" y="3002875"/>
-                  </a:lnTo>
-                  <a:lnTo>
-                    <a:pt x="306274" y="3009606"/>
-                  </a:lnTo>
-                  <a:lnTo>
-                    <a:pt x="228640" y="3016244"/>
-                  </a:lnTo>
-                  <a:lnTo>
-                    <a:pt x="151006" y="3022788"/>
-                  </a:lnTo>
-                  <a:lnTo>
-                    <a:pt x="73372" y="3029241"/>
-                  </a:lnTo>
-                  <a:lnTo>
-                    <a:pt x="0" y="3035254"/>
+                    <a:pt x="1831044" y="26612"/>
+                  </a:lnTo>
+                  <a:lnTo>
+                    <a:pt x="1907513" y="252096"/>
+                  </a:lnTo>
+                  <a:lnTo>
+                    <a:pt x="1983981" y="461804"/>
+                  </a:lnTo>
+                  <a:lnTo>
+                    <a:pt x="2060450" y="656840"/>
+                  </a:lnTo>
+                  <a:lnTo>
+                    <a:pt x="2136918" y="838229"/>
+                  </a:lnTo>
+                  <a:lnTo>
+                    <a:pt x="2213386" y="1006928"/>
+                  </a:lnTo>
+                  <a:lnTo>
+                    <a:pt x="2289855" y="1163824"/>
+                  </a:lnTo>
+                  <a:lnTo>
+                    <a:pt x="2366323" y="1309742"/>
+                  </a:lnTo>
+                  <a:lnTo>
+                    <a:pt x="2442792" y="1445452"/>
+                  </a:lnTo>
+                  <a:lnTo>
+                    <a:pt x="2519260" y="1571666"/>
+                  </a:lnTo>
+                  <a:lnTo>
+                    <a:pt x="2595729" y="1689050"/>
+                  </a:lnTo>
+                  <a:lnTo>
+                    <a:pt x="2672197" y="1798221"/>
+                  </a:lnTo>
+                  <a:lnTo>
+                    <a:pt x="2748666" y="1899753"/>
+                  </a:lnTo>
+                  <a:lnTo>
+                    <a:pt x="2825134" y="1994182"/>
+                  </a:lnTo>
+                  <a:lnTo>
+                    <a:pt x="2901602" y="2082005"/>
+                  </a:lnTo>
+                  <a:lnTo>
+                    <a:pt x="2978071" y="2163682"/>
+                  </a:lnTo>
+                  <a:lnTo>
+                    <a:pt x="3054539" y="2239645"/>
+                  </a:lnTo>
+                  <a:lnTo>
+                    <a:pt x="3131008" y="2310294"/>
+                  </a:lnTo>
+                  <a:lnTo>
+                    <a:pt x="3207476" y="2375999"/>
+                  </a:lnTo>
+                  <a:lnTo>
+                    <a:pt x="3283945" y="2437107"/>
+                  </a:lnTo>
+                  <a:lnTo>
+                    <a:pt x="3360413" y="2472151"/>
+                  </a:lnTo>
+                  <a:lnTo>
+                    <a:pt x="3436881" y="2461116"/>
+                  </a:lnTo>
+                  <a:lnTo>
+                    <a:pt x="3513350" y="2449924"/>
+                  </a:lnTo>
+                  <a:lnTo>
+                    <a:pt x="3589818" y="2438573"/>
+                  </a:lnTo>
+                  <a:lnTo>
+                    <a:pt x="3666287" y="2427062"/>
+                  </a:lnTo>
+                  <a:lnTo>
+                    <a:pt x="3742755" y="2415387"/>
+                  </a:lnTo>
+                  <a:lnTo>
+                    <a:pt x="3819224" y="2403546"/>
+                  </a:lnTo>
+                  <a:lnTo>
+                    <a:pt x="3895692" y="2391537"/>
+                  </a:lnTo>
+                  <a:lnTo>
+                    <a:pt x="3972160" y="2379357"/>
+                  </a:lnTo>
+                  <a:lnTo>
+                    <a:pt x="4048629" y="2367004"/>
+                  </a:lnTo>
+                  <a:lnTo>
+                    <a:pt x="4125097" y="2354477"/>
+                  </a:lnTo>
+                  <a:lnTo>
+                    <a:pt x="4201566" y="2341771"/>
+                  </a:lnTo>
+                  <a:lnTo>
+                    <a:pt x="4278034" y="2328885"/>
+                  </a:lnTo>
+                  <a:lnTo>
+                    <a:pt x="4354503" y="2315816"/>
+                  </a:lnTo>
+                  <a:lnTo>
+                    <a:pt x="4430971" y="2302561"/>
+                  </a:lnTo>
+                  <a:lnTo>
+                    <a:pt x="4507439" y="2289118"/>
+                  </a:lnTo>
+                  <a:lnTo>
+                    <a:pt x="4583908" y="2275485"/>
+                  </a:lnTo>
+                  <a:lnTo>
+                    <a:pt x="4660376" y="2261658"/>
+                  </a:lnTo>
+                  <a:lnTo>
+                    <a:pt x="4736845" y="2247634"/>
+                  </a:lnTo>
+                  <a:lnTo>
+                    <a:pt x="4813313" y="2233411"/>
+                  </a:lnTo>
+                  <a:lnTo>
+                    <a:pt x="4889782" y="2218987"/>
+                  </a:lnTo>
+                  <a:lnTo>
+                    <a:pt x="4966250" y="2204358"/>
+                  </a:lnTo>
+                  <a:lnTo>
+                    <a:pt x="5042719" y="2189521"/>
+                  </a:lnTo>
+                  <a:lnTo>
+                    <a:pt x="5119187" y="2174473"/>
+                  </a:lnTo>
+                  <a:lnTo>
+                    <a:pt x="5195655" y="2159212"/>
+                  </a:lnTo>
+                  <a:lnTo>
+                    <a:pt x="5272124" y="2143734"/>
+                  </a:lnTo>
+                  <a:lnTo>
+                    <a:pt x="5348592" y="2128036"/>
+                  </a:lnTo>
+                  <a:lnTo>
+                    <a:pt x="5425061" y="2112115"/>
+                  </a:lnTo>
+                  <a:lnTo>
+                    <a:pt x="5501529" y="2095969"/>
+                  </a:lnTo>
+                  <a:lnTo>
+                    <a:pt x="5577998" y="2079593"/>
+                  </a:lnTo>
+                  <a:lnTo>
+                    <a:pt x="5654466" y="2062985"/>
+                  </a:lnTo>
+                  <a:lnTo>
+                    <a:pt x="5730934" y="2046140"/>
+                  </a:lnTo>
+                  <a:lnTo>
+                    <a:pt x="5807403" y="2029057"/>
+                  </a:lnTo>
+                  <a:lnTo>
+                    <a:pt x="5883871" y="2011731"/>
+                  </a:lnTo>
+                  <a:lnTo>
+                    <a:pt x="5960340" y="1994159"/>
+                  </a:lnTo>
+                  <a:lnTo>
+                    <a:pt x="6036808" y="1976338"/>
+                  </a:lnTo>
+                  <a:lnTo>
+                    <a:pt x="6113277" y="1958264"/>
+                  </a:lnTo>
+                  <a:lnTo>
+                    <a:pt x="6189745" y="1939933"/>
+                  </a:lnTo>
+                  <a:lnTo>
+                    <a:pt x="6266213" y="1921342"/>
+                  </a:lnTo>
+                  <a:lnTo>
+                    <a:pt x="6342682" y="1902487"/>
+                  </a:lnTo>
+                  <a:lnTo>
+                    <a:pt x="6419150" y="1883364"/>
+                  </a:lnTo>
+                  <a:lnTo>
+                    <a:pt x="6495619" y="1863970"/>
+                  </a:lnTo>
+                  <a:lnTo>
+                    <a:pt x="6572087" y="1844300"/>
+                  </a:lnTo>
+                  <a:lnTo>
+                    <a:pt x="6648556" y="1824351"/>
+                  </a:lnTo>
+                  <a:lnTo>
+                    <a:pt x="6725024" y="1804119"/>
+                  </a:lnTo>
+                  <a:lnTo>
+                    <a:pt x="6801492" y="1783600"/>
+                  </a:lnTo>
+                  <a:lnTo>
+                    <a:pt x="6877961" y="1762789"/>
+                  </a:lnTo>
+                  <a:lnTo>
+                    <a:pt x="6954429" y="1741683"/>
+                  </a:lnTo>
+                  <a:lnTo>
+                    <a:pt x="7030898" y="1720277"/>
+                  </a:lnTo>
+                  <a:lnTo>
+                    <a:pt x="7107366" y="1698567"/>
+                  </a:lnTo>
+                  <a:lnTo>
+                    <a:pt x="7183835" y="1676549"/>
+                  </a:lnTo>
+                  <a:lnTo>
+                    <a:pt x="7260303" y="1654219"/>
+                  </a:lnTo>
+                  <a:lnTo>
+                    <a:pt x="7260303" y="3230715"/>
+                  </a:lnTo>
+                  <a:lnTo>
+                    <a:pt x="7183835" y="3229309"/>
+                  </a:lnTo>
+                  <a:lnTo>
+                    <a:pt x="7107366" y="3227797"/>
+                  </a:lnTo>
+                  <a:lnTo>
+                    <a:pt x="7030898" y="3226171"/>
+                  </a:lnTo>
+                  <a:lnTo>
+                    <a:pt x="6954429" y="3224423"/>
+                  </a:lnTo>
+                  <a:lnTo>
+                    <a:pt x="6877961" y="3222543"/>
+                  </a:lnTo>
+                  <a:lnTo>
+                    <a:pt x="6801492" y="3220522"/>
+                  </a:lnTo>
+                  <a:lnTo>
+                    <a:pt x="6725024" y="3218349"/>
+                  </a:lnTo>
+                  <a:lnTo>
+                    <a:pt x="6648556" y="3216013"/>
+                  </a:lnTo>
+                  <a:lnTo>
+                    <a:pt x="6572087" y="3213500"/>
+                  </a:lnTo>
+                  <a:lnTo>
+                    <a:pt x="6495619" y="3210799"/>
+                  </a:lnTo>
+                  <a:lnTo>
+                    <a:pt x="6419150" y="3207895"/>
+                  </a:lnTo>
+                  <a:lnTo>
+                    <a:pt x="6342682" y="3204772"/>
+                  </a:lnTo>
+                  <a:lnTo>
+                    <a:pt x="6266213" y="3201414"/>
+                  </a:lnTo>
+                  <a:lnTo>
+                    <a:pt x="6189745" y="3197803"/>
+                  </a:lnTo>
+                  <a:lnTo>
+                    <a:pt x="6113277" y="3193921"/>
+                  </a:lnTo>
+                  <a:lnTo>
+                    <a:pt x="6036808" y="3189747"/>
+                  </a:lnTo>
+                  <a:lnTo>
+                    <a:pt x="5960340" y="3185259"/>
+                  </a:lnTo>
+                  <a:lnTo>
+                    <a:pt x="5883871" y="3180433"/>
+                  </a:lnTo>
+                  <a:lnTo>
+                    <a:pt x="5807403" y="3175244"/>
+                  </a:lnTo>
+                  <a:lnTo>
+                    <a:pt x="5730934" y="3169665"/>
+                  </a:lnTo>
+                  <a:lnTo>
+                    <a:pt x="5654466" y="3163666"/>
+                  </a:lnTo>
+                  <a:lnTo>
+                    <a:pt x="5577998" y="3157216"/>
+                  </a:lnTo>
+                  <a:lnTo>
+                    <a:pt x="5501529" y="3150281"/>
+                  </a:lnTo>
+                  <a:lnTo>
+                    <a:pt x="5425061" y="3142823"/>
+                  </a:lnTo>
+                  <a:lnTo>
+                    <a:pt x="5348592" y="3134805"/>
+                  </a:lnTo>
+                  <a:lnTo>
+                    <a:pt x="5272124" y="3126184"/>
+                  </a:lnTo>
+                  <a:lnTo>
+                    <a:pt x="5195655" y="3116914"/>
+                  </a:lnTo>
+                  <a:lnTo>
+                    <a:pt x="5119187" y="3106946"/>
+                  </a:lnTo>
+                  <a:lnTo>
+                    <a:pt x="5042719" y="3096229"/>
+                  </a:lnTo>
+                  <a:lnTo>
+                    <a:pt x="4966250" y="3084706"/>
+                  </a:lnTo>
+                  <a:lnTo>
+                    <a:pt x="4889782" y="3072316"/>
+                  </a:lnTo>
+                  <a:lnTo>
+                    <a:pt x="4813313" y="3058993"/>
+                  </a:lnTo>
+                  <a:lnTo>
+                    <a:pt x="4736845" y="3044669"/>
+                  </a:lnTo>
+                  <a:lnTo>
+                    <a:pt x="4660376" y="3029266"/>
+                  </a:lnTo>
+                  <a:lnTo>
+                    <a:pt x="4583908" y="3012705"/>
+                  </a:lnTo>
+                  <a:lnTo>
+                    <a:pt x="4507439" y="2994899"/>
+                  </a:lnTo>
+                  <a:lnTo>
+                    <a:pt x="4430971" y="2975752"/>
+                  </a:lnTo>
+                  <a:lnTo>
+                    <a:pt x="4354503" y="2955166"/>
+                  </a:lnTo>
+                  <a:lnTo>
+                    <a:pt x="4278034" y="2933030"/>
+                  </a:lnTo>
+                  <a:lnTo>
+                    <a:pt x="4201566" y="2909229"/>
+                  </a:lnTo>
+                  <a:lnTo>
+                    <a:pt x="4125097" y="2883638"/>
+                  </a:lnTo>
+                  <a:lnTo>
+                    <a:pt x="4048629" y="2856122"/>
+                  </a:lnTo>
+                  <a:lnTo>
+                    <a:pt x="3972160" y="2826536"/>
+                  </a:lnTo>
+                  <a:lnTo>
+                    <a:pt x="3895692" y="2794723"/>
+                  </a:lnTo>
+                  <a:lnTo>
+                    <a:pt x="3819224" y="2760518"/>
+                  </a:lnTo>
+                  <a:lnTo>
+                    <a:pt x="3742755" y="2723740"/>
+                  </a:lnTo>
+                  <a:lnTo>
+                    <a:pt x="3666287" y="2684194"/>
+                  </a:lnTo>
+                  <a:lnTo>
+                    <a:pt x="3589818" y="2641674"/>
+                  </a:lnTo>
+                  <a:lnTo>
+                    <a:pt x="3513350" y="2595955"/>
+                  </a:lnTo>
+                  <a:lnTo>
+                    <a:pt x="3436881" y="2546797"/>
+                  </a:lnTo>
+                  <a:lnTo>
+                    <a:pt x="3360413" y="2493940"/>
+                  </a:lnTo>
+                  <a:lnTo>
+                    <a:pt x="3283945" y="2483031"/>
+                  </a:lnTo>
+                  <a:lnTo>
+                    <a:pt x="3207476" y="2493760"/>
+                  </a:lnTo>
+                  <a:lnTo>
+                    <a:pt x="3131008" y="2504338"/>
+                  </a:lnTo>
+                  <a:lnTo>
+                    <a:pt x="3054539" y="2514768"/>
+                  </a:lnTo>
+                  <a:lnTo>
+                    <a:pt x="2978071" y="2525052"/>
+                  </a:lnTo>
+                  <a:lnTo>
+                    <a:pt x="2901602" y="2535192"/>
+                  </a:lnTo>
+                  <a:lnTo>
+                    <a:pt x="2825134" y="2545190"/>
+                  </a:lnTo>
+                  <a:lnTo>
+                    <a:pt x="2748666" y="2555048"/>
+                  </a:lnTo>
+                  <a:lnTo>
+                    <a:pt x="2672197" y="2564768"/>
+                  </a:lnTo>
+                  <a:lnTo>
+                    <a:pt x="2595729" y="2574352"/>
+                  </a:lnTo>
+                  <a:lnTo>
+                    <a:pt x="2519260" y="2583802"/>
+                  </a:lnTo>
+                  <a:lnTo>
+                    <a:pt x="2442792" y="2593120"/>
+                  </a:lnTo>
+                  <a:lnTo>
+                    <a:pt x="2366323" y="2602307"/>
+                  </a:lnTo>
+                  <a:lnTo>
+                    <a:pt x="2289855" y="2611365"/>
+                  </a:lnTo>
+                  <a:lnTo>
+                    <a:pt x="2213386" y="2620297"/>
+                  </a:lnTo>
+                  <a:lnTo>
+                    <a:pt x="2136918" y="2629104"/>
+                  </a:lnTo>
+                  <a:lnTo>
+                    <a:pt x="2060450" y="2637787"/>
+                  </a:lnTo>
+                  <a:lnTo>
+                    <a:pt x="1983981" y="2646349"/>
+                  </a:lnTo>
+                  <a:lnTo>
+                    <a:pt x="1907513" y="2654791"/>
+                  </a:lnTo>
+                  <a:lnTo>
+                    <a:pt x="1831044" y="2663115"/>
+                  </a:lnTo>
+                  <a:lnTo>
+                    <a:pt x="1754576" y="2671322"/>
+                  </a:lnTo>
+                  <a:lnTo>
+                    <a:pt x="1678107" y="2679415"/>
+                  </a:lnTo>
+                  <a:lnTo>
+                    <a:pt x="1601639" y="2687394"/>
+                  </a:lnTo>
+                  <a:lnTo>
+                    <a:pt x="1525171" y="2695261"/>
+                  </a:lnTo>
+                  <a:lnTo>
+                    <a:pt x="1448702" y="2703019"/>
+                  </a:lnTo>
+                  <a:lnTo>
+                    <a:pt x="1372234" y="2710667"/>
+                  </a:lnTo>
+                  <a:lnTo>
+                    <a:pt x="1295765" y="2718209"/>
+                  </a:lnTo>
+                  <a:lnTo>
+                    <a:pt x="1219297" y="2725645"/>
+                  </a:lnTo>
+                  <a:lnTo>
+                    <a:pt x="1142828" y="2732977"/>
+                  </a:lnTo>
+                  <a:lnTo>
+                    <a:pt x="1066360" y="2740206"/>
+                  </a:lnTo>
+                  <a:lnTo>
+                    <a:pt x="989892" y="2747334"/>
+                  </a:lnTo>
+                  <a:lnTo>
+                    <a:pt x="913423" y="2754363"/>
+                  </a:lnTo>
+                  <a:lnTo>
+                    <a:pt x="836955" y="2761293"/>
+                  </a:lnTo>
+                  <a:lnTo>
+                    <a:pt x="760486" y="2768126"/>
+                  </a:lnTo>
+                  <a:lnTo>
+                    <a:pt x="684018" y="2774863"/>
+                  </a:lnTo>
+                  <a:lnTo>
+                    <a:pt x="607549" y="2781506"/>
+                  </a:lnTo>
+                  <a:lnTo>
+                    <a:pt x="531081" y="2788056"/>
+                  </a:lnTo>
+                  <a:lnTo>
+                    <a:pt x="454613" y="2794514"/>
+                  </a:lnTo>
+                  <a:lnTo>
+                    <a:pt x="378144" y="2800882"/>
+                  </a:lnTo>
+                  <a:lnTo>
+                    <a:pt x="301676" y="2807161"/>
+                  </a:lnTo>
+                  <a:lnTo>
+                    <a:pt x="225207" y="2813352"/>
+                  </a:lnTo>
+                  <a:lnTo>
+                    <a:pt x="148739" y="2819456"/>
+                  </a:lnTo>
+                  <a:lnTo>
+                    <a:pt x="72270" y="2825475"/>
+                  </a:lnTo>
+                  <a:lnTo>
+                    <a:pt x="0" y="2831084"/>
                   </a:lnTo>
                   <a:close/>
                 </a:path>
@@ -3540,231 +3540,231 @@
           </p:nvSpPr>
           <p:spPr>
             <a:xfrm>
-              <a:off x="2667951" y="2073503"/>
-              <a:ext cx="5520538" cy="2650436"/>
+              <a:off x="2738296" y="2209169"/>
+              <a:ext cx="5437652" cy="2472151"/>
             </a:xfrm>
             <a:custGeom>
               <a:avLst/>
               <a:pathLst>
-                <a:path w="5520538" h="2650436">
+                <a:path w="5437652" h="2472151">
                   <a:moveTo>
                     <a:pt x="0" y="0"/>
                   </a:moveTo>
                   <a:lnTo>
-                    <a:pt x="8521" y="28532"/>
-                  </a:lnTo>
-                  <a:lnTo>
-                    <a:pt x="86155" y="270277"/>
-                  </a:lnTo>
-                  <a:lnTo>
-                    <a:pt x="163789" y="495108"/>
-                  </a:lnTo>
-                  <a:lnTo>
-                    <a:pt x="241423" y="704209"/>
-                  </a:lnTo>
-                  <a:lnTo>
-                    <a:pt x="319057" y="898680"/>
-                  </a:lnTo>
-                  <a:lnTo>
-                    <a:pt x="396691" y="1079545"/>
-                  </a:lnTo>
-                  <a:lnTo>
-                    <a:pt x="474326" y="1247756"/>
-                  </a:lnTo>
-                  <a:lnTo>
-                    <a:pt x="551960" y="1404198"/>
-                  </a:lnTo>
-                  <a:lnTo>
-                    <a:pt x="629594" y="1549694"/>
-                  </a:lnTo>
-                  <a:lnTo>
-                    <a:pt x="707228" y="1685011"/>
-                  </a:lnTo>
-                  <a:lnTo>
-                    <a:pt x="784862" y="1810860"/>
-                  </a:lnTo>
-                  <a:lnTo>
-                    <a:pt x="862496" y="1927904"/>
-                  </a:lnTo>
-                  <a:lnTo>
-                    <a:pt x="940130" y="2036759"/>
-                  </a:lnTo>
-                  <a:lnTo>
-                    <a:pt x="1017764" y="2137998"/>
-                  </a:lnTo>
-                  <a:lnTo>
-                    <a:pt x="1095398" y="2232153"/>
-                  </a:lnTo>
-                  <a:lnTo>
-                    <a:pt x="1173032" y="2319721"/>
-                  </a:lnTo>
-                  <a:lnTo>
-                    <a:pt x="1250666" y="2401163"/>
-                  </a:lnTo>
-                  <a:lnTo>
-                    <a:pt x="1328300" y="2476906"/>
-                  </a:lnTo>
-                  <a:lnTo>
-                    <a:pt x="1405934" y="2547350"/>
-                  </a:lnTo>
-                  <a:lnTo>
-                    <a:pt x="1483568" y="2612865"/>
-                  </a:lnTo>
-                  <a:lnTo>
-                    <a:pt x="1561202" y="2650436"/>
-                  </a:lnTo>
-                  <a:lnTo>
-                    <a:pt x="1638836" y="2638605"/>
-                  </a:lnTo>
-                  <a:lnTo>
-                    <a:pt x="1716470" y="2626606"/>
-                  </a:lnTo>
-                  <a:lnTo>
-                    <a:pt x="1794104" y="2614437"/>
-                  </a:lnTo>
-                  <a:lnTo>
-                    <a:pt x="1871738" y="2602095"/>
-                  </a:lnTo>
-                  <a:lnTo>
-                    <a:pt x="1949372" y="2589578"/>
-                  </a:lnTo>
-                  <a:lnTo>
-                    <a:pt x="2027006" y="2576883"/>
-                  </a:lnTo>
-                  <a:lnTo>
-                    <a:pt x="2104640" y="2564008"/>
-                  </a:lnTo>
-                  <a:lnTo>
-                    <a:pt x="2182275" y="2550950"/>
-                  </a:lnTo>
-                  <a:lnTo>
-                    <a:pt x="2259909" y="2537707"/>
-                  </a:lnTo>
-                  <a:lnTo>
-                    <a:pt x="2337543" y="2524275"/>
-                  </a:lnTo>
-                  <a:lnTo>
-                    <a:pt x="2415177" y="2510653"/>
-                  </a:lnTo>
-                  <a:lnTo>
-                    <a:pt x="2492811" y="2496838"/>
-                  </a:lnTo>
-                  <a:lnTo>
-                    <a:pt x="2570445" y="2482826"/>
-                  </a:lnTo>
-                  <a:lnTo>
-                    <a:pt x="2648079" y="2468616"/>
-                  </a:lnTo>
-                  <a:lnTo>
-                    <a:pt x="2725713" y="2454204"/>
-                  </a:lnTo>
-                  <a:lnTo>
-                    <a:pt x="2803347" y="2439587"/>
-                  </a:lnTo>
-                  <a:lnTo>
-                    <a:pt x="2880981" y="2424762"/>
-                  </a:lnTo>
-                  <a:lnTo>
-                    <a:pt x="2958615" y="2409728"/>
-                  </a:lnTo>
-                  <a:lnTo>
-                    <a:pt x="3036249" y="2394479"/>
-                  </a:lnTo>
-                  <a:lnTo>
-                    <a:pt x="3113883" y="2379015"/>
-                  </a:lnTo>
-                  <a:lnTo>
-                    <a:pt x="3191517" y="2363330"/>
-                  </a:lnTo>
-                  <a:lnTo>
-                    <a:pt x="3269151" y="2347423"/>
-                  </a:lnTo>
-                  <a:lnTo>
-                    <a:pt x="3346785" y="2331290"/>
-                  </a:lnTo>
-                  <a:lnTo>
-                    <a:pt x="3424419" y="2314928"/>
-                  </a:lnTo>
-                  <a:lnTo>
-                    <a:pt x="3502053" y="2298334"/>
-                  </a:lnTo>
-                  <a:lnTo>
-                    <a:pt x="3579687" y="2281504"/>
-                  </a:lnTo>
-                  <a:lnTo>
-                    <a:pt x="3657321" y="2264436"/>
-                  </a:lnTo>
-                  <a:lnTo>
-                    <a:pt x="3734955" y="2247125"/>
-                  </a:lnTo>
-                  <a:lnTo>
-                    <a:pt x="3812589" y="2229568"/>
-                  </a:lnTo>
-                  <a:lnTo>
-                    <a:pt x="3890224" y="2211762"/>
-                  </a:lnTo>
-                  <a:lnTo>
-                    <a:pt x="3967858" y="2193703"/>
-                  </a:lnTo>
-                  <a:lnTo>
-                    <a:pt x="4045492" y="2175387"/>
-                  </a:lnTo>
-                  <a:lnTo>
-                    <a:pt x="4123126" y="2156812"/>
-                  </a:lnTo>
-                  <a:lnTo>
-                    <a:pt x="4200760" y="2137973"/>
-                  </a:lnTo>
-                  <a:lnTo>
-                    <a:pt x="4278394" y="2118867"/>
-                  </a:lnTo>
-                  <a:lnTo>
-                    <a:pt x="4356028" y="2099489"/>
-                  </a:lnTo>
-                  <a:lnTo>
-                    <a:pt x="4433662" y="2079836"/>
-                  </a:lnTo>
-                  <a:lnTo>
-                    <a:pt x="4511296" y="2059904"/>
-                  </a:lnTo>
-                  <a:lnTo>
-                    <a:pt x="4588930" y="2039689"/>
-                  </a:lnTo>
-                  <a:lnTo>
-                    <a:pt x="4666564" y="2019187"/>
-                  </a:lnTo>
-                  <a:lnTo>
-                    <a:pt x="4744198" y="1998394"/>
-                  </a:lnTo>
-                  <a:lnTo>
-                    <a:pt x="4821832" y="1977306"/>
-                  </a:lnTo>
-                  <a:lnTo>
-                    <a:pt x="4899466" y="1955918"/>
-                  </a:lnTo>
-                  <a:lnTo>
-                    <a:pt x="4977100" y="1934227"/>
-                  </a:lnTo>
-                  <a:lnTo>
-                    <a:pt x="5054734" y="1912228"/>
-                  </a:lnTo>
-                  <a:lnTo>
-                    <a:pt x="5132368" y="1889917"/>
-                  </a:lnTo>
-                  <a:lnTo>
-                    <a:pt x="5210002" y="1867288"/>
-                  </a:lnTo>
-                  <a:lnTo>
-                    <a:pt x="5287636" y="1844339"/>
-                  </a:lnTo>
-                  <a:lnTo>
-                    <a:pt x="5365270" y="1821063"/>
-                  </a:lnTo>
-                  <a:lnTo>
-                    <a:pt x="5442904" y="1797458"/>
-                  </a:lnTo>
-                  <a:lnTo>
-                    <a:pt x="5520538" y="1773517"/>
+                    <a:pt x="8393" y="26612"/>
+                  </a:lnTo>
+                  <a:lnTo>
+                    <a:pt x="84862" y="252096"/>
+                  </a:lnTo>
+                  <a:lnTo>
+                    <a:pt x="161330" y="461804"/>
+                  </a:lnTo>
+                  <a:lnTo>
+                    <a:pt x="237799" y="656840"/>
+                  </a:lnTo>
+                  <a:lnTo>
+                    <a:pt x="314267" y="838229"/>
+                  </a:lnTo>
+                  <a:lnTo>
+                    <a:pt x="390735" y="1006928"/>
+                  </a:lnTo>
+                  <a:lnTo>
+                    <a:pt x="467204" y="1163824"/>
+                  </a:lnTo>
+                  <a:lnTo>
+                    <a:pt x="543672" y="1309742"/>
+                  </a:lnTo>
+                  <a:lnTo>
+                    <a:pt x="620141" y="1445452"/>
+                  </a:lnTo>
+                  <a:lnTo>
+                    <a:pt x="696609" y="1571666"/>
+                  </a:lnTo>
+                  <a:lnTo>
+                    <a:pt x="773078" y="1689050"/>
+                  </a:lnTo>
+                  <a:lnTo>
+                    <a:pt x="849546" y="1798221"/>
+                  </a:lnTo>
+                  <a:lnTo>
+                    <a:pt x="926015" y="1899753"/>
+                  </a:lnTo>
+                  <a:lnTo>
+                    <a:pt x="1002483" y="1994182"/>
+                  </a:lnTo>
+                  <a:lnTo>
+                    <a:pt x="1078951" y="2082005"/>
+                  </a:lnTo>
+                  <a:lnTo>
+                    <a:pt x="1155420" y="2163682"/>
+                  </a:lnTo>
+                  <a:lnTo>
+                    <a:pt x="1231888" y="2239645"/>
+                  </a:lnTo>
+                  <a:lnTo>
+                    <a:pt x="1308357" y="2310294"/>
+                  </a:lnTo>
+                  <a:lnTo>
+                    <a:pt x="1384825" y="2375999"/>
+                  </a:lnTo>
+                  <a:lnTo>
+                    <a:pt x="1461294" y="2437107"/>
+                  </a:lnTo>
+                  <a:lnTo>
+                    <a:pt x="1537762" y="2472151"/>
+                  </a:lnTo>
+                  <a:lnTo>
+                    <a:pt x="1614230" y="2461116"/>
+                  </a:lnTo>
+                  <a:lnTo>
+                    <a:pt x="1690699" y="2449924"/>
+                  </a:lnTo>
+                  <a:lnTo>
+                    <a:pt x="1767167" y="2438573"/>
+                  </a:lnTo>
+                  <a:lnTo>
+                    <a:pt x="1843636" y="2427062"/>
+                  </a:lnTo>
+                  <a:lnTo>
+                    <a:pt x="1920104" y="2415387"/>
+                  </a:lnTo>
+                  <a:lnTo>
+                    <a:pt x="1996573" y="2403546"/>
+                  </a:lnTo>
+                  <a:lnTo>
+                    <a:pt x="2073041" y="2391537"/>
+                  </a:lnTo>
+                  <a:lnTo>
+                    <a:pt x="2149509" y="2379357"/>
+                  </a:lnTo>
+                  <a:lnTo>
+                    <a:pt x="2225978" y="2367004"/>
+                  </a:lnTo>
+                  <a:lnTo>
+                    <a:pt x="2302446" y="2354477"/>
+                  </a:lnTo>
+                  <a:lnTo>
+                    <a:pt x="2378915" y="2341771"/>
+                  </a:lnTo>
+                  <a:lnTo>
+                    <a:pt x="2455383" y="2328885"/>
+                  </a:lnTo>
+                  <a:lnTo>
+                    <a:pt x="2531852" y="2315816"/>
+                  </a:lnTo>
+                  <a:lnTo>
+                    <a:pt x="2608320" y="2302561"/>
+                  </a:lnTo>
+                  <a:lnTo>
+                    <a:pt x="2684788" y="2289118"/>
+                  </a:lnTo>
+                  <a:lnTo>
+                    <a:pt x="2761257" y="2275485"/>
+                  </a:lnTo>
+                  <a:lnTo>
+                    <a:pt x="2837725" y="2261658"/>
+                  </a:lnTo>
+                  <a:lnTo>
+                    <a:pt x="2914194" y="2247634"/>
+                  </a:lnTo>
+                  <a:lnTo>
+                    <a:pt x="2990662" y="2233411"/>
+                  </a:lnTo>
+                  <a:lnTo>
+                    <a:pt x="3067131" y="2218987"/>
+                  </a:lnTo>
+                  <a:lnTo>
+                    <a:pt x="3143599" y="2204358"/>
+                  </a:lnTo>
+                  <a:lnTo>
+                    <a:pt x="3220068" y="2189521"/>
+                  </a:lnTo>
+                  <a:lnTo>
+                    <a:pt x="3296536" y="2174473"/>
+                  </a:lnTo>
+                  <a:lnTo>
+                    <a:pt x="3373004" y="2159212"/>
+                  </a:lnTo>
+                  <a:lnTo>
+                    <a:pt x="3449473" y="2143734"/>
+                  </a:lnTo>
+                  <a:lnTo>
+                    <a:pt x="3525941" y="2128036"/>
+                  </a:lnTo>
+                  <a:lnTo>
+                    <a:pt x="3602410" y="2112115"/>
+                  </a:lnTo>
+                  <a:lnTo>
+                    <a:pt x="3678878" y="2095969"/>
+                  </a:lnTo>
+                  <a:lnTo>
+                    <a:pt x="3755347" y="2079593"/>
+                  </a:lnTo>
+                  <a:lnTo>
+                    <a:pt x="3831815" y="2062985"/>
+                  </a:lnTo>
+                  <a:lnTo>
+                    <a:pt x="3908283" y="2046140"/>
+                  </a:lnTo>
+                  <a:lnTo>
+                    <a:pt x="3984752" y="2029057"/>
+                  </a:lnTo>
+                  <a:lnTo>
+                    <a:pt x="4061220" y="2011731"/>
+                  </a:lnTo>
+                  <a:lnTo>
+                    <a:pt x="4137689" y="1994159"/>
+                  </a:lnTo>
+                  <a:lnTo>
+                    <a:pt x="4214157" y="1976338"/>
+                  </a:lnTo>
+                  <a:lnTo>
+                    <a:pt x="4290626" y="1958264"/>
+                  </a:lnTo>
+                  <a:lnTo>
+                    <a:pt x="4367094" y="1939933"/>
+                  </a:lnTo>
+                  <a:lnTo>
+                    <a:pt x="4443562" y="1921342"/>
+                  </a:lnTo>
+                  <a:lnTo>
+                    <a:pt x="4520031" y="1902487"/>
+                  </a:lnTo>
+                  <a:lnTo>
+                    <a:pt x="4596499" y="1883364"/>
+                  </a:lnTo>
+                  <a:lnTo>
+                    <a:pt x="4672968" y="1863970"/>
+                  </a:lnTo>
+                  <a:lnTo>
+                    <a:pt x="4749436" y="1844300"/>
+                  </a:lnTo>
+                  <a:lnTo>
+                    <a:pt x="4825905" y="1824351"/>
+                  </a:lnTo>
+                  <a:lnTo>
+                    <a:pt x="4902373" y="1804119"/>
+                  </a:lnTo>
+                  <a:lnTo>
+                    <a:pt x="4978841" y="1783600"/>
+                  </a:lnTo>
+                  <a:lnTo>
+                    <a:pt x="5055310" y="1762789"/>
+                  </a:lnTo>
+                  <a:lnTo>
+                    <a:pt x="5131778" y="1741683"/>
+                  </a:lnTo>
+                  <a:lnTo>
+                    <a:pt x="5208247" y="1720277"/>
+                  </a:lnTo>
+                  <a:lnTo>
+                    <a:pt x="5284715" y="1698567"/>
+                  </a:lnTo>
+                  <a:lnTo>
+                    <a:pt x="5361184" y="1676549"/>
+                  </a:lnTo>
+                  <a:lnTo>
+                    <a:pt x="5437652" y="1654219"/>
                   </a:lnTo>
                 </a:path>
               </a:pathLst>
@@ -3784,300 +3784,300 @@
           </p:nvSpPr>
           <p:spPr>
             <a:xfrm>
-              <a:off x="817517" y="4735604"/>
-              <a:ext cx="7370972" cy="801604"/>
+              <a:off x="915645" y="4692201"/>
+              <a:ext cx="7260303" cy="747683"/>
             </a:xfrm>
             <a:custGeom>
               <a:avLst/>
               <a:pathLst>
-                <a:path w="7370972" h="801604">
+                <a:path w="7260303" h="747683">
                   <a:moveTo>
-                    <a:pt x="7370972" y="801604"/>
+                    <a:pt x="7260303" y="747683"/>
                   </a:moveTo>
                   <a:lnTo>
-                    <a:pt x="7293338" y="800096"/>
-                  </a:lnTo>
-                  <a:lnTo>
-                    <a:pt x="7215704" y="798475"/>
-                  </a:lnTo>
-                  <a:lnTo>
-                    <a:pt x="7138070" y="796732"/>
-                  </a:lnTo>
-                  <a:lnTo>
-                    <a:pt x="7060436" y="794858"/>
-                  </a:lnTo>
-                  <a:lnTo>
-                    <a:pt x="6982802" y="792843"/>
-                  </a:lnTo>
-                  <a:lnTo>
-                    <a:pt x="6905168" y="790676"/>
-                  </a:lnTo>
-                  <a:lnTo>
-                    <a:pt x="6827534" y="788347"/>
-                  </a:lnTo>
-                  <a:lnTo>
-                    <a:pt x="6749900" y="785842"/>
-                  </a:lnTo>
-                  <a:lnTo>
-                    <a:pt x="6672266" y="783148"/>
-                  </a:lnTo>
-                  <a:lnTo>
-                    <a:pt x="6594632" y="780252"/>
-                  </a:lnTo>
-                  <a:lnTo>
-                    <a:pt x="6516998" y="777138"/>
-                  </a:lnTo>
-                  <a:lnTo>
-                    <a:pt x="6439364" y="773790"/>
-                  </a:lnTo>
-                  <a:lnTo>
-                    <a:pt x="6361730" y="770190"/>
-                  </a:lnTo>
-                  <a:lnTo>
-                    <a:pt x="6284096" y="766319"/>
-                  </a:lnTo>
-                  <a:lnTo>
-                    <a:pt x="6206462" y="762157"/>
-                  </a:lnTo>
-                  <a:lnTo>
-                    <a:pt x="6128827" y="757682"/>
-                  </a:lnTo>
-                  <a:lnTo>
-                    <a:pt x="6051193" y="752870"/>
-                  </a:lnTo>
-                  <a:lnTo>
-                    <a:pt x="5973559" y="747696"/>
-                  </a:lnTo>
-                  <a:lnTo>
-                    <a:pt x="5895925" y="742133"/>
-                  </a:lnTo>
-                  <a:lnTo>
-                    <a:pt x="5818291" y="736151"/>
-                  </a:lnTo>
-                  <a:lnTo>
-                    <a:pt x="5740657" y="729720"/>
-                  </a:lnTo>
-                  <a:lnTo>
-                    <a:pt x="5663023" y="722805"/>
-                  </a:lnTo>
-                  <a:lnTo>
-                    <a:pt x="5585389" y="715369"/>
-                  </a:lnTo>
-                  <a:lnTo>
-                    <a:pt x="5507755" y="707374"/>
-                  </a:lnTo>
-                  <a:lnTo>
-                    <a:pt x="5430121" y="698778"/>
-                  </a:lnTo>
-                  <a:lnTo>
-                    <a:pt x="5352487" y="689534"/>
-                  </a:lnTo>
-                  <a:lnTo>
-                    <a:pt x="5274853" y="679596"/>
-                  </a:lnTo>
-                  <a:lnTo>
-                    <a:pt x="5197219" y="668910"/>
-                  </a:lnTo>
-                  <a:lnTo>
-                    <a:pt x="5119585" y="657420"/>
-                  </a:lnTo>
-                  <a:lnTo>
-                    <a:pt x="5041951" y="645065"/>
-                  </a:lnTo>
-                  <a:lnTo>
-                    <a:pt x="4964317" y="631781"/>
-                  </a:lnTo>
-                  <a:lnTo>
-                    <a:pt x="4886683" y="617498"/>
-                  </a:lnTo>
-                  <a:lnTo>
-                    <a:pt x="4809049" y="602141"/>
-                  </a:lnTo>
-                  <a:lnTo>
-                    <a:pt x="4731415" y="585628"/>
-                  </a:lnTo>
-                  <a:lnTo>
-                    <a:pt x="4653781" y="567872"/>
-                  </a:lnTo>
-                  <a:lnTo>
-                    <a:pt x="4576147" y="548781"/>
-                  </a:lnTo>
-                  <a:lnTo>
-                    <a:pt x="4498513" y="528254"/>
-                  </a:lnTo>
-                  <a:lnTo>
-                    <a:pt x="4420879" y="506183"/>
-                  </a:lnTo>
-                  <a:lnTo>
-                    <a:pt x="4343244" y="482451"/>
-                  </a:lnTo>
-                  <a:lnTo>
-                    <a:pt x="4265610" y="456934"/>
-                  </a:lnTo>
-                  <a:lnTo>
-                    <a:pt x="4187976" y="429497"/>
-                  </a:lnTo>
-                  <a:lnTo>
-                    <a:pt x="4110342" y="399996"/>
-                  </a:lnTo>
-                  <a:lnTo>
-                    <a:pt x="4032708" y="368276"/>
-                  </a:lnTo>
-                  <a:lnTo>
-                    <a:pt x="3955074" y="334170"/>
-                  </a:lnTo>
-                  <a:lnTo>
-                    <a:pt x="3877440" y="297498"/>
-                  </a:lnTo>
-                  <a:lnTo>
-                    <a:pt x="3799806" y="258067"/>
-                  </a:lnTo>
-                  <a:lnTo>
-                    <a:pt x="3722172" y="215670"/>
-                  </a:lnTo>
-                  <a:lnTo>
-                    <a:pt x="3644538" y="170083"/>
-                  </a:lnTo>
-                  <a:lnTo>
-                    <a:pt x="3566904" y="121067"/>
-                  </a:lnTo>
-                  <a:lnTo>
-                    <a:pt x="3489270" y="68363"/>
-                  </a:lnTo>
-                  <a:lnTo>
-                    <a:pt x="3411636" y="11695"/>
-                  </a:lnTo>
-                  <a:lnTo>
-                    <a:pt x="3334002" y="0"/>
-                  </a:lnTo>
-                  <a:lnTo>
-                    <a:pt x="3256368" y="11501"/>
-                  </a:lnTo>
-                  <a:lnTo>
-                    <a:pt x="3178734" y="22842"/>
-                  </a:lnTo>
-                  <a:lnTo>
-                    <a:pt x="3101100" y="34025"/>
-                  </a:lnTo>
-                  <a:lnTo>
-                    <a:pt x="3023466" y="45050"/>
-                  </a:lnTo>
-                  <a:lnTo>
-                    <a:pt x="2945832" y="55921"/>
-                  </a:lnTo>
-                  <a:lnTo>
-                    <a:pt x="2868198" y="66641"/>
-                  </a:lnTo>
-                  <a:lnTo>
-                    <a:pt x="2790564" y="77210"/>
-                  </a:lnTo>
-                  <a:lnTo>
-                    <a:pt x="2712930" y="87631"/>
-                  </a:lnTo>
-                  <a:lnTo>
-                    <a:pt x="2635295" y="97906"/>
-                  </a:lnTo>
-                  <a:lnTo>
-                    <a:pt x="2557661" y="108037"/>
-                  </a:lnTo>
-                  <a:lnTo>
-                    <a:pt x="2480027" y="118027"/>
-                  </a:lnTo>
-                  <a:lnTo>
-                    <a:pt x="2402393" y="127877"/>
-                  </a:lnTo>
-                  <a:lnTo>
-                    <a:pt x="2324759" y="137588"/>
-                  </a:lnTo>
-                  <a:lnTo>
-                    <a:pt x="2247125" y="147164"/>
-                  </a:lnTo>
-                  <a:lnTo>
-                    <a:pt x="2169491" y="156606"/>
-                  </a:lnTo>
-                  <a:lnTo>
-                    <a:pt x="2091857" y="165916"/>
-                  </a:lnTo>
-                  <a:lnTo>
-                    <a:pt x="2014223" y="175095"/>
-                  </a:lnTo>
-                  <a:lnTo>
-                    <a:pt x="1936589" y="184146"/>
-                  </a:lnTo>
-                  <a:lnTo>
-                    <a:pt x="1858955" y="193070"/>
-                  </a:lnTo>
-                  <a:lnTo>
-                    <a:pt x="1781321" y="201869"/>
-                  </a:lnTo>
-                  <a:lnTo>
-                    <a:pt x="1703687" y="210545"/>
-                  </a:lnTo>
-                  <a:lnTo>
-                    <a:pt x="1626053" y="219100"/>
-                  </a:lnTo>
-                  <a:lnTo>
-                    <a:pt x="1548419" y="227535"/>
-                  </a:lnTo>
-                  <a:lnTo>
-                    <a:pt x="1470785" y="235852"/>
-                  </a:lnTo>
-                  <a:lnTo>
-                    <a:pt x="1393151" y="244052"/>
-                  </a:lnTo>
-                  <a:lnTo>
-                    <a:pt x="1315517" y="252137"/>
-                  </a:lnTo>
-                  <a:lnTo>
-                    <a:pt x="1237883" y="260110"/>
-                  </a:lnTo>
-                  <a:lnTo>
-                    <a:pt x="1160249" y="267971"/>
-                  </a:lnTo>
-                  <a:lnTo>
-                    <a:pt x="1082615" y="275721"/>
-                  </a:lnTo>
-                  <a:lnTo>
-                    <a:pt x="1004981" y="283363"/>
-                  </a:lnTo>
-                  <a:lnTo>
-                    <a:pt x="927346" y="290899"/>
-                  </a:lnTo>
-                  <a:lnTo>
-                    <a:pt x="849712" y="298328"/>
-                  </a:lnTo>
-                  <a:lnTo>
-                    <a:pt x="772078" y="305654"/>
-                  </a:lnTo>
-                  <a:lnTo>
-                    <a:pt x="694444" y="312877"/>
-                  </a:lnTo>
-                  <a:lnTo>
-                    <a:pt x="616810" y="319999"/>
-                  </a:lnTo>
-                  <a:lnTo>
-                    <a:pt x="539176" y="327022"/>
-                  </a:lnTo>
-                  <a:lnTo>
-                    <a:pt x="461542" y="333946"/>
-                  </a:lnTo>
-                  <a:lnTo>
-                    <a:pt x="383908" y="340773"/>
-                  </a:lnTo>
-                  <a:lnTo>
-                    <a:pt x="306274" y="347505"/>
-                  </a:lnTo>
-                  <a:lnTo>
-                    <a:pt x="228640" y="354142"/>
-                  </a:lnTo>
-                  <a:lnTo>
-                    <a:pt x="151006" y="360686"/>
-                  </a:lnTo>
-                  <a:lnTo>
-                    <a:pt x="73372" y="367139"/>
-                  </a:lnTo>
-                  <a:lnTo>
-                    <a:pt x="0" y="373152"/>
+                    <a:pt x="7183835" y="746277"/>
+                  </a:lnTo>
+                  <a:lnTo>
+                    <a:pt x="7107366" y="744765"/>
+                  </a:lnTo>
+                  <a:lnTo>
+                    <a:pt x="7030898" y="743139"/>
+                  </a:lnTo>
+                  <a:lnTo>
+                    <a:pt x="6954429" y="741391"/>
+                  </a:lnTo>
+                  <a:lnTo>
+                    <a:pt x="6877961" y="739511"/>
+                  </a:lnTo>
+                  <a:lnTo>
+                    <a:pt x="6801492" y="737490"/>
+                  </a:lnTo>
+                  <a:lnTo>
+                    <a:pt x="6725024" y="735317"/>
+                  </a:lnTo>
+                  <a:lnTo>
+                    <a:pt x="6648556" y="732981"/>
+                  </a:lnTo>
+                  <a:lnTo>
+                    <a:pt x="6572087" y="730469"/>
+                  </a:lnTo>
+                  <a:lnTo>
+                    <a:pt x="6495619" y="727767"/>
+                  </a:lnTo>
+                  <a:lnTo>
+                    <a:pt x="6419150" y="724863"/>
+                  </a:lnTo>
+                  <a:lnTo>
+                    <a:pt x="6342682" y="721740"/>
+                  </a:lnTo>
+                  <a:lnTo>
+                    <a:pt x="6266213" y="718382"/>
+                  </a:lnTo>
+                  <a:lnTo>
+                    <a:pt x="6189745" y="714772"/>
+                  </a:lnTo>
+                  <a:lnTo>
+                    <a:pt x="6113277" y="710889"/>
+                  </a:lnTo>
+                  <a:lnTo>
+                    <a:pt x="6036808" y="706715"/>
+                  </a:lnTo>
+                  <a:lnTo>
+                    <a:pt x="5960340" y="702227"/>
+                  </a:lnTo>
+                  <a:lnTo>
+                    <a:pt x="5883871" y="697401"/>
+                  </a:lnTo>
+                  <a:lnTo>
+                    <a:pt x="5807403" y="692212"/>
+                  </a:lnTo>
+                  <a:lnTo>
+                    <a:pt x="5730934" y="686633"/>
+                  </a:lnTo>
+                  <a:lnTo>
+                    <a:pt x="5654466" y="680634"/>
+                  </a:lnTo>
+                  <a:lnTo>
+                    <a:pt x="5577998" y="674184"/>
+                  </a:lnTo>
+                  <a:lnTo>
+                    <a:pt x="5501529" y="667249"/>
+                  </a:lnTo>
+                  <a:lnTo>
+                    <a:pt x="5425061" y="659791"/>
+                  </a:lnTo>
+                  <a:lnTo>
+                    <a:pt x="5348592" y="651773"/>
+                  </a:lnTo>
+                  <a:lnTo>
+                    <a:pt x="5272124" y="643152"/>
+                  </a:lnTo>
+                  <a:lnTo>
+                    <a:pt x="5195655" y="633882"/>
+                  </a:lnTo>
+                  <a:lnTo>
+                    <a:pt x="5119187" y="623915"/>
+                  </a:lnTo>
+                  <a:lnTo>
+                    <a:pt x="5042719" y="613197"/>
+                  </a:lnTo>
+                  <a:lnTo>
+                    <a:pt x="4966250" y="601674"/>
+                  </a:lnTo>
+                  <a:lnTo>
+                    <a:pt x="4889782" y="589284"/>
+                  </a:lnTo>
+                  <a:lnTo>
+                    <a:pt x="4813313" y="575961"/>
+                  </a:lnTo>
+                  <a:lnTo>
+                    <a:pt x="4736845" y="561637"/>
+                  </a:lnTo>
+                  <a:lnTo>
+                    <a:pt x="4660376" y="546234"/>
+                  </a:lnTo>
+                  <a:lnTo>
+                    <a:pt x="4583908" y="529674"/>
+                  </a:lnTo>
+                  <a:lnTo>
+                    <a:pt x="4507439" y="511867"/>
+                  </a:lnTo>
+                  <a:lnTo>
+                    <a:pt x="4430971" y="492720"/>
+                  </a:lnTo>
+                  <a:lnTo>
+                    <a:pt x="4354503" y="472134"/>
+                  </a:lnTo>
+                  <a:lnTo>
+                    <a:pt x="4278034" y="449998"/>
+                  </a:lnTo>
+                  <a:lnTo>
+                    <a:pt x="4201566" y="426198"/>
+                  </a:lnTo>
+                  <a:lnTo>
+                    <a:pt x="4125097" y="400606"/>
+                  </a:lnTo>
+                  <a:lnTo>
+                    <a:pt x="4048629" y="373090"/>
+                  </a:lnTo>
+                  <a:lnTo>
+                    <a:pt x="3972160" y="343504"/>
+                  </a:lnTo>
+                  <a:lnTo>
+                    <a:pt x="3895692" y="311692"/>
+                  </a:lnTo>
+                  <a:lnTo>
+                    <a:pt x="3819224" y="277486"/>
+                  </a:lnTo>
+                  <a:lnTo>
+                    <a:pt x="3742755" y="240708"/>
+                  </a:lnTo>
+                  <a:lnTo>
+                    <a:pt x="3666287" y="201162"/>
+                  </a:lnTo>
+                  <a:lnTo>
+                    <a:pt x="3589818" y="158642"/>
+                  </a:lnTo>
+                  <a:lnTo>
+                    <a:pt x="3513350" y="112923"/>
+                  </a:lnTo>
+                  <a:lnTo>
+                    <a:pt x="3436881" y="63765"/>
+                  </a:lnTo>
+                  <a:lnTo>
+                    <a:pt x="3360413" y="10908"/>
+                  </a:lnTo>
+                  <a:lnTo>
+                    <a:pt x="3283945" y="0"/>
+                  </a:lnTo>
+                  <a:lnTo>
+                    <a:pt x="3207476" y="10728"/>
+                  </a:lnTo>
+                  <a:lnTo>
+                    <a:pt x="3131008" y="21306"/>
+                  </a:lnTo>
+                  <a:lnTo>
+                    <a:pt x="3054539" y="31736"/>
+                  </a:lnTo>
+                  <a:lnTo>
+                    <a:pt x="2978071" y="42020"/>
+                  </a:lnTo>
+                  <a:lnTo>
+                    <a:pt x="2901602" y="52160"/>
+                  </a:lnTo>
+                  <a:lnTo>
+                    <a:pt x="2825134" y="62158"/>
+                  </a:lnTo>
+                  <a:lnTo>
+                    <a:pt x="2748666" y="72016"/>
+                  </a:lnTo>
+                  <a:lnTo>
+                    <a:pt x="2672197" y="81736"/>
+                  </a:lnTo>
+                  <a:lnTo>
+                    <a:pt x="2595729" y="91320"/>
+                  </a:lnTo>
+                  <a:lnTo>
+                    <a:pt x="2519260" y="100770"/>
+                  </a:lnTo>
+                  <a:lnTo>
+                    <a:pt x="2442792" y="110088"/>
+                  </a:lnTo>
+                  <a:lnTo>
+                    <a:pt x="2366323" y="119275"/>
+                  </a:lnTo>
+                  <a:lnTo>
+                    <a:pt x="2289855" y="128333"/>
+                  </a:lnTo>
+                  <a:lnTo>
+                    <a:pt x="2213386" y="137265"/>
+                  </a:lnTo>
+                  <a:lnTo>
+                    <a:pt x="2136918" y="146072"/>
+                  </a:lnTo>
+                  <a:lnTo>
+                    <a:pt x="2060450" y="154755"/>
+                  </a:lnTo>
+                  <a:lnTo>
+                    <a:pt x="1983981" y="163317"/>
+                  </a:lnTo>
+                  <a:lnTo>
+                    <a:pt x="1907513" y="171759"/>
+                  </a:lnTo>
+                  <a:lnTo>
+                    <a:pt x="1831044" y="180083"/>
+                  </a:lnTo>
+                  <a:lnTo>
+                    <a:pt x="1754576" y="188290"/>
+                  </a:lnTo>
+                  <a:lnTo>
+                    <a:pt x="1678107" y="196383"/>
+                  </a:lnTo>
+                  <a:lnTo>
+                    <a:pt x="1601639" y="204362"/>
+                  </a:lnTo>
+                  <a:lnTo>
+                    <a:pt x="1525171" y="212229"/>
+                  </a:lnTo>
+                  <a:lnTo>
+                    <a:pt x="1448702" y="219987"/>
+                  </a:lnTo>
+                  <a:lnTo>
+                    <a:pt x="1372234" y="227635"/>
+                  </a:lnTo>
+                  <a:lnTo>
+                    <a:pt x="1295765" y="235177"/>
+                  </a:lnTo>
+                  <a:lnTo>
+                    <a:pt x="1219297" y="242613"/>
+                  </a:lnTo>
+                  <a:lnTo>
+                    <a:pt x="1142828" y="249945"/>
+                  </a:lnTo>
+                  <a:lnTo>
+                    <a:pt x="1066360" y="257174"/>
+                  </a:lnTo>
+                  <a:lnTo>
+                    <a:pt x="989892" y="264303"/>
+                  </a:lnTo>
+                  <a:lnTo>
+                    <a:pt x="913423" y="271331"/>
+                  </a:lnTo>
+                  <a:lnTo>
+                    <a:pt x="836955" y="278261"/>
+                  </a:lnTo>
+                  <a:lnTo>
+                    <a:pt x="760486" y="285094"/>
+                  </a:lnTo>
+                  <a:lnTo>
+                    <a:pt x="684018" y="291831"/>
+                  </a:lnTo>
+                  <a:lnTo>
+                    <a:pt x="607549" y="298474"/>
+                  </a:lnTo>
+                  <a:lnTo>
+                    <a:pt x="531081" y="305024"/>
+                  </a:lnTo>
+                  <a:lnTo>
+                    <a:pt x="454613" y="311483"/>
+                  </a:lnTo>
+                  <a:lnTo>
+                    <a:pt x="378144" y="317850"/>
+                  </a:lnTo>
+                  <a:lnTo>
+                    <a:pt x="301676" y="324129"/>
+                  </a:lnTo>
+                  <a:lnTo>
+                    <a:pt x="225207" y="330320"/>
+                  </a:lnTo>
+                  <a:lnTo>
+                    <a:pt x="148739" y="336424"/>
+                  </a:lnTo>
+                  <a:lnTo>
+                    <a:pt x="72270" y="342443"/>
+                  </a:lnTo>
+                  <a:lnTo>
+                    <a:pt x="0" y="348052"/>
                   </a:lnTo>
                 </a:path>
               </a:pathLst>
@@ -4097,300 +4097,300 @@
           </p:nvSpPr>
           <p:spPr>
             <a:xfrm>
-              <a:off x="817517" y="2590581"/>
-              <a:ext cx="7370972" cy="2781535"/>
+              <a:off x="915645" y="2691465"/>
+              <a:ext cx="7260303" cy="2594431"/>
             </a:xfrm>
             <a:custGeom>
               <a:avLst/>
               <a:pathLst>
-                <a:path w="7370972" h="2781535">
+                <a:path w="7260303" h="2594431">
                   <a:moveTo>
                     <a:pt x="0" y="0"/>
                   </a:moveTo>
                   <a:lnTo>
-                    <a:pt x="73372" y="80864"/>
-                  </a:lnTo>
-                  <a:lnTo>
-                    <a:pt x="151006" y="163961"/>
-                  </a:lnTo>
-                  <a:lnTo>
-                    <a:pt x="228640" y="244666"/>
-                  </a:lnTo>
-                  <a:lnTo>
-                    <a:pt x="306274" y="323046"/>
-                  </a:lnTo>
-                  <a:lnTo>
-                    <a:pt x="383908" y="399170"/>
-                  </a:lnTo>
-                  <a:lnTo>
-                    <a:pt x="461542" y="473101"/>
-                  </a:lnTo>
-                  <a:lnTo>
-                    <a:pt x="539176" y="544904"/>
-                  </a:lnTo>
-                  <a:lnTo>
-                    <a:pt x="616810" y="614639"/>
-                  </a:lnTo>
-                  <a:lnTo>
-                    <a:pt x="694444" y="682366"/>
-                  </a:lnTo>
-                  <a:lnTo>
-                    <a:pt x="772078" y="748143"/>
-                  </a:lnTo>
-                  <a:lnTo>
-                    <a:pt x="849712" y="812026"/>
-                  </a:lnTo>
-                  <a:lnTo>
-                    <a:pt x="927346" y="874069"/>
-                  </a:lnTo>
-                  <a:lnTo>
-                    <a:pt x="1004981" y="934326"/>
-                  </a:lnTo>
-                  <a:lnTo>
-                    <a:pt x="1082615" y="992848"/>
-                  </a:lnTo>
-                  <a:lnTo>
-                    <a:pt x="1160249" y="1049684"/>
-                  </a:lnTo>
-                  <a:lnTo>
-                    <a:pt x="1237883" y="1104884"/>
-                  </a:lnTo>
-                  <a:lnTo>
-                    <a:pt x="1315517" y="1158495"/>
-                  </a:lnTo>
-                  <a:lnTo>
-                    <a:pt x="1393151" y="1210561"/>
-                  </a:lnTo>
-                  <a:lnTo>
-                    <a:pt x="1470785" y="1261129"/>
-                  </a:lnTo>
-                  <a:lnTo>
-                    <a:pt x="1548419" y="1310240"/>
-                  </a:lnTo>
-                  <a:lnTo>
-                    <a:pt x="1626053" y="1357937"/>
-                  </a:lnTo>
-                  <a:lnTo>
-                    <a:pt x="1703687" y="1404261"/>
-                  </a:lnTo>
-                  <a:lnTo>
-                    <a:pt x="1781321" y="1449251"/>
-                  </a:lnTo>
-                  <a:lnTo>
-                    <a:pt x="1858955" y="1492945"/>
-                  </a:lnTo>
-                  <a:lnTo>
-                    <a:pt x="1936589" y="1535381"/>
-                  </a:lnTo>
-                  <a:lnTo>
-                    <a:pt x="2014223" y="1576595"/>
-                  </a:lnTo>
-                  <a:lnTo>
-                    <a:pt x="2091857" y="1616623"/>
-                  </a:lnTo>
-                  <a:lnTo>
-                    <a:pt x="2169491" y="1655498"/>
-                  </a:lnTo>
-                  <a:lnTo>
-                    <a:pt x="2247125" y="1693253"/>
-                  </a:lnTo>
-                  <a:lnTo>
-                    <a:pt x="2324759" y="1729921"/>
-                  </a:lnTo>
-                  <a:lnTo>
-                    <a:pt x="2402393" y="1765534"/>
-                  </a:lnTo>
-                  <a:lnTo>
-                    <a:pt x="2480027" y="1800120"/>
-                  </a:lnTo>
-                  <a:lnTo>
-                    <a:pt x="2557661" y="1833711"/>
-                  </a:lnTo>
-                  <a:lnTo>
-                    <a:pt x="2635295" y="1866335"/>
-                  </a:lnTo>
-                  <a:lnTo>
-                    <a:pt x="2712930" y="1898019"/>
-                  </a:lnTo>
-                  <a:lnTo>
-                    <a:pt x="2790564" y="1928791"/>
-                  </a:lnTo>
-                  <a:lnTo>
-                    <a:pt x="2868198" y="1958677"/>
-                  </a:lnTo>
-                  <a:lnTo>
-                    <a:pt x="2945832" y="1987703"/>
-                  </a:lnTo>
-                  <a:lnTo>
-                    <a:pt x="3023466" y="2015892"/>
-                  </a:lnTo>
-                  <a:lnTo>
-                    <a:pt x="3101100" y="2043270"/>
-                  </a:lnTo>
-                  <a:lnTo>
-                    <a:pt x="3178734" y="2069859"/>
-                  </a:lnTo>
-                  <a:lnTo>
-                    <a:pt x="3256368" y="2095683"/>
-                  </a:lnTo>
-                  <a:lnTo>
-                    <a:pt x="3334002" y="2120763"/>
-                  </a:lnTo>
-                  <a:lnTo>
-                    <a:pt x="3411636" y="2145121"/>
-                  </a:lnTo>
-                  <a:lnTo>
-                    <a:pt x="3489270" y="2168778"/>
-                  </a:lnTo>
-                  <a:lnTo>
-                    <a:pt x="3566904" y="2191753"/>
-                  </a:lnTo>
-                  <a:lnTo>
-                    <a:pt x="3644538" y="2214067"/>
-                  </a:lnTo>
-                  <a:lnTo>
-                    <a:pt x="3722172" y="2235738"/>
-                  </a:lnTo>
-                  <a:lnTo>
-                    <a:pt x="3799806" y="2256786"/>
-                  </a:lnTo>
-                  <a:lnTo>
-                    <a:pt x="3877440" y="2277227"/>
-                  </a:lnTo>
-                  <a:lnTo>
-                    <a:pt x="3955074" y="2297079"/>
-                  </a:lnTo>
-                  <a:lnTo>
-                    <a:pt x="4032708" y="2316360"/>
-                  </a:lnTo>
-                  <a:lnTo>
-                    <a:pt x="4110342" y="2335086"/>
-                  </a:lnTo>
-                  <a:lnTo>
-                    <a:pt x="4187976" y="2353273"/>
-                  </a:lnTo>
-                  <a:lnTo>
-                    <a:pt x="4265610" y="2370935"/>
-                  </a:lnTo>
-                  <a:lnTo>
-                    <a:pt x="4343244" y="2388090"/>
-                  </a:lnTo>
-                  <a:lnTo>
-                    <a:pt x="4420879" y="2404750"/>
-                  </a:lnTo>
-                  <a:lnTo>
-                    <a:pt x="4498513" y="2420930"/>
-                  </a:lnTo>
-                  <a:lnTo>
-                    <a:pt x="4576147" y="2436645"/>
-                  </a:lnTo>
-                  <a:lnTo>
-                    <a:pt x="4653781" y="2451907"/>
-                  </a:lnTo>
-                  <a:lnTo>
-                    <a:pt x="4731415" y="2466730"/>
-                  </a:lnTo>
-                  <a:lnTo>
-                    <a:pt x="4809049" y="2481126"/>
-                  </a:lnTo>
-                  <a:lnTo>
-                    <a:pt x="4886683" y="2495107"/>
-                  </a:lnTo>
-                  <a:lnTo>
-                    <a:pt x="4964317" y="2508686"/>
-                  </a:lnTo>
-                  <a:lnTo>
-                    <a:pt x="5041951" y="2521873"/>
-                  </a:lnTo>
-                  <a:lnTo>
-                    <a:pt x="5119585" y="2534681"/>
-                  </a:lnTo>
-                  <a:lnTo>
-                    <a:pt x="5197219" y="2547120"/>
-                  </a:lnTo>
-                  <a:lnTo>
-                    <a:pt x="5274853" y="2559201"/>
-                  </a:lnTo>
-                  <a:lnTo>
-                    <a:pt x="5352487" y="2570934"/>
-                  </a:lnTo>
-                  <a:lnTo>
-                    <a:pt x="5430121" y="2582330"/>
-                  </a:lnTo>
-                  <a:lnTo>
-                    <a:pt x="5507755" y="2593397"/>
-                  </a:lnTo>
-                  <a:lnTo>
-                    <a:pt x="5585389" y="2604145"/>
-                  </a:lnTo>
-                  <a:lnTo>
-                    <a:pt x="5663023" y="2614584"/>
-                  </a:lnTo>
-                  <a:lnTo>
-                    <a:pt x="5740657" y="2624722"/>
-                  </a:lnTo>
-                  <a:lnTo>
-                    <a:pt x="5818291" y="2634569"/>
-                  </a:lnTo>
-                  <a:lnTo>
-                    <a:pt x="5895925" y="2644132"/>
-                  </a:lnTo>
-                  <a:lnTo>
-                    <a:pt x="5973559" y="2653419"/>
-                  </a:lnTo>
-                  <a:lnTo>
-                    <a:pt x="6051193" y="2662439"/>
-                  </a:lnTo>
-                  <a:lnTo>
-                    <a:pt x="6128827" y="2671200"/>
-                  </a:lnTo>
-                  <a:lnTo>
-                    <a:pt x="6206462" y="2679708"/>
-                  </a:lnTo>
-                  <a:lnTo>
-                    <a:pt x="6284096" y="2687971"/>
-                  </a:lnTo>
-                  <a:lnTo>
-                    <a:pt x="6361730" y="2695996"/>
-                  </a:lnTo>
-                  <a:lnTo>
-                    <a:pt x="6439364" y="2703790"/>
-                  </a:lnTo>
-                  <a:lnTo>
-                    <a:pt x="6516998" y="2711360"/>
-                  </a:lnTo>
-                  <a:lnTo>
-                    <a:pt x="6594632" y="2718711"/>
-                  </a:lnTo>
-                  <a:lnTo>
-                    <a:pt x="6672266" y="2725851"/>
-                  </a:lnTo>
-                  <a:lnTo>
-                    <a:pt x="6749900" y="2732786"/>
-                  </a:lnTo>
-                  <a:lnTo>
-                    <a:pt x="6827534" y="2739520"/>
-                  </a:lnTo>
-                  <a:lnTo>
-                    <a:pt x="6905168" y="2746061"/>
-                  </a:lnTo>
-                  <a:lnTo>
-                    <a:pt x="6982802" y="2752413"/>
-                  </a:lnTo>
-                  <a:lnTo>
-                    <a:pt x="7060436" y="2758583"/>
-                  </a:lnTo>
-                  <a:lnTo>
-                    <a:pt x="7138070" y="2764575"/>
-                  </a:lnTo>
-                  <a:lnTo>
-                    <a:pt x="7215704" y="2770394"/>
-                  </a:lnTo>
-                  <a:lnTo>
-                    <a:pt x="7293338" y="2776046"/>
-                  </a:lnTo>
-                  <a:lnTo>
-                    <a:pt x="7370972" y="2781535"/>
+                    <a:pt x="72270" y="75424"/>
+                  </a:lnTo>
+                  <a:lnTo>
+                    <a:pt x="148739" y="152932"/>
+                  </a:lnTo>
+                  <a:lnTo>
+                    <a:pt x="225207" y="228208"/>
+                  </a:lnTo>
+                  <a:lnTo>
+                    <a:pt x="301676" y="301316"/>
+                  </a:lnTo>
+                  <a:lnTo>
+                    <a:pt x="378144" y="372319"/>
+                  </a:lnTo>
+                  <a:lnTo>
+                    <a:pt x="454613" y="441278"/>
+                  </a:lnTo>
+                  <a:lnTo>
+                    <a:pt x="531081" y="508250"/>
+                  </a:lnTo>
+                  <a:lnTo>
+                    <a:pt x="607549" y="573295"/>
+                  </a:lnTo>
+                  <a:lnTo>
+                    <a:pt x="684018" y="636466"/>
+                  </a:lnTo>
+                  <a:lnTo>
+                    <a:pt x="760486" y="697818"/>
+                  </a:lnTo>
+                  <a:lnTo>
+                    <a:pt x="836955" y="757404"/>
+                  </a:lnTo>
+                  <a:lnTo>
+                    <a:pt x="913423" y="815274"/>
+                  </a:lnTo>
+                  <a:lnTo>
+                    <a:pt x="989892" y="871477"/>
+                  </a:lnTo>
+                  <a:lnTo>
+                    <a:pt x="1066360" y="926063"/>
+                  </a:lnTo>
+                  <a:lnTo>
+                    <a:pt x="1142828" y="979076"/>
+                  </a:lnTo>
+                  <a:lnTo>
+                    <a:pt x="1219297" y="1030563"/>
+                  </a:lnTo>
+                  <a:lnTo>
+                    <a:pt x="1295765" y="1080567"/>
+                  </a:lnTo>
+                  <a:lnTo>
+                    <a:pt x="1372234" y="1129131"/>
+                  </a:lnTo>
+                  <a:lnTo>
+                    <a:pt x="1448702" y="1176297"/>
+                  </a:lnTo>
+                  <a:lnTo>
+                    <a:pt x="1525171" y="1222105"/>
+                  </a:lnTo>
+                  <a:lnTo>
+                    <a:pt x="1601639" y="1266594"/>
+                  </a:lnTo>
+                  <a:lnTo>
+                    <a:pt x="1678107" y="1309801"/>
+                  </a:lnTo>
+                  <a:lnTo>
+                    <a:pt x="1754576" y="1351765"/>
+                  </a:lnTo>
+                  <a:lnTo>
+                    <a:pt x="1831044" y="1392520"/>
+                  </a:lnTo>
+                  <a:lnTo>
+                    <a:pt x="1907513" y="1432102"/>
+                  </a:lnTo>
+                  <a:lnTo>
+                    <a:pt x="1983981" y="1470544"/>
+                  </a:lnTo>
+                  <a:lnTo>
+                    <a:pt x="2060450" y="1507878"/>
+                  </a:lnTo>
+                  <a:lnTo>
+                    <a:pt x="2136918" y="1544138"/>
+                  </a:lnTo>
+                  <a:lnTo>
+                    <a:pt x="2213386" y="1579354"/>
+                  </a:lnTo>
+                  <a:lnTo>
+                    <a:pt x="2289855" y="1613556"/>
+                  </a:lnTo>
+                  <a:lnTo>
+                    <a:pt x="2366323" y="1646773"/>
+                  </a:lnTo>
+                  <a:lnTo>
+                    <a:pt x="2442792" y="1679033"/>
+                  </a:lnTo>
+                  <a:lnTo>
+                    <a:pt x="2519260" y="1710364"/>
+                  </a:lnTo>
+                  <a:lnTo>
+                    <a:pt x="2595729" y="1740794"/>
+                  </a:lnTo>
+                  <a:lnTo>
+                    <a:pt x="2672197" y="1770347"/>
+                  </a:lnTo>
+                  <a:lnTo>
+                    <a:pt x="2748666" y="1799049"/>
+                  </a:lnTo>
+                  <a:lnTo>
+                    <a:pt x="2825134" y="1826924"/>
+                  </a:lnTo>
+                  <a:lnTo>
+                    <a:pt x="2901602" y="1853997"/>
+                  </a:lnTo>
+                  <a:lnTo>
+                    <a:pt x="2978071" y="1880290"/>
+                  </a:lnTo>
+                  <a:lnTo>
+                    <a:pt x="3054539" y="1905827"/>
+                  </a:lnTo>
+                  <a:lnTo>
+                    <a:pt x="3131008" y="1930627"/>
+                  </a:lnTo>
+                  <a:lnTo>
+                    <a:pt x="3207476" y="1954714"/>
+                  </a:lnTo>
+                  <a:lnTo>
+                    <a:pt x="3283945" y="1978107"/>
+                  </a:lnTo>
+                  <a:lnTo>
+                    <a:pt x="3360413" y="2000827"/>
+                  </a:lnTo>
+                  <a:lnTo>
+                    <a:pt x="3436881" y="2022892"/>
+                  </a:lnTo>
+                  <a:lnTo>
+                    <a:pt x="3513350" y="2044322"/>
+                  </a:lnTo>
+                  <a:lnTo>
+                    <a:pt x="3589818" y="2065135"/>
+                  </a:lnTo>
+                  <a:lnTo>
+                    <a:pt x="3666287" y="2085348"/>
+                  </a:lnTo>
+                  <a:lnTo>
+                    <a:pt x="3742755" y="2104980"/>
+                  </a:lnTo>
+                  <a:lnTo>
+                    <a:pt x="3819224" y="2124046"/>
+                  </a:lnTo>
+                  <a:lnTo>
+                    <a:pt x="3895692" y="2142563"/>
+                  </a:lnTo>
+                  <a:lnTo>
+                    <a:pt x="3972160" y="2160547"/>
+                  </a:lnTo>
+                  <a:lnTo>
+                    <a:pt x="4048629" y="2178013"/>
+                  </a:lnTo>
+                  <a:lnTo>
+                    <a:pt x="4125097" y="2194977"/>
+                  </a:lnTo>
+                  <a:lnTo>
+                    <a:pt x="4201566" y="2211451"/>
+                  </a:lnTo>
+                  <a:lnTo>
+                    <a:pt x="4278034" y="2227452"/>
+                  </a:lnTo>
+                  <a:lnTo>
+                    <a:pt x="4354503" y="2242991"/>
+                  </a:lnTo>
+                  <a:lnTo>
+                    <a:pt x="4430971" y="2258083"/>
+                  </a:lnTo>
+                  <a:lnTo>
+                    <a:pt x="4507439" y="2272741"/>
+                  </a:lnTo>
+                  <a:lnTo>
+                    <a:pt x="4583908" y="2286976"/>
+                  </a:lnTo>
+                  <a:lnTo>
+                    <a:pt x="4660376" y="2300802"/>
+                  </a:lnTo>
+                  <a:lnTo>
+                    <a:pt x="4736845" y="2314229"/>
+                  </a:lnTo>
+                  <a:lnTo>
+                    <a:pt x="4813313" y="2327270"/>
+                  </a:lnTo>
+                  <a:lnTo>
+                    <a:pt x="4889782" y="2339936"/>
+                  </a:lnTo>
+                  <a:lnTo>
+                    <a:pt x="4966250" y="2352236"/>
+                  </a:lnTo>
+                  <a:lnTo>
+                    <a:pt x="5042719" y="2364183"/>
+                  </a:lnTo>
+                  <a:lnTo>
+                    <a:pt x="5119187" y="2375785"/>
+                  </a:lnTo>
+                  <a:lnTo>
+                    <a:pt x="5195655" y="2387053"/>
+                  </a:lnTo>
+                  <a:lnTo>
+                    <a:pt x="5272124" y="2397997"/>
+                  </a:lnTo>
+                  <a:lnTo>
+                    <a:pt x="5348592" y="2408626"/>
+                  </a:lnTo>
+                  <a:lnTo>
+                    <a:pt x="5425061" y="2418948"/>
+                  </a:lnTo>
+                  <a:lnTo>
+                    <a:pt x="5501529" y="2428974"/>
+                  </a:lnTo>
+                  <a:lnTo>
+                    <a:pt x="5577998" y="2438711"/>
+                  </a:lnTo>
+                  <a:lnTo>
+                    <a:pt x="5654466" y="2448167"/>
+                  </a:lnTo>
+                  <a:lnTo>
+                    <a:pt x="5730934" y="2457351"/>
+                  </a:lnTo>
+                  <a:lnTo>
+                    <a:pt x="5807403" y="2466271"/>
+                  </a:lnTo>
+                  <a:lnTo>
+                    <a:pt x="5883871" y="2474933"/>
+                  </a:lnTo>
+                  <a:lnTo>
+                    <a:pt x="5960340" y="2483347"/>
+                  </a:lnTo>
+                  <a:lnTo>
+                    <a:pt x="6036808" y="2491518"/>
+                  </a:lnTo>
+                  <a:lnTo>
+                    <a:pt x="6113277" y="2499454"/>
+                  </a:lnTo>
+                  <a:lnTo>
+                    <a:pt x="6189745" y="2507161"/>
+                  </a:lnTo>
+                  <a:lnTo>
+                    <a:pt x="6266213" y="2514646"/>
+                  </a:lnTo>
+                  <a:lnTo>
+                    <a:pt x="6342682" y="2521916"/>
+                  </a:lnTo>
+                  <a:lnTo>
+                    <a:pt x="6419150" y="2528976"/>
+                  </a:lnTo>
+                  <a:lnTo>
+                    <a:pt x="6495619" y="2535834"/>
+                  </a:lnTo>
+                  <a:lnTo>
+                    <a:pt x="6572087" y="2542493"/>
+                  </a:lnTo>
+                  <a:lnTo>
+                    <a:pt x="6648556" y="2548961"/>
+                  </a:lnTo>
+                  <a:lnTo>
+                    <a:pt x="6725024" y="2555243"/>
+                  </a:lnTo>
+                  <a:lnTo>
+                    <a:pt x="6801492" y="2561344"/>
+                  </a:lnTo>
+                  <a:lnTo>
+                    <a:pt x="6877961" y="2567269"/>
+                  </a:lnTo>
+                  <a:lnTo>
+                    <a:pt x="6954429" y="2573023"/>
+                  </a:lnTo>
+                  <a:lnTo>
+                    <a:pt x="7030898" y="2578612"/>
+                  </a:lnTo>
+                  <a:lnTo>
+                    <a:pt x="7107366" y="2584040"/>
+                  </a:lnTo>
+                  <a:lnTo>
+                    <a:pt x="7183835" y="2589311"/>
+                  </a:lnTo>
+                  <a:lnTo>
+                    <a:pt x="7260303" y="2594431"/>
                   </a:lnTo>
                 </a:path>
               </a:pathLst>
@@ -4419,21 +4419,21 @@
           </p:nvSpPr>
           <p:spPr>
             <a:xfrm>
-              <a:off x="817517" y="4727786"/>
-              <a:ext cx="7799693" cy="0"/>
+              <a:off x="915645" y="4684908"/>
+              <a:ext cx="7682587" cy="0"/>
             </a:xfrm>
             <a:custGeom>
               <a:avLst/>
               <a:pathLst>
-                <a:path w="7799693" h="0">
+                <a:path w="7682587" h="0">
                   <a:moveTo>
                     <a:pt x="0" y="0"/>
                   </a:moveTo>
                   <a:lnTo>
-                    <a:pt x="7799693" y="0"/>
-                  </a:lnTo>
-                  <a:lnTo>
-                    <a:pt x="7799693" y="0"/>
+                    <a:pt x="7682587" y="0"/>
+                  </a:lnTo>
+                  <a:lnTo>
+                    <a:pt x="7682587" y="0"/>
                   </a:lnTo>
                 </a:path>
               </a:pathLst>
@@ -4462,15 +4462,15 @@
           </p:nvSpPr>
           <p:spPr>
             <a:xfrm>
-              <a:off x="4203673" y="2073503"/>
-              <a:ext cx="0" cy="3649639"/>
+              <a:off x="4250960" y="2209169"/>
+              <a:ext cx="0" cy="3404141"/>
             </a:xfrm>
             <a:custGeom>
               <a:avLst/>
               <a:pathLst>
-                <a:path w="0" h="3649639">
+                <a:path w="0" h="3404141">
                   <a:moveTo>
-                    <a:pt x="0" y="3649639"/>
+                    <a:pt x="0" y="3404141"/>
                   </a:moveTo>
                   <a:lnTo>
                     <a:pt x="0" y="0"/>
@@ -4505,8 +4505,8 @@
           </p:nvSpPr>
           <p:spPr>
             <a:xfrm>
-              <a:off x="692708" y="5517199"/>
-              <a:ext cx="62179" cy="80101"/>
+              <a:off x="756929" y="5407599"/>
+              <a:ext cx="79004" cy="101955"/>
             </a:xfrm>
             <a:prstGeom prst="rect">
               <a:avLst/>
@@ -4519,7 +4519,7 @@
             <a:p>
               <a:pPr algn="l" marL="0" marR="0" indent="0">
                 <a:lnSpc>
-                  <a:spcPts val="880"/>
+                  <a:spcPts val="1120"/>
                 </a:lnSpc>
                 <a:spcBef>
                   <a:spcPts val="0"/>
@@ -4529,7 +4529,7 @@
                 </a:spcAft>
               </a:pPr>
               <a:r>
-                <a:rPr sz="880">
+                <a:rPr sz="1120">
                   <a:solidFill>
                     <a:srgbClr val="4D4D4D">
                       <a:alpha val="100000"/>
@@ -4551,8 +4551,8 @@
           </p:nvSpPr>
           <p:spPr>
             <a:xfrm>
-              <a:off x="692708" y="4687735"/>
-              <a:ext cx="62179" cy="80101"/>
+              <a:off x="756929" y="4633931"/>
+              <a:ext cx="79004" cy="101955"/>
             </a:xfrm>
             <a:prstGeom prst="rect">
               <a:avLst/>
@@ -4565,7 +4565,7 @@
             <a:p>
               <a:pPr algn="l" marL="0" marR="0" indent="0">
                 <a:lnSpc>
-                  <a:spcPts val="880"/>
+                  <a:spcPts val="1120"/>
                 </a:lnSpc>
                 <a:spcBef>
                   <a:spcPts val="0"/>
@@ -4575,7 +4575,7 @@
                 </a:spcAft>
               </a:pPr>
               <a:r>
-                <a:rPr sz="880">
+                <a:rPr sz="1120">
                   <a:solidFill>
                     <a:srgbClr val="4D4D4D">
                       <a:alpha val="100000"/>
@@ -4597,8 +4597,8 @@
           </p:nvSpPr>
           <p:spPr>
             <a:xfrm>
-              <a:off x="692708" y="3858272"/>
-              <a:ext cx="62179" cy="80101"/>
+              <a:off x="756929" y="3860262"/>
+              <a:ext cx="79004" cy="101955"/>
             </a:xfrm>
             <a:prstGeom prst="rect">
               <a:avLst/>
@@ -4611,7 +4611,7 @@
             <a:p>
               <a:pPr algn="l" marL="0" marR="0" indent="0">
                 <a:lnSpc>
-                  <a:spcPts val="880"/>
+                  <a:spcPts val="1120"/>
                 </a:lnSpc>
                 <a:spcBef>
                   <a:spcPts val="0"/>
@@ -4621,7 +4621,7 @@
                 </a:spcAft>
               </a:pPr>
               <a:r>
-                <a:rPr sz="880">
+                <a:rPr sz="1120">
                   <a:solidFill>
                     <a:srgbClr val="4D4D4D">
                       <a:alpha val="100000"/>
@@ -4643,8 +4643,8 @@
           </p:nvSpPr>
           <p:spPr>
             <a:xfrm>
-              <a:off x="692708" y="3028808"/>
-              <a:ext cx="62179" cy="80101"/>
+              <a:off x="756929" y="3086593"/>
+              <a:ext cx="79004" cy="101955"/>
             </a:xfrm>
             <a:prstGeom prst="rect">
               <a:avLst/>
@@ -4657,7 +4657,7 @@
             <a:p>
               <a:pPr algn="l" marL="0" marR="0" indent="0">
                 <a:lnSpc>
-                  <a:spcPts val="880"/>
+                  <a:spcPts val="1120"/>
                 </a:lnSpc>
                 <a:spcBef>
                   <a:spcPts val="0"/>
@@ -4667,7 +4667,7 @@
                 </a:spcAft>
               </a:pPr>
               <a:r>
-                <a:rPr sz="880">
+                <a:rPr sz="1120">
                   <a:solidFill>
                     <a:srgbClr val="4D4D4D">
                       <a:alpha val="100000"/>
@@ -4689,8 +4689,8 @@
           </p:nvSpPr>
           <p:spPr>
             <a:xfrm>
-              <a:off x="692708" y="2199345"/>
-              <a:ext cx="62179" cy="80101"/>
+              <a:off x="756929" y="2312925"/>
+              <a:ext cx="79004" cy="101955"/>
             </a:xfrm>
             <a:prstGeom prst="rect">
               <a:avLst/>
@@ -4703,7 +4703,7 @@
             <a:p>
               <a:pPr algn="l" marL="0" marR="0" indent="0">
                 <a:lnSpc>
-                  <a:spcPts val="880"/>
+                  <a:spcPts val="1120"/>
                 </a:lnSpc>
                 <a:spcBef>
                   <a:spcPts val="0"/>
@@ -4713,7 +4713,7 @@
                 </a:spcAft>
               </a:pPr>
               <a:r>
-                <a:rPr sz="880">
+                <a:rPr sz="1120">
                   <a:solidFill>
                     <a:srgbClr val="4D4D4D">
                       <a:alpha val="100000"/>
@@ -4735,8 +4735,8 @@
           </p:nvSpPr>
           <p:spPr>
             <a:xfrm>
-              <a:off x="2423864" y="5785772"/>
-              <a:ext cx="155356" cy="80101"/>
+              <a:off x="2475630" y="5693022"/>
+              <a:ext cx="197510" cy="101955"/>
             </a:xfrm>
             <a:prstGeom prst="rect">
               <a:avLst/>
@@ -4749,7 +4749,7 @@
             <a:p>
               <a:pPr algn="l" marL="0" marR="0" indent="0">
                 <a:lnSpc>
-                  <a:spcPts val="880"/>
+                  <a:spcPts val="1120"/>
                 </a:lnSpc>
                 <a:spcBef>
                   <a:spcPts val="0"/>
@@ -4759,7 +4759,7 @@
                 </a:spcAft>
               </a:pPr>
               <a:r>
-                <a:rPr sz="880">
+                <a:rPr sz="1120">
                   <a:solidFill>
                     <a:srgbClr val="4D4D4D">
                       <a:alpha val="100000"/>
@@ -4781,8 +4781,8 @@
           </p:nvSpPr>
           <p:spPr>
             <a:xfrm>
-              <a:off x="4196521" y="5785772"/>
-              <a:ext cx="155356" cy="80101"/>
+              <a:off x="4221672" y="5693022"/>
+              <a:ext cx="197510" cy="101955"/>
             </a:xfrm>
             <a:prstGeom prst="rect">
               <a:avLst/>
@@ -4795,7 +4795,7 @@
             <a:p>
               <a:pPr algn="l" marL="0" marR="0" indent="0">
                 <a:lnSpc>
-                  <a:spcPts val="880"/>
+                  <a:spcPts val="1120"/>
                 </a:lnSpc>
                 <a:spcBef>
                   <a:spcPts val="0"/>
@@ -4805,7 +4805,7 @@
                 </a:spcAft>
               </a:pPr>
               <a:r>
-                <a:rPr sz="880">
+                <a:rPr sz="1120">
                   <a:solidFill>
                     <a:srgbClr val="4D4D4D">
                       <a:alpha val="100000"/>
@@ -4827,8 +4827,8 @@
           </p:nvSpPr>
           <p:spPr>
             <a:xfrm>
-              <a:off x="5969179" y="5785772"/>
-              <a:ext cx="155356" cy="80101"/>
+              <a:off x="5967715" y="5693022"/>
+              <a:ext cx="197510" cy="101955"/>
             </a:xfrm>
             <a:prstGeom prst="rect">
               <a:avLst/>
@@ -4841,7 +4841,7 @@
             <a:p>
               <a:pPr algn="l" marL="0" marR="0" indent="0">
                 <a:lnSpc>
-                  <a:spcPts val="880"/>
+                  <a:spcPts val="1120"/>
                 </a:lnSpc>
                 <a:spcBef>
                   <a:spcPts val="0"/>
@@ -4851,7 +4851,7 @@
                 </a:spcAft>
               </a:pPr>
               <a:r>
-                <a:rPr sz="880">
+                <a:rPr sz="1120">
                   <a:solidFill>
                     <a:srgbClr val="4D4D4D">
                       <a:alpha val="100000"/>
@@ -4873,8 +4873,8 @@
           </p:nvSpPr>
           <p:spPr>
             <a:xfrm>
-              <a:off x="7741836" y="5785772"/>
-              <a:ext cx="155356" cy="80101"/>
+              <a:off x="7713757" y="5693022"/>
+              <a:ext cx="197510" cy="101955"/>
             </a:xfrm>
             <a:prstGeom prst="rect">
               <a:avLst/>
@@ -4887,7 +4887,7 @@
             <a:p>
               <a:pPr algn="l" marL="0" marR="0" indent="0">
                 <a:lnSpc>
-                  <a:spcPts val="880"/>
+                  <a:spcPts val="1120"/>
                 </a:lnSpc>
                 <a:spcBef>
                   <a:spcPts val="0"/>
@@ -4897,7 +4897,7 @@
                 </a:spcAft>
               </a:pPr>
               <a:r>
-                <a:rPr sz="880">
+                <a:rPr sz="1120">
                   <a:solidFill>
                     <a:srgbClr val="4D4D4D">
                       <a:alpha val="100000"/>
@@ -4919,8 +4919,8 @@
           </p:nvSpPr>
           <p:spPr>
             <a:xfrm>
-              <a:off x="3879271" y="5925448"/>
-              <a:ext cx="1676186" cy="100218"/>
+              <a:off x="3690153" y="5870717"/>
+              <a:ext cx="2133569" cy="127558"/>
             </a:xfrm>
             <a:prstGeom prst="rect">
               <a:avLst/>
@@ -4933,7 +4933,7 @@
             <a:p>
               <a:pPr algn="l" marL="0" marR="0" indent="0">
                 <a:lnSpc>
-                  <a:spcPts val="1100"/>
+                  <a:spcPts val="1400"/>
                 </a:lnSpc>
                 <a:spcBef>
                   <a:spcPts val="0"/>
@@ -4943,7 +4943,7 @@
                 </a:spcAft>
               </a:pPr>
               <a:r>
-                <a:rPr sz="1100">
+                <a:rPr sz="1400">
                   <a:solidFill>
                     <a:srgbClr val="000000">
                       <a:alpha val="100000"/>
@@ -4965,8 +4965,8 @@
           </p:nvSpPr>
           <p:spPr>
             <a:xfrm rot="-5400000">
-              <a:off x="68446" y="3848213"/>
-              <a:ext cx="1016904" cy="100218"/>
+              <a:off x="-37527" y="3847460"/>
+              <a:ext cx="1294150" cy="127558"/>
             </a:xfrm>
             <a:prstGeom prst="rect">
               <a:avLst/>
@@ -4979,7 +4979,7 @@
             <a:p>
               <a:pPr algn="l" marL="0" marR="0" indent="0">
                 <a:lnSpc>
-                  <a:spcPts val="1100"/>
+                  <a:spcPts val="1400"/>
                 </a:lnSpc>
                 <a:spcBef>
                   <a:spcPts val="0"/>
@@ -4989,7 +4989,7 @@
                 </a:spcAft>
               </a:pPr>
               <a:r>
-                <a:rPr sz="1100">
+                <a:rPr sz="1400">
                   <a:solidFill>
                     <a:srgbClr val="000000">
                       <a:alpha val="100000"/>
@@ -5011,8 +5011,8 @@
           </p:nvSpPr>
           <p:spPr>
             <a:xfrm>
-              <a:off x="817517" y="1896563"/>
-              <a:ext cx="4166463" cy="82021"/>
+              <a:off x="915645" y="1977589"/>
+              <a:ext cx="5556900" cy="109362"/>
             </a:xfrm>
             <a:prstGeom prst="rect">
               <a:avLst/>
@@ -5025,7 +5025,7 @@
             <a:p>
               <a:pPr algn="l" marL="0" marR="0" indent="0">
                 <a:lnSpc>
-                  <a:spcPts val="900"/>
+                  <a:spcPts val="1200"/>
                 </a:lnSpc>
                 <a:spcBef>
                   <a:spcPts val="0"/>
@@ -5035,7 +5035,7 @@
                 </a:spcAft>
               </a:pPr>
               <a:r>
-                <a:rPr sz="900">
+                <a:rPr sz="1200">
                   <a:solidFill>
                     <a:srgbClr val="404040">
                       <a:alpha val="100000"/>
@@ -5057,8 +5057,8 @@
           </p:nvSpPr>
           <p:spPr>
             <a:xfrm>
-              <a:off x="817517" y="1669789"/>
-              <a:ext cx="2616647" cy="120152"/>
+              <a:off x="915645" y="1688767"/>
+              <a:ext cx="3331159" cy="153070"/>
             </a:xfrm>
             <a:prstGeom prst="rect">
               <a:avLst/>
@@ -5071,7 +5071,7 @@
             <a:p>
               <a:pPr algn="l" marL="0" marR="0" indent="0">
                 <a:lnSpc>
-                  <a:spcPts val="1320"/>
+                  <a:spcPts val="1680"/>
                 </a:lnSpc>
                 <a:spcBef>
                   <a:spcPts val="0"/>
@@ -5081,7 +5081,7 @@
                 </a:spcAft>
               </a:pPr>
               <a:r>
-                <a:rPr sz="1320">
+                <a:rPr sz="1680">
                   <a:solidFill>
                     <a:srgbClr val="000000">
                       <a:alpha val="100000"/>
